--- a/output/presentation/techflow-source-registry.pptx
+++ b/output/presentation/techflow-source-registry.pptx
@@ -2,20 +2,22 @@
 <file path=ppt/presentation.xml><?xml version="1.0" encoding="utf-8"?>
 <p:presentation xmlns:p="http://schemas.openxmlformats.org/presentationml/2006/main">
   <p:sldMasterIdLst>
-    <p:sldMasterId xmlns:r="http://schemas.openxmlformats.org/officeDocument/2006/relationships" id="2147483648" r:id="R10383d97162d44e4"/>
+    <p:sldMasterId xmlns:r="http://schemas.openxmlformats.org/officeDocument/2006/relationships" id="2147483648" r:id="R8f96aea2228b4ca9"/>
   </p:sldMasterIdLst>
   <p:notesMasterIdLst>
-    <p:notesMasterId xmlns:r="http://schemas.openxmlformats.org/officeDocument/2006/relationships" r:id="Rfb772b72f45d47fd"/>
+    <p:notesMasterId xmlns:r="http://schemas.openxmlformats.org/officeDocument/2006/relationships" r:id="R15bde44744e246ec"/>
   </p:notesMasterIdLst>
   <p:sldIdLst>
-    <p:sldId xmlns:r="http://schemas.openxmlformats.org/officeDocument/2006/relationships" id="256" r:id="Ra517a8d6f57b4c56"/>
-    <p:sldId xmlns:r="http://schemas.openxmlformats.org/officeDocument/2006/relationships" id="257" r:id="R40253ffac39f44e8"/>
-    <p:sldId xmlns:r="http://schemas.openxmlformats.org/officeDocument/2006/relationships" id="258" r:id="R57110a25873642af"/>
-    <p:sldId xmlns:r="http://schemas.openxmlformats.org/officeDocument/2006/relationships" id="259" r:id="R12ef4e1c5585476d"/>
-    <p:sldId xmlns:r="http://schemas.openxmlformats.org/officeDocument/2006/relationships" id="260" r:id="Rcbde2c6ec6d54905"/>
-    <p:sldId xmlns:r="http://schemas.openxmlformats.org/officeDocument/2006/relationships" id="261" r:id="R7b7fc06164394a67"/>
-    <p:sldId xmlns:r="http://schemas.openxmlformats.org/officeDocument/2006/relationships" id="262" r:id="R7c92ceff178947a2"/>
-    <p:sldId xmlns:r="http://schemas.openxmlformats.org/officeDocument/2006/relationships" id="263" r:id="R18d7f0a8e8cc42a1"/>
+    <p:sldId xmlns:r="http://schemas.openxmlformats.org/officeDocument/2006/relationships" id="256" r:id="Rb2e7ec809e3c41e1"/>
+    <p:sldId xmlns:r="http://schemas.openxmlformats.org/officeDocument/2006/relationships" id="257" r:id="Rdbc9f5fc7e3a4be1"/>
+    <p:sldId xmlns:r="http://schemas.openxmlformats.org/officeDocument/2006/relationships" id="258" r:id="R9151a8a632f34516"/>
+    <p:sldId xmlns:r="http://schemas.openxmlformats.org/officeDocument/2006/relationships" id="259" r:id="R4439098abee14a5e"/>
+    <p:sldId xmlns:r="http://schemas.openxmlformats.org/officeDocument/2006/relationships" id="260" r:id="Rc4e39ee301d748f8"/>
+    <p:sldId xmlns:r="http://schemas.openxmlformats.org/officeDocument/2006/relationships" id="261" r:id="R1423bb1148b94dcc"/>
+    <p:sldId xmlns:r="http://schemas.openxmlformats.org/officeDocument/2006/relationships" id="262" r:id="R50335df91263466e"/>
+    <p:sldId xmlns:r="http://schemas.openxmlformats.org/officeDocument/2006/relationships" id="263" r:id="R57a1cd71c80c45e2"/>
+    <p:sldId xmlns:r="http://schemas.openxmlformats.org/officeDocument/2006/relationships" id="264" r:id="R9115715dc7e846ca"/>
+    <p:sldId xmlns:r="http://schemas.openxmlformats.org/officeDocument/2006/relationships" id="265" r:id="Rc37b8cebb5584f8a"/>
   </p:sldIdLst>
   <p:sldSz cx="12192000" cy="6858000"/>
   <p:notesSz cx="6858000" cy="9144000"/>
@@ -475,6 +477,72 @@
 </p:notes>
 </file>
 
+<file path=ppt/notesSlides/notesSlide10.xml><?xml version="1.0" encoding="utf-8"?>
+<p:notes xmlns:p="http://schemas.openxmlformats.org/presentationml/2006/main">
+  <p:cSld>
+    <p:spTree>
+      <p:nvGrpSpPr>
+        <p:cNvPr id="1" name=""/>
+        <p:cNvGrpSpPr/>
+        <p:nvPr/>
+      </p:nvGrpSpPr>
+      <p:grpSpPr>
+        <a:xfrm xmlns:a="http://schemas.openxmlformats.org/drawingml/2006/main"/>
+      </p:grpSpPr>
+      <p:sp>
+        <p:nvSpPr>
+          <p:cNvPr id="2" name="Slide Image Placeholder 1"/>
+          <p:cNvSpPr>
+            <a:spLocks xmlns:a="http://schemas.openxmlformats.org/drawingml/2006/main" noGrp="1"/>
+          </p:cNvSpPr>
+          <p:nvPr>
+            <p:ph type="sldImg" idx="0"/>
+          </p:nvPr>
+        </p:nvSpPr>
+        <p:spPr/>
+      </p:sp>
+      <p:sp>
+        <p:nvSpPr>
+          <p:cNvPr id="3" name="Notes Placeholder 2"/>
+          <p:cNvSpPr>
+            <a:spLocks xmlns:a="http://schemas.openxmlformats.org/drawingml/2006/main" noGrp="1"/>
+          </p:cNvSpPr>
+          <p:nvPr>
+            <p:ph type="body" idx="1"/>
+          </p:nvPr>
+        </p:nvSpPr>
+        <p:spPr/>
+        <p:txBody>
+          <a:bodyPr xmlns:a="http://schemas.openxmlformats.org/drawingml/2006/main"/>
+          <a:lstStyle xmlns:a="http://schemas.openxmlformats.org/drawingml/2006/main"/>
+          <a:p xmlns:a="http://schemas.openxmlformats.org/drawingml/2006/main"/>
+        </p:txBody>
+      </p:sp>
+      <p:sp>
+        <p:nvSpPr>
+          <p:cNvPr id="4" name="Slide Number Placeholder 3"/>
+          <p:cNvSpPr>
+            <a:spLocks xmlns:a="http://schemas.openxmlformats.org/drawingml/2006/main" noGrp="1"/>
+          </p:cNvSpPr>
+          <p:nvPr>
+            <p:ph type="sldNum" idx="5"/>
+          </p:nvPr>
+        </p:nvSpPr>
+        <p:spPr/>
+        <p:txBody>
+          <a:bodyPr xmlns:a="http://schemas.openxmlformats.org/drawingml/2006/main"/>
+          <a:lstStyle xmlns:a="http://schemas.openxmlformats.org/drawingml/2006/main"/>
+          <a:p xmlns:a="http://schemas.openxmlformats.org/drawingml/2006/main"/>
+        </p:txBody>
+      </p:sp>
+    </p:spTree>
+  </p:cSld>
+  <p:clrMapOvr>
+    <a:masterClrMapping xmlns:a="http://schemas.openxmlformats.org/drawingml/2006/main"/>
+  </p:clrMapOvr>
+</p:notes>
+</file>
+
 <file path=ppt/notesSlides/notesSlide2.xml><?xml version="1.0" encoding="utf-8"?>
 <p:notes xmlns:p="http://schemas.openxmlformats.org/presentationml/2006/main">
   <p:cSld>
@@ -872,6 +940,72 @@
 </file>
 
 <file path=ppt/notesSlides/notesSlide8.xml><?xml version="1.0" encoding="utf-8"?>
+<p:notes xmlns:p="http://schemas.openxmlformats.org/presentationml/2006/main">
+  <p:cSld>
+    <p:spTree>
+      <p:nvGrpSpPr>
+        <p:cNvPr id="1" name=""/>
+        <p:cNvGrpSpPr/>
+        <p:nvPr/>
+      </p:nvGrpSpPr>
+      <p:grpSpPr>
+        <a:xfrm xmlns:a="http://schemas.openxmlformats.org/drawingml/2006/main"/>
+      </p:grpSpPr>
+      <p:sp>
+        <p:nvSpPr>
+          <p:cNvPr id="2" name="Slide Image Placeholder 1"/>
+          <p:cNvSpPr>
+            <a:spLocks xmlns:a="http://schemas.openxmlformats.org/drawingml/2006/main" noGrp="1"/>
+          </p:cNvSpPr>
+          <p:nvPr>
+            <p:ph type="sldImg" idx="0"/>
+          </p:nvPr>
+        </p:nvSpPr>
+        <p:spPr/>
+      </p:sp>
+      <p:sp>
+        <p:nvSpPr>
+          <p:cNvPr id="3" name="Notes Placeholder 2"/>
+          <p:cNvSpPr>
+            <a:spLocks xmlns:a="http://schemas.openxmlformats.org/drawingml/2006/main" noGrp="1"/>
+          </p:cNvSpPr>
+          <p:nvPr>
+            <p:ph type="body" idx="1"/>
+          </p:nvPr>
+        </p:nvSpPr>
+        <p:spPr/>
+        <p:txBody>
+          <a:bodyPr xmlns:a="http://schemas.openxmlformats.org/drawingml/2006/main"/>
+          <a:lstStyle xmlns:a="http://schemas.openxmlformats.org/drawingml/2006/main"/>
+          <a:p xmlns:a="http://schemas.openxmlformats.org/drawingml/2006/main"/>
+        </p:txBody>
+      </p:sp>
+      <p:sp>
+        <p:nvSpPr>
+          <p:cNvPr id="4" name="Slide Number Placeholder 3"/>
+          <p:cNvSpPr>
+            <a:spLocks xmlns:a="http://schemas.openxmlformats.org/drawingml/2006/main" noGrp="1"/>
+          </p:cNvSpPr>
+          <p:nvPr>
+            <p:ph type="sldNum" idx="5"/>
+          </p:nvPr>
+        </p:nvSpPr>
+        <p:spPr/>
+        <p:txBody>
+          <a:bodyPr xmlns:a="http://schemas.openxmlformats.org/drawingml/2006/main"/>
+          <a:lstStyle xmlns:a="http://schemas.openxmlformats.org/drawingml/2006/main"/>
+          <a:p xmlns:a="http://schemas.openxmlformats.org/drawingml/2006/main"/>
+        </p:txBody>
+      </p:sp>
+    </p:spTree>
+  </p:cSld>
+  <p:clrMapOvr>
+    <a:masterClrMapping xmlns:a="http://schemas.openxmlformats.org/drawingml/2006/main"/>
+  </p:clrMapOvr>
+</p:notes>
+</file>
+
+<file path=ppt/notesSlides/notesSlide9.xml><?xml version="1.0" encoding="utf-8"?>
 <p:notes xmlns:p="http://schemas.openxmlformats.org/presentationml/2006/main">
   <p:cSld>
     <p:spTree>
@@ -975,7 +1109,7 @@
   </p:cSld>
   <p:clrMap bg1="lt1" tx1="dk1" bg2="lt2" tx2="dk2" accent1="accent1" accent2="accent2" accent3="accent3" accent4="accent4" accent5="accent5" accent6="accent6" hlink="hlink" folHlink="folHlink"/>
   <p:sldLayoutIdLst>
-    <p:sldLayoutId xmlns:r="http://schemas.openxmlformats.org/officeDocument/2006/relationships" id="2147483649" r:id="R009225aab2f546b7"/>
+    <p:sldLayoutId xmlns:r="http://schemas.openxmlformats.org/officeDocument/2006/relationships" id="2147483649" r:id="R37ef9c6331e945b6"/>
   </p:sldLayoutIdLst>
   <p:txStyles>
     <p:titleStyle>
@@ -1526,7 +1660,7 @@
           <p:cNvPr id="5" name="">
             <a:extLst xmlns:a="http://schemas.openxmlformats.org/drawingml/2006/main">
               <a:ext uri="{FF2B5EF4-FFF2-40B4-BE49-F238E27FC236}">
-                <a16:creationId xmlns:a16="http://schemas.microsoft.com/office/drawing/2014/main" id="{8525CD3B-27AB-480F-B75F-F96FDF599850}"/>
+                <a16:creationId xmlns:a16="http://schemas.microsoft.com/office/drawing/2014/main" id="{B6E40EF7-B7FE-4D64-B6DB-6F537D5583B4}"/>
               </a:ext>
             </a:extLst>
           </p:cNvPr>
@@ -1538,7 +1672,7 @@
         <p:spPr>
           <a:xfrm xmlns:a="http://schemas.openxmlformats.org/drawingml/2006/main">
             <a:off x="400050" y="400050"/>
-            <a:ext cx="6096000" cy="400050"/>
+            <a:ext cx="6667500" cy="400050"/>
           </a:xfrm>
           <a:prstGeom xmlns:a="http://schemas.openxmlformats.org/drawingml/2006/main" prst="rect">
             <a:avLst/>
@@ -1582,76 +1716,76 @@
           <p:cNvPr id="2" name="">
             <a:extLst xmlns:a="http://schemas.openxmlformats.org/drawingml/2006/main">
               <a:ext uri="{FF2B5EF4-FFF2-40B4-BE49-F238E27FC236}">
-                <a16:creationId xmlns:a16="http://schemas.microsoft.com/office/drawing/2014/main" id="{C8A68B7B-40ED-4A9E-84F6-476BF45308B7}"/>
-              </a:ext>
-            </a:extLst>
-          </p:cNvPr>
-          <p:cNvSpPr>
-            <a:spLocks xmlns:a="http://schemas.openxmlformats.org/drawingml/2006/main" noGrp="1"/>
-          </p:cNvSpPr>
-          <p:nvPr/>
-        </p:nvSpPr>
-        <p:spPr>
-          <a:xfrm xmlns:a="http://schemas.openxmlformats.org/drawingml/2006/main">
-            <a:off x="400050" y="1581150"/>
-            <a:ext cx="10001250" cy="2247900"/>
-          </a:xfrm>
-          <a:prstGeom xmlns:a="http://schemas.openxmlformats.org/drawingml/2006/main" prst="rect">
-            <a:avLst/>
-          </a:prstGeom>
-          <a:noFill xmlns:a="http://schemas.openxmlformats.org/drawingml/2006/main"/>
-          <a:ln xmlns:a="http://schemas.openxmlformats.org/drawingml/2006/main" w="0">
-            <a:noFill/>
-            <a:prstDash val="solid"/>
-          </a:ln>
-        </p:spPr>
-        <p:txBody>
-          <a:bodyPr xmlns:a="http://schemas.openxmlformats.org/drawingml/2006/main"/>
-          <a:lstStyle xmlns:a="http://schemas.openxmlformats.org/drawingml/2006/main"/>
-          <a:p xmlns:a="http://schemas.openxmlformats.org/drawingml/2006/main">
-            <a:pPr algn="l">
-              <a:defRPr sz="4800" b="1">
-                <a:solidFill>
-                  <a:srgbClr val="101010"/>
-                </a:solidFill>
-                <a:latin typeface="Malgun Gothic"/>
-                <a:ea typeface="Malgun Gothic"/>
-                <a:cs typeface="Malgun Gothic"/>
-              </a:defRPr>
-            </a:pPr>
-            <a:r>
-              <a:rPr sz="4800" b="1">
-                <a:solidFill>
-                  <a:srgbClr val="101010"/>
-                </a:solidFill>
-                <a:latin typeface="Malgun Gothic"/>
-                <a:ea typeface="Malgun Gothic"/>
-                <a:cs typeface="Malgun Gothic"/>
-              </a:rPr>
-              <a:t>Source Registry·검역·승인</a:t>
-            </a:r>
-          </a:p>
-          <a:p xmlns:a="http://schemas.openxmlformats.org/drawingml/2006/main">
-            <a:pPr algn="l">
-              <a:defRPr sz="4800" b="1">
-                <a:solidFill>
-                  <a:srgbClr val="101010"/>
-                </a:solidFill>
-                <a:latin typeface="Malgun Gothic"/>
-                <a:ea typeface="Malgun Gothic"/>
-                <a:cs typeface="Malgun Gothic"/>
-              </a:defRPr>
-            </a:pPr>
-            <a:r>
-              <a:rPr sz="4800" b="1">
-                <a:solidFill>
-                  <a:srgbClr val="101010"/>
-                </a:solidFill>
-                <a:latin typeface="Malgun Gothic"/>
-                <a:ea typeface="Malgun Gothic"/>
-                <a:cs typeface="Malgun Gothic"/>
-              </a:rPr>
-              <a:t>파이프라인 구현 완료</a:t>
+                <a16:creationId xmlns:a16="http://schemas.microsoft.com/office/drawing/2014/main" id="{45E68D9E-AA91-4986-A9B5-0C4424FC4FE6}"/>
+              </a:ext>
+            </a:extLst>
+          </p:cNvPr>
+          <p:cNvSpPr>
+            <a:spLocks xmlns:a="http://schemas.openxmlformats.org/drawingml/2006/main" noGrp="1"/>
+          </p:cNvSpPr>
+          <p:nvPr/>
+        </p:nvSpPr>
+        <p:spPr>
+          <a:xfrm xmlns:a="http://schemas.openxmlformats.org/drawingml/2006/main">
+            <a:off x="400050" y="1485900"/>
+            <a:ext cx="10287000" cy="2266950"/>
+          </a:xfrm>
+          <a:prstGeom xmlns:a="http://schemas.openxmlformats.org/drawingml/2006/main" prst="rect">
+            <a:avLst/>
+          </a:prstGeom>
+          <a:noFill xmlns:a="http://schemas.openxmlformats.org/drawingml/2006/main"/>
+          <a:ln xmlns:a="http://schemas.openxmlformats.org/drawingml/2006/main" w="0">
+            <a:noFill/>
+            <a:prstDash val="solid"/>
+          </a:ln>
+        </p:spPr>
+        <p:txBody>
+          <a:bodyPr xmlns:a="http://schemas.openxmlformats.org/drawingml/2006/main"/>
+          <a:lstStyle xmlns:a="http://schemas.openxmlformats.org/drawingml/2006/main"/>
+          <a:p xmlns:a="http://schemas.openxmlformats.org/drawingml/2006/main">
+            <a:pPr algn="l">
+              <a:defRPr sz="4650" b="1">
+                <a:solidFill>
+                  <a:srgbClr val="101010"/>
+                </a:solidFill>
+                <a:latin typeface="Malgun Gothic"/>
+                <a:ea typeface="Malgun Gothic"/>
+                <a:cs typeface="Malgun Gothic"/>
+              </a:defRPr>
+            </a:pPr>
+            <a:r>
+              <a:rPr sz="4650" b="1">
+                <a:solidFill>
+                  <a:srgbClr val="101010"/>
+                </a:solidFill>
+                <a:latin typeface="Malgun Gothic"/>
+                <a:ea typeface="Malgun Gothic"/>
+                <a:cs typeface="Malgun Gothic"/>
+              </a:rPr>
+              <a:t>Source Registry·영속 미러·검역</a:t>
+            </a:r>
+          </a:p>
+          <a:p xmlns:a="http://schemas.openxmlformats.org/drawingml/2006/main">
+            <a:pPr algn="l">
+              <a:defRPr sz="4650" b="1">
+                <a:solidFill>
+                  <a:srgbClr val="101010"/>
+                </a:solidFill>
+                <a:latin typeface="Malgun Gothic"/>
+                <a:ea typeface="Malgun Gothic"/>
+                <a:cs typeface="Malgun Gothic"/>
+              </a:defRPr>
+            </a:pPr>
+            <a:r>
+              <a:rPr sz="4650" b="1">
+                <a:solidFill>
+                  <a:srgbClr val="101010"/>
+                </a:solidFill>
+                <a:latin typeface="Malgun Gothic"/>
+                <a:ea typeface="Malgun Gothic"/>
+                <a:cs typeface="Malgun Gothic"/>
+              </a:rPr>
+              <a:t>보완 구현 완료</a:t>
             </a:r>
           </a:p>
         </p:txBody>
@@ -1661,35 +1795,35 @@
           <p:cNvPr id="3" name="">
             <a:extLst xmlns:a="http://schemas.openxmlformats.org/drawingml/2006/main">
               <a:ext uri="{FF2B5EF4-FFF2-40B4-BE49-F238E27FC236}">
-                <a16:creationId xmlns:a16="http://schemas.microsoft.com/office/drawing/2014/main" id="{54B1022D-F349-4C16-A298-B9388A4130DA}"/>
-              </a:ext>
-            </a:extLst>
-          </p:cNvPr>
-          <p:cNvSpPr>
-            <a:spLocks xmlns:a="http://schemas.openxmlformats.org/drawingml/2006/main" noGrp="1"/>
-          </p:cNvSpPr>
-          <p:nvPr/>
-        </p:nvSpPr>
-        <p:spPr>
-          <a:xfrm xmlns:a="http://schemas.openxmlformats.org/drawingml/2006/main">
-            <a:off x="400050" y="4810125"/>
-            <a:ext cx="8763000" cy="457200"/>
-          </a:xfrm>
-          <a:prstGeom xmlns:a="http://schemas.openxmlformats.org/drawingml/2006/main" prst="rect">
-            <a:avLst/>
-          </a:prstGeom>
-          <a:noFill xmlns:a="http://schemas.openxmlformats.org/drawingml/2006/main"/>
-          <a:ln xmlns:a="http://schemas.openxmlformats.org/drawingml/2006/main" w="0">
-            <a:noFill/>
-            <a:prstDash val="solid"/>
-          </a:ln>
-        </p:spPr>
-        <p:txBody>
-          <a:bodyPr xmlns:a="http://schemas.openxmlformats.org/drawingml/2006/main"/>
-          <a:lstStyle xmlns:a="http://schemas.openxmlformats.org/drawingml/2006/main"/>
-          <a:p xmlns:a="http://schemas.openxmlformats.org/drawingml/2006/main">
-            <a:pPr algn="l">
-              <a:defRPr sz="1800" b="1">
+                <a16:creationId xmlns:a16="http://schemas.microsoft.com/office/drawing/2014/main" id="{847BC500-7D6B-45D0-B9B6-4CABBCA5615C}"/>
+              </a:ext>
+            </a:extLst>
+          </p:cNvPr>
+          <p:cNvSpPr>
+            <a:spLocks xmlns:a="http://schemas.openxmlformats.org/drawingml/2006/main" noGrp="1"/>
+          </p:cNvSpPr>
+          <p:nvPr/>
+        </p:nvSpPr>
+        <p:spPr>
+          <a:xfrm xmlns:a="http://schemas.openxmlformats.org/drawingml/2006/main">
+            <a:off x="400050" y="4762500"/>
+            <a:ext cx="9906000" cy="457200"/>
+          </a:xfrm>
+          <a:prstGeom xmlns:a="http://schemas.openxmlformats.org/drawingml/2006/main" prst="rect">
+            <a:avLst/>
+          </a:prstGeom>
+          <a:noFill xmlns:a="http://schemas.openxmlformats.org/drawingml/2006/main"/>
+          <a:ln xmlns:a="http://schemas.openxmlformats.org/drawingml/2006/main" w="0">
+            <a:noFill/>
+            <a:prstDash val="solid"/>
+          </a:ln>
+        </p:spPr>
+        <p:txBody>
+          <a:bodyPr xmlns:a="http://schemas.openxmlformats.org/drawingml/2006/main"/>
+          <a:lstStyle xmlns:a="http://schemas.openxmlformats.org/drawingml/2006/main"/>
+          <a:p xmlns:a="http://schemas.openxmlformats.org/drawingml/2006/main">
+            <a:pPr algn="l">
+              <a:defRPr sz="1725" b="1">
                 <a:solidFill>
                   <a:srgbClr val="3D8DFF"/>
                 </a:solidFill>
@@ -1699,7 +1833,7 @@
               </a:defRPr>
             </a:pPr>
             <a:r>
-              <a:rPr sz="1800" b="1">
+              <a:rPr sz="1725" b="1">
                 <a:solidFill>
                   <a:srgbClr val="3D8DFF"/>
                 </a:solidFill>
@@ -1707,7 +1841,7 @@
                 <a:ea typeface="Malgun Gothic"/>
                 <a:cs typeface="Malgun Gothic"/>
               </a:rPr>
-              <a:t>18 API · 18 Table · 9 Source Profile · Reviewer dhslove</a:t>
+              <a:t>19 API · 19 Table · 7 Persistent Mirrors · 9 Source Profiles</a:t>
             </a:r>
           </a:p>
         </p:txBody>
@@ -1717,19 +1851,19 @@
           <p:cNvPr id="4" name="">
             <a:extLst xmlns:a="http://schemas.openxmlformats.org/drawingml/2006/main">
               <a:ext uri="{FF2B5EF4-FFF2-40B4-BE49-F238E27FC236}">
-                <a16:creationId xmlns:a16="http://schemas.microsoft.com/office/drawing/2014/main" id="{A6ED399F-93B0-4F31-ADE6-6EAF6D557CAD}"/>
-              </a:ext>
-            </a:extLst>
-          </p:cNvPr>
-          <p:cNvSpPr>
-            <a:spLocks xmlns:a="http://schemas.openxmlformats.org/drawingml/2006/main" noGrp="1"/>
-          </p:cNvSpPr>
-          <p:nvPr/>
-        </p:nvSpPr>
-        <p:spPr>
-          <a:xfrm xmlns:a="http://schemas.openxmlformats.org/drawingml/2006/main">
-            <a:off x="400050" y="5438775"/>
-            <a:ext cx="7239000" cy="419100"/>
+                <a16:creationId xmlns:a16="http://schemas.microsoft.com/office/drawing/2014/main" id="{6587BF33-3F85-4928-9EBA-3B07922C22D3}"/>
+              </a:ext>
+            </a:extLst>
+          </p:cNvPr>
+          <p:cNvSpPr>
+            <a:spLocks xmlns:a="http://schemas.openxmlformats.org/drawingml/2006/main" noGrp="1"/>
+          </p:cNvSpPr>
+          <p:nvPr/>
+        </p:nvSpPr>
+        <p:spPr>
+          <a:xfrm xmlns:a="http://schemas.openxmlformats.org/drawingml/2006/main">
+            <a:off x="400050" y="5410200"/>
+            <a:ext cx="10287000" cy="419100"/>
           </a:xfrm>
           <a:prstGeom xmlns:a="http://schemas.openxmlformats.org/drawingml/2006/main" prst="rect">
             <a:avLst/>
@@ -1763,7 +1897,7 @@
                 <a:ea typeface="Malgun Gothic"/>
                 <a:cs typeface="Malgun Gothic"/>
               </a:rPr>
-              <a:t>실제 승인 0건 · OpenAI 호출 0건 · 2026-08-05</a:t>
+              <a:t>Root 1,005 GiB · 실제 승인 0건 · OpenAI 호출 0건 · 2026-08-05</a:t>
             </a:r>
           </a:p>
         </p:txBody>
@@ -1771,7 +1905,395 @@
     </p:spTree>
     <p:extLst>
       <p:ext uri="{BB962C8B-B14F-4D97-AF65-F5344CB8AC3E}">
-        <p14:creationId xmlns:p14="http://schemas.microsoft.com/office/powerpoint/2010/main" val="73488383"/>
+        <p14:creationId xmlns:p14="http://schemas.microsoft.com/office/powerpoint/2010/main" val="889890692"/>
+      </p:ext>
+    </p:extLst>
+  </p:cSld>
+</p:sld>
+</file>
+
+<file path=ppt/slides/slide10.xml><?xml version="1.0" encoding="utf-8"?>
+<p:sld xmlns:p="http://schemas.openxmlformats.org/presentationml/2006/main">
+  <p:cSld>
+    <p:bg>
+      <p:bgPr>
+        <a:solidFill xmlns:a="http://schemas.openxmlformats.org/drawingml/2006/main">
+          <a:srgbClr val="FFFFFF"/>
+        </a:solidFill>
+      </p:bgPr>
+    </p:bg>
+    <p:spTree>
+      <p:nvGrpSpPr>
+        <p:cNvPr id="1" name=""/>
+        <p:cNvGrpSpPr/>
+        <p:nvPr/>
+      </p:nvGrpSpPr>
+      <p:grpSpPr>
+        <a:xfrm xmlns:a="http://schemas.openxmlformats.org/drawingml/2006/main"/>
+      </p:grpSpPr>
+      <p:sp>
+        <p:nvSpPr>
+          <p:cNvPr id="7" name="">
+            <a:extLst xmlns:a="http://schemas.openxmlformats.org/drawingml/2006/main">
+              <a:ext uri="{FF2B5EF4-FFF2-40B4-BE49-F238E27FC236}">
+                <a16:creationId xmlns:a16="http://schemas.microsoft.com/office/drawing/2014/main" id="{01D0F334-BA2F-4AFB-9ADA-EEEEAB4EFDE1}"/>
+              </a:ext>
+            </a:extLst>
+          </p:cNvPr>
+          <p:cNvSpPr>
+            <a:spLocks xmlns:a="http://schemas.openxmlformats.org/drawingml/2006/main" noGrp="1"/>
+          </p:cNvSpPr>
+          <p:nvPr/>
+        </p:nvSpPr>
+        <p:spPr>
+          <a:xfrm xmlns:a="http://schemas.openxmlformats.org/drawingml/2006/main">
+            <a:off x="400050" y="400050"/>
+            <a:ext cx="3429000" cy="400050"/>
+          </a:xfrm>
+          <a:prstGeom xmlns:a="http://schemas.openxmlformats.org/drawingml/2006/main" prst="rect">
+            <a:avLst/>
+          </a:prstGeom>
+          <a:noFill xmlns:a="http://schemas.openxmlformats.org/drawingml/2006/main"/>
+          <a:ln xmlns:a="http://schemas.openxmlformats.org/drawingml/2006/main" w="0">
+            <a:noFill/>
+            <a:prstDash val="solid"/>
+          </a:ln>
+        </p:spPr>
+        <p:txBody>
+          <a:bodyPr xmlns:a="http://schemas.openxmlformats.org/drawingml/2006/main"/>
+          <a:lstStyle xmlns:a="http://schemas.openxmlformats.org/drawingml/2006/main"/>
+          <a:p xmlns:a="http://schemas.openxmlformats.org/drawingml/2006/main">
+            <a:pPr algn="l">
+              <a:defRPr sz="1800" b="1">
+                <a:solidFill>
+                  <a:srgbClr val="101010"/>
+                </a:solidFill>
+                <a:latin typeface="Malgun Gothic"/>
+                <a:ea typeface="Malgun Gothic"/>
+                <a:cs typeface="Malgun Gothic"/>
+              </a:defRPr>
+            </a:pPr>
+            <a:r>
+              <a:rPr sz="1800" b="1">
+                <a:solidFill>
+                  <a:srgbClr val="101010"/>
+                </a:solidFill>
+                <a:latin typeface="Malgun Gothic"/>
+                <a:ea typeface="Malgun Gothic"/>
+                <a:cs typeface="Malgun Gothic"/>
+              </a:rPr>
+              <a:t>NEXT · ISSUE #43</a:t>
+            </a:r>
+          </a:p>
+        </p:txBody>
+      </p:sp>
+      <p:sp>
+        <p:nvSpPr>
+          <p:cNvPr id="2" name="">
+            <a:extLst xmlns:a="http://schemas.openxmlformats.org/drawingml/2006/main">
+              <a:ext uri="{FF2B5EF4-FFF2-40B4-BE49-F238E27FC236}">
+                <a16:creationId xmlns:a16="http://schemas.microsoft.com/office/drawing/2014/main" id="{A7A06CC4-F590-490B-844F-F7FF26CEB0F7}"/>
+              </a:ext>
+            </a:extLst>
+          </p:cNvPr>
+          <p:cNvSpPr>
+            <a:spLocks xmlns:a="http://schemas.openxmlformats.org/drawingml/2006/main" noGrp="1"/>
+          </p:cNvSpPr>
+          <p:nvPr/>
+        </p:nvSpPr>
+        <p:spPr>
+          <a:xfrm xmlns:a="http://schemas.openxmlformats.org/drawingml/2006/main">
+            <a:off x="400050" y="1600200"/>
+            <a:ext cx="10668000" cy="1847850"/>
+          </a:xfrm>
+          <a:prstGeom xmlns:a="http://schemas.openxmlformats.org/drawingml/2006/main" prst="rect">
+            <a:avLst/>
+          </a:prstGeom>
+          <a:noFill xmlns:a="http://schemas.openxmlformats.org/drawingml/2006/main"/>
+          <a:ln xmlns:a="http://schemas.openxmlformats.org/drawingml/2006/main" w="0">
+            <a:noFill/>
+            <a:prstDash val="solid"/>
+          </a:ln>
+        </p:spPr>
+        <p:txBody>
+          <a:bodyPr xmlns:a="http://schemas.openxmlformats.org/drawingml/2006/main"/>
+          <a:lstStyle xmlns:a="http://schemas.openxmlformats.org/drawingml/2006/main"/>
+          <a:p xmlns:a="http://schemas.openxmlformats.org/drawingml/2006/main">
+            <a:pPr algn="l">
+              <a:defRPr sz="4350" b="1">
+                <a:solidFill>
+                  <a:srgbClr val="101010"/>
+                </a:solidFill>
+                <a:latin typeface="Malgun Gothic"/>
+                <a:ea typeface="Malgun Gothic"/>
+                <a:cs typeface="Malgun Gothic"/>
+              </a:defRPr>
+            </a:pPr>
+            <a:r>
+              <a:rPr sz="4350" b="1">
+                <a:solidFill>
+                  <a:srgbClr val="101010"/>
+                </a:solidFill>
+                <a:latin typeface="Malgun Gothic"/>
+                <a:ea typeface="Malgun Gothic"/>
+                <a:cs typeface="Malgun Gothic"/>
+              </a:rPr>
+              <a:t>로컬 Source 기반이 준비됐습니다.</a:t>
+            </a:r>
+          </a:p>
+          <a:p xmlns:a="http://schemas.openxmlformats.org/drawingml/2006/main">
+            <a:pPr algn="l">
+              <a:defRPr sz="4350" b="1">
+                <a:solidFill>
+                  <a:srgbClr val="101010"/>
+                </a:solidFill>
+                <a:latin typeface="Malgun Gothic"/>
+                <a:ea typeface="Malgun Gothic"/>
+                <a:cs typeface="Malgun Gothic"/>
+              </a:defRPr>
+            </a:pPr>
+            <a:r>
+              <a:rPr sz="4350" b="1">
+                <a:solidFill>
+                  <a:srgbClr val="101010"/>
+                </a:solidFill>
+                <a:latin typeface="Malgun Gothic"/>
+                <a:ea typeface="Malgun Gothic"/>
+                <a:cs typeface="Malgun Gothic"/>
+              </a:rPr>
+              <a:t>이제 검색 품질을 구현합니다.</a:t>
+            </a:r>
+          </a:p>
+        </p:txBody>
+      </p:sp>
+      <p:sp>
+        <p:nvSpPr>
+          <p:cNvPr id="3" name="">
+            <a:extLst xmlns:a="http://schemas.openxmlformats.org/drawingml/2006/main">
+              <a:ext uri="{FF2B5EF4-FFF2-40B4-BE49-F238E27FC236}">
+                <a16:creationId xmlns:a16="http://schemas.microsoft.com/office/drawing/2014/main" id="{5710868D-16EA-42C6-8130-230D4FADCA2C}"/>
+              </a:ext>
+            </a:extLst>
+          </p:cNvPr>
+          <p:cNvSpPr>
+            <a:spLocks xmlns:a="http://schemas.openxmlformats.org/drawingml/2006/main" noGrp="1"/>
+          </p:cNvSpPr>
+          <p:nvPr/>
+        </p:nvSpPr>
+        <p:spPr>
+          <a:xfrm xmlns:a="http://schemas.openxmlformats.org/drawingml/2006/main">
+            <a:off x="400050" y="4305300"/>
+            <a:ext cx="8763000" cy="323850"/>
+          </a:xfrm>
+          <a:prstGeom xmlns:a="http://schemas.openxmlformats.org/drawingml/2006/main" prst="rect">
+            <a:avLst/>
+          </a:prstGeom>
+          <a:noFill xmlns:a="http://schemas.openxmlformats.org/drawingml/2006/main"/>
+          <a:ln xmlns:a="http://schemas.openxmlformats.org/drawingml/2006/main" w="0">
+            <a:noFill/>
+            <a:prstDash val="solid"/>
+          </a:ln>
+        </p:spPr>
+        <p:txBody>
+          <a:bodyPr xmlns:a="http://schemas.openxmlformats.org/drawingml/2006/main"/>
+          <a:lstStyle xmlns:a="http://schemas.openxmlformats.org/drawingml/2006/main"/>
+          <a:p xmlns:a="http://schemas.openxmlformats.org/drawingml/2006/main">
+            <a:pPr algn="l">
+              <a:defRPr sz="1575" b="1">
+                <a:solidFill>
+                  <a:srgbClr val="3D8DFF"/>
+                </a:solidFill>
+                <a:latin typeface="Malgun Gothic"/>
+                <a:ea typeface="Malgun Gothic"/>
+                <a:cs typeface="Malgun Gothic"/>
+              </a:defRPr>
+            </a:pPr>
+            <a:r>
+              <a:rPr sz="1575" b="1">
+                <a:solidFill>
+                  <a:srgbClr val="3D8DFF"/>
+                </a:solidFill>
+                <a:latin typeface="Malgun Gothic"/>
+                <a:ea typeface="Malgun Gothic"/>
+                <a:cs typeface="Malgun Gothic"/>
+              </a:rPr>
+              <a:t>검토 1  ·  7개 Mirror·6시간 주기·24시간 Stale</a:t>
+            </a:r>
+          </a:p>
+        </p:txBody>
+      </p:sp>
+      <p:sp>
+        <p:nvSpPr>
+          <p:cNvPr id="4" name="">
+            <a:extLst xmlns:a="http://schemas.openxmlformats.org/drawingml/2006/main">
+              <a:ext uri="{FF2B5EF4-FFF2-40B4-BE49-F238E27FC236}">
+                <a16:creationId xmlns:a16="http://schemas.microsoft.com/office/drawing/2014/main" id="{6ED2C4B0-1BE8-46EC-977C-8ABA75B60666}"/>
+              </a:ext>
+            </a:extLst>
+          </p:cNvPr>
+          <p:cNvSpPr>
+            <a:spLocks xmlns:a="http://schemas.openxmlformats.org/drawingml/2006/main" noGrp="1"/>
+          </p:cNvSpPr>
+          <p:nvPr/>
+        </p:nvSpPr>
+        <p:spPr>
+          <a:xfrm xmlns:a="http://schemas.openxmlformats.org/drawingml/2006/main">
+            <a:off x="400050" y="4762500"/>
+            <a:ext cx="8763000" cy="323850"/>
+          </a:xfrm>
+          <a:prstGeom xmlns:a="http://schemas.openxmlformats.org/drawingml/2006/main" prst="rect">
+            <a:avLst/>
+          </a:prstGeom>
+          <a:noFill xmlns:a="http://schemas.openxmlformats.org/drawingml/2006/main"/>
+          <a:ln xmlns:a="http://schemas.openxmlformats.org/drawingml/2006/main" w="0">
+            <a:noFill/>
+            <a:prstDash val="solid"/>
+          </a:ln>
+        </p:spPr>
+        <p:txBody>
+          <a:bodyPr xmlns:a="http://schemas.openxmlformats.org/drawingml/2006/main"/>
+          <a:lstStyle xmlns:a="http://schemas.openxmlformats.org/drawingml/2006/main"/>
+          <a:p xmlns:a="http://schemas.openxmlformats.org/drawingml/2006/main">
+            <a:pPr algn="l">
+              <a:defRPr sz="1575" b="1">
+                <a:solidFill>
+                  <a:srgbClr val="3D8DFF"/>
+                </a:solidFill>
+                <a:latin typeface="Malgun Gothic"/>
+                <a:ea typeface="Malgun Gothic"/>
+                <a:cs typeface="Malgun Gothic"/>
+              </a:defRPr>
+            </a:pPr>
+            <a:r>
+              <a:rPr sz="1575" b="1">
+                <a:solidFill>
+                  <a:srgbClr val="3D8DFF"/>
+                </a:solidFill>
+                <a:latin typeface="Malgun Gothic"/>
+                <a:ea typeface="Malgun Gothic"/>
+                <a:cs typeface="Malgun Gothic"/>
+              </a:rPr>
+              <a:t>검토 2  ·  Root 1,005 GiB·가용 950 GiB</a:t>
+            </a:r>
+          </a:p>
+        </p:txBody>
+      </p:sp>
+      <p:sp>
+        <p:nvSpPr>
+          <p:cNvPr id="5" name="">
+            <a:extLst xmlns:a="http://schemas.openxmlformats.org/drawingml/2006/main">
+              <a:ext uri="{FF2B5EF4-FFF2-40B4-BE49-F238E27FC236}">
+                <a16:creationId xmlns:a16="http://schemas.microsoft.com/office/drawing/2014/main" id="{2E72678C-53C8-48F3-8C83-5F5B51356534}"/>
+              </a:ext>
+            </a:extLst>
+          </p:cNvPr>
+          <p:cNvSpPr>
+            <a:spLocks xmlns:a="http://schemas.openxmlformats.org/drawingml/2006/main" noGrp="1"/>
+          </p:cNvSpPr>
+          <p:nvPr/>
+        </p:nvSpPr>
+        <p:spPr>
+          <a:xfrm xmlns:a="http://schemas.openxmlformats.org/drawingml/2006/main">
+            <a:off x="400050" y="5219700"/>
+            <a:ext cx="9334500" cy="323850"/>
+          </a:xfrm>
+          <a:prstGeom xmlns:a="http://schemas.openxmlformats.org/drawingml/2006/main" prst="rect">
+            <a:avLst/>
+          </a:prstGeom>
+          <a:noFill xmlns:a="http://schemas.openxmlformats.org/drawingml/2006/main"/>
+          <a:ln xmlns:a="http://schemas.openxmlformats.org/drawingml/2006/main" w="0">
+            <a:noFill/>
+            <a:prstDash val="solid"/>
+          </a:ln>
+        </p:spPr>
+        <p:txBody>
+          <a:bodyPr xmlns:a="http://schemas.openxmlformats.org/drawingml/2006/main"/>
+          <a:lstStyle xmlns:a="http://schemas.openxmlformats.org/drawingml/2006/main"/>
+          <a:p xmlns:a="http://schemas.openxmlformats.org/drawingml/2006/main">
+            <a:pPr algn="l">
+              <a:defRPr sz="1575" b="1">
+                <a:solidFill>
+                  <a:srgbClr val="117A4B"/>
+                </a:solidFill>
+                <a:latin typeface="Malgun Gothic"/>
+                <a:ea typeface="Malgun Gothic"/>
+                <a:cs typeface="Malgun Gothic"/>
+              </a:defRPr>
+            </a:pPr>
+            <a:r>
+              <a:rPr sz="1575" b="1">
+                <a:solidFill>
+                  <a:srgbClr val="117A4B"/>
+                </a:solidFill>
+                <a:latin typeface="Malgun Gothic"/>
+                <a:ea typeface="Malgun Gothic"/>
+                <a:cs typeface="Malgun Gothic"/>
+              </a:rPr>
+              <a:t>다음  ·  Parser·Chunk·Embeddings·Hybrid Retrieval</a:t>
+            </a:r>
+          </a:p>
+        </p:txBody>
+      </p:sp>
+      <p:sp>
+        <p:nvSpPr>
+          <p:cNvPr id="6" name="">
+            <a:extLst xmlns:a="http://schemas.openxmlformats.org/drawingml/2006/main">
+              <a:ext uri="{FF2B5EF4-FFF2-40B4-BE49-F238E27FC236}">
+                <a16:creationId xmlns:a16="http://schemas.microsoft.com/office/drawing/2014/main" id="{718EB549-E159-4134-AB20-2D601C818D18}"/>
+              </a:ext>
+            </a:extLst>
+          </p:cNvPr>
+          <p:cNvSpPr>
+            <a:spLocks xmlns:a="http://schemas.openxmlformats.org/drawingml/2006/main" noGrp="1"/>
+          </p:cNvSpPr>
+          <p:nvPr/>
+        </p:nvSpPr>
+        <p:spPr>
+          <a:xfrm xmlns:a="http://schemas.openxmlformats.org/drawingml/2006/main">
+            <a:off x="400050" y="5791200"/>
+            <a:ext cx="9334500" cy="285750"/>
+          </a:xfrm>
+          <a:prstGeom xmlns:a="http://schemas.openxmlformats.org/drawingml/2006/main" prst="rect">
+            <a:avLst/>
+          </a:prstGeom>
+          <a:noFill xmlns:a="http://schemas.openxmlformats.org/drawingml/2006/main"/>
+          <a:ln xmlns:a="http://schemas.openxmlformats.org/drawingml/2006/main" w="0">
+            <a:noFill/>
+            <a:prstDash val="solid"/>
+          </a:ln>
+        </p:spPr>
+        <p:txBody>
+          <a:bodyPr xmlns:a="http://schemas.openxmlformats.org/drawingml/2006/main"/>
+          <a:lstStyle xmlns:a="http://schemas.openxmlformats.org/drawingml/2006/main"/>
+          <a:p xmlns:a="http://schemas.openxmlformats.org/drawingml/2006/main">
+            <a:pPr algn="l">
+              <a:defRPr sz="1350" b="0">
+                <a:solidFill>
+                  <a:srgbClr val="5B616B"/>
+                </a:solidFill>
+                <a:latin typeface="Malgun Gothic"/>
+                <a:ea typeface="Malgun Gothic"/>
+                <a:cs typeface="Malgun Gothic"/>
+              </a:defRPr>
+            </a:pPr>
+            <a:r>
+              <a:rPr sz="1350" b="0">
+                <a:solidFill>
+                  <a:srgbClr val="5B616B"/>
+                </a:solidFill>
+                <a:latin typeface="Malgun Gothic"/>
+                <a:ea typeface="Malgun Gothic"/>
+                <a:cs typeface="Malgun Gothic"/>
+              </a:rPr>
+              <a:t>Source 승인은 #43 Dry-run·원자 활성화 검증 뒤 별도로 수행</a:t>
+            </a:r>
+          </a:p>
+        </p:txBody>
+      </p:sp>
+    </p:spTree>
+    <p:extLst>
+      <p:ext uri="{BB962C8B-B14F-4D97-AF65-F5344CB8AC3E}">
+        <p14:creationId xmlns:p14="http://schemas.microsoft.com/office/powerpoint/2010/main" val="744621763"/>
       </p:ext>
     </p:extLst>
   </p:cSld>
@@ -1802,7 +2324,7 @@
           <p:cNvPr id="16" name="">
             <a:extLst xmlns:a="http://schemas.openxmlformats.org/drawingml/2006/main">
               <a:ext uri="{FF2B5EF4-FFF2-40B4-BE49-F238E27FC236}">
-                <a16:creationId xmlns:a16="http://schemas.microsoft.com/office/drawing/2014/main" id="{B12B6052-4D90-41BD-81AF-68EDE71C5B87}"/>
+                <a16:creationId xmlns:a16="http://schemas.microsoft.com/office/drawing/2014/main" id="{9F6EC6A0-C280-46DF-89A2-635B6113F157}"/>
               </a:ext>
             </a:extLst>
           </p:cNvPr>
@@ -1848,7 +2370,7 @@
                 <a:ea typeface="Malgun Gothic"/>
                 <a:cs typeface="Malgun Gothic"/>
               </a:rPr>
-              <a:t>후보를 수집할 수 있지만 사람 승인 없이는 색인할 수 없습니다</a:t>
+              <a:t>질의는 GitHub가 아닌 서버 로컬 자료를 사용합니다</a:t>
             </a:r>
           </a:p>
         </p:txBody>
@@ -1858,7 +2380,7 @@
           <p:cNvPr id="2" name="">
             <a:extLst xmlns:a="http://schemas.openxmlformats.org/drawingml/2006/main">
               <a:ext uri="{FF2B5EF4-FFF2-40B4-BE49-F238E27FC236}">
-                <a16:creationId xmlns:a16="http://schemas.microsoft.com/office/drawing/2014/main" id="{70C9A304-A06E-4719-9D16-8613C464F390}"/>
+                <a16:creationId xmlns:a16="http://schemas.microsoft.com/office/drawing/2014/main" id="{95EB88A3-73A4-45FC-9A53-2FC187976FA1}"/>
               </a:ext>
             </a:extLst>
           </p:cNvPr>
@@ -1914,7 +2436,7 @@
           <p:cNvPr id="3" name="">
             <a:extLst xmlns:a="http://schemas.openxmlformats.org/drawingml/2006/main">
               <a:ext uri="{FF2B5EF4-FFF2-40B4-BE49-F238E27FC236}">
-                <a16:creationId xmlns:a16="http://schemas.microsoft.com/office/drawing/2014/main" id="{B6031DD0-C8A3-4BC6-8E89-9A192E3FFE32}"/>
+                <a16:creationId xmlns:a16="http://schemas.microsoft.com/office/drawing/2014/main" id="{3A6B8738-2A0F-4F48-B048-DC4955BD5604}"/>
               </a:ext>
             </a:extLst>
           </p:cNvPr>
@@ -1960,7 +2482,7 @@
                 <a:ea typeface="Malgun Gothic"/>
                 <a:cs typeface="Malgun Gothic"/>
               </a:rPr>
-              <a:t>#42는 실행 가능한 Source Gate를 구현하고 실제 Source 승인은 보류했습니다.</a:t>
+              <a:t>발견 단계만 온라인이며 검역·향후 검색은 로컬 자산을 사용합니다.</a:t>
             </a:r>
           </a:p>
         </p:txBody>
@@ -1970,23 +2492,23 @@
           <p:cNvPr id="4" name="">
             <a:extLst xmlns:a="http://schemas.openxmlformats.org/drawingml/2006/main">
               <a:ext uri="{FF2B5EF4-FFF2-40B4-BE49-F238E27FC236}">
-                <a16:creationId xmlns:a16="http://schemas.microsoft.com/office/drawing/2014/main" id="{803ECBEC-10CA-4BCD-99F3-A5FF0E91FDAA}"/>
-              </a:ext>
-            </a:extLst>
-          </p:cNvPr>
-          <p:cNvSpPr>
-            <a:spLocks xmlns:a="http://schemas.openxmlformats.org/drawingml/2006/main" noGrp="1"/>
-          </p:cNvSpPr>
-          <p:nvPr/>
-        </p:nvSpPr>
-        <p:spPr>
-          <a:xfrm xmlns:a="http://schemas.openxmlformats.org/drawingml/2006/main">
-            <a:off x="400050" y="2857500"/>
-            <a:ext cx="3562350" cy="2914650"/>
+                <a16:creationId xmlns:a16="http://schemas.microsoft.com/office/drawing/2014/main" id="{19DC8362-BC64-4B67-8B03-2DF527A7A7C7}"/>
+              </a:ext>
+            </a:extLst>
+          </p:cNvPr>
+          <p:cNvSpPr>
+            <a:spLocks xmlns:a="http://schemas.openxmlformats.org/drawingml/2006/main" noGrp="1"/>
+          </p:cNvSpPr>
+          <p:nvPr/>
+        </p:nvSpPr>
+        <p:spPr>
+          <a:xfrm xmlns:a="http://schemas.openxmlformats.org/drawingml/2006/main">
+            <a:off x="400050" y="2781300"/>
+            <a:ext cx="3562350" cy="2990850"/>
           </a:xfrm>
           <a:prstGeom xmlns:a="http://schemas.openxmlformats.org/drawingml/2006/main" prst="roundRect">
             <a:avLst>
-              <a:gd name="adj" fmla="val 3922"/>
+              <a:gd name="adj" fmla="val 3822"/>
             </a:avLst>
           </a:prstGeom>
           <a:solidFill xmlns:a="http://schemas.openxmlformats.org/drawingml/2006/main">
@@ -2003,18 +2525,18 @@
           <p:cNvPr id="5" name="">
             <a:extLst xmlns:a="http://schemas.openxmlformats.org/drawingml/2006/main">
               <a:ext uri="{FF2B5EF4-FFF2-40B4-BE49-F238E27FC236}">
-                <a16:creationId xmlns:a16="http://schemas.microsoft.com/office/drawing/2014/main" id="{520A0806-B33A-42A4-B94D-27D32D654F44}"/>
-              </a:ext>
-            </a:extLst>
-          </p:cNvPr>
-          <p:cNvSpPr>
-            <a:spLocks xmlns:a="http://schemas.openxmlformats.org/drawingml/2006/main" noGrp="1"/>
-          </p:cNvSpPr>
-          <p:nvPr/>
-        </p:nvSpPr>
-        <p:spPr>
-          <a:xfrm xmlns:a="http://schemas.openxmlformats.org/drawingml/2006/main">
-            <a:off x="685800" y="3219450"/>
+                <a16:creationId xmlns:a16="http://schemas.microsoft.com/office/drawing/2014/main" id="{F7F287E2-7D3E-4B0E-A3F8-8CD29812E7E9}"/>
+              </a:ext>
+            </a:extLst>
+          </p:cNvPr>
+          <p:cNvSpPr>
+            <a:spLocks xmlns:a="http://schemas.openxmlformats.org/drawingml/2006/main" noGrp="1"/>
+          </p:cNvSpPr>
+          <p:nvPr/>
+        </p:nvSpPr>
+        <p:spPr>
+          <a:xfrm xmlns:a="http://schemas.openxmlformats.org/drawingml/2006/main">
+            <a:off x="685800" y="3143250"/>
             <a:ext cx="2952750" cy="1104900"/>
           </a:xfrm>
           <a:prstGeom xmlns:a="http://schemas.openxmlformats.org/drawingml/2006/main" prst="rect">
@@ -2031,25 +2553,25 @@
           <a:lstStyle xmlns:a="http://schemas.openxmlformats.org/drawingml/2006/main"/>
           <a:p xmlns:a="http://schemas.openxmlformats.org/drawingml/2006/main">
             <a:pPr algn="l">
-              <a:defRPr sz="5700" b="1">
-                <a:solidFill>
-                  <a:srgbClr val="101010"/>
-                </a:solidFill>
-                <a:latin typeface="Malgun Gothic"/>
-                <a:ea typeface="Malgun Gothic"/>
-                <a:cs typeface="Malgun Gothic"/>
-              </a:defRPr>
-            </a:pPr>
-            <a:r>
-              <a:rPr sz="5700" b="1">
-                <a:solidFill>
-                  <a:srgbClr val="101010"/>
-                </a:solidFill>
-                <a:latin typeface="Malgun Gothic"/>
-                <a:ea typeface="Malgun Gothic"/>
-                <a:cs typeface="Malgun Gothic"/>
-              </a:rPr>
-              <a:t>9</a:t>
+              <a:defRPr sz="5400" b="1">
+                <a:solidFill>
+                  <a:srgbClr val="101010"/>
+                </a:solidFill>
+                <a:latin typeface="Malgun Gothic"/>
+                <a:ea typeface="Malgun Gothic"/>
+                <a:cs typeface="Malgun Gothic"/>
+              </a:defRPr>
+            </a:pPr>
+            <a:r>
+              <a:rPr sz="5400" b="1">
+                <a:solidFill>
+                  <a:srgbClr val="101010"/>
+                </a:solidFill>
+                <a:latin typeface="Malgun Gothic"/>
+                <a:ea typeface="Malgun Gothic"/>
+                <a:cs typeface="Malgun Gothic"/>
+              </a:rPr>
+              <a:t>7</a:t>
             </a:r>
           </a:p>
         </p:txBody>
@@ -2059,18 +2581,18 @@
           <p:cNvPr id="6" name="">
             <a:extLst xmlns:a="http://schemas.openxmlformats.org/drawingml/2006/main">
               <a:ext uri="{FF2B5EF4-FFF2-40B4-BE49-F238E27FC236}">
-                <a16:creationId xmlns:a16="http://schemas.microsoft.com/office/drawing/2014/main" id="{57DB9240-53A6-4681-B4FB-E3BE107DBBA3}"/>
-              </a:ext>
-            </a:extLst>
-          </p:cNvPr>
-          <p:cNvSpPr>
-            <a:spLocks xmlns:a="http://schemas.openxmlformats.org/drawingml/2006/main" noGrp="1"/>
-          </p:cNvSpPr>
-          <p:nvPr/>
-        </p:nvSpPr>
-        <p:spPr>
-          <a:xfrm xmlns:a="http://schemas.openxmlformats.org/drawingml/2006/main">
-            <a:off x="685800" y="4438650"/>
+                <a16:creationId xmlns:a16="http://schemas.microsoft.com/office/drawing/2014/main" id="{D0184861-C1D0-494C-92EF-6A52FEE6D17E}"/>
+              </a:ext>
+            </a:extLst>
+          </p:cNvPr>
+          <p:cNvSpPr>
+            <a:spLocks xmlns:a="http://schemas.openxmlformats.org/drawingml/2006/main" noGrp="1"/>
+          </p:cNvSpPr>
+          <p:nvPr/>
+        </p:nvSpPr>
+        <p:spPr>
+          <a:xfrm xmlns:a="http://schemas.openxmlformats.org/drawingml/2006/main">
+            <a:off x="685800" y="4400550"/>
             <a:ext cx="2952750" cy="323850"/>
           </a:xfrm>
           <a:prstGeom xmlns:a="http://schemas.openxmlformats.org/drawingml/2006/main" prst="rect">
@@ -2087,25 +2609,25 @@
           <a:lstStyle xmlns:a="http://schemas.openxmlformats.org/drawingml/2006/main"/>
           <a:p xmlns:a="http://schemas.openxmlformats.org/drawingml/2006/main">
             <a:pPr algn="l">
-              <a:defRPr sz="1500" b="1">
-                <a:solidFill>
-                  <a:srgbClr val="101010"/>
-                </a:solidFill>
-                <a:latin typeface="Malgun Gothic"/>
-                <a:ea typeface="Malgun Gothic"/>
-                <a:cs typeface="Malgun Gothic"/>
-              </a:defRPr>
-            </a:pPr>
-            <a:r>
-              <a:rPr sz="1500" b="1">
-                <a:solidFill>
-                  <a:srgbClr val="101010"/>
-                </a:solidFill>
-                <a:latin typeface="Malgun Gothic"/>
-                <a:ea typeface="Malgun Gothic"/>
-                <a:cs typeface="Malgun Gothic"/>
-              </a:rPr>
-              <a:t>SOURCE PROFILES</a:t>
+              <a:defRPr sz="1425" b="1">
+                <a:solidFill>
+                  <a:srgbClr val="101010"/>
+                </a:solidFill>
+                <a:latin typeface="Malgun Gothic"/>
+                <a:ea typeface="Malgun Gothic"/>
+                <a:cs typeface="Malgun Gothic"/>
+              </a:defRPr>
+            </a:pPr>
+            <a:r>
+              <a:rPr sz="1425" b="1">
+                <a:solidFill>
+                  <a:srgbClr val="101010"/>
+                </a:solidFill>
+                <a:latin typeface="Malgun Gothic"/>
+                <a:ea typeface="Malgun Gothic"/>
+                <a:cs typeface="Malgun Gothic"/>
+              </a:rPr>
+              <a:t>PERSISTENT MIRRORS</a:t>
             </a:r>
           </a:p>
         </p:txBody>
@@ -2115,18 +2637,18 @@
           <p:cNvPr id="7" name="">
             <a:extLst xmlns:a="http://schemas.openxmlformats.org/drawingml/2006/main">
               <a:ext uri="{FF2B5EF4-FFF2-40B4-BE49-F238E27FC236}">
-                <a16:creationId xmlns:a16="http://schemas.microsoft.com/office/drawing/2014/main" id="{34B37DB4-87CE-4783-8C49-510AC1AF552D}"/>
-              </a:ext>
-            </a:extLst>
-          </p:cNvPr>
-          <p:cNvSpPr>
-            <a:spLocks xmlns:a="http://schemas.openxmlformats.org/drawingml/2006/main" noGrp="1"/>
-          </p:cNvSpPr>
-          <p:nvPr/>
-        </p:nvSpPr>
-        <p:spPr>
-          <a:xfrm xmlns:a="http://schemas.openxmlformats.org/drawingml/2006/main">
-            <a:off x="685800" y="4953000"/>
+                <a16:creationId xmlns:a16="http://schemas.microsoft.com/office/drawing/2014/main" id="{2B17336A-F552-49F3-ACD3-148CF35FDFE6}"/>
+              </a:ext>
+            </a:extLst>
+          </p:cNvPr>
+          <p:cNvSpPr>
+            <a:spLocks xmlns:a="http://schemas.openxmlformats.org/drawingml/2006/main" noGrp="1"/>
+          </p:cNvSpPr>
+          <p:nvPr/>
+        </p:nvSpPr>
+        <p:spPr>
+          <a:xfrm xmlns:a="http://schemas.openxmlformats.org/drawingml/2006/main">
+            <a:off x="685800" y="4933950"/>
             <a:ext cx="2952750" cy="552450"/>
           </a:xfrm>
           <a:prstGeom xmlns:a="http://schemas.openxmlformats.org/drawingml/2006/main" prst="rect">
@@ -2161,7 +2683,7 @@
                 <a:ea typeface="Malgun Gothic"/>
                 <a:cs typeface="Malgun Gothic"/>
               </a:rPr>
-              <a:t>7개 저장소·Cloud 3개 Branch</a:t>
+              <a:t>Repository별 Bare Mirror</a:t>
             </a:r>
           </a:p>
         </p:txBody>
@@ -2171,23 +2693,23 @@
           <p:cNvPr id="8" name="">
             <a:extLst xmlns:a="http://schemas.openxmlformats.org/drawingml/2006/main">
               <a:ext uri="{FF2B5EF4-FFF2-40B4-BE49-F238E27FC236}">
-                <a16:creationId xmlns:a16="http://schemas.microsoft.com/office/drawing/2014/main" id="{89B8D70E-11E2-42E8-8592-27E57B1C45E7}"/>
-              </a:ext>
-            </a:extLst>
-          </p:cNvPr>
-          <p:cNvSpPr>
-            <a:spLocks xmlns:a="http://schemas.openxmlformats.org/drawingml/2006/main" noGrp="1"/>
-          </p:cNvSpPr>
-          <p:nvPr/>
-        </p:nvSpPr>
-        <p:spPr>
-          <a:xfrm xmlns:a="http://schemas.openxmlformats.org/drawingml/2006/main">
-            <a:off x="4314825" y="2857500"/>
-            <a:ext cx="3562350" cy="2914650"/>
+                <a16:creationId xmlns:a16="http://schemas.microsoft.com/office/drawing/2014/main" id="{2A734521-FDE0-4C5A-92D9-5FE7906392B9}"/>
+              </a:ext>
+            </a:extLst>
+          </p:cNvPr>
+          <p:cNvSpPr>
+            <a:spLocks xmlns:a="http://schemas.openxmlformats.org/drawingml/2006/main" noGrp="1"/>
+          </p:cNvSpPr>
+          <p:nvPr/>
+        </p:nvSpPr>
+        <p:spPr>
+          <a:xfrm xmlns:a="http://schemas.openxmlformats.org/drawingml/2006/main">
+            <a:off x="4314825" y="2781300"/>
+            <a:ext cx="3562350" cy="2990850"/>
           </a:xfrm>
           <a:prstGeom xmlns:a="http://schemas.openxmlformats.org/drawingml/2006/main" prst="roundRect">
             <a:avLst>
-              <a:gd name="adj" fmla="val 3922"/>
+              <a:gd name="adj" fmla="val 3822"/>
             </a:avLst>
           </a:prstGeom>
           <a:solidFill xmlns:a="http://schemas.openxmlformats.org/drawingml/2006/main">
@@ -2204,18 +2726,18 @@
           <p:cNvPr id="9" name="">
             <a:extLst xmlns:a="http://schemas.openxmlformats.org/drawingml/2006/main">
               <a:ext uri="{FF2B5EF4-FFF2-40B4-BE49-F238E27FC236}">
-                <a16:creationId xmlns:a16="http://schemas.microsoft.com/office/drawing/2014/main" id="{B4EA9363-0ABF-4DFE-9D3C-809E66F33005}"/>
-              </a:ext>
-            </a:extLst>
-          </p:cNvPr>
-          <p:cNvSpPr>
-            <a:spLocks xmlns:a="http://schemas.openxmlformats.org/drawingml/2006/main" noGrp="1"/>
-          </p:cNvSpPr>
-          <p:nvPr/>
-        </p:nvSpPr>
-        <p:spPr>
-          <a:xfrm xmlns:a="http://schemas.openxmlformats.org/drawingml/2006/main">
-            <a:off x="4600575" y="3219450"/>
+                <a16:creationId xmlns:a16="http://schemas.microsoft.com/office/drawing/2014/main" id="{38CD460F-B5C3-4B5E-9469-620B81616F3D}"/>
+              </a:ext>
+            </a:extLst>
+          </p:cNvPr>
+          <p:cNvSpPr>
+            <a:spLocks xmlns:a="http://schemas.openxmlformats.org/drawingml/2006/main" noGrp="1"/>
+          </p:cNvSpPr>
+          <p:nvPr/>
+        </p:nvSpPr>
+        <p:spPr>
+          <a:xfrm xmlns:a="http://schemas.openxmlformats.org/drawingml/2006/main">
+            <a:off x="4600575" y="3143250"/>
             <a:ext cx="2952750" cy="1104900"/>
           </a:xfrm>
           <a:prstGeom xmlns:a="http://schemas.openxmlformats.org/drawingml/2006/main" prst="rect">
@@ -2232,25 +2754,25 @@
           <a:lstStyle xmlns:a="http://schemas.openxmlformats.org/drawingml/2006/main"/>
           <a:p xmlns:a="http://schemas.openxmlformats.org/drawingml/2006/main">
             <a:pPr algn="l">
-              <a:defRPr sz="5700" b="1">
-                <a:solidFill>
-                  <a:srgbClr val="101010"/>
-                </a:solidFill>
-                <a:latin typeface="Malgun Gothic"/>
-                <a:ea typeface="Malgun Gothic"/>
-                <a:cs typeface="Malgun Gothic"/>
-              </a:defRPr>
-            </a:pPr>
-            <a:r>
-              <a:rPr sz="5700" b="1">
-                <a:solidFill>
-                  <a:srgbClr val="101010"/>
-                </a:solidFill>
-                <a:latin typeface="Malgun Gothic"/>
-                <a:ea typeface="Malgun Gothic"/>
-                <a:cs typeface="Malgun Gothic"/>
-              </a:rPr>
-              <a:t>34</a:t>
+              <a:defRPr sz="5400" b="1">
+                <a:solidFill>
+                  <a:srgbClr val="101010"/>
+                </a:solidFill>
+                <a:latin typeface="Malgun Gothic"/>
+                <a:ea typeface="Malgun Gothic"/>
+                <a:cs typeface="Malgun Gothic"/>
+              </a:defRPr>
+            </a:pPr>
+            <a:r>
+              <a:rPr sz="5400" b="1">
+                <a:solidFill>
+                  <a:srgbClr val="101010"/>
+                </a:solidFill>
+                <a:latin typeface="Malgun Gothic"/>
+                <a:ea typeface="Malgun Gothic"/>
+                <a:cs typeface="Malgun Gothic"/>
+              </a:rPr>
+              <a:t>6h</a:t>
             </a:r>
           </a:p>
         </p:txBody>
@@ -2260,18 +2782,18 @@
           <p:cNvPr id="10" name="">
             <a:extLst xmlns:a="http://schemas.openxmlformats.org/drawingml/2006/main">
               <a:ext uri="{FF2B5EF4-FFF2-40B4-BE49-F238E27FC236}">
-                <a16:creationId xmlns:a16="http://schemas.microsoft.com/office/drawing/2014/main" id="{0BC952C6-BE3C-43ED-8601-113F573D9A1A}"/>
-              </a:ext>
-            </a:extLst>
-          </p:cNvPr>
-          <p:cNvSpPr>
-            <a:spLocks xmlns:a="http://schemas.openxmlformats.org/drawingml/2006/main" noGrp="1"/>
-          </p:cNvSpPr>
-          <p:nvPr/>
-        </p:nvSpPr>
-        <p:spPr>
-          <a:xfrm xmlns:a="http://schemas.openxmlformats.org/drawingml/2006/main">
-            <a:off x="4600575" y="4438650"/>
+                <a16:creationId xmlns:a16="http://schemas.microsoft.com/office/drawing/2014/main" id="{86E09EAA-A1B8-4FE2-91DC-CB99952531B4}"/>
+              </a:ext>
+            </a:extLst>
+          </p:cNvPr>
+          <p:cNvSpPr>
+            <a:spLocks xmlns:a="http://schemas.openxmlformats.org/drawingml/2006/main" noGrp="1"/>
+          </p:cNvSpPr>
+          <p:nvPr/>
+        </p:nvSpPr>
+        <p:spPr>
+          <a:xfrm xmlns:a="http://schemas.openxmlformats.org/drawingml/2006/main">
+            <a:off x="4600575" y="4400550"/>
             <a:ext cx="2952750" cy="323850"/>
           </a:xfrm>
           <a:prstGeom xmlns:a="http://schemas.openxmlformats.org/drawingml/2006/main" prst="rect">
@@ -2288,25 +2810,25 @@
           <a:lstStyle xmlns:a="http://schemas.openxmlformats.org/drawingml/2006/main"/>
           <a:p xmlns:a="http://schemas.openxmlformats.org/drawingml/2006/main">
             <a:pPr algn="l">
-              <a:defRPr sz="1500" b="1">
-                <a:solidFill>
-                  <a:srgbClr val="101010"/>
-                </a:solidFill>
-                <a:latin typeface="Malgun Gothic"/>
-                <a:ea typeface="Malgun Gothic"/>
-                <a:cs typeface="Malgun Gothic"/>
-              </a:defRPr>
-            </a:pPr>
-            <a:r>
-              <a:rPr sz="1500" b="1">
-                <a:solidFill>
-                  <a:srgbClr val="101010"/>
-                </a:solidFill>
-                <a:latin typeface="Malgun Gothic"/>
-                <a:ea typeface="Malgun Gothic"/>
-                <a:cs typeface="Malgun Gothic"/>
-              </a:rPr>
-              <a:t>ELIGIBLE FILES</a:t>
+              <a:defRPr sz="1425" b="1">
+                <a:solidFill>
+                  <a:srgbClr val="101010"/>
+                </a:solidFill>
+                <a:latin typeface="Malgun Gothic"/>
+                <a:ea typeface="Malgun Gothic"/>
+                <a:cs typeface="Malgun Gothic"/>
+              </a:defRPr>
+            </a:pPr>
+            <a:r>
+              <a:rPr sz="1425" b="1">
+                <a:solidFill>
+                  <a:srgbClr val="101010"/>
+                </a:solidFill>
+                <a:latin typeface="Malgun Gothic"/>
+                <a:ea typeface="Malgun Gothic"/>
+                <a:cs typeface="Malgun Gothic"/>
+              </a:rPr>
+              <a:t>RECONCILIATION</a:t>
             </a:r>
           </a:p>
         </p:txBody>
@@ -2316,18 +2838,18 @@
           <p:cNvPr id="11" name="">
             <a:extLst xmlns:a="http://schemas.openxmlformats.org/drawingml/2006/main">
               <a:ext uri="{FF2B5EF4-FFF2-40B4-BE49-F238E27FC236}">
-                <a16:creationId xmlns:a16="http://schemas.microsoft.com/office/drawing/2014/main" id="{BD430675-D4E4-475B-82FF-72955CC70174}"/>
-              </a:ext>
-            </a:extLst>
-          </p:cNvPr>
-          <p:cNvSpPr>
-            <a:spLocks xmlns:a="http://schemas.openxmlformats.org/drawingml/2006/main" noGrp="1"/>
-          </p:cNvSpPr>
-          <p:nvPr/>
-        </p:nvSpPr>
-        <p:spPr>
-          <a:xfrm xmlns:a="http://schemas.openxmlformats.org/drawingml/2006/main">
-            <a:off x="4600575" y="4953000"/>
+                <a16:creationId xmlns:a16="http://schemas.microsoft.com/office/drawing/2014/main" id="{845F9D97-7034-42BC-9FEF-6354A1FDE313}"/>
+              </a:ext>
+            </a:extLst>
+          </p:cNvPr>
+          <p:cNvSpPr>
+            <a:spLocks xmlns:a="http://schemas.openxmlformats.org/drawingml/2006/main" noGrp="1"/>
+          </p:cNvSpPr>
+          <p:nvPr/>
+        </p:nvSpPr>
+        <p:spPr>
+          <a:xfrm xmlns:a="http://schemas.openxmlformats.org/drawingml/2006/main">
+            <a:off x="4600575" y="4933950"/>
             <a:ext cx="2952750" cy="552450"/>
           </a:xfrm>
           <a:prstGeom xmlns:a="http://schemas.openxmlformats.org/drawingml/2006/main" prst="rect">
@@ -2362,7 +2884,7 @@
                 <a:ea typeface="Malgun Gothic"/>
                 <a:cs typeface="Malgun Gothic"/>
               </a:rPr>
-              <a:t>GENIE_MASTER Canary·제외 0</a:t>
+              <a:t>24시간 초과 시 STALE</a:t>
             </a:r>
           </a:p>
         </p:txBody>
@@ -2372,23 +2894,23 @@
           <p:cNvPr id="12" name="">
             <a:extLst xmlns:a="http://schemas.openxmlformats.org/drawingml/2006/main">
               <a:ext uri="{FF2B5EF4-FFF2-40B4-BE49-F238E27FC236}">
-                <a16:creationId xmlns:a16="http://schemas.microsoft.com/office/drawing/2014/main" id="{5E37F1C3-5A8C-499F-8A7D-89AC95E2A52F}"/>
-              </a:ext>
-            </a:extLst>
-          </p:cNvPr>
-          <p:cNvSpPr>
-            <a:spLocks xmlns:a="http://schemas.openxmlformats.org/drawingml/2006/main" noGrp="1"/>
-          </p:cNvSpPr>
-          <p:nvPr/>
-        </p:nvSpPr>
-        <p:spPr>
-          <a:xfrm xmlns:a="http://schemas.openxmlformats.org/drawingml/2006/main">
-            <a:off x="8229600" y="2857500"/>
-            <a:ext cx="3562350" cy="2914650"/>
+                <a16:creationId xmlns:a16="http://schemas.microsoft.com/office/drawing/2014/main" id="{45BEE577-FD1A-4B00-A6E2-B7EDC49AB97E}"/>
+              </a:ext>
+            </a:extLst>
+          </p:cNvPr>
+          <p:cNvSpPr>
+            <a:spLocks xmlns:a="http://schemas.openxmlformats.org/drawingml/2006/main" noGrp="1"/>
+          </p:cNvSpPr>
+          <p:nvPr/>
+        </p:nvSpPr>
+        <p:spPr>
+          <a:xfrm xmlns:a="http://schemas.openxmlformats.org/drawingml/2006/main">
+            <a:off x="8229600" y="2781300"/>
+            <a:ext cx="3562350" cy="2990850"/>
           </a:xfrm>
           <a:prstGeom xmlns:a="http://schemas.openxmlformats.org/drawingml/2006/main" prst="roundRect">
             <a:avLst>
-              <a:gd name="adj" fmla="val 3922"/>
+              <a:gd name="adj" fmla="val 3822"/>
             </a:avLst>
           </a:prstGeom>
           <a:solidFill xmlns:a="http://schemas.openxmlformats.org/drawingml/2006/main">
@@ -2405,18 +2927,18 @@
           <p:cNvPr id="13" name="">
             <a:extLst xmlns:a="http://schemas.openxmlformats.org/drawingml/2006/main">
               <a:ext uri="{FF2B5EF4-FFF2-40B4-BE49-F238E27FC236}">
-                <a16:creationId xmlns:a16="http://schemas.microsoft.com/office/drawing/2014/main" id="{DC7168AD-C4AE-45C0-AD95-92EED20A2DAD}"/>
-              </a:ext>
-            </a:extLst>
-          </p:cNvPr>
-          <p:cNvSpPr>
-            <a:spLocks xmlns:a="http://schemas.openxmlformats.org/drawingml/2006/main" noGrp="1"/>
-          </p:cNvSpPr>
-          <p:nvPr/>
-        </p:nvSpPr>
-        <p:spPr>
-          <a:xfrm xmlns:a="http://schemas.openxmlformats.org/drawingml/2006/main">
-            <a:off x="8515350" y="3219450"/>
+                <a16:creationId xmlns:a16="http://schemas.microsoft.com/office/drawing/2014/main" id="{ACCDA896-BC1C-4B34-8E09-2A8B25DD31DD}"/>
+              </a:ext>
+            </a:extLst>
+          </p:cNvPr>
+          <p:cNvSpPr>
+            <a:spLocks xmlns:a="http://schemas.openxmlformats.org/drawingml/2006/main" noGrp="1"/>
+          </p:cNvSpPr>
+          <p:nvPr/>
+        </p:nvSpPr>
+        <p:spPr>
+          <a:xfrm xmlns:a="http://schemas.openxmlformats.org/drawingml/2006/main">
+            <a:off x="8515350" y="3143250"/>
             <a:ext cx="2952750" cy="1104900"/>
           </a:xfrm>
           <a:prstGeom xmlns:a="http://schemas.openxmlformats.org/drawingml/2006/main" prst="rect">
@@ -2433,7 +2955,7 @@
           <a:lstStyle xmlns:a="http://schemas.openxmlformats.org/drawingml/2006/main"/>
           <a:p xmlns:a="http://schemas.openxmlformats.org/drawingml/2006/main">
             <a:pPr algn="l">
-              <a:defRPr sz="5700" b="1">
+              <a:defRPr sz="5400" b="1">
                 <a:solidFill>
                   <a:srgbClr val="3D8DFF"/>
                 </a:solidFill>
@@ -2443,7 +2965,7 @@
               </a:defRPr>
             </a:pPr>
             <a:r>
-              <a:rPr sz="5700" b="1">
+              <a:rPr sz="5400" b="1">
                 <a:solidFill>
                   <a:srgbClr val="3D8DFF"/>
                 </a:solidFill>
@@ -2461,18 +2983,18 @@
           <p:cNvPr id="14" name="">
             <a:extLst xmlns:a="http://schemas.openxmlformats.org/drawingml/2006/main">
               <a:ext uri="{FF2B5EF4-FFF2-40B4-BE49-F238E27FC236}">
-                <a16:creationId xmlns:a16="http://schemas.microsoft.com/office/drawing/2014/main" id="{5C90998C-385C-4D89-8F07-E1248D4BC46A}"/>
-              </a:ext>
-            </a:extLst>
-          </p:cNvPr>
-          <p:cNvSpPr>
-            <a:spLocks xmlns:a="http://schemas.openxmlformats.org/drawingml/2006/main" noGrp="1"/>
-          </p:cNvSpPr>
-          <p:nvPr/>
-        </p:nvSpPr>
-        <p:spPr>
-          <a:xfrm xmlns:a="http://schemas.openxmlformats.org/drawingml/2006/main">
-            <a:off x="8515350" y="4438650"/>
+                <a16:creationId xmlns:a16="http://schemas.microsoft.com/office/drawing/2014/main" id="{400E29E9-69B6-4C4D-9FE6-CE31A7BBB59F}"/>
+              </a:ext>
+            </a:extLst>
+          </p:cNvPr>
+          <p:cNvSpPr>
+            <a:spLocks xmlns:a="http://schemas.openxmlformats.org/drawingml/2006/main" noGrp="1"/>
+          </p:cNvSpPr>
+          <p:nvPr/>
+        </p:nvSpPr>
+        <p:spPr>
+          <a:xfrm xmlns:a="http://schemas.openxmlformats.org/drawingml/2006/main">
+            <a:off x="8515350" y="4400550"/>
             <a:ext cx="2952750" cy="323850"/>
           </a:xfrm>
           <a:prstGeom xmlns:a="http://schemas.openxmlformats.org/drawingml/2006/main" prst="rect">
@@ -2489,25 +3011,25 @@
           <a:lstStyle xmlns:a="http://schemas.openxmlformats.org/drawingml/2006/main"/>
           <a:p xmlns:a="http://schemas.openxmlformats.org/drawingml/2006/main">
             <a:pPr algn="l">
-              <a:defRPr sz="1500" b="1">
-                <a:solidFill>
-                  <a:srgbClr val="101010"/>
-                </a:solidFill>
-                <a:latin typeface="Malgun Gothic"/>
-                <a:ea typeface="Malgun Gothic"/>
-                <a:cs typeface="Malgun Gothic"/>
-              </a:defRPr>
-            </a:pPr>
-            <a:r>
-              <a:rPr sz="1500" b="1">
-                <a:solidFill>
-                  <a:srgbClr val="101010"/>
-                </a:solidFill>
-                <a:latin typeface="Malgun Gothic"/>
-                <a:ea typeface="Malgun Gothic"/>
-                <a:cs typeface="Malgun Gothic"/>
-              </a:rPr>
-              <a:t>APPROVED / ACTIVE</a:t>
+              <a:defRPr sz="1425" b="1">
+                <a:solidFill>
+                  <a:srgbClr val="101010"/>
+                </a:solidFill>
+                <a:latin typeface="Malgun Gothic"/>
+                <a:ea typeface="Malgun Gothic"/>
+                <a:cs typeface="Malgun Gothic"/>
+              </a:defRPr>
+            </a:pPr>
+            <a:r>
+              <a:rPr sz="1425" b="1">
+                <a:solidFill>
+                  <a:srgbClr val="101010"/>
+                </a:solidFill>
+                <a:latin typeface="Malgun Gothic"/>
+                <a:ea typeface="Malgun Gothic"/>
+                <a:cs typeface="Malgun Gothic"/>
+              </a:rPr>
+              <a:t>ONLINE QUERY</a:t>
             </a:r>
           </a:p>
         </p:txBody>
@@ -2517,18 +3039,18 @@
           <p:cNvPr id="15" name="">
             <a:extLst xmlns:a="http://schemas.openxmlformats.org/drawingml/2006/main">
               <a:ext uri="{FF2B5EF4-FFF2-40B4-BE49-F238E27FC236}">
-                <a16:creationId xmlns:a16="http://schemas.microsoft.com/office/drawing/2014/main" id="{8A1163BF-1314-40F5-8944-1675FCD8BD62}"/>
-              </a:ext>
-            </a:extLst>
-          </p:cNvPr>
-          <p:cNvSpPr>
-            <a:spLocks xmlns:a="http://schemas.openxmlformats.org/drawingml/2006/main" noGrp="1"/>
-          </p:cNvSpPr>
-          <p:nvPr/>
-        </p:nvSpPr>
-        <p:spPr>
-          <a:xfrm xmlns:a="http://schemas.openxmlformats.org/drawingml/2006/main">
-            <a:off x="8515350" y="4953000"/>
+                <a16:creationId xmlns:a16="http://schemas.microsoft.com/office/drawing/2014/main" id="{F54A3104-FABE-4C88-B51E-951C121CA227}"/>
+              </a:ext>
+            </a:extLst>
+          </p:cNvPr>
+          <p:cNvSpPr>
+            <a:spLocks xmlns:a="http://schemas.openxmlformats.org/drawingml/2006/main" noGrp="1"/>
+          </p:cNvSpPr>
+          <p:nvPr/>
+        </p:nvSpPr>
+        <p:spPr>
+          <a:xfrm xmlns:a="http://schemas.openxmlformats.org/drawingml/2006/main">
+            <a:off x="8515350" y="4933950"/>
             <a:ext cx="2952750" cy="552450"/>
           </a:xfrm>
           <a:prstGeom xmlns:a="http://schemas.openxmlformats.org/drawingml/2006/main" prst="rect">
@@ -2563,7 +3085,7 @@
                 <a:ea typeface="Malgun Gothic"/>
                 <a:cs typeface="Malgun Gothic"/>
               </a:rPr>
-              <a:t>Provider Call도 0건</a:t>
+              <a:t>고정 Commit·승인 Index 사용</a:t>
             </a:r>
           </a:p>
         </p:txBody>
@@ -2571,7 +3093,7 @@
     </p:spTree>
     <p:extLst>
       <p:ext uri="{BB962C8B-B14F-4D97-AF65-F5344CB8AC3E}">
-        <p14:creationId xmlns:p14="http://schemas.microsoft.com/office/powerpoint/2010/main" val="466780538"/>
+        <p14:creationId xmlns:p14="http://schemas.microsoft.com/office/powerpoint/2010/main" val="1264944454"/>
       </p:ext>
     </p:extLst>
   </p:cSld>
@@ -2602,7 +3124,7 @@
           <p:cNvPr id="16" name="">
             <a:extLst xmlns:a="http://schemas.openxmlformats.org/drawingml/2006/main">
               <a:ext uri="{FF2B5EF4-FFF2-40B4-BE49-F238E27FC236}">
-                <a16:creationId xmlns:a16="http://schemas.microsoft.com/office/drawing/2014/main" id="{162C3016-3DAF-4525-B511-5CC6E3F6FA7D}"/>
+                <a16:creationId xmlns:a16="http://schemas.microsoft.com/office/drawing/2014/main" id="{ED8D46F6-E8E9-452A-9A37-769BFDD11AA3}"/>
               </a:ext>
             </a:extLst>
           </p:cNvPr>
@@ -2648,7 +3170,7 @@
                 <a:ea typeface="Malgun Gothic"/>
                 <a:cs typeface="Malgun Gothic"/>
               </a:rPr>
-              <a:t>Activepieces는 흐름을, AI Gateway는 정책과 상태를 소유합니다</a:t>
+              <a:t>GitHub Fetch와 로컬 스캔을 명확히 분리했습니다</a:t>
             </a:r>
           </a:p>
         </p:txBody>
@@ -2658,7 +3180,7 @@
           <p:cNvPr id="2" name="">
             <a:extLst xmlns:a="http://schemas.openxmlformats.org/drawingml/2006/main">
               <a:ext uri="{FF2B5EF4-FFF2-40B4-BE49-F238E27FC236}">
-                <a16:creationId xmlns:a16="http://schemas.microsoft.com/office/drawing/2014/main" id="{6A5BC84C-969A-46B3-96FA-4D19F1CA7174}"/>
+                <a16:creationId xmlns:a16="http://schemas.microsoft.com/office/drawing/2014/main" id="{2AD6C455-3B90-4670-977E-6508F5A71D8C}"/>
               </a:ext>
             </a:extLst>
           </p:cNvPr>
@@ -2714,18 +3236,18 @@
           <p:cNvPr id="3" name="">
             <a:extLst xmlns:a="http://schemas.openxmlformats.org/drawingml/2006/main">
               <a:ext uri="{FF2B5EF4-FFF2-40B4-BE49-F238E27FC236}">
-                <a16:creationId xmlns:a16="http://schemas.microsoft.com/office/drawing/2014/main" id="{3C5D00B1-0975-4554-B0AB-3587A7B512F0}"/>
-              </a:ext>
-            </a:extLst>
-          </p:cNvPr>
-          <p:cNvSpPr>
-            <a:spLocks xmlns:a="http://schemas.openxmlformats.org/drawingml/2006/main" noGrp="1"/>
-          </p:cNvSpPr>
-          <p:nvPr/>
-        </p:nvSpPr>
-        <p:spPr>
-          <a:xfrm xmlns:a="http://schemas.openxmlformats.org/drawingml/2006/main">
-            <a:off x="400050" y="2076450"/>
+                <a16:creationId xmlns:a16="http://schemas.microsoft.com/office/drawing/2014/main" id="{846F5787-7FE7-4876-AD23-ABCE99EEA07D}"/>
+              </a:ext>
+            </a:extLst>
+          </p:cNvPr>
+          <p:cNvSpPr>
+            <a:spLocks xmlns:a="http://schemas.openxmlformats.org/drawingml/2006/main" noGrp="1"/>
+          </p:cNvSpPr>
+          <p:nvPr/>
+        </p:nvSpPr>
+        <p:spPr>
+          <a:xfrm xmlns:a="http://schemas.openxmlformats.org/drawingml/2006/main">
+            <a:off x="400050" y="2000250"/>
             <a:ext cx="457200" cy="457200"/>
           </a:xfrm>
           <a:prstGeom xmlns:a="http://schemas.openxmlformats.org/drawingml/2006/main" prst="rect">
@@ -2770,18 +3292,18 @@
           <p:cNvPr id="4" name="">
             <a:extLst xmlns:a="http://schemas.openxmlformats.org/drawingml/2006/main">
               <a:ext uri="{FF2B5EF4-FFF2-40B4-BE49-F238E27FC236}">
-                <a16:creationId xmlns:a16="http://schemas.microsoft.com/office/drawing/2014/main" id="{438E100C-CBD2-4224-ABC4-95CA74891367}"/>
-              </a:ext>
-            </a:extLst>
-          </p:cNvPr>
-          <p:cNvSpPr>
-            <a:spLocks xmlns:a="http://schemas.openxmlformats.org/drawingml/2006/main" noGrp="1"/>
-          </p:cNvSpPr>
-          <p:nvPr/>
-        </p:nvSpPr>
-        <p:spPr>
-          <a:xfrm xmlns:a="http://schemas.openxmlformats.org/drawingml/2006/main">
-            <a:off x="400050" y="2667000"/>
+                <a16:creationId xmlns:a16="http://schemas.microsoft.com/office/drawing/2014/main" id="{A17ECA56-4429-40B9-829C-DE6523CCB413}"/>
+              </a:ext>
+            </a:extLst>
+          </p:cNvPr>
+          <p:cNvSpPr>
+            <a:spLocks xmlns:a="http://schemas.openxmlformats.org/drawingml/2006/main" noGrp="1"/>
+          </p:cNvSpPr>
+          <p:nvPr/>
+        </p:nvSpPr>
+        <p:spPr>
+          <a:xfrm xmlns:a="http://schemas.openxmlformats.org/drawingml/2006/main">
+            <a:off x="400050" y="2590800"/>
             <a:ext cx="3562350" cy="19050"/>
           </a:xfrm>
           <a:prstGeom xmlns:a="http://schemas.openxmlformats.org/drawingml/2006/main" prst="rect">
@@ -2801,18 +3323,18 @@
           <p:cNvPr id="5" name="">
             <a:extLst xmlns:a="http://schemas.openxmlformats.org/drawingml/2006/main">
               <a:ext uri="{FF2B5EF4-FFF2-40B4-BE49-F238E27FC236}">
-                <a16:creationId xmlns:a16="http://schemas.microsoft.com/office/drawing/2014/main" id="{FC686D9A-5125-4D2E-A4F5-97C1F517FCBD}"/>
-              </a:ext>
-            </a:extLst>
-          </p:cNvPr>
-          <p:cNvSpPr>
-            <a:spLocks xmlns:a="http://schemas.openxmlformats.org/drawingml/2006/main" noGrp="1"/>
-          </p:cNvSpPr>
-          <p:nvPr/>
-        </p:nvSpPr>
-        <p:spPr>
-          <a:xfrm xmlns:a="http://schemas.openxmlformats.org/drawingml/2006/main">
-            <a:off x="400050" y="3028950"/>
+                <a16:creationId xmlns:a16="http://schemas.microsoft.com/office/drawing/2014/main" id="{9E29C045-149A-4EAE-8792-70553E89FBDB}"/>
+              </a:ext>
+            </a:extLst>
+          </p:cNvPr>
+          <p:cNvSpPr>
+            <a:spLocks xmlns:a="http://schemas.openxmlformats.org/drawingml/2006/main" noGrp="1"/>
+          </p:cNvSpPr>
+          <p:nvPr/>
+        </p:nvSpPr>
+        <p:spPr>
+          <a:xfrm xmlns:a="http://schemas.openxmlformats.org/drawingml/2006/main">
+            <a:off x="400050" y="2952750"/>
             <a:ext cx="3333750" cy="342900"/>
           </a:xfrm>
           <a:prstGeom xmlns:a="http://schemas.openxmlformats.org/drawingml/2006/main" prst="rect">
@@ -2847,7 +3369,7 @@
                 <a:ea typeface="Malgun Gothic"/>
                 <a:cs typeface="Malgun Gothic"/>
               </a:rPr>
-              <a:t>ACTIVEPIECES</a:t>
+              <a:t>DISCOVERY</a:t>
             </a:r>
           </a:p>
         </p:txBody>
@@ -2857,99 +3379,99 @@
           <p:cNvPr id="6" name="">
             <a:extLst xmlns:a="http://schemas.openxmlformats.org/drawingml/2006/main">
               <a:ext uri="{FF2B5EF4-FFF2-40B4-BE49-F238E27FC236}">
-                <a16:creationId xmlns:a16="http://schemas.microsoft.com/office/drawing/2014/main" id="{B037384E-90EA-4D5F-9DE3-E48F607C50B1}"/>
-              </a:ext>
-            </a:extLst>
-          </p:cNvPr>
-          <p:cNvSpPr>
-            <a:spLocks xmlns:a="http://schemas.openxmlformats.org/drawingml/2006/main" noGrp="1"/>
-          </p:cNvSpPr>
-          <p:nvPr/>
-        </p:nvSpPr>
-        <p:spPr>
-          <a:xfrm xmlns:a="http://schemas.openxmlformats.org/drawingml/2006/main">
-            <a:off x="400050" y="3638550"/>
-            <a:ext cx="3333750" cy="1295400"/>
-          </a:xfrm>
-          <a:prstGeom xmlns:a="http://schemas.openxmlformats.org/drawingml/2006/main" prst="rect">
-            <a:avLst/>
-          </a:prstGeom>
-          <a:noFill xmlns:a="http://schemas.openxmlformats.org/drawingml/2006/main"/>
-          <a:ln xmlns:a="http://schemas.openxmlformats.org/drawingml/2006/main" w="0">
-            <a:noFill/>
-            <a:prstDash val="solid"/>
-          </a:ln>
-        </p:spPr>
-        <p:txBody>
-          <a:bodyPr xmlns:a="http://schemas.openxmlformats.org/drawingml/2006/main"/>
-          <a:lstStyle xmlns:a="http://schemas.openxmlformats.org/drawingml/2006/main"/>
-          <a:p xmlns:a="http://schemas.openxmlformats.org/drawingml/2006/main">
-            <a:pPr algn="l">
-              <a:defRPr sz="1875" b="0">
-                <a:solidFill>
-                  <a:srgbClr val="101010"/>
-                </a:solidFill>
-                <a:latin typeface="Malgun Gothic"/>
-                <a:ea typeface="Malgun Gothic"/>
-                <a:cs typeface="Malgun Gothic"/>
-              </a:defRPr>
-            </a:pPr>
-            <a:r>
-              <a:rPr sz="1875" b="0">
-                <a:solidFill>
-                  <a:srgbClr val="101010"/>
-                </a:solidFill>
-                <a:latin typeface="Malgun Gothic"/>
-                <a:ea typeface="Malgun Gothic"/>
-                <a:cs typeface="Malgun Gothic"/>
-              </a:rPr>
-              <a:t>Branch Head 감지</a:t>
-            </a:r>
-          </a:p>
-          <a:p xmlns:a="http://schemas.openxmlformats.org/drawingml/2006/main">
-            <a:pPr algn="l">
-              <a:defRPr sz="1875" b="0">
-                <a:solidFill>
-                  <a:srgbClr val="101010"/>
-                </a:solidFill>
-                <a:latin typeface="Malgun Gothic"/>
-                <a:ea typeface="Malgun Gothic"/>
-                <a:cs typeface="Malgun Gothic"/>
-              </a:defRPr>
-            </a:pPr>
-            <a:r>
-              <a:rPr sz="1875" b="0">
-                <a:solidFill>
-                  <a:srgbClr val="101010"/>
-                </a:solidFill>
-                <a:latin typeface="Malgun Gothic"/>
-                <a:ea typeface="Malgun Gothic"/>
-                <a:cs typeface="Malgun Gothic"/>
-              </a:rPr>
-              <a:t>승인 요청·Job 호출</a:t>
-            </a:r>
-          </a:p>
-          <a:p xmlns:a="http://schemas.openxmlformats.org/drawingml/2006/main">
-            <a:pPr algn="l">
-              <a:defRPr sz="1875" b="0">
-                <a:solidFill>
-                  <a:srgbClr val="101010"/>
-                </a:solidFill>
-                <a:latin typeface="Malgun Gothic"/>
-                <a:ea typeface="Malgun Gothic"/>
-                <a:cs typeface="Malgun Gothic"/>
-              </a:defRPr>
-            </a:pPr>
-            <a:r>
-              <a:rPr sz="1875" b="0">
-                <a:solidFill>
-                  <a:srgbClr val="101010"/>
-                </a:solidFill>
-                <a:latin typeface="Malgun Gothic"/>
-                <a:ea typeface="Malgun Gothic"/>
-                <a:cs typeface="Malgun Gothic"/>
-              </a:rPr>
-              <a:t>재시도·알림</a:t>
+                <a16:creationId xmlns:a16="http://schemas.microsoft.com/office/drawing/2014/main" id="{FE667E2F-E8EA-4104-84E7-437EB3AB4619}"/>
+              </a:ext>
+            </a:extLst>
+          </p:cNvPr>
+          <p:cNvSpPr>
+            <a:spLocks xmlns:a="http://schemas.openxmlformats.org/drawingml/2006/main" noGrp="1"/>
+          </p:cNvSpPr>
+          <p:nvPr/>
+        </p:nvSpPr>
+        <p:spPr>
+          <a:xfrm xmlns:a="http://schemas.openxmlformats.org/drawingml/2006/main">
+            <a:off x="400050" y="3562350"/>
+            <a:ext cx="3333750" cy="1485900"/>
+          </a:xfrm>
+          <a:prstGeom xmlns:a="http://schemas.openxmlformats.org/drawingml/2006/main" prst="rect">
+            <a:avLst/>
+          </a:prstGeom>
+          <a:noFill xmlns:a="http://schemas.openxmlformats.org/drawingml/2006/main"/>
+          <a:ln xmlns:a="http://schemas.openxmlformats.org/drawingml/2006/main" w="0">
+            <a:noFill/>
+            <a:prstDash val="solid"/>
+          </a:ln>
+        </p:spPr>
+        <p:txBody>
+          <a:bodyPr xmlns:a="http://schemas.openxmlformats.org/drawingml/2006/main"/>
+          <a:lstStyle xmlns:a="http://schemas.openxmlformats.org/drawingml/2006/main"/>
+          <a:p xmlns:a="http://schemas.openxmlformats.org/drawingml/2006/main">
+            <a:pPr algn="l">
+              <a:defRPr sz="1800" b="0">
+                <a:solidFill>
+                  <a:srgbClr val="101010"/>
+                </a:solidFill>
+                <a:latin typeface="Malgun Gothic"/>
+                <a:ea typeface="Malgun Gothic"/>
+                <a:cs typeface="Malgun Gothic"/>
+              </a:defRPr>
+            </a:pPr>
+            <a:r>
+              <a:rPr sz="1800" b="0">
+                <a:solidFill>
+                  <a:srgbClr val="101010"/>
+                </a:solidFill>
+                <a:latin typeface="Malgun Gothic"/>
+                <a:ea typeface="Malgun Gothic"/>
+                <a:cs typeface="Malgun Gothic"/>
+              </a:rPr>
+              <a:t>GitHub HTTPS</a:t>
+            </a:r>
+          </a:p>
+          <a:p xmlns:a="http://schemas.openxmlformats.org/drawingml/2006/main">
+            <a:pPr algn="l">
+              <a:defRPr sz="1800" b="0">
+                <a:solidFill>
+                  <a:srgbClr val="101010"/>
+                </a:solidFill>
+                <a:latin typeface="Malgun Gothic"/>
+                <a:ea typeface="Malgun Gothic"/>
+                <a:cs typeface="Malgun Gothic"/>
+              </a:defRPr>
+            </a:pPr>
+            <a:r>
+              <a:rPr sz="1800" b="0">
+                <a:solidFill>
+                  <a:srgbClr val="101010"/>
+                </a:solidFill>
+                <a:latin typeface="Malgun Gothic"/>
+                <a:ea typeface="Malgun Gothic"/>
+                <a:cs typeface="Malgun Gothic"/>
+              </a:rPr>
+              <a:t>허용 Branch만 증분 Fetch</a:t>
+            </a:r>
+          </a:p>
+          <a:p xmlns:a="http://schemas.openxmlformats.org/drawingml/2006/main">
+            <a:pPr algn="l">
+              <a:defRPr sz="1800" b="0">
+                <a:solidFill>
+                  <a:srgbClr val="101010"/>
+                </a:solidFill>
+                <a:latin typeface="Malgun Gothic"/>
+                <a:ea typeface="Malgun Gothic"/>
+                <a:cs typeface="Malgun Gothic"/>
+              </a:defRPr>
+            </a:pPr>
+            <a:r>
+              <a:rPr sz="1800" b="0">
+                <a:solidFill>
+                  <a:srgbClr val="101010"/>
+                </a:solidFill>
+                <a:latin typeface="Malgun Gothic"/>
+                <a:ea typeface="Malgun Gothic"/>
+                <a:cs typeface="Malgun Gothic"/>
+              </a:rPr>
+              <a:t>6시간 Reconciler</a:t>
             </a:r>
           </a:p>
         </p:txBody>
@@ -2959,18 +3481,18 @@
           <p:cNvPr id="7" name="">
             <a:extLst xmlns:a="http://schemas.openxmlformats.org/drawingml/2006/main">
               <a:ext uri="{FF2B5EF4-FFF2-40B4-BE49-F238E27FC236}">
-                <a16:creationId xmlns:a16="http://schemas.microsoft.com/office/drawing/2014/main" id="{F8712FB3-2119-4E94-A660-0C0149BF01D9}"/>
-              </a:ext>
-            </a:extLst>
-          </p:cNvPr>
-          <p:cNvSpPr>
-            <a:spLocks xmlns:a="http://schemas.openxmlformats.org/drawingml/2006/main" noGrp="1"/>
-          </p:cNvSpPr>
-          <p:nvPr/>
-        </p:nvSpPr>
-        <p:spPr>
-          <a:xfrm xmlns:a="http://schemas.openxmlformats.org/drawingml/2006/main">
-            <a:off x="4314825" y="2076450"/>
+                <a16:creationId xmlns:a16="http://schemas.microsoft.com/office/drawing/2014/main" id="{A5FE3CD7-BC5B-40F4-97FA-FCDA8640BE0E}"/>
+              </a:ext>
+            </a:extLst>
+          </p:cNvPr>
+          <p:cNvSpPr>
+            <a:spLocks xmlns:a="http://schemas.openxmlformats.org/drawingml/2006/main" noGrp="1"/>
+          </p:cNvSpPr>
+          <p:nvPr/>
+        </p:nvSpPr>
+        <p:spPr>
+          <a:xfrm xmlns:a="http://schemas.openxmlformats.org/drawingml/2006/main">
+            <a:off x="4314825" y="2000250"/>
             <a:ext cx="457200" cy="457200"/>
           </a:xfrm>
           <a:prstGeom xmlns:a="http://schemas.openxmlformats.org/drawingml/2006/main" prst="rect">
@@ -3015,18 +3537,18 @@
           <p:cNvPr id="8" name="">
             <a:extLst xmlns:a="http://schemas.openxmlformats.org/drawingml/2006/main">
               <a:ext uri="{FF2B5EF4-FFF2-40B4-BE49-F238E27FC236}">
-                <a16:creationId xmlns:a16="http://schemas.microsoft.com/office/drawing/2014/main" id="{5C775ED8-FCFB-4C3F-B992-10B427282F18}"/>
-              </a:ext>
-            </a:extLst>
-          </p:cNvPr>
-          <p:cNvSpPr>
-            <a:spLocks xmlns:a="http://schemas.openxmlformats.org/drawingml/2006/main" noGrp="1"/>
-          </p:cNvSpPr>
-          <p:nvPr/>
-        </p:nvSpPr>
-        <p:spPr>
-          <a:xfrm xmlns:a="http://schemas.openxmlformats.org/drawingml/2006/main">
-            <a:off x="4314825" y="2667000"/>
+                <a16:creationId xmlns:a16="http://schemas.microsoft.com/office/drawing/2014/main" id="{7BC612D9-0FF2-44D0-85AD-C040F772D408}"/>
+              </a:ext>
+            </a:extLst>
+          </p:cNvPr>
+          <p:cNvSpPr>
+            <a:spLocks xmlns:a="http://schemas.openxmlformats.org/drawingml/2006/main" noGrp="1"/>
+          </p:cNvSpPr>
+          <p:nvPr/>
+        </p:nvSpPr>
+        <p:spPr>
+          <a:xfrm xmlns:a="http://schemas.openxmlformats.org/drawingml/2006/main">
+            <a:off x="4314825" y="2590800"/>
             <a:ext cx="3562350" cy="19050"/>
           </a:xfrm>
           <a:prstGeom xmlns:a="http://schemas.openxmlformats.org/drawingml/2006/main" prst="rect">
@@ -3046,18 +3568,18 @@
           <p:cNvPr id="9" name="">
             <a:extLst xmlns:a="http://schemas.openxmlformats.org/drawingml/2006/main">
               <a:ext uri="{FF2B5EF4-FFF2-40B4-BE49-F238E27FC236}">
-                <a16:creationId xmlns:a16="http://schemas.microsoft.com/office/drawing/2014/main" id="{5DF7D8BE-5E93-4BCF-A815-CAFDD5F9F0D6}"/>
-              </a:ext>
-            </a:extLst>
-          </p:cNvPr>
-          <p:cNvSpPr>
-            <a:spLocks xmlns:a="http://schemas.openxmlformats.org/drawingml/2006/main" noGrp="1"/>
-          </p:cNvSpPr>
-          <p:nvPr/>
-        </p:nvSpPr>
-        <p:spPr>
-          <a:xfrm xmlns:a="http://schemas.openxmlformats.org/drawingml/2006/main">
-            <a:off x="4314825" y="3028950"/>
+                <a16:creationId xmlns:a16="http://schemas.microsoft.com/office/drawing/2014/main" id="{AD46B4CC-E43C-4F39-80D7-3C97DACFDC54}"/>
+              </a:ext>
+            </a:extLst>
+          </p:cNvPr>
+          <p:cNvSpPr>
+            <a:spLocks xmlns:a="http://schemas.openxmlformats.org/drawingml/2006/main" noGrp="1"/>
+          </p:cNvSpPr>
+          <p:nvPr/>
+        </p:nvSpPr>
+        <p:spPr>
+          <a:xfrm xmlns:a="http://schemas.openxmlformats.org/drawingml/2006/main">
+            <a:off x="4314825" y="2952750"/>
             <a:ext cx="3333750" cy="342900"/>
           </a:xfrm>
           <a:prstGeom xmlns:a="http://schemas.openxmlformats.org/drawingml/2006/main" prst="rect">
@@ -3092,7 +3614,7 @@
                 <a:ea typeface="Malgun Gothic"/>
                 <a:cs typeface="Malgun Gothic"/>
               </a:rPr>
-              <a:t>AI GATEWAY</a:t>
+              <a:t>PERSISTENT MIRROR</a:t>
             </a:r>
           </a:p>
         </p:txBody>
@@ -3102,99 +3624,99 @@
           <p:cNvPr id="10" name="">
             <a:extLst xmlns:a="http://schemas.openxmlformats.org/drawingml/2006/main">
               <a:ext uri="{FF2B5EF4-FFF2-40B4-BE49-F238E27FC236}">
-                <a16:creationId xmlns:a16="http://schemas.microsoft.com/office/drawing/2014/main" id="{FBAC375E-915F-4C71-99F2-8E2926B1A3F4}"/>
-              </a:ext>
-            </a:extLst>
-          </p:cNvPr>
-          <p:cNvSpPr>
-            <a:spLocks xmlns:a="http://schemas.openxmlformats.org/drawingml/2006/main" noGrp="1"/>
-          </p:cNvSpPr>
-          <p:nvPr/>
-        </p:nvSpPr>
-        <p:spPr>
-          <a:xfrm xmlns:a="http://schemas.openxmlformats.org/drawingml/2006/main">
-            <a:off x="4314825" y="3638550"/>
-            <a:ext cx="3333750" cy="1295400"/>
-          </a:xfrm>
-          <a:prstGeom xmlns:a="http://schemas.openxmlformats.org/drawingml/2006/main" prst="rect">
-            <a:avLst/>
-          </a:prstGeom>
-          <a:noFill xmlns:a="http://schemas.openxmlformats.org/drawingml/2006/main"/>
-          <a:ln xmlns:a="http://schemas.openxmlformats.org/drawingml/2006/main" w="0">
-            <a:noFill/>
-            <a:prstDash val="solid"/>
-          </a:ln>
-        </p:spPr>
-        <p:txBody>
-          <a:bodyPr xmlns:a="http://schemas.openxmlformats.org/drawingml/2006/main"/>
-          <a:lstStyle xmlns:a="http://schemas.openxmlformats.org/drawingml/2006/main"/>
-          <a:p xmlns:a="http://schemas.openxmlformats.org/drawingml/2006/main">
-            <a:pPr algn="l">
-              <a:defRPr sz="1875" b="0">
-                <a:solidFill>
-                  <a:srgbClr val="101010"/>
-                </a:solidFill>
-                <a:latin typeface="Malgun Gothic"/>
-                <a:ea typeface="Malgun Gothic"/>
-                <a:cs typeface="Malgun Gothic"/>
-              </a:defRPr>
-            </a:pPr>
-            <a:r>
-              <a:rPr sz="1875" b="0">
-                <a:solidFill>
-                  <a:srgbClr val="101010"/>
-                </a:solidFill>
-                <a:latin typeface="Malgun Gothic"/>
-                <a:ea typeface="Malgun Gothic"/>
-                <a:cs typeface="Malgun Gothic"/>
-              </a:rPr>
-              <a:t>불변 Registry</a:t>
-            </a:r>
-          </a:p>
-          <a:p xmlns:a="http://schemas.openxmlformats.org/drawingml/2006/main">
-            <a:pPr algn="l">
-              <a:defRPr sz="1875" b="0">
-                <a:solidFill>
-                  <a:srgbClr val="101010"/>
-                </a:solidFill>
-                <a:latin typeface="Malgun Gothic"/>
-                <a:ea typeface="Malgun Gothic"/>
-                <a:cs typeface="Malgun Gothic"/>
-              </a:defRPr>
-            </a:pPr>
-            <a:r>
-              <a:rPr sz="1875" b="0">
-                <a:solidFill>
-                  <a:srgbClr val="101010"/>
-                </a:solidFill>
-                <a:latin typeface="Malgun Gothic"/>
-                <a:ea typeface="Malgun Gothic"/>
-                <a:cs typeface="Malgun Gothic"/>
-              </a:rPr>
-              <a:t>고정 Commit Fetch</a:t>
-            </a:r>
-          </a:p>
-          <a:p xmlns:a="http://schemas.openxmlformats.org/drawingml/2006/main">
-            <a:pPr algn="l">
-              <a:defRPr sz="1875" b="0">
-                <a:solidFill>
-                  <a:srgbClr val="101010"/>
-                </a:solidFill>
-                <a:latin typeface="Malgun Gothic"/>
-                <a:ea typeface="Malgun Gothic"/>
-                <a:cs typeface="Malgun Gothic"/>
-              </a:defRPr>
-            </a:pPr>
-            <a:r>
-              <a:rPr sz="1875" b="0">
-                <a:solidFill>
-                  <a:srgbClr val="101010"/>
-                </a:solidFill>
-                <a:latin typeface="Malgun Gothic"/>
-                <a:ea typeface="Malgun Gothic"/>
-                <a:cs typeface="Malgun Gothic"/>
-              </a:rPr>
-              <a:t>검역·멱등성·Gate</a:t>
+                <a16:creationId xmlns:a16="http://schemas.microsoft.com/office/drawing/2014/main" id="{68551936-4752-4196-92D8-EC8C599DA72C}"/>
+              </a:ext>
+            </a:extLst>
+          </p:cNvPr>
+          <p:cNvSpPr>
+            <a:spLocks xmlns:a="http://schemas.openxmlformats.org/drawingml/2006/main" noGrp="1"/>
+          </p:cNvSpPr>
+          <p:nvPr/>
+        </p:nvSpPr>
+        <p:spPr>
+          <a:xfrm xmlns:a="http://schemas.openxmlformats.org/drawingml/2006/main">
+            <a:off x="4314825" y="3562350"/>
+            <a:ext cx="3333750" cy="1485900"/>
+          </a:xfrm>
+          <a:prstGeom xmlns:a="http://schemas.openxmlformats.org/drawingml/2006/main" prst="rect">
+            <a:avLst/>
+          </a:prstGeom>
+          <a:noFill xmlns:a="http://schemas.openxmlformats.org/drawingml/2006/main"/>
+          <a:ln xmlns:a="http://schemas.openxmlformats.org/drawingml/2006/main" w="0">
+            <a:noFill/>
+            <a:prstDash val="solid"/>
+          </a:ln>
+        </p:spPr>
+        <p:txBody>
+          <a:bodyPr xmlns:a="http://schemas.openxmlformats.org/drawingml/2006/main"/>
+          <a:lstStyle xmlns:a="http://schemas.openxmlformats.org/drawingml/2006/main"/>
+          <a:p xmlns:a="http://schemas.openxmlformats.org/drawingml/2006/main">
+            <a:pPr algn="l">
+              <a:defRPr sz="1800" b="0">
+                <a:solidFill>
+                  <a:srgbClr val="101010"/>
+                </a:solidFill>
+                <a:latin typeface="Malgun Gothic"/>
+                <a:ea typeface="Malgun Gothic"/>
+                <a:cs typeface="Malgun Gothic"/>
+              </a:defRPr>
+            </a:pPr>
+            <a:r>
+              <a:rPr sz="1800" b="0">
+                <a:solidFill>
+                  <a:srgbClr val="101010"/>
+                </a:solidFill>
+                <a:latin typeface="Malgun Gothic"/>
+                <a:ea typeface="Malgun Gothic"/>
+                <a:cs typeface="Malgun Gothic"/>
+              </a:rPr>
+              <a:t>7개 Bare Repository</a:t>
+            </a:r>
+          </a:p>
+          <a:p xmlns:a="http://schemas.openxmlformats.org/drawingml/2006/main">
+            <a:pPr algn="l">
+              <a:defRPr sz="1800" b="0">
+                <a:solidFill>
+                  <a:srgbClr val="101010"/>
+                </a:solidFill>
+                <a:latin typeface="Malgun Gothic"/>
+                <a:ea typeface="Malgun Gothic"/>
+                <a:cs typeface="Malgun Gothic"/>
+              </a:defRPr>
+            </a:pPr>
+            <a:r>
+              <a:rPr sz="1800" b="0">
+                <a:solidFill>
+                  <a:srgbClr val="101010"/>
+                </a:solidFill>
+                <a:latin typeface="Malgun Gothic"/>
+                <a:ea typeface="Malgun Gothic"/>
+                <a:cs typeface="Malgun Gothic"/>
+              </a:rPr>
+              <a:t>Profile별 Candidate Ref</a:t>
+            </a:r>
+          </a:p>
+          <a:p xmlns:a="http://schemas.openxmlformats.org/drawingml/2006/main">
+            <a:pPr algn="l">
+              <a:defRPr sz="1800" b="0">
+                <a:solidFill>
+                  <a:srgbClr val="101010"/>
+                </a:solidFill>
+                <a:latin typeface="Malgun Gothic"/>
+                <a:ea typeface="Malgun Gothic"/>
+                <a:cs typeface="Malgun Gothic"/>
+              </a:defRPr>
+            </a:pPr>
+            <a:r>
+              <a:rPr sz="1800" b="0">
+                <a:solidFill>
+                  <a:srgbClr val="101010"/>
+                </a:solidFill>
+                <a:latin typeface="Malgun Gothic"/>
+                <a:ea typeface="Malgun Gothic"/>
+                <a:cs typeface="Malgun Gothic"/>
+              </a:rPr>
+              <a:t>File Lock·fsck·gc --auto</a:t>
             </a:r>
           </a:p>
         </p:txBody>
@@ -3204,18 +3726,18 @@
           <p:cNvPr id="11" name="">
             <a:extLst xmlns:a="http://schemas.openxmlformats.org/drawingml/2006/main">
               <a:ext uri="{FF2B5EF4-FFF2-40B4-BE49-F238E27FC236}">
-                <a16:creationId xmlns:a16="http://schemas.microsoft.com/office/drawing/2014/main" id="{4650DC8D-9AC4-411C-84D3-EFB47DB86003}"/>
-              </a:ext>
-            </a:extLst>
-          </p:cNvPr>
-          <p:cNvSpPr>
-            <a:spLocks xmlns:a="http://schemas.openxmlformats.org/drawingml/2006/main" noGrp="1"/>
-          </p:cNvSpPr>
-          <p:nvPr/>
-        </p:nvSpPr>
-        <p:spPr>
-          <a:xfrm xmlns:a="http://schemas.openxmlformats.org/drawingml/2006/main">
-            <a:off x="8229600" y="2076450"/>
+                <a16:creationId xmlns:a16="http://schemas.microsoft.com/office/drawing/2014/main" id="{74BE237A-AD86-4C7F-AF34-BBD556544277}"/>
+              </a:ext>
+            </a:extLst>
+          </p:cNvPr>
+          <p:cNvSpPr>
+            <a:spLocks xmlns:a="http://schemas.openxmlformats.org/drawingml/2006/main" noGrp="1"/>
+          </p:cNvSpPr>
+          <p:nvPr/>
+        </p:nvSpPr>
+        <p:spPr>
+          <a:xfrm xmlns:a="http://schemas.openxmlformats.org/drawingml/2006/main">
+            <a:off x="8229600" y="2000250"/>
             <a:ext cx="457200" cy="457200"/>
           </a:xfrm>
           <a:prstGeom xmlns:a="http://schemas.openxmlformats.org/drawingml/2006/main" prst="rect">
@@ -3260,18 +3782,18 @@
           <p:cNvPr id="12" name="">
             <a:extLst xmlns:a="http://schemas.openxmlformats.org/drawingml/2006/main">
               <a:ext uri="{FF2B5EF4-FFF2-40B4-BE49-F238E27FC236}">
-                <a16:creationId xmlns:a16="http://schemas.microsoft.com/office/drawing/2014/main" id="{737EEA67-9E3F-495A-9972-FD0C8F9B8C17}"/>
-              </a:ext>
-            </a:extLst>
-          </p:cNvPr>
-          <p:cNvSpPr>
-            <a:spLocks xmlns:a="http://schemas.openxmlformats.org/drawingml/2006/main" noGrp="1"/>
-          </p:cNvSpPr>
-          <p:nvPr/>
-        </p:nvSpPr>
-        <p:spPr>
-          <a:xfrm xmlns:a="http://schemas.openxmlformats.org/drawingml/2006/main">
-            <a:off x="8229600" y="2667000"/>
+                <a16:creationId xmlns:a16="http://schemas.microsoft.com/office/drawing/2014/main" id="{A944E2FD-9CFD-4D46-878E-BC393CDDB8D1}"/>
+              </a:ext>
+            </a:extLst>
+          </p:cNvPr>
+          <p:cNvSpPr>
+            <a:spLocks xmlns:a="http://schemas.openxmlformats.org/drawingml/2006/main" noGrp="1"/>
+          </p:cNvSpPr>
+          <p:nvPr/>
+        </p:nvSpPr>
+        <p:spPr>
+          <a:xfrm xmlns:a="http://schemas.openxmlformats.org/drawingml/2006/main">
+            <a:off x="8229600" y="2590800"/>
             <a:ext cx="3562350" cy="19050"/>
           </a:xfrm>
           <a:prstGeom xmlns:a="http://schemas.openxmlformats.org/drawingml/2006/main" prst="rect">
@@ -3291,18 +3813,18 @@
           <p:cNvPr id="13" name="">
             <a:extLst xmlns:a="http://schemas.openxmlformats.org/drawingml/2006/main">
               <a:ext uri="{FF2B5EF4-FFF2-40B4-BE49-F238E27FC236}">
-                <a16:creationId xmlns:a16="http://schemas.microsoft.com/office/drawing/2014/main" id="{E4D23643-7CAB-48A4-A942-D98F3A531B79}"/>
-              </a:ext>
-            </a:extLst>
-          </p:cNvPr>
-          <p:cNvSpPr>
-            <a:spLocks xmlns:a="http://schemas.openxmlformats.org/drawingml/2006/main" noGrp="1"/>
-          </p:cNvSpPr>
-          <p:nvPr/>
-        </p:nvSpPr>
-        <p:spPr>
-          <a:xfrm xmlns:a="http://schemas.openxmlformats.org/drawingml/2006/main">
-            <a:off x="8229600" y="3028950"/>
+                <a16:creationId xmlns:a16="http://schemas.microsoft.com/office/drawing/2014/main" id="{569FB1AF-EA10-4CEE-9656-23EE2FFAEC42}"/>
+              </a:ext>
+            </a:extLst>
+          </p:cNvPr>
+          <p:cNvSpPr>
+            <a:spLocks xmlns:a="http://schemas.openxmlformats.org/drawingml/2006/main" noGrp="1"/>
+          </p:cNvSpPr>
+          <p:nvPr/>
+        </p:nvSpPr>
+        <p:spPr>
+          <a:xfrm xmlns:a="http://schemas.openxmlformats.org/drawingml/2006/main">
+            <a:off x="8229600" y="2952750"/>
             <a:ext cx="3333750" cy="342900"/>
           </a:xfrm>
           <a:prstGeom xmlns:a="http://schemas.openxmlformats.org/drawingml/2006/main" prst="rect">
@@ -3337,7 +3859,7 @@
                 <a:ea typeface="Malgun Gothic"/>
                 <a:cs typeface="Malgun Gothic"/>
               </a:rPr>
-              <a:t>POSTGRESQL</a:t>
+              <a:t>LOCAL DATA PATH</a:t>
             </a:r>
           </a:p>
         </p:txBody>
@@ -3347,99 +3869,99 @@
           <p:cNvPr id="14" name="">
             <a:extLst xmlns:a="http://schemas.openxmlformats.org/drawingml/2006/main">
               <a:ext uri="{FF2B5EF4-FFF2-40B4-BE49-F238E27FC236}">
-                <a16:creationId xmlns:a16="http://schemas.microsoft.com/office/drawing/2014/main" id="{3EB54D93-5EF0-46CE-B2D3-116E416CC020}"/>
-              </a:ext>
-            </a:extLst>
-          </p:cNvPr>
-          <p:cNvSpPr>
-            <a:spLocks xmlns:a="http://schemas.openxmlformats.org/drawingml/2006/main" noGrp="1"/>
-          </p:cNvSpPr>
-          <p:nvPr/>
-        </p:nvSpPr>
-        <p:spPr>
-          <a:xfrm xmlns:a="http://schemas.openxmlformats.org/drawingml/2006/main">
-            <a:off x="8229600" y="3638550"/>
-            <a:ext cx="3333750" cy="1295400"/>
-          </a:xfrm>
-          <a:prstGeom xmlns:a="http://schemas.openxmlformats.org/drawingml/2006/main" prst="rect">
-            <a:avLst/>
-          </a:prstGeom>
-          <a:noFill xmlns:a="http://schemas.openxmlformats.org/drawingml/2006/main"/>
-          <a:ln xmlns:a="http://schemas.openxmlformats.org/drawingml/2006/main" w="0">
-            <a:noFill/>
-            <a:prstDash val="solid"/>
-          </a:ln>
-        </p:spPr>
-        <p:txBody>
-          <a:bodyPr xmlns:a="http://schemas.openxmlformats.org/drawingml/2006/main"/>
-          <a:lstStyle xmlns:a="http://schemas.openxmlformats.org/drawingml/2006/main"/>
-          <a:p xmlns:a="http://schemas.openxmlformats.org/drawingml/2006/main">
-            <a:pPr algn="l">
-              <a:defRPr sz="1875" b="0">
-                <a:solidFill>
-                  <a:srgbClr val="101010"/>
-                </a:solidFill>
-                <a:latin typeface="Malgun Gothic"/>
-                <a:ea typeface="Malgun Gothic"/>
-                <a:cs typeface="Malgun Gothic"/>
-              </a:defRPr>
-            </a:pPr>
-            <a:r>
-              <a:rPr sz="1875" b="0">
-                <a:solidFill>
-                  <a:srgbClr val="101010"/>
-                </a:solidFill>
-                <a:latin typeface="Malgun Gothic"/>
-                <a:ea typeface="Malgun Gothic"/>
-                <a:cs typeface="Malgun Gothic"/>
-              </a:rPr>
-              <a:t>Version·Blob·File</a:t>
-            </a:r>
-          </a:p>
-          <a:p xmlns:a="http://schemas.openxmlformats.org/drawingml/2006/main">
-            <a:pPr algn="l">
-              <a:defRPr sz="1875" b="0">
-                <a:solidFill>
-                  <a:srgbClr val="101010"/>
-                </a:solidFill>
-                <a:latin typeface="Malgun Gothic"/>
-                <a:ea typeface="Malgun Gothic"/>
-                <a:cs typeface="Malgun Gothic"/>
-              </a:defRPr>
-            </a:pPr>
-            <a:r>
-              <a:rPr sz="1875" b="0">
-                <a:solidFill>
-                  <a:srgbClr val="101010"/>
-                </a:solidFill>
-                <a:latin typeface="Malgun Gothic"/>
-                <a:ea typeface="Malgun Gothic"/>
-                <a:cs typeface="Malgun Gothic"/>
-              </a:rPr>
-              <a:t>Finding·Approval·Job</a:t>
-            </a:r>
-          </a:p>
-          <a:p xmlns:a="http://schemas.openxmlformats.org/drawingml/2006/main">
-            <a:pPr algn="l">
-              <a:defRPr sz="1875" b="0">
-                <a:solidFill>
-                  <a:srgbClr val="101010"/>
-                </a:solidFill>
-                <a:latin typeface="Malgun Gothic"/>
-                <a:ea typeface="Malgun Gothic"/>
-                <a:cs typeface="Malgun Gothic"/>
-              </a:defRPr>
-            </a:pPr>
-            <a:r>
-              <a:rPr sz="1875" b="0">
-                <a:solidFill>
-                  <a:srgbClr val="101010"/>
-                </a:solidFill>
-                <a:latin typeface="Malgun Gothic"/>
-                <a:ea typeface="Malgun Gothic"/>
-                <a:cs typeface="Malgun Gothic"/>
-              </a:rPr>
-              <a:t>18개 Table</a:t>
+                <a16:creationId xmlns:a16="http://schemas.microsoft.com/office/drawing/2014/main" id="{DFB5F40C-70A5-47A0-A85B-86AF546467A3}"/>
+              </a:ext>
+            </a:extLst>
+          </p:cNvPr>
+          <p:cNvSpPr>
+            <a:spLocks xmlns:a="http://schemas.openxmlformats.org/drawingml/2006/main" noGrp="1"/>
+          </p:cNvSpPr>
+          <p:nvPr/>
+        </p:nvSpPr>
+        <p:spPr>
+          <a:xfrm xmlns:a="http://schemas.openxmlformats.org/drawingml/2006/main">
+            <a:off x="8229600" y="3562350"/>
+            <a:ext cx="3333750" cy="1485900"/>
+          </a:xfrm>
+          <a:prstGeom xmlns:a="http://schemas.openxmlformats.org/drawingml/2006/main" prst="rect">
+            <a:avLst/>
+          </a:prstGeom>
+          <a:noFill xmlns:a="http://schemas.openxmlformats.org/drawingml/2006/main"/>
+          <a:ln xmlns:a="http://schemas.openxmlformats.org/drawingml/2006/main" w="0">
+            <a:noFill/>
+            <a:prstDash val="solid"/>
+          </a:ln>
+        </p:spPr>
+        <p:txBody>
+          <a:bodyPr xmlns:a="http://schemas.openxmlformats.org/drawingml/2006/main"/>
+          <a:lstStyle xmlns:a="http://schemas.openxmlformats.org/drawingml/2006/main"/>
+          <a:p xmlns:a="http://schemas.openxmlformats.org/drawingml/2006/main">
+            <a:pPr algn="l">
+              <a:defRPr sz="1800" b="0">
+                <a:solidFill>
+                  <a:srgbClr val="101010"/>
+                </a:solidFill>
+                <a:latin typeface="Malgun Gothic"/>
+                <a:ea typeface="Malgun Gothic"/>
+                <a:cs typeface="Malgun Gothic"/>
+              </a:defRPr>
+            </a:pPr>
+            <a:r>
+              <a:rPr sz="1800" b="0">
+                <a:solidFill>
+                  <a:srgbClr val="101010"/>
+                </a:solidFill>
+                <a:latin typeface="Malgun Gothic"/>
+                <a:ea typeface="Malgun Gothic"/>
+                <a:cs typeface="Malgun Gothic"/>
+              </a:rPr>
+              <a:t>ls-tree·cat-file Scan</a:t>
+            </a:r>
+          </a:p>
+          <a:p xmlns:a="http://schemas.openxmlformats.org/drawingml/2006/main">
+            <a:pPr algn="l">
+              <a:defRPr sz="1800" b="0">
+                <a:solidFill>
+                  <a:srgbClr val="101010"/>
+                </a:solidFill>
+                <a:latin typeface="Malgun Gothic"/>
+                <a:ea typeface="Malgun Gothic"/>
+                <a:cs typeface="Malgun Gothic"/>
+              </a:defRPr>
+            </a:pPr>
+            <a:r>
+              <a:rPr sz="1800" b="0">
+                <a:solidFill>
+                  <a:srgbClr val="101010"/>
+                </a:solidFill>
+                <a:latin typeface="Malgun Gothic"/>
+                <a:ea typeface="Malgun Gothic"/>
+                <a:cs typeface="Malgun Gothic"/>
+              </a:rPr>
+              <a:t>D0 Blob은 PostgreSQL</a:t>
+            </a:r>
+          </a:p>
+          <a:p xmlns:a="http://schemas.openxmlformats.org/drawingml/2006/main">
+            <a:pPr algn="l">
+              <a:defRPr sz="1800" b="0">
+                <a:solidFill>
+                  <a:srgbClr val="101010"/>
+                </a:solidFill>
+                <a:latin typeface="Malgun Gothic"/>
+                <a:ea typeface="Malgun Gothic"/>
+                <a:cs typeface="Malgun Gothic"/>
+              </a:defRPr>
+            </a:pPr>
+            <a:r>
+              <a:rPr sz="1800" b="0">
+                <a:solidFill>
+                  <a:srgbClr val="101010"/>
+                </a:solidFill>
+                <a:latin typeface="Malgun Gothic"/>
+                <a:ea typeface="Malgun Gothic"/>
+                <a:cs typeface="Malgun Gothic"/>
+              </a:rPr>
+              <a:t>#43 승인 Index 질의</a:t>
             </a:r>
           </a:p>
         </p:txBody>
@@ -3449,19 +3971,19 @@
           <p:cNvPr id="15" name="">
             <a:extLst xmlns:a="http://schemas.openxmlformats.org/drawingml/2006/main">
               <a:ext uri="{FF2B5EF4-FFF2-40B4-BE49-F238E27FC236}">
-                <a16:creationId xmlns:a16="http://schemas.microsoft.com/office/drawing/2014/main" id="{9FEA80BA-63AA-4588-9CF4-0A71C8B363D0}"/>
-              </a:ext>
-            </a:extLst>
-          </p:cNvPr>
-          <p:cNvSpPr>
-            <a:spLocks xmlns:a="http://schemas.openxmlformats.org/drawingml/2006/main" noGrp="1"/>
-          </p:cNvSpPr>
-          <p:nvPr/>
-        </p:nvSpPr>
-        <p:spPr>
-          <a:xfrm xmlns:a="http://schemas.openxmlformats.org/drawingml/2006/main">
-            <a:off x="400050" y="5829300"/>
-            <a:ext cx="9334500" cy="285750"/>
+                <a16:creationId xmlns:a16="http://schemas.microsoft.com/office/drawing/2014/main" id="{9115E341-7425-4CB6-9043-382DA0E9C759}"/>
+              </a:ext>
+            </a:extLst>
+          </p:cNvPr>
+          <p:cNvSpPr>
+            <a:spLocks xmlns:a="http://schemas.openxmlformats.org/drawingml/2006/main" noGrp="1"/>
+          </p:cNvSpPr>
+          <p:nvPr/>
+        </p:nvSpPr>
+        <p:spPr>
+          <a:xfrm xmlns:a="http://schemas.openxmlformats.org/drawingml/2006/main">
+            <a:off x="400050" y="5810250"/>
+            <a:ext cx="10668000" cy="304800"/>
           </a:xfrm>
           <a:prstGeom xmlns:a="http://schemas.openxmlformats.org/drawingml/2006/main" prst="rect">
             <a:avLst/>
@@ -3495,7 +4017,7 @@
                 <a:ea typeface="Malgun Gothic"/>
                 <a:cs typeface="Malgun Gothic"/>
               </a:rPr>
-              <a:t>Parser·Chunk·Embeddings는 #43에서 이 Gate 뒤에 연결합니다.</a:t>
+              <a:t>GitHub 장애 시 신규 Head만 지연되고 기존 Mirror·Blob·승인 Index는 유지됩니다.</a:t>
             </a:r>
           </a:p>
         </p:txBody>
@@ -3503,7 +4025,7 @@
     </p:spTree>
     <p:extLst>
       <p:ext uri="{BB962C8B-B14F-4D97-AF65-F5344CB8AC3E}">
-        <p14:creationId xmlns:p14="http://schemas.microsoft.com/office/powerpoint/2010/main" val="1728655344"/>
+        <p14:creationId xmlns:p14="http://schemas.microsoft.com/office/powerpoint/2010/main" val="86631414"/>
       </p:ext>
     </p:extLst>
   </p:cSld>
@@ -3534,7 +4056,7 @@
           <p:cNvPr id="39" name="">
             <a:extLst xmlns:a="http://schemas.openxmlformats.org/drawingml/2006/main">
               <a:ext uri="{FF2B5EF4-FFF2-40B4-BE49-F238E27FC236}">
-                <a16:creationId xmlns:a16="http://schemas.microsoft.com/office/drawing/2014/main" id="{BDA45491-D982-406C-ADAC-892CE9567B7E}"/>
+                <a16:creationId xmlns:a16="http://schemas.microsoft.com/office/drawing/2014/main" id="{2D5D71B4-A6F1-4E06-832E-0DE89CF3E80D}"/>
               </a:ext>
             </a:extLst>
           </p:cNvPr>
@@ -3590,7 +4112,7 @@
           <p:cNvPr id="2" name="">
             <a:extLst xmlns:a="http://schemas.openxmlformats.org/drawingml/2006/main">
               <a:ext uri="{FF2B5EF4-FFF2-40B4-BE49-F238E27FC236}">
-                <a16:creationId xmlns:a16="http://schemas.microsoft.com/office/drawing/2014/main" id="{281D80AB-8858-4594-A639-905F79B45419}"/>
+                <a16:creationId xmlns:a16="http://schemas.microsoft.com/office/drawing/2014/main" id="{14FE3F7A-025C-4F33-9D5F-B4A2E5B33875}"/>
               </a:ext>
             </a:extLst>
           </p:cNvPr>
@@ -3646,7 +4168,7 @@
           <p:cNvPr id="3" name="">
             <a:extLst xmlns:a="http://schemas.openxmlformats.org/drawingml/2006/main">
               <a:ext uri="{FF2B5EF4-FFF2-40B4-BE49-F238E27FC236}">
-                <a16:creationId xmlns:a16="http://schemas.microsoft.com/office/drawing/2014/main" id="{76F13A5C-7082-4756-BFBA-54A5FFDDE6B0}"/>
+                <a16:creationId xmlns:a16="http://schemas.microsoft.com/office/drawing/2014/main" id="{DF088374-7063-486B-A8BA-6D29E4E7841F}"/>
               </a:ext>
             </a:extLst>
           </p:cNvPr>
@@ -3702,7 +4224,7 @@
           <p:cNvPr id="4" name="">
             <a:extLst xmlns:a="http://schemas.openxmlformats.org/drawingml/2006/main">
               <a:ext uri="{FF2B5EF4-FFF2-40B4-BE49-F238E27FC236}">
-                <a16:creationId xmlns:a16="http://schemas.microsoft.com/office/drawing/2014/main" id="{B757F4D4-44BE-464C-B8E1-2C62EC571312}"/>
+                <a16:creationId xmlns:a16="http://schemas.microsoft.com/office/drawing/2014/main" id="{2520A857-43DB-4B24-A682-5334572E4266}"/>
               </a:ext>
             </a:extLst>
           </p:cNvPr>
@@ -3758,7 +4280,7 @@
           <p:cNvPr id="5" name="">
             <a:extLst xmlns:a="http://schemas.openxmlformats.org/drawingml/2006/main">
               <a:ext uri="{FF2B5EF4-FFF2-40B4-BE49-F238E27FC236}">
-                <a16:creationId xmlns:a16="http://schemas.microsoft.com/office/drawing/2014/main" id="{95310B25-3369-4977-94D5-25394C2E1560}"/>
+                <a16:creationId xmlns:a16="http://schemas.microsoft.com/office/drawing/2014/main" id="{22108E28-4AC8-4E80-95FE-39A0CD54B29B}"/>
               </a:ext>
             </a:extLst>
           </p:cNvPr>
@@ -3814,7 +4336,7 @@
           <p:cNvPr id="6" name="">
             <a:extLst xmlns:a="http://schemas.openxmlformats.org/drawingml/2006/main">
               <a:ext uri="{FF2B5EF4-FFF2-40B4-BE49-F238E27FC236}">
-                <a16:creationId xmlns:a16="http://schemas.microsoft.com/office/drawing/2014/main" id="{53226366-0323-495E-B117-3C2F067D5AC7}"/>
+                <a16:creationId xmlns:a16="http://schemas.microsoft.com/office/drawing/2014/main" id="{4AF12B8C-FCB9-4B33-8709-D6ACF0F0C356}"/>
               </a:ext>
             </a:extLst>
           </p:cNvPr>
@@ -3845,7 +4367,7 @@
           <p:cNvPr id="7" name="">
             <a:extLst xmlns:a="http://schemas.openxmlformats.org/drawingml/2006/main">
               <a:ext uri="{FF2B5EF4-FFF2-40B4-BE49-F238E27FC236}">
-                <a16:creationId xmlns:a16="http://schemas.microsoft.com/office/drawing/2014/main" id="{CA0DF5B3-E246-4DC2-BE3D-32741B5653E7}"/>
+                <a16:creationId xmlns:a16="http://schemas.microsoft.com/office/drawing/2014/main" id="{F7B33F12-8217-4555-97C0-E84870626EC6}"/>
               </a:ext>
             </a:extLst>
           </p:cNvPr>
@@ -3901,7 +4423,7 @@
           <p:cNvPr id="8" name="">
             <a:extLst xmlns:a="http://schemas.openxmlformats.org/drawingml/2006/main">
               <a:ext uri="{FF2B5EF4-FFF2-40B4-BE49-F238E27FC236}">
-                <a16:creationId xmlns:a16="http://schemas.microsoft.com/office/drawing/2014/main" id="{A56BFCBE-165A-45A8-84BF-31C8836BCF7A}"/>
+                <a16:creationId xmlns:a16="http://schemas.microsoft.com/office/drawing/2014/main" id="{AE5A1946-96E7-4C20-B5F0-A9A1E6D2EC08}"/>
               </a:ext>
             </a:extLst>
           </p:cNvPr>
@@ -3957,7 +4479,7 @@
           <p:cNvPr id="9" name="">
             <a:extLst xmlns:a="http://schemas.openxmlformats.org/drawingml/2006/main">
               <a:ext uri="{FF2B5EF4-FFF2-40B4-BE49-F238E27FC236}">
-                <a16:creationId xmlns:a16="http://schemas.microsoft.com/office/drawing/2014/main" id="{6DA212FA-5696-4C7A-97A5-1456A69361DE}"/>
+                <a16:creationId xmlns:a16="http://schemas.microsoft.com/office/drawing/2014/main" id="{762F93A4-65AE-4CEE-B860-EC3969B9A913}"/>
               </a:ext>
             </a:extLst>
           </p:cNvPr>
@@ -4013,7 +4535,7 @@
           <p:cNvPr id="10" name="">
             <a:extLst xmlns:a="http://schemas.openxmlformats.org/drawingml/2006/main">
               <a:ext uri="{FF2B5EF4-FFF2-40B4-BE49-F238E27FC236}">
-                <a16:creationId xmlns:a16="http://schemas.microsoft.com/office/drawing/2014/main" id="{A1F9BAAD-6264-46AE-B807-18C29D522BC2}"/>
+                <a16:creationId xmlns:a16="http://schemas.microsoft.com/office/drawing/2014/main" id="{ECC21E4A-8EE5-4BBB-AB2D-5F3DBCFA94BA}"/>
               </a:ext>
             </a:extLst>
           </p:cNvPr>
@@ -4069,7 +4591,7 @@
           <p:cNvPr id="11" name="">
             <a:extLst xmlns:a="http://schemas.openxmlformats.org/drawingml/2006/main">
               <a:ext uri="{FF2B5EF4-FFF2-40B4-BE49-F238E27FC236}">
-                <a16:creationId xmlns:a16="http://schemas.microsoft.com/office/drawing/2014/main" id="{1B412973-A943-402A-81CC-42C75F462500}"/>
+                <a16:creationId xmlns:a16="http://schemas.microsoft.com/office/drawing/2014/main" id="{501526A1-144F-48DC-84B2-96C665F3C995}"/>
               </a:ext>
             </a:extLst>
           </p:cNvPr>
@@ -4125,7 +4647,7 @@
           <p:cNvPr id="12" name="">
             <a:extLst xmlns:a="http://schemas.openxmlformats.org/drawingml/2006/main">
               <a:ext uri="{FF2B5EF4-FFF2-40B4-BE49-F238E27FC236}">
-                <a16:creationId xmlns:a16="http://schemas.microsoft.com/office/drawing/2014/main" id="{D923DBDC-BEAD-4D0A-998F-7A3039A79C9E}"/>
+                <a16:creationId xmlns:a16="http://schemas.microsoft.com/office/drawing/2014/main" id="{844309B6-DE71-4D9B-99BB-8CD298520EE9}"/>
               </a:ext>
             </a:extLst>
           </p:cNvPr>
@@ -4181,7 +4703,7 @@
           <p:cNvPr id="13" name="">
             <a:extLst xmlns:a="http://schemas.openxmlformats.org/drawingml/2006/main">
               <a:ext uri="{FF2B5EF4-FFF2-40B4-BE49-F238E27FC236}">
-                <a16:creationId xmlns:a16="http://schemas.microsoft.com/office/drawing/2014/main" id="{8A5B4775-AFD2-4ACF-97D4-7A6258B2181A}"/>
+                <a16:creationId xmlns:a16="http://schemas.microsoft.com/office/drawing/2014/main" id="{C33EB998-FBF8-4686-AAC3-92C32F111631}"/>
               </a:ext>
             </a:extLst>
           </p:cNvPr>
@@ -4212,7 +4734,7 @@
           <p:cNvPr id="14" name="">
             <a:extLst xmlns:a="http://schemas.openxmlformats.org/drawingml/2006/main">
               <a:ext uri="{FF2B5EF4-FFF2-40B4-BE49-F238E27FC236}">
-                <a16:creationId xmlns:a16="http://schemas.microsoft.com/office/drawing/2014/main" id="{19269169-75BF-403F-982A-BC25BDF69AB3}"/>
+                <a16:creationId xmlns:a16="http://schemas.microsoft.com/office/drawing/2014/main" id="{7E4BEB26-7D79-4C88-9F19-87CA2824C6D2}"/>
               </a:ext>
             </a:extLst>
           </p:cNvPr>
@@ -4268,7 +4790,7 @@
           <p:cNvPr id="15" name="">
             <a:extLst xmlns:a="http://schemas.openxmlformats.org/drawingml/2006/main">
               <a:ext uri="{FF2B5EF4-FFF2-40B4-BE49-F238E27FC236}">
-                <a16:creationId xmlns:a16="http://schemas.microsoft.com/office/drawing/2014/main" id="{283E146F-D71E-4A3C-BEC5-9296104A4A5B}"/>
+                <a16:creationId xmlns:a16="http://schemas.microsoft.com/office/drawing/2014/main" id="{0C3B33F2-CC76-4D70-B9B9-85E0D5269FB9}"/>
               </a:ext>
             </a:extLst>
           </p:cNvPr>
@@ -4324,7 +4846,7 @@
           <p:cNvPr id="16" name="">
             <a:extLst xmlns:a="http://schemas.openxmlformats.org/drawingml/2006/main">
               <a:ext uri="{FF2B5EF4-FFF2-40B4-BE49-F238E27FC236}">
-                <a16:creationId xmlns:a16="http://schemas.microsoft.com/office/drawing/2014/main" id="{CE3A5652-2FFD-4807-9FA4-D1959C9CB841}"/>
+                <a16:creationId xmlns:a16="http://schemas.microsoft.com/office/drawing/2014/main" id="{0263ACF0-47BB-4F33-9FC9-24781577821D}"/>
               </a:ext>
             </a:extLst>
           </p:cNvPr>
@@ -4380,7 +4902,7 @@
           <p:cNvPr id="17" name="">
             <a:extLst xmlns:a="http://schemas.openxmlformats.org/drawingml/2006/main">
               <a:ext uri="{FF2B5EF4-FFF2-40B4-BE49-F238E27FC236}">
-                <a16:creationId xmlns:a16="http://schemas.microsoft.com/office/drawing/2014/main" id="{278BCB60-0523-4BA6-9369-3C555FC7675C}"/>
+                <a16:creationId xmlns:a16="http://schemas.microsoft.com/office/drawing/2014/main" id="{F6D4AF4B-95F1-47D3-8558-CCBCFF525500}"/>
               </a:ext>
             </a:extLst>
           </p:cNvPr>
@@ -4436,7 +4958,7 @@
           <p:cNvPr id="18" name="">
             <a:extLst xmlns:a="http://schemas.openxmlformats.org/drawingml/2006/main">
               <a:ext uri="{FF2B5EF4-FFF2-40B4-BE49-F238E27FC236}">
-                <a16:creationId xmlns:a16="http://schemas.microsoft.com/office/drawing/2014/main" id="{989BBB88-F871-405A-BB77-F60E102AE5A4}"/>
+                <a16:creationId xmlns:a16="http://schemas.microsoft.com/office/drawing/2014/main" id="{0DA48C3E-EDC9-4904-95D1-1ADD0363E974}"/>
               </a:ext>
             </a:extLst>
           </p:cNvPr>
@@ -4492,7 +5014,7 @@
           <p:cNvPr id="19" name="">
             <a:extLst xmlns:a="http://schemas.openxmlformats.org/drawingml/2006/main">
               <a:ext uri="{FF2B5EF4-FFF2-40B4-BE49-F238E27FC236}">
-                <a16:creationId xmlns:a16="http://schemas.microsoft.com/office/drawing/2014/main" id="{CC03BA87-D8F8-422B-963D-0BEBDFC93B60}"/>
+                <a16:creationId xmlns:a16="http://schemas.microsoft.com/office/drawing/2014/main" id="{7D124BAF-425F-481E-BB38-C7878940FC0F}"/>
               </a:ext>
             </a:extLst>
           </p:cNvPr>
@@ -4548,7 +5070,7 @@
           <p:cNvPr id="20" name="">
             <a:extLst xmlns:a="http://schemas.openxmlformats.org/drawingml/2006/main">
               <a:ext uri="{FF2B5EF4-FFF2-40B4-BE49-F238E27FC236}">
-                <a16:creationId xmlns:a16="http://schemas.microsoft.com/office/drawing/2014/main" id="{7B1E429D-E896-4C53-8512-9070A7A401CC}"/>
+                <a16:creationId xmlns:a16="http://schemas.microsoft.com/office/drawing/2014/main" id="{6EBAEB79-C866-4EB5-9988-243FE1362DEE}"/>
               </a:ext>
             </a:extLst>
           </p:cNvPr>
@@ -4579,7 +5101,7 @@
           <p:cNvPr id="21" name="">
             <a:extLst xmlns:a="http://schemas.openxmlformats.org/drawingml/2006/main">
               <a:ext uri="{FF2B5EF4-FFF2-40B4-BE49-F238E27FC236}">
-                <a16:creationId xmlns:a16="http://schemas.microsoft.com/office/drawing/2014/main" id="{833545AB-846E-4A2D-BCC0-425A54CC16E0}"/>
+                <a16:creationId xmlns:a16="http://schemas.microsoft.com/office/drawing/2014/main" id="{EF4733B4-9FCB-4823-9E62-F591254DEB56}"/>
               </a:ext>
             </a:extLst>
           </p:cNvPr>
@@ -4635,7 +5157,7 @@
           <p:cNvPr id="22" name="">
             <a:extLst xmlns:a="http://schemas.openxmlformats.org/drawingml/2006/main">
               <a:ext uri="{FF2B5EF4-FFF2-40B4-BE49-F238E27FC236}">
-                <a16:creationId xmlns:a16="http://schemas.microsoft.com/office/drawing/2014/main" id="{DBB65416-767C-48AC-BFF0-AB126CBF0ADD}"/>
+                <a16:creationId xmlns:a16="http://schemas.microsoft.com/office/drawing/2014/main" id="{B76545BA-3116-401D-B12A-449B93AA5AD2}"/>
               </a:ext>
             </a:extLst>
           </p:cNvPr>
@@ -4691,7 +5213,7 @@
           <p:cNvPr id="23" name="">
             <a:extLst xmlns:a="http://schemas.openxmlformats.org/drawingml/2006/main">
               <a:ext uri="{FF2B5EF4-FFF2-40B4-BE49-F238E27FC236}">
-                <a16:creationId xmlns:a16="http://schemas.microsoft.com/office/drawing/2014/main" id="{CA1C1F3B-9A8C-41E2-928F-1327F2B62663}"/>
+                <a16:creationId xmlns:a16="http://schemas.microsoft.com/office/drawing/2014/main" id="{002E7A14-B317-478D-91D4-897CC0BAD339}"/>
               </a:ext>
             </a:extLst>
           </p:cNvPr>
@@ -4747,7 +5269,7 @@
           <p:cNvPr id="24" name="">
             <a:extLst xmlns:a="http://schemas.openxmlformats.org/drawingml/2006/main">
               <a:ext uri="{FF2B5EF4-FFF2-40B4-BE49-F238E27FC236}">
-                <a16:creationId xmlns:a16="http://schemas.microsoft.com/office/drawing/2014/main" id="{F6549794-B8B7-4138-99B1-51ED0180D416}"/>
+                <a16:creationId xmlns:a16="http://schemas.microsoft.com/office/drawing/2014/main" id="{2CC1B78C-55C3-4EC8-B7A2-C00C894051CF}"/>
               </a:ext>
             </a:extLst>
           </p:cNvPr>
@@ -4803,7 +5325,7 @@
           <p:cNvPr id="25" name="">
             <a:extLst xmlns:a="http://schemas.openxmlformats.org/drawingml/2006/main">
               <a:ext uri="{FF2B5EF4-FFF2-40B4-BE49-F238E27FC236}">
-                <a16:creationId xmlns:a16="http://schemas.microsoft.com/office/drawing/2014/main" id="{E347557B-EC6A-4C9C-8373-4C5B51D67691}"/>
+                <a16:creationId xmlns:a16="http://schemas.microsoft.com/office/drawing/2014/main" id="{7E9B43B2-4E27-4BC3-AAFE-AF31CA62EF70}"/>
               </a:ext>
             </a:extLst>
           </p:cNvPr>
@@ -4859,7 +5381,7 @@
           <p:cNvPr id="26" name="">
             <a:extLst xmlns:a="http://schemas.openxmlformats.org/drawingml/2006/main">
               <a:ext uri="{FF2B5EF4-FFF2-40B4-BE49-F238E27FC236}">
-                <a16:creationId xmlns:a16="http://schemas.microsoft.com/office/drawing/2014/main" id="{8AA67BF3-A09F-413C-8FB3-7B91A44D60CA}"/>
+                <a16:creationId xmlns:a16="http://schemas.microsoft.com/office/drawing/2014/main" id="{8DEFF566-B437-43F3-9D2B-35A9DF5D86EA}"/>
               </a:ext>
             </a:extLst>
           </p:cNvPr>
@@ -4915,7 +5437,7 @@
           <p:cNvPr id="27" name="">
             <a:extLst xmlns:a="http://schemas.openxmlformats.org/drawingml/2006/main">
               <a:ext uri="{FF2B5EF4-FFF2-40B4-BE49-F238E27FC236}">
-                <a16:creationId xmlns:a16="http://schemas.microsoft.com/office/drawing/2014/main" id="{9F78A2A3-B594-4AD0-9439-4FE09FE8D3CB}"/>
+                <a16:creationId xmlns:a16="http://schemas.microsoft.com/office/drawing/2014/main" id="{1CBCE721-23D3-4692-A0F7-9DDACE9E3A7E}"/>
               </a:ext>
             </a:extLst>
           </p:cNvPr>
@@ -4946,7 +5468,7 @@
           <p:cNvPr id="28" name="">
             <a:extLst xmlns:a="http://schemas.openxmlformats.org/drawingml/2006/main">
               <a:ext uri="{FF2B5EF4-FFF2-40B4-BE49-F238E27FC236}">
-                <a16:creationId xmlns:a16="http://schemas.microsoft.com/office/drawing/2014/main" id="{8A070E1E-9B33-4AA8-AA8E-F106944DABF0}"/>
+                <a16:creationId xmlns:a16="http://schemas.microsoft.com/office/drawing/2014/main" id="{B184CBB9-9F7C-4AEE-88F3-83EF60431CA7}"/>
               </a:ext>
             </a:extLst>
           </p:cNvPr>
@@ -5002,7 +5524,7 @@
           <p:cNvPr id="29" name="">
             <a:extLst xmlns:a="http://schemas.openxmlformats.org/drawingml/2006/main">
               <a:ext uri="{FF2B5EF4-FFF2-40B4-BE49-F238E27FC236}">
-                <a16:creationId xmlns:a16="http://schemas.microsoft.com/office/drawing/2014/main" id="{23DA1F66-33A8-420D-8D23-56C214CFE9B0}"/>
+                <a16:creationId xmlns:a16="http://schemas.microsoft.com/office/drawing/2014/main" id="{481D33B1-037B-42E3-A905-C74B30625124}"/>
               </a:ext>
             </a:extLst>
           </p:cNvPr>
@@ -5058,7 +5580,7 @@
           <p:cNvPr id="30" name="">
             <a:extLst xmlns:a="http://schemas.openxmlformats.org/drawingml/2006/main">
               <a:ext uri="{FF2B5EF4-FFF2-40B4-BE49-F238E27FC236}">
-                <a16:creationId xmlns:a16="http://schemas.microsoft.com/office/drawing/2014/main" id="{DE211F08-7E48-4070-9CD2-71D448ED3A91}"/>
+                <a16:creationId xmlns:a16="http://schemas.microsoft.com/office/drawing/2014/main" id="{88449FC2-FB64-4802-9BAD-3EB54A388084}"/>
               </a:ext>
             </a:extLst>
           </p:cNvPr>
@@ -5114,7 +5636,7 @@
           <p:cNvPr id="31" name="">
             <a:extLst xmlns:a="http://schemas.openxmlformats.org/drawingml/2006/main">
               <a:ext uri="{FF2B5EF4-FFF2-40B4-BE49-F238E27FC236}">
-                <a16:creationId xmlns:a16="http://schemas.microsoft.com/office/drawing/2014/main" id="{9A409DE6-3599-4D9C-8C6F-668D8C3E7E6F}"/>
+                <a16:creationId xmlns:a16="http://schemas.microsoft.com/office/drawing/2014/main" id="{2C1789FF-F455-430F-9D72-4259E878FACB}"/>
               </a:ext>
             </a:extLst>
           </p:cNvPr>
@@ -5170,7 +5692,7 @@
           <p:cNvPr id="32" name="">
             <a:extLst xmlns:a="http://schemas.openxmlformats.org/drawingml/2006/main">
               <a:ext uri="{FF2B5EF4-FFF2-40B4-BE49-F238E27FC236}">
-                <a16:creationId xmlns:a16="http://schemas.microsoft.com/office/drawing/2014/main" id="{8722847A-EF89-4779-917B-E18DE053371B}"/>
+                <a16:creationId xmlns:a16="http://schemas.microsoft.com/office/drawing/2014/main" id="{24B1B25A-BCD8-4299-AD90-AC4075E57B4E}"/>
               </a:ext>
             </a:extLst>
           </p:cNvPr>
@@ -5226,7 +5748,7 @@
           <p:cNvPr id="33" name="">
             <a:extLst xmlns:a="http://schemas.openxmlformats.org/drawingml/2006/main">
               <a:ext uri="{FF2B5EF4-FFF2-40B4-BE49-F238E27FC236}">
-                <a16:creationId xmlns:a16="http://schemas.microsoft.com/office/drawing/2014/main" id="{63F30BA7-0C1F-4610-9D71-3851659EE671}"/>
+                <a16:creationId xmlns:a16="http://schemas.microsoft.com/office/drawing/2014/main" id="{321DADD6-D265-43D4-9D95-60DB91BC7C40}"/>
               </a:ext>
             </a:extLst>
           </p:cNvPr>
@@ -5282,7 +5804,7 @@
           <p:cNvPr id="34" name="">
             <a:extLst xmlns:a="http://schemas.openxmlformats.org/drawingml/2006/main">
               <a:ext uri="{FF2B5EF4-FFF2-40B4-BE49-F238E27FC236}">
-                <a16:creationId xmlns:a16="http://schemas.microsoft.com/office/drawing/2014/main" id="{895C0070-7D6C-4A75-B782-BD49EE9ECC8F}"/>
+                <a16:creationId xmlns:a16="http://schemas.microsoft.com/office/drawing/2014/main" id="{B1C4AE5A-599C-4B53-890F-6289B8A78717}"/>
               </a:ext>
             </a:extLst>
           </p:cNvPr>
@@ -5313,7 +5835,7 @@
           <p:cNvPr id="35" name="">
             <a:extLst xmlns:a="http://schemas.openxmlformats.org/drawingml/2006/main">
               <a:ext uri="{FF2B5EF4-FFF2-40B4-BE49-F238E27FC236}">
-                <a16:creationId xmlns:a16="http://schemas.microsoft.com/office/drawing/2014/main" id="{F1F0DE8A-3C2E-4A65-8C20-C6EE36A7C6DE}"/>
+                <a16:creationId xmlns:a16="http://schemas.microsoft.com/office/drawing/2014/main" id="{B871F3F3-02EE-47F1-B6EB-EA659C9F48A6}"/>
               </a:ext>
             </a:extLst>
           </p:cNvPr>
@@ -5369,7 +5891,7 @@
           <p:cNvPr id="36" name="">
             <a:extLst xmlns:a="http://schemas.openxmlformats.org/drawingml/2006/main">
               <a:ext uri="{FF2B5EF4-FFF2-40B4-BE49-F238E27FC236}">
-                <a16:creationId xmlns:a16="http://schemas.microsoft.com/office/drawing/2014/main" id="{B199238E-1930-41B4-8A1E-80D1897BF0F6}"/>
+                <a16:creationId xmlns:a16="http://schemas.microsoft.com/office/drawing/2014/main" id="{96341C1F-5ACA-4634-8BFD-1D12EA24B9B6}"/>
               </a:ext>
             </a:extLst>
           </p:cNvPr>
@@ -5425,7 +5947,7 @@
           <p:cNvPr id="37" name="">
             <a:extLst xmlns:a="http://schemas.openxmlformats.org/drawingml/2006/main">
               <a:ext uri="{FF2B5EF4-FFF2-40B4-BE49-F238E27FC236}">
-                <a16:creationId xmlns:a16="http://schemas.microsoft.com/office/drawing/2014/main" id="{9EEAEE58-9CCD-4B27-8433-A4D8125CD70C}"/>
+                <a16:creationId xmlns:a16="http://schemas.microsoft.com/office/drawing/2014/main" id="{DEF5B9B8-984B-4402-B8E0-7DFFF6DEBEC5}"/>
               </a:ext>
             </a:extLst>
           </p:cNvPr>
@@ -5481,7 +6003,7 @@
           <p:cNvPr id="38" name="">
             <a:extLst xmlns:a="http://schemas.openxmlformats.org/drawingml/2006/main">
               <a:ext uri="{FF2B5EF4-FFF2-40B4-BE49-F238E27FC236}">
-                <a16:creationId xmlns:a16="http://schemas.microsoft.com/office/drawing/2014/main" id="{7938C66B-4140-4DA3-9BBC-D26B0FD7A810}"/>
+                <a16:creationId xmlns:a16="http://schemas.microsoft.com/office/drawing/2014/main" id="{750086E2-CD11-4F56-9E14-4C37771E3152}"/>
               </a:ext>
             </a:extLst>
           </p:cNvPr>
@@ -5493,7 +6015,7 @@
         <p:spPr>
           <a:xfrm xmlns:a="http://schemas.openxmlformats.org/drawingml/2006/main">
             <a:off x="400050" y="5981700"/>
-            <a:ext cx="9048750" cy="285750"/>
+            <a:ext cx="9525000" cy="285750"/>
           </a:xfrm>
           <a:prstGeom xmlns:a="http://schemas.openxmlformats.org/drawingml/2006/main" prst="rect">
             <a:avLst/>
@@ -5527,7 +6049,7 @@
                 <a:ea typeface="Malgun Gothic"/>
                 <a:cs typeface="Malgun Gothic"/>
               </a:rPr>
-              <a:t>모든 Profile: D0 · 7일 삭제 SLA · 초기 Reviewer dhslove</a:t>
+              <a:t>Cloud 3개 Profile은 한 Mirror 안에서 Branch·Candidate Ref를 분리합니다.</a:t>
             </a:r>
           </a:p>
         </p:txBody>
@@ -5535,7 +6057,7 @@
     </p:spTree>
     <p:extLst>
       <p:ext uri="{BB962C8B-B14F-4D97-AF65-F5344CB8AC3E}">
-        <p14:creationId xmlns:p14="http://schemas.microsoft.com/office/powerpoint/2010/main" val="476665281"/>
+        <p14:creationId xmlns:p14="http://schemas.microsoft.com/office/powerpoint/2010/main" val="839881464"/>
       </p:ext>
     </p:extLst>
   </p:cSld>
@@ -5563,10 +6085,10 @@
       </p:grpSpPr>
       <p:sp>
         <p:nvSpPr>
-          <p:cNvPr id="20" name="">
-            <a:extLst xmlns:a="http://schemas.openxmlformats.org/drawingml/2006/main">
-              <a:ext uri="{FF2B5EF4-FFF2-40B4-BE49-F238E27FC236}">
-                <a16:creationId xmlns:a16="http://schemas.microsoft.com/office/drawing/2014/main" id="{84C60F28-5522-4466-90F5-F48162827E7A}"/>
+          <p:cNvPr id="17" name="">
+            <a:extLst xmlns:a="http://schemas.openxmlformats.org/drawingml/2006/main">
+              <a:ext uri="{FF2B5EF4-FFF2-40B4-BE49-F238E27FC236}">
+                <a16:creationId xmlns:a16="http://schemas.microsoft.com/office/drawing/2014/main" id="{8E56A8CA-7A31-4108-89C1-65C1B24FA861}"/>
               </a:ext>
             </a:extLst>
           </p:cNvPr>
@@ -5612,7 +6134,7 @@
                 <a:ea typeface="Malgun Gothic"/>
                 <a:cs typeface="Malgun Gothic"/>
               </a:rPr>
-              <a:t>새 Commit은 기존 승인을 상속하지 않고 전체 성공 후에만 활성화됩니다</a:t>
+              <a:t>6시간 동기화와 24시간 Stale 판정을 실제 운영합니다</a:t>
             </a:r>
           </a:p>
         </p:txBody>
@@ -5622,7 +6144,7 @@
           <p:cNvPr id="2" name="">
             <a:extLst xmlns:a="http://schemas.openxmlformats.org/drawingml/2006/main">
               <a:ext uri="{FF2B5EF4-FFF2-40B4-BE49-F238E27FC236}">
-                <a16:creationId xmlns:a16="http://schemas.microsoft.com/office/drawing/2014/main" id="{BED664A0-45C9-4B6E-AF81-43B4C70FD1C1}"/>
+                <a16:creationId xmlns:a16="http://schemas.microsoft.com/office/drawing/2014/main" id="{E2929E33-318B-4F3B-9B6F-91126A7F4913}"/>
               </a:ext>
             </a:extLst>
           </p:cNvPr>
@@ -5678,19 +6200,19 @@
           <p:cNvPr id="3" name="">
             <a:extLst xmlns:a="http://schemas.openxmlformats.org/drawingml/2006/main">
               <a:ext uri="{FF2B5EF4-FFF2-40B4-BE49-F238E27FC236}">
-                <a16:creationId xmlns:a16="http://schemas.microsoft.com/office/drawing/2014/main" id="{D6802C1B-B76C-4E46-A7A0-5CB74DDF6BD8}"/>
-              </a:ext>
-            </a:extLst>
-          </p:cNvPr>
-          <p:cNvSpPr>
-            <a:spLocks xmlns:a="http://schemas.openxmlformats.org/drawingml/2006/main" noGrp="1"/>
-          </p:cNvSpPr>
-          <p:nvPr/>
-        </p:nvSpPr>
-        <p:spPr>
-          <a:xfrm xmlns:a="http://schemas.openxmlformats.org/drawingml/2006/main">
-            <a:off x="723900" y="3371850"/>
-            <a:ext cx="10668000" cy="19050"/>
+                <a16:creationId xmlns:a16="http://schemas.microsoft.com/office/drawing/2014/main" id="{2CCF7CC9-7462-4767-9322-BBD8832E97C9}"/>
+              </a:ext>
+            </a:extLst>
+          </p:cNvPr>
+          <p:cNvSpPr>
+            <a:spLocks xmlns:a="http://schemas.openxmlformats.org/drawingml/2006/main" noGrp="1"/>
+          </p:cNvSpPr>
+          <p:nvPr/>
+        </p:nvSpPr>
+        <p:spPr>
+          <a:xfrm xmlns:a="http://schemas.openxmlformats.org/drawingml/2006/main">
+            <a:off x="876300" y="3333750"/>
+            <a:ext cx="9906000" cy="19050"/>
           </a:xfrm>
           <a:prstGeom xmlns:a="http://schemas.openxmlformats.org/drawingml/2006/main" prst="rect">
             <a:avLst/>
@@ -5709,19 +6231,19 @@
           <p:cNvPr id="4" name="">
             <a:extLst xmlns:a="http://schemas.openxmlformats.org/drawingml/2006/main">
               <a:ext uri="{FF2B5EF4-FFF2-40B4-BE49-F238E27FC236}">
-                <a16:creationId xmlns:a16="http://schemas.microsoft.com/office/drawing/2014/main" id="{D76F3887-D814-47C1-9F17-B5F334244BD9}"/>
-              </a:ext>
-            </a:extLst>
-          </p:cNvPr>
-          <p:cNvSpPr>
-            <a:spLocks xmlns:a="http://schemas.openxmlformats.org/drawingml/2006/main" noGrp="1"/>
-          </p:cNvSpPr>
-          <p:nvPr/>
-        </p:nvSpPr>
-        <p:spPr>
-          <a:xfrm xmlns:a="http://schemas.openxmlformats.org/drawingml/2006/main">
-            <a:off x="723900" y="3295650"/>
-            <a:ext cx="171450" cy="171450"/>
+                <a16:creationId xmlns:a16="http://schemas.microsoft.com/office/drawing/2014/main" id="{9D13DDA9-55A8-4516-B2EC-77630DFF2F68}"/>
+              </a:ext>
+            </a:extLst>
+          </p:cNvPr>
+          <p:cNvSpPr>
+            <a:spLocks xmlns:a="http://schemas.openxmlformats.org/drawingml/2006/main" noGrp="1"/>
+          </p:cNvSpPr>
+          <p:nvPr/>
+        </p:nvSpPr>
+        <p:spPr>
+          <a:xfrm xmlns:a="http://schemas.openxmlformats.org/drawingml/2006/main">
+            <a:off x="876300" y="3248025"/>
+            <a:ext cx="190500" cy="190500"/>
           </a:xfrm>
           <a:prstGeom xmlns:a="http://schemas.openxmlformats.org/drawingml/2006/main" prst="roundRect">
             <a:avLst>
@@ -5744,53 +6266,53 @@
           <p:cNvPr id="5" name="">
             <a:extLst xmlns:a="http://schemas.openxmlformats.org/drawingml/2006/main">
               <a:ext uri="{FF2B5EF4-FFF2-40B4-BE49-F238E27FC236}">
-                <a16:creationId xmlns:a16="http://schemas.microsoft.com/office/drawing/2014/main" id="{70C6A582-ABA3-401F-B9B5-F979A53C6C7D}"/>
-              </a:ext>
-            </a:extLst>
-          </p:cNvPr>
-          <p:cNvSpPr>
-            <a:spLocks xmlns:a="http://schemas.openxmlformats.org/drawingml/2006/main" noGrp="1"/>
-          </p:cNvSpPr>
-          <p:nvPr/>
-        </p:nvSpPr>
-        <p:spPr>
-          <a:xfrm xmlns:a="http://schemas.openxmlformats.org/drawingml/2006/main">
-            <a:off x="723900" y="2571750"/>
-            <a:ext cx="1809750" cy="304800"/>
-          </a:xfrm>
-          <a:prstGeom xmlns:a="http://schemas.openxmlformats.org/drawingml/2006/main" prst="rect">
-            <a:avLst/>
-          </a:prstGeom>
-          <a:noFill xmlns:a="http://schemas.openxmlformats.org/drawingml/2006/main"/>
-          <a:ln xmlns:a="http://schemas.openxmlformats.org/drawingml/2006/main" w="0">
-            <a:noFill/>
-            <a:prstDash val="solid"/>
-          </a:ln>
-        </p:spPr>
-        <p:txBody>
-          <a:bodyPr xmlns:a="http://schemas.openxmlformats.org/drawingml/2006/main"/>
-          <a:lstStyle xmlns:a="http://schemas.openxmlformats.org/drawingml/2006/main"/>
-          <a:p xmlns:a="http://schemas.openxmlformats.org/drawingml/2006/main">
-            <a:pPr algn="l">
-              <a:defRPr sz="1350" b="1">
-                <a:solidFill>
-                  <a:srgbClr val="101010"/>
-                </a:solidFill>
-                <a:latin typeface="Malgun Gothic"/>
-                <a:ea typeface="Malgun Gothic"/>
-                <a:cs typeface="Malgun Gothic"/>
-              </a:defRPr>
-            </a:pPr>
-            <a:r>
-              <a:rPr sz="1350" b="1">
-                <a:solidFill>
-                  <a:srgbClr val="101010"/>
-                </a:solidFill>
-                <a:latin typeface="Malgun Gothic"/>
-                <a:ea typeface="Malgun Gothic"/>
-                <a:cs typeface="Malgun Gothic"/>
-              </a:rPr>
-              <a:t>REGISTERED</a:t>
+                <a16:creationId xmlns:a16="http://schemas.microsoft.com/office/drawing/2014/main" id="{33502403-3CD9-44B2-840A-30D36146D805}"/>
+              </a:ext>
+            </a:extLst>
+          </p:cNvPr>
+          <p:cNvSpPr>
+            <a:spLocks xmlns:a="http://schemas.openxmlformats.org/drawingml/2006/main" noGrp="1"/>
+          </p:cNvSpPr>
+          <p:nvPr/>
+        </p:nvSpPr>
+        <p:spPr>
+          <a:xfrm xmlns:a="http://schemas.openxmlformats.org/drawingml/2006/main">
+            <a:off x="876300" y="2495550"/>
+            <a:ext cx="2190750" cy="323850"/>
+          </a:xfrm>
+          <a:prstGeom xmlns:a="http://schemas.openxmlformats.org/drawingml/2006/main" prst="rect">
+            <a:avLst/>
+          </a:prstGeom>
+          <a:noFill xmlns:a="http://schemas.openxmlformats.org/drawingml/2006/main"/>
+          <a:ln xmlns:a="http://schemas.openxmlformats.org/drawingml/2006/main" w="0">
+            <a:noFill/>
+            <a:prstDash val="solid"/>
+          </a:ln>
+        </p:spPr>
+        <p:txBody>
+          <a:bodyPr xmlns:a="http://schemas.openxmlformats.org/drawingml/2006/main"/>
+          <a:lstStyle xmlns:a="http://schemas.openxmlformats.org/drawingml/2006/main"/>
+          <a:p xmlns:a="http://schemas.openxmlformats.org/drawingml/2006/main">
+            <a:pPr algn="l">
+              <a:defRPr sz="1425" b="1">
+                <a:solidFill>
+                  <a:srgbClr val="101010"/>
+                </a:solidFill>
+                <a:latin typeface="Malgun Gothic"/>
+                <a:ea typeface="Malgun Gothic"/>
+                <a:cs typeface="Malgun Gothic"/>
+              </a:defRPr>
+            </a:pPr>
+            <a:r>
+              <a:rPr sz="1425" b="1">
+                <a:solidFill>
+                  <a:srgbClr val="101010"/>
+                </a:solidFill>
+                <a:latin typeface="Malgun Gothic"/>
+                <a:ea typeface="Malgun Gothic"/>
+                <a:cs typeface="Malgun Gothic"/>
+              </a:rPr>
+              <a:t>START / 6h</a:t>
             </a:r>
           </a:p>
         </p:txBody>
@@ -5800,19 +6322,19 @@
           <p:cNvPr id="6" name="">
             <a:extLst xmlns:a="http://schemas.openxmlformats.org/drawingml/2006/main">
               <a:ext uri="{FF2B5EF4-FFF2-40B4-BE49-F238E27FC236}">
-                <a16:creationId xmlns:a16="http://schemas.microsoft.com/office/drawing/2014/main" id="{04877993-4B3F-4D79-87C0-ED49F2B8D94E}"/>
-              </a:ext>
-            </a:extLst>
-          </p:cNvPr>
-          <p:cNvSpPr>
-            <a:spLocks xmlns:a="http://schemas.openxmlformats.org/drawingml/2006/main" noGrp="1"/>
-          </p:cNvSpPr>
-          <p:nvPr/>
-        </p:nvSpPr>
-        <p:spPr>
-          <a:xfrm xmlns:a="http://schemas.openxmlformats.org/drawingml/2006/main">
-            <a:off x="723900" y="3829050"/>
-            <a:ext cx="1809750" cy="685800"/>
+                <a16:creationId xmlns:a16="http://schemas.microsoft.com/office/drawing/2014/main" id="{D5183C54-60CD-4162-809D-3F35352F11D9}"/>
+              </a:ext>
+            </a:extLst>
+          </p:cNvPr>
+          <p:cNvSpPr>
+            <a:spLocks xmlns:a="http://schemas.openxmlformats.org/drawingml/2006/main" noGrp="1"/>
+          </p:cNvSpPr>
+          <p:nvPr/>
+        </p:nvSpPr>
+        <p:spPr>
+          <a:xfrm xmlns:a="http://schemas.openxmlformats.org/drawingml/2006/main">
+            <a:off x="876300" y="3790950"/>
+            <a:ext cx="2190750" cy="723900"/>
           </a:xfrm>
           <a:prstGeom xmlns:a="http://schemas.openxmlformats.org/drawingml/2006/main" prst="rect">
             <a:avLst/>
@@ -5846,7 +6368,7 @@
                 <a:ea typeface="Malgun Gothic"/>
                 <a:cs typeface="Malgun Gothic"/>
               </a:rPr>
-              <a:t>Head 발견</a:t>
+              <a:t>9개 Profile</a:t>
             </a:r>
           </a:p>
           <a:p xmlns:a="http://schemas.openxmlformats.org/drawingml/2006/main">
@@ -5869,7 +6391,7 @@
                 <a:ea typeface="Malgun Gothic"/>
                 <a:cs typeface="Malgun Gothic"/>
               </a:rPr>
-              <a:t>Commit 고정</a:t>
+              <a:t>발견 API</a:t>
             </a:r>
           </a:p>
         </p:txBody>
@@ -5879,19 +6401,19 @@
           <p:cNvPr id="7" name="">
             <a:extLst xmlns:a="http://schemas.openxmlformats.org/drawingml/2006/main">
               <a:ext uri="{FF2B5EF4-FFF2-40B4-BE49-F238E27FC236}">
-                <a16:creationId xmlns:a16="http://schemas.microsoft.com/office/drawing/2014/main" id="{6EACDFF7-E665-45EC-84C1-093D9B640890}"/>
-              </a:ext>
-            </a:extLst>
-          </p:cNvPr>
-          <p:cNvSpPr>
-            <a:spLocks xmlns:a="http://schemas.openxmlformats.org/drawingml/2006/main" noGrp="1"/>
-          </p:cNvSpPr>
-          <p:nvPr/>
-        </p:nvSpPr>
-        <p:spPr>
-          <a:xfrm xmlns:a="http://schemas.openxmlformats.org/drawingml/2006/main">
-            <a:off x="3048000" y="3295650"/>
-            <a:ext cx="171450" cy="171450"/>
+                <a16:creationId xmlns:a16="http://schemas.microsoft.com/office/drawing/2014/main" id="{DCE920E6-2FC1-4660-BED9-777E0FECB3A5}"/>
+              </a:ext>
+            </a:extLst>
+          </p:cNvPr>
+          <p:cNvSpPr>
+            <a:spLocks xmlns:a="http://schemas.openxmlformats.org/drawingml/2006/main" noGrp="1"/>
+          </p:cNvSpPr>
+          <p:nvPr/>
+        </p:nvSpPr>
+        <p:spPr>
+          <a:xfrm xmlns:a="http://schemas.openxmlformats.org/drawingml/2006/main">
+            <a:off x="3924300" y="3248025"/>
+            <a:ext cx="190500" cy="190500"/>
           </a:xfrm>
           <a:prstGeom xmlns:a="http://schemas.openxmlformats.org/drawingml/2006/main" prst="roundRect">
             <a:avLst>
@@ -5914,53 +6436,53 @@
           <p:cNvPr id="8" name="">
             <a:extLst xmlns:a="http://schemas.openxmlformats.org/drawingml/2006/main">
               <a:ext uri="{FF2B5EF4-FFF2-40B4-BE49-F238E27FC236}">
-                <a16:creationId xmlns:a16="http://schemas.microsoft.com/office/drawing/2014/main" id="{632832E2-C602-4534-8FA6-36FA2FF1C01C}"/>
-              </a:ext>
-            </a:extLst>
-          </p:cNvPr>
-          <p:cNvSpPr>
-            <a:spLocks xmlns:a="http://schemas.openxmlformats.org/drawingml/2006/main" noGrp="1"/>
-          </p:cNvSpPr>
-          <p:nvPr/>
-        </p:nvSpPr>
-        <p:spPr>
-          <a:xfrm xmlns:a="http://schemas.openxmlformats.org/drawingml/2006/main">
-            <a:off x="3048000" y="2571750"/>
-            <a:ext cx="1809750" cy="304800"/>
-          </a:xfrm>
-          <a:prstGeom xmlns:a="http://schemas.openxmlformats.org/drawingml/2006/main" prst="rect">
-            <a:avLst/>
-          </a:prstGeom>
-          <a:noFill xmlns:a="http://schemas.openxmlformats.org/drawingml/2006/main"/>
-          <a:ln xmlns:a="http://schemas.openxmlformats.org/drawingml/2006/main" w="0">
-            <a:noFill/>
-            <a:prstDash val="solid"/>
-          </a:ln>
-        </p:spPr>
-        <p:txBody>
-          <a:bodyPr xmlns:a="http://schemas.openxmlformats.org/drawingml/2006/main"/>
-          <a:lstStyle xmlns:a="http://schemas.openxmlformats.org/drawingml/2006/main"/>
-          <a:p xmlns:a="http://schemas.openxmlformats.org/drawingml/2006/main">
-            <a:pPr algn="l">
-              <a:defRPr sz="1350" b="1">
-                <a:solidFill>
-                  <a:srgbClr val="101010"/>
-                </a:solidFill>
-                <a:latin typeface="Malgun Gothic"/>
-                <a:ea typeface="Malgun Gothic"/>
-                <a:cs typeface="Malgun Gothic"/>
-              </a:defRPr>
-            </a:pPr>
-            <a:r>
-              <a:rPr sz="1350" b="1">
-                <a:solidFill>
-                  <a:srgbClr val="101010"/>
-                </a:solidFill>
-                <a:latin typeface="Malgun Gothic"/>
-                <a:ea typeface="Malgun Gothic"/>
-                <a:cs typeface="Malgun Gothic"/>
-              </a:rPr>
-              <a:t>QUARANTINED</a:t>
+                <a16:creationId xmlns:a16="http://schemas.microsoft.com/office/drawing/2014/main" id="{3211B274-D4AD-4A3E-A03E-F13E3C57577D}"/>
+              </a:ext>
+            </a:extLst>
+          </p:cNvPr>
+          <p:cNvSpPr>
+            <a:spLocks xmlns:a="http://schemas.openxmlformats.org/drawingml/2006/main" noGrp="1"/>
+          </p:cNvSpPr>
+          <p:nvPr/>
+        </p:nvSpPr>
+        <p:spPr>
+          <a:xfrm xmlns:a="http://schemas.openxmlformats.org/drawingml/2006/main">
+            <a:off x="3924300" y="2495550"/>
+            <a:ext cx="2190750" cy="323850"/>
+          </a:xfrm>
+          <a:prstGeom xmlns:a="http://schemas.openxmlformats.org/drawingml/2006/main" prst="rect">
+            <a:avLst/>
+          </a:prstGeom>
+          <a:noFill xmlns:a="http://schemas.openxmlformats.org/drawingml/2006/main"/>
+          <a:ln xmlns:a="http://schemas.openxmlformats.org/drawingml/2006/main" w="0">
+            <a:noFill/>
+            <a:prstDash val="solid"/>
+          </a:ln>
+        </p:spPr>
+        <p:txBody>
+          <a:bodyPr xmlns:a="http://schemas.openxmlformats.org/drawingml/2006/main"/>
+          <a:lstStyle xmlns:a="http://schemas.openxmlformats.org/drawingml/2006/main"/>
+          <a:p xmlns:a="http://schemas.openxmlformats.org/drawingml/2006/main">
+            <a:pPr algn="l">
+              <a:defRPr sz="1425" b="1">
+                <a:solidFill>
+                  <a:srgbClr val="101010"/>
+                </a:solidFill>
+                <a:latin typeface="Malgun Gothic"/>
+                <a:ea typeface="Malgun Gothic"/>
+                <a:cs typeface="Malgun Gothic"/>
+              </a:defRPr>
+            </a:pPr>
+            <a:r>
+              <a:rPr sz="1425" b="1">
+                <a:solidFill>
+                  <a:srgbClr val="101010"/>
+                </a:solidFill>
+                <a:latin typeface="Malgun Gothic"/>
+                <a:ea typeface="Malgun Gothic"/>
+                <a:cs typeface="Malgun Gothic"/>
+              </a:rPr>
+              <a:t>FETCH</a:t>
             </a:r>
           </a:p>
         </p:txBody>
@@ -5970,19 +6492,19 @@
           <p:cNvPr id="9" name="">
             <a:extLst xmlns:a="http://schemas.openxmlformats.org/drawingml/2006/main">
               <a:ext uri="{FF2B5EF4-FFF2-40B4-BE49-F238E27FC236}">
-                <a16:creationId xmlns:a16="http://schemas.microsoft.com/office/drawing/2014/main" id="{DF7ECCC0-D19A-463E-AE52-F9A0C0FE6EC5}"/>
-              </a:ext>
-            </a:extLst>
-          </p:cNvPr>
-          <p:cNvSpPr>
-            <a:spLocks xmlns:a="http://schemas.openxmlformats.org/drawingml/2006/main" noGrp="1"/>
-          </p:cNvSpPr>
-          <p:nvPr/>
-        </p:nvSpPr>
-        <p:spPr>
-          <a:xfrm xmlns:a="http://schemas.openxmlformats.org/drawingml/2006/main">
-            <a:off x="3048000" y="3829050"/>
-            <a:ext cx="1809750" cy="685800"/>
+                <a16:creationId xmlns:a16="http://schemas.microsoft.com/office/drawing/2014/main" id="{3DED23F6-2B87-4F98-BF75-D4EFDDAB7953}"/>
+              </a:ext>
+            </a:extLst>
+          </p:cNvPr>
+          <p:cNvSpPr>
+            <a:spLocks xmlns:a="http://schemas.openxmlformats.org/drawingml/2006/main" noGrp="1"/>
+          </p:cNvSpPr>
+          <p:nvPr/>
+        </p:nvSpPr>
+        <p:spPr>
+          <a:xfrm xmlns:a="http://schemas.openxmlformats.org/drawingml/2006/main">
+            <a:off x="3924300" y="3790950"/>
+            <a:ext cx="2190750" cy="723900"/>
           </a:xfrm>
           <a:prstGeom xmlns:a="http://schemas.openxmlformats.org/drawingml/2006/main" prst="rect">
             <a:avLst/>
@@ -6016,7 +6538,7 @@
                 <a:ea typeface="Malgun Gothic"/>
                 <a:cs typeface="Malgun Gothic"/>
               </a:rPr>
-              <a:t>정적 검역</a:t>
+              <a:t>Branch → Mirror</a:t>
             </a:r>
           </a:p>
           <a:p xmlns:a="http://schemas.openxmlformats.org/drawingml/2006/main">
@@ -6039,7 +6561,7 @@
                 <a:ea typeface="Malgun Gothic"/>
                 <a:cs typeface="Malgun Gothic"/>
               </a:rPr>
-              <a:t>원문 실행 금지</a:t>
+              <a:t>보호 Ref 생성</a:t>
             </a:r>
           </a:p>
         </p:txBody>
@@ -6049,19 +6571,19 @@
           <p:cNvPr id="10" name="">
             <a:extLst xmlns:a="http://schemas.openxmlformats.org/drawingml/2006/main">
               <a:ext uri="{FF2B5EF4-FFF2-40B4-BE49-F238E27FC236}">
-                <a16:creationId xmlns:a16="http://schemas.microsoft.com/office/drawing/2014/main" id="{CFE9981F-92F8-4CB2-BFE1-C6C9F0EEFC3B}"/>
-              </a:ext>
-            </a:extLst>
-          </p:cNvPr>
-          <p:cNvSpPr>
-            <a:spLocks xmlns:a="http://schemas.openxmlformats.org/drawingml/2006/main" noGrp="1"/>
-          </p:cNvSpPr>
-          <p:nvPr/>
-        </p:nvSpPr>
-        <p:spPr>
-          <a:xfrm xmlns:a="http://schemas.openxmlformats.org/drawingml/2006/main">
-            <a:off x="5372100" y="3295650"/>
-            <a:ext cx="171450" cy="171450"/>
+                <a16:creationId xmlns:a16="http://schemas.microsoft.com/office/drawing/2014/main" id="{F8C4ADF4-2CAF-4BC3-8903-56F4B494AE6C}"/>
+              </a:ext>
+            </a:extLst>
+          </p:cNvPr>
+          <p:cNvSpPr>
+            <a:spLocks xmlns:a="http://schemas.openxmlformats.org/drawingml/2006/main" noGrp="1"/>
+          </p:cNvSpPr>
+          <p:nvPr/>
+        </p:nvSpPr>
+        <p:spPr>
+          <a:xfrm xmlns:a="http://schemas.openxmlformats.org/drawingml/2006/main">
+            <a:off x="6972300" y="3248025"/>
+            <a:ext cx="190500" cy="190500"/>
           </a:xfrm>
           <a:prstGeom xmlns:a="http://schemas.openxmlformats.org/drawingml/2006/main" prst="roundRect">
             <a:avLst>
@@ -6084,53 +6606,53 @@
           <p:cNvPr id="11" name="">
             <a:extLst xmlns:a="http://schemas.openxmlformats.org/drawingml/2006/main">
               <a:ext uri="{FF2B5EF4-FFF2-40B4-BE49-F238E27FC236}">
-                <a16:creationId xmlns:a16="http://schemas.microsoft.com/office/drawing/2014/main" id="{EC6DD062-89E0-432C-87C9-0BF5BF74FEAF}"/>
-              </a:ext>
-            </a:extLst>
-          </p:cNvPr>
-          <p:cNvSpPr>
-            <a:spLocks xmlns:a="http://schemas.openxmlformats.org/drawingml/2006/main" noGrp="1"/>
-          </p:cNvSpPr>
-          <p:nvPr/>
-        </p:nvSpPr>
-        <p:spPr>
-          <a:xfrm xmlns:a="http://schemas.openxmlformats.org/drawingml/2006/main">
-            <a:off x="5372100" y="2571750"/>
-            <a:ext cx="1809750" cy="304800"/>
-          </a:xfrm>
-          <a:prstGeom xmlns:a="http://schemas.openxmlformats.org/drawingml/2006/main" prst="rect">
-            <a:avLst/>
-          </a:prstGeom>
-          <a:noFill xmlns:a="http://schemas.openxmlformats.org/drawingml/2006/main"/>
-          <a:ln xmlns:a="http://schemas.openxmlformats.org/drawingml/2006/main" w="0">
-            <a:noFill/>
-            <a:prstDash val="solid"/>
-          </a:ln>
-        </p:spPr>
-        <p:txBody>
-          <a:bodyPr xmlns:a="http://schemas.openxmlformats.org/drawingml/2006/main"/>
-          <a:lstStyle xmlns:a="http://schemas.openxmlformats.org/drawingml/2006/main"/>
-          <a:p xmlns:a="http://schemas.openxmlformats.org/drawingml/2006/main">
-            <a:pPr algn="l">
-              <a:defRPr sz="1350" b="1">
-                <a:solidFill>
-                  <a:srgbClr val="101010"/>
-                </a:solidFill>
-                <a:latin typeface="Malgun Gothic"/>
-                <a:ea typeface="Malgun Gothic"/>
-                <a:cs typeface="Malgun Gothic"/>
-              </a:defRPr>
-            </a:pPr>
-            <a:r>
-              <a:rPr sz="1350" b="1">
-                <a:solidFill>
-                  <a:srgbClr val="101010"/>
-                </a:solidFill>
-                <a:latin typeface="Malgun Gothic"/>
-                <a:ea typeface="Malgun Gothic"/>
-                <a:cs typeface="Malgun Gothic"/>
-              </a:rPr>
-              <a:t>APPROVED</a:t>
+                <a16:creationId xmlns:a16="http://schemas.microsoft.com/office/drawing/2014/main" id="{A61D1DB0-0503-4E0C-8ED5-95421A507B4B}"/>
+              </a:ext>
+            </a:extLst>
+          </p:cNvPr>
+          <p:cNvSpPr>
+            <a:spLocks xmlns:a="http://schemas.openxmlformats.org/drawingml/2006/main" noGrp="1"/>
+          </p:cNvSpPr>
+          <p:nvPr/>
+        </p:nvSpPr>
+        <p:spPr>
+          <a:xfrm xmlns:a="http://schemas.openxmlformats.org/drawingml/2006/main">
+            <a:off x="6972300" y="2495550"/>
+            <a:ext cx="2190750" cy="323850"/>
+          </a:xfrm>
+          <a:prstGeom xmlns:a="http://schemas.openxmlformats.org/drawingml/2006/main" prst="rect">
+            <a:avLst/>
+          </a:prstGeom>
+          <a:noFill xmlns:a="http://schemas.openxmlformats.org/drawingml/2006/main"/>
+          <a:ln xmlns:a="http://schemas.openxmlformats.org/drawingml/2006/main" w="0">
+            <a:noFill/>
+            <a:prstDash val="solid"/>
+          </a:ln>
+        </p:spPr>
+        <p:txBody>
+          <a:bodyPr xmlns:a="http://schemas.openxmlformats.org/drawingml/2006/main"/>
+          <a:lstStyle xmlns:a="http://schemas.openxmlformats.org/drawingml/2006/main"/>
+          <a:p xmlns:a="http://schemas.openxmlformats.org/drawingml/2006/main">
+            <a:pPr algn="l">
+              <a:defRPr sz="1425" b="1">
+                <a:solidFill>
+                  <a:srgbClr val="101010"/>
+                </a:solidFill>
+                <a:latin typeface="Malgun Gothic"/>
+                <a:ea typeface="Malgun Gothic"/>
+                <a:cs typeface="Malgun Gothic"/>
+              </a:defRPr>
+            </a:pPr>
+            <a:r>
+              <a:rPr sz="1425" b="1">
+                <a:solidFill>
+                  <a:srgbClr val="101010"/>
+                </a:solidFill>
+                <a:latin typeface="Malgun Gothic"/>
+                <a:ea typeface="Malgun Gothic"/>
+                <a:cs typeface="Malgun Gothic"/>
+              </a:rPr>
+              <a:t>SCAN</a:t>
             </a:r>
           </a:p>
         </p:txBody>
@@ -6140,19 +6662,19 @@
           <p:cNvPr id="12" name="">
             <a:extLst xmlns:a="http://schemas.openxmlformats.org/drawingml/2006/main">
               <a:ext uri="{FF2B5EF4-FFF2-40B4-BE49-F238E27FC236}">
-                <a16:creationId xmlns:a16="http://schemas.microsoft.com/office/drawing/2014/main" id="{AAC5FCD2-C836-490B-9E49-AE777A382863}"/>
-              </a:ext>
-            </a:extLst>
-          </p:cNvPr>
-          <p:cNvSpPr>
-            <a:spLocks xmlns:a="http://schemas.openxmlformats.org/drawingml/2006/main" noGrp="1"/>
-          </p:cNvSpPr>
-          <p:nvPr/>
-        </p:nvSpPr>
-        <p:spPr>
-          <a:xfrm xmlns:a="http://schemas.openxmlformats.org/drawingml/2006/main">
-            <a:off x="5372100" y="3829050"/>
-            <a:ext cx="1809750" cy="685800"/>
+                <a16:creationId xmlns:a16="http://schemas.microsoft.com/office/drawing/2014/main" id="{B72933BB-D82C-49B9-B2C9-950BB9DD93ED}"/>
+              </a:ext>
+            </a:extLst>
+          </p:cNvPr>
+          <p:cNvSpPr>
+            <a:spLocks xmlns:a="http://schemas.openxmlformats.org/drawingml/2006/main" noGrp="1"/>
+          </p:cNvSpPr>
+          <p:nvPr/>
+        </p:nvSpPr>
+        <p:spPr>
+          <a:xfrm xmlns:a="http://schemas.openxmlformats.org/drawingml/2006/main">
+            <a:off x="6972300" y="3790950"/>
+            <a:ext cx="2190750" cy="723900"/>
           </a:xfrm>
           <a:prstGeom xmlns:a="http://schemas.openxmlformats.org/drawingml/2006/main" prst="rect">
             <a:avLst/>
@@ -6186,7 +6708,7 @@
                 <a:ea typeface="Malgun Gothic"/>
                 <a:cs typeface="Malgun Gothic"/>
               </a:rPr>
-              <a:t>dhslove</a:t>
+              <a:t>로컬 Commit</a:t>
             </a:r>
           </a:p>
           <a:p xmlns:a="http://schemas.openxmlformats.org/drawingml/2006/main">
@@ -6209,7 +6731,7 @@
                 <a:ea typeface="Malgun Gothic"/>
                 <a:cs typeface="Malgun Gothic"/>
               </a:rPr>
-              <a:t>Commit 확인</a:t>
+              <a:t>네트워크 없음</a:t>
             </a:r>
           </a:p>
         </p:txBody>
@@ -6219,19 +6741,19 @@
           <p:cNvPr id="13" name="">
             <a:extLst xmlns:a="http://schemas.openxmlformats.org/drawingml/2006/main">
               <a:ext uri="{FF2B5EF4-FFF2-40B4-BE49-F238E27FC236}">
-                <a16:creationId xmlns:a16="http://schemas.microsoft.com/office/drawing/2014/main" id="{D744213D-3E51-40D4-81CD-A75F207F0FFD}"/>
-              </a:ext>
-            </a:extLst>
-          </p:cNvPr>
-          <p:cNvSpPr>
-            <a:spLocks xmlns:a="http://schemas.openxmlformats.org/drawingml/2006/main" noGrp="1"/>
-          </p:cNvSpPr>
-          <p:nvPr/>
-        </p:nvSpPr>
-        <p:spPr>
-          <a:xfrm xmlns:a="http://schemas.openxmlformats.org/drawingml/2006/main">
-            <a:off x="7696200" y="3295650"/>
-            <a:ext cx="171450" cy="171450"/>
+                <a16:creationId xmlns:a16="http://schemas.microsoft.com/office/drawing/2014/main" id="{CB9D6611-EA0D-4AB9-ABB7-0348D3637AD6}"/>
+              </a:ext>
+            </a:extLst>
+          </p:cNvPr>
+          <p:cNvSpPr>
+            <a:spLocks xmlns:a="http://schemas.openxmlformats.org/drawingml/2006/main" noGrp="1"/>
+          </p:cNvSpPr>
+          <p:nvPr/>
+        </p:nvSpPr>
+        <p:spPr>
+          <a:xfrm xmlns:a="http://schemas.openxmlformats.org/drawingml/2006/main">
+            <a:off x="10020300" y="3248025"/>
+            <a:ext cx="190500" cy="190500"/>
           </a:xfrm>
           <a:prstGeom xmlns:a="http://schemas.openxmlformats.org/drawingml/2006/main" prst="roundRect">
             <a:avLst>
@@ -6254,53 +6776,53 @@
           <p:cNvPr id="14" name="">
             <a:extLst xmlns:a="http://schemas.openxmlformats.org/drawingml/2006/main">
               <a:ext uri="{FF2B5EF4-FFF2-40B4-BE49-F238E27FC236}">
-                <a16:creationId xmlns:a16="http://schemas.microsoft.com/office/drawing/2014/main" id="{73289B72-8BA7-4F9C-8DA6-3812D57F18A0}"/>
-              </a:ext>
-            </a:extLst>
-          </p:cNvPr>
-          <p:cNvSpPr>
-            <a:spLocks xmlns:a="http://schemas.openxmlformats.org/drawingml/2006/main" noGrp="1"/>
-          </p:cNvSpPr>
-          <p:nvPr/>
-        </p:nvSpPr>
-        <p:spPr>
-          <a:xfrm xmlns:a="http://schemas.openxmlformats.org/drawingml/2006/main">
-            <a:off x="7696200" y="2571750"/>
-            <a:ext cx="1809750" cy="304800"/>
-          </a:xfrm>
-          <a:prstGeom xmlns:a="http://schemas.openxmlformats.org/drawingml/2006/main" prst="rect">
-            <a:avLst/>
-          </a:prstGeom>
-          <a:noFill xmlns:a="http://schemas.openxmlformats.org/drawingml/2006/main"/>
-          <a:ln xmlns:a="http://schemas.openxmlformats.org/drawingml/2006/main" w="0">
-            <a:noFill/>
-            <a:prstDash val="solid"/>
-          </a:ln>
-        </p:spPr>
-        <p:txBody>
-          <a:bodyPr xmlns:a="http://schemas.openxmlformats.org/drawingml/2006/main"/>
-          <a:lstStyle xmlns:a="http://schemas.openxmlformats.org/drawingml/2006/main"/>
-          <a:p xmlns:a="http://schemas.openxmlformats.org/drawingml/2006/main">
-            <a:pPr algn="l">
-              <a:defRPr sz="1350" b="1">
-                <a:solidFill>
-                  <a:srgbClr val="101010"/>
-                </a:solidFill>
-                <a:latin typeface="Malgun Gothic"/>
-                <a:ea typeface="Malgun Gothic"/>
-                <a:cs typeface="Malgun Gothic"/>
-              </a:defRPr>
-            </a:pPr>
-            <a:r>
-              <a:rPr sz="1350" b="1">
-                <a:solidFill>
-                  <a:srgbClr val="101010"/>
-                </a:solidFill>
-                <a:latin typeface="Malgun Gothic"/>
-                <a:ea typeface="Malgun Gothic"/>
-                <a:cs typeface="Malgun Gothic"/>
-              </a:rPr>
-              <a:t>INDEXING</a:t>
+                <a16:creationId xmlns:a16="http://schemas.microsoft.com/office/drawing/2014/main" id="{F50E39CA-0685-45DE-A492-6C177C59C988}"/>
+              </a:ext>
+            </a:extLst>
+          </p:cNvPr>
+          <p:cNvSpPr>
+            <a:spLocks xmlns:a="http://schemas.openxmlformats.org/drawingml/2006/main" noGrp="1"/>
+          </p:cNvSpPr>
+          <p:nvPr/>
+        </p:nvSpPr>
+        <p:spPr>
+          <a:xfrm xmlns:a="http://schemas.openxmlformats.org/drawingml/2006/main">
+            <a:off x="10020300" y="2495550"/>
+            <a:ext cx="2190750" cy="323850"/>
+          </a:xfrm>
+          <a:prstGeom xmlns:a="http://schemas.openxmlformats.org/drawingml/2006/main" prst="rect">
+            <a:avLst/>
+          </a:prstGeom>
+          <a:noFill xmlns:a="http://schemas.openxmlformats.org/drawingml/2006/main"/>
+          <a:ln xmlns:a="http://schemas.openxmlformats.org/drawingml/2006/main" w="0">
+            <a:noFill/>
+            <a:prstDash val="solid"/>
+          </a:ln>
+        </p:spPr>
+        <p:txBody>
+          <a:bodyPr xmlns:a="http://schemas.openxmlformats.org/drawingml/2006/main"/>
+          <a:lstStyle xmlns:a="http://schemas.openxmlformats.org/drawingml/2006/main"/>
+          <a:p xmlns:a="http://schemas.openxmlformats.org/drawingml/2006/main">
+            <a:pPr algn="l">
+              <a:defRPr sz="1425" b="1">
+                <a:solidFill>
+                  <a:srgbClr val="101010"/>
+                </a:solidFill>
+                <a:latin typeface="Malgun Gothic"/>
+                <a:ea typeface="Malgun Gothic"/>
+                <a:cs typeface="Malgun Gothic"/>
+              </a:defRPr>
+            </a:pPr>
+            <a:r>
+              <a:rPr sz="1425" b="1">
+                <a:solidFill>
+                  <a:srgbClr val="101010"/>
+                </a:solidFill>
+                <a:latin typeface="Malgun Gothic"/>
+                <a:ea typeface="Malgun Gothic"/>
+                <a:cs typeface="Malgun Gothic"/>
+              </a:rPr>
+              <a:t>STATE</a:t>
             </a:r>
           </a:p>
         </p:txBody>
@@ -6310,19 +6832,19 @@
           <p:cNvPr id="15" name="">
             <a:extLst xmlns:a="http://schemas.openxmlformats.org/drawingml/2006/main">
               <a:ext uri="{FF2B5EF4-FFF2-40B4-BE49-F238E27FC236}">
-                <a16:creationId xmlns:a16="http://schemas.microsoft.com/office/drawing/2014/main" id="{DF36C11F-B435-4E89-8F79-FA6504AA2C2C}"/>
-              </a:ext>
-            </a:extLst>
-          </p:cNvPr>
-          <p:cNvSpPr>
-            <a:spLocks xmlns:a="http://schemas.openxmlformats.org/drawingml/2006/main" noGrp="1"/>
-          </p:cNvSpPr>
-          <p:nvPr/>
-        </p:nvSpPr>
-        <p:spPr>
-          <a:xfrm xmlns:a="http://schemas.openxmlformats.org/drawingml/2006/main">
-            <a:off x="7696200" y="3829050"/>
-            <a:ext cx="1809750" cy="685800"/>
+                <a16:creationId xmlns:a16="http://schemas.microsoft.com/office/drawing/2014/main" id="{7744657E-C732-4141-81C2-75A89D9D6D83}"/>
+              </a:ext>
+            </a:extLst>
+          </p:cNvPr>
+          <p:cNvSpPr>
+            <a:spLocks xmlns:a="http://schemas.openxmlformats.org/drawingml/2006/main" noGrp="1"/>
+          </p:cNvSpPr>
+          <p:nvPr/>
+        </p:nvSpPr>
+        <p:spPr>
+          <a:xfrm xmlns:a="http://schemas.openxmlformats.org/drawingml/2006/main">
+            <a:off x="10020300" y="3790950"/>
+            <a:ext cx="2190750" cy="723900"/>
           </a:xfrm>
           <a:prstGeom xmlns:a="http://schemas.openxmlformats.org/drawingml/2006/main" prst="rect">
             <a:avLst/>
@@ -6356,7 +6878,7 @@
                 <a:ea typeface="Malgun Gothic"/>
                 <a:cs typeface="Malgun Gothic"/>
               </a:rPr>
-              <a:t>#43 Job</a:t>
+              <a:t>성공 HEALTHY</a:t>
             </a:r>
           </a:p>
           <a:p xmlns:a="http://schemas.openxmlformats.org/drawingml/2006/main">
@@ -6379,7 +6901,7 @@
                 <a:ea typeface="Malgun Gothic"/>
                 <a:cs typeface="Malgun Gothic"/>
               </a:rPr>
-              <a:t>부분 성공 금지</a:t>
+              <a:t>24h 초과 STALE</a:t>
             </a:r>
           </a:p>
         </p:txBody>
@@ -6389,189 +6911,19 @@
           <p:cNvPr id="16" name="">
             <a:extLst xmlns:a="http://schemas.openxmlformats.org/drawingml/2006/main">
               <a:ext uri="{FF2B5EF4-FFF2-40B4-BE49-F238E27FC236}">
-                <a16:creationId xmlns:a16="http://schemas.microsoft.com/office/drawing/2014/main" id="{33F0F855-48F9-4F6F-A7ED-99B18ADD9083}"/>
-              </a:ext>
-            </a:extLst>
-          </p:cNvPr>
-          <p:cNvSpPr>
-            <a:spLocks xmlns:a="http://schemas.openxmlformats.org/drawingml/2006/main" noGrp="1"/>
-          </p:cNvSpPr>
-          <p:nvPr/>
-        </p:nvSpPr>
-        <p:spPr>
-          <a:xfrm xmlns:a="http://schemas.openxmlformats.org/drawingml/2006/main">
-            <a:off x="10020300" y="3295650"/>
-            <a:ext cx="171450" cy="171450"/>
-          </a:xfrm>
-          <a:prstGeom xmlns:a="http://schemas.openxmlformats.org/drawingml/2006/main" prst="roundRect">
-            <a:avLst>
-              <a:gd name="adj" fmla="val 50000"/>
-            </a:avLst>
-          </a:prstGeom>
-          <a:solidFill xmlns:a="http://schemas.openxmlformats.org/drawingml/2006/main">
-            <a:srgbClr val="FFFFFF"/>
-          </a:solidFill>
-          <a:ln xmlns:a="http://schemas.openxmlformats.org/drawingml/2006/main" w="9525">
-            <a:solidFill>
-              <a:srgbClr val="101010"/>
-            </a:solidFill>
-            <a:prstDash val="solid"/>
-          </a:ln>
-        </p:spPr>
-      </p:sp>
-      <p:sp>
-        <p:nvSpPr>
-          <p:cNvPr id="17" name="">
-            <a:extLst xmlns:a="http://schemas.openxmlformats.org/drawingml/2006/main">
-              <a:ext uri="{FF2B5EF4-FFF2-40B4-BE49-F238E27FC236}">
-                <a16:creationId xmlns:a16="http://schemas.microsoft.com/office/drawing/2014/main" id="{B1BE1B4C-4E3F-45EA-B172-85F25BBBDC3D}"/>
-              </a:ext>
-            </a:extLst>
-          </p:cNvPr>
-          <p:cNvSpPr>
-            <a:spLocks xmlns:a="http://schemas.openxmlformats.org/drawingml/2006/main" noGrp="1"/>
-          </p:cNvSpPr>
-          <p:nvPr/>
-        </p:nvSpPr>
-        <p:spPr>
-          <a:xfrm xmlns:a="http://schemas.openxmlformats.org/drawingml/2006/main">
-            <a:off x="10020300" y="2571750"/>
-            <a:ext cx="1809750" cy="304800"/>
-          </a:xfrm>
-          <a:prstGeom xmlns:a="http://schemas.openxmlformats.org/drawingml/2006/main" prst="rect">
-            <a:avLst/>
-          </a:prstGeom>
-          <a:noFill xmlns:a="http://schemas.openxmlformats.org/drawingml/2006/main"/>
-          <a:ln xmlns:a="http://schemas.openxmlformats.org/drawingml/2006/main" w="0">
-            <a:noFill/>
-            <a:prstDash val="solid"/>
-          </a:ln>
-        </p:spPr>
-        <p:txBody>
-          <a:bodyPr xmlns:a="http://schemas.openxmlformats.org/drawingml/2006/main"/>
-          <a:lstStyle xmlns:a="http://schemas.openxmlformats.org/drawingml/2006/main"/>
-          <a:p xmlns:a="http://schemas.openxmlformats.org/drawingml/2006/main">
-            <a:pPr algn="l">
-              <a:defRPr sz="1350" b="1">
-                <a:solidFill>
-                  <a:srgbClr val="101010"/>
-                </a:solidFill>
-                <a:latin typeface="Malgun Gothic"/>
-                <a:ea typeface="Malgun Gothic"/>
-                <a:cs typeface="Malgun Gothic"/>
-              </a:defRPr>
-            </a:pPr>
-            <a:r>
-              <a:rPr sz="1350" b="1">
-                <a:solidFill>
-                  <a:srgbClr val="101010"/>
-                </a:solidFill>
-                <a:latin typeface="Malgun Gothic"/>
-                <a:ea typeface="Malgun Gothic"/>
-                <a:cs typeface="Malgun Gothic"/>
-              </a:rPr>
-              <a:t>ACTIVE</a:t>
-            </a:r>
-          </a:p>
-        </p:txBody>
-      </p:sp>
-      <p:sp>
-        <p:nvSpPr>
-          <p:cNvPr id="18" name="">
-            <a:extLst xmlns:a="http://schemas.openxmlformats.org/drawingml/2006/main">
-              <a:ext uri="{FF2B5EF4-FFF2-40B4-BE49-F238E27FC236}">
-                <a16:creationId xmlns:a16="http://schemas.microsoft.com/office/drawing/2014/main" id="{82459E35-F7CD-44C2-8920-117716B63565}"/>
-              </a:ext>
-            </a:extLst>
-          </p:cNvPr>
-          <p:cNvSpPr>
-            <a:spLocks xmlns:a="http://schemas.openxmlformats.org/drawingml/2006/main" noGrp="1"/>
-          </p:cNvSpPr>
-          <p:nvPr/>
-        </p:nvSpPr>
-        <p:spPr>
-          <a:xfrm xmlns:a="http://schemas.openxmlformats.org/drawingml/2006/main">
-            <a:off x="10020300" y="3829050"/>
-            <a:ext cx="1809750" cy="685800"/>
-          </a:xfrm>
-          <a:prstGeom xmlns:a="http://schemas.openxmlformats.org/drawingml/2006/main" prst="rect">
-            <a:avLst/>
-          </a:prstGeom>
-          <a:noFill xmlns:a="http://schemas.openxmlformats.org/drawingml/2006/main"/>
-          <a:ln xmlns:a="http://schemas.openxmlformats.org/drawingml/2006/main" w="0">
-            <a:noFill/>
-            <a:prstDash val="solid"/>
-          </a:ln>
-        </p:spPr>
-        <p:txBody>
-          <a:bodyPr xmlns:a="http://schemas.openxmlformats.org/drawingml/2006/main"/>
-          <a:lstStyle xmlns:a="http://schemas.openxmlformats.org/drawingml/2006/main"/>
-          <a:p xmlns:a="http://schemas.openxmlformats.org/drawingml/2006/main">
-            <a:pPr algn="l">
-              <a:defRPr sz="1350" b="0">
-                <a:solidFill>
-                  <a:srgbClr val="5B616B"/>
-                </a:solidFill>
-                <a:latin typeface="Malgun Gothic"/>
-                <a:ea typeface="Malgun Gothic"/>
-                <a:cs typeface="Malgun Gothic"/>
-              </a:defRPr>
-            </a:pPr>
-            <a:r>
-              <a:rPr sz="1350" b="0">
-                <a:solidFill>
-                  <a:srgbClr val="5B616B"/>
-                </a:solidFill>
-                <a:latin typeface="Malgun Gothic"/>
-                <a:ea typeface="Malgun Gothic"/>
-                <a:cs typeface="Malgun Gothic"/>
-              </a:rPr>
-              <a:t>원자 전환</a:t>
-            </a:r>
-          </a:p>
-          <a:p xmlns:a="http://schemas.openxmlformats.org/drawingml/2006/main">
-            <a:pPr algn="l">
-              <a:defRPr sz="1350" b="0">
-                <a:solidFill>
-                  <a:srgbClr val="5B616B"/>
-                </a:solidFill>
-                <a:latin typeface="Malgun Gothic"/>
-                <a:ea typeface="Malgun Gothic"/>
-                <a:cs typeface="Malgun Gothic"/>
-              </a:defRPr>
-            </a:pPr>
-            <a:r>
-              <a:rPr sz="1350" b="0">
-                <a:solidFill>
-                  <a:srgbClr val="5B616B"/>
-                </a:solidFill>
-                <a:latin typeface="Malgun Gothic"/>
-                <a:ea typeface="Malgun Gothic"/>
-                <a:cs typeface="Malgun Gothic"/>
-              </a:rPr>
-              <a:t>이전 버전 철회</a:t>
-            </a:r>
-          </a:p>
-        </p:txBody>
-      </p:sp>
-      <p:sp>
-        <p:nvSpPr>
-          <p:cNvPr id="19" name="">
-            <a:extLst xmlns:a="http://schemas.openxmlformats.org/drawingml/2006/main">
-              <a:ext uri="{FF2B5EF4-FFF2-40B4-BE49-F238E27FC236}">
-                <a16:creationId xmlns:a16="http://schemas.microsoft.com/office/drawing/2014/main" id="{FCEA50F0-72A0-4DFD-A51D-813860725A4E}"/>
-              </a:ext>
-            </a:extLst>
-          </p:cNvPr>
-          <p:cNvSpPr>
-            <a:spLocks xmlns:a="http://schemas.openxmlformats.org/drawingml/2006/main" noGrp="1"/>
-          </p:cNvSpPr>
-          <p:nvPr/>
-        </p:nvSpPr>
-        <p:spPr>
-          <a:xfrm xmlns:a="http://schemas.openxmlformats.org/drawingml/2006/main">
-            <a:off x="723900" y="5410200"/>
-            <a:ext cx="10287000" cy="342900"/>
+                <a16:creationId xmlns:a16="http://schemas.microsoft.com/office/drawing/2014/main" id="{E853C6EA-AB67-49BD-8F04-4C2CED858C88}"/>
+              </a:ext>
+            </a:extLst>
+          </p:cNvPr>
+          <p:cNvSpPr>
+            <a:spLocks xmlns:a="http://schemas.openxmlformats.org/drawingml/2006/main" noGrp="1"/>
+          </p:cNvSpPr>
+          <p:nvPr/>
+        </p:nvSpPr>
+        <p:spPr>
+          <a:xfrm xmlns:a="http://schemas.openxmlformats.org/drawingml/2006/main">
+            <a:off x="876300" y="5381625"/>
+            <a:ext cx="10287000" cy="381000"/>
           </a:xfrm>
           <a:prstGeom xmlns:a="http://schemas.openxmlformats.org/drawingml/2006/main" prst="rect">
             <a:avLst/>
@@ -6605,7 +6957,7 @@
                 <a:ea typeface="Malgun Gothic"/>
                 <a:cs typeface="Malgun Gothic"/>
               </a:rPr>
-              <a:t>실패 → APPROVED 복귀  |  File 수 불일치 → ACTIVE 거부  |  Head 변경 → 새 Version</a:t>
+              <a:t>실패 → DEGRADED · 기존 데이터 유지  |  Push 즉시 갱신 → #45에서 Activepieces와 연결</a:t>
             </a:r>
           </a:p>
         </p:txBody>
@@ -6613,7 +6965,7 @@
     </p:spTree>
     <p:extLst>
       <p:ext uri="{BB962C8B-B14F-4D97-AF65-F5344CB8AC3E}">
-        <p14:creationId xmlns:p14="http://schemas.microsoft.com/office/powerpoint/2010/main" val="1266261855"/>
+        <p14:creationId xmlns:p14="http://schemas.microsoft.com/office/powerpoint/2010/main" val="1477923293"/>
       </p:ext>
     </p:extLst>
   </p:cSld>
@@ -6641,10 +6993,10 @@
       </p:grpSpPr>
       <p:sp>
         <p:nvSpPr>
-          <p:cNvPr id="13" name="">
-            <a:extLst xmlns:a="http://schemas.openxmlformats.org/drawingml/2006/main">
-              <a:ext uri="{FF2B5EF4-FFF2-40B4-BE49-F238E27FC236}">
-                <a16:creationId xmlns:a16="http://schemas.microsoft.com/office/drawing/2014/main" id="{225452AA-1136-4C36-BC8A-0230BE242D10}"/>
+          <p:cNvPr id="20" name="">
+            <a:extLst xmlns:a="http://schemas.openxmlformats.org/drawingml/2006/main">
+              <a:ext uri="{FF2B5EF4-FFF2-40B4-BE49-F238E27FC236}">
+                <a16:creationId xmlns:a16="http://schemas.microsoft.com/office/drawing/2014/main" id="{D373C629-A11E-48C2-8666-8D2BCB7ECCFD}"/>
               </a:ext>
             </a:extLst>
           </p:cNvPr>
@@ -6690,7 +7042,7 @@
                 <a:ea typeface="Malgun Gothic"/>
                 <a:cs typeface="Malgun Gothic"/>
               </a:rPr>
-              <a:t>Fetcher는 소스를 읽지만 어떤 코드도 실행하지 않습니다</a:t>
+              <a:t>새 Commit은 기존 승인을 상속하지 않고 전체 성공 후에만 활성화됩니다</a:t>
             </a:r>
           </a:p>
         </p:txBody>
@@ -6700,7 +7052,7 @@
           <p:cNvPr id="2" name="">
             <a:extLst xmlns:a="http://schemas.openxmlformats.org/drawingml/2006/main">
               <a:ext uri="{FF2B5EF4-FFF2-40B4-BE49-F238E27FC236}">
-                <a16:creationId xmlns:a16="http://schemas.microsoft.com/office/drawing/2014/main" id="{6AD8F051-B202-4A58-9989-0B19BC708179}"/>
+                <a16:creationId xmlns:a16="http://schemas.microsoft.com/office/drawing/2014/main" id="{1CC2CF06-E249-46DD-82C8-7B8D66E18CAC}"/>
               </a:ext>
             </a:extLst>
           </p:cNvPr>
@@ -6756,25 +7108,25 @@
           <p:cNvPr id="3" name="">
             <a:extLst xmlns:a="http://schemas.openxmlformats.org/drawingml/2006/main">
               <a:ext uri="{FF2B5EF4-FFF2-40B4-BE49-F238E27FC236}">
-                <a16:creationId xmlns:a16="http://schemas.microsoft.com/office/drawing/2014/main" id="{3B151B68-E57A-4FA7-9EC2-E25C54B7F5B9}"/>
-              </a:ext>
-            </a:extLst>
-          </p:cNvPr>
-          <p:cNvSpPr>
-            <a:spLocks xmlns:a="http://schemas.openxmlformats.org/drawingml/2006/main" noGrp="1"/>
-          </p:cNvSpPr>
-          <p:nvPr/>
-        </p:nvSpPr>
-        <p:spPr>
-          <a:xfrm xmlns:a="http://schemas.openxmlformats.org/drawingml/2006/main">
-            <a:off x="400050" y="1809750"/>
-            <a:ext cx="3562350" cy="3714750"/>
+                <a16:creationId xmlns:a16="http://schemas.microsoft.com/office/drawing/2014/main" id="{9A58F2B8-8AF9-436E-B9AA-F06E3B2BF7E3}"/>
+              </a:ext>
+            </a:extLst>
+          </p:cNvPr>
+          <p:cNvSpPr>
+            <a:spLocks xmlns:a="http://schemas.openxmlformats.org/drawingml/2006/main" noGrp="1"/>
+          </p:cNvSpPr>
+          <p:nvPr/>
+        </p:nvSpPr>
+        <p:spPr>
+          <a:xfrm xmlns:a="http://schemas.openxmlformats.org/drawingml/2006/main">
+            <a:off x="723900" y="3371850"/>
+            <a:ext cx="10668000" cy="19050"/>
           </a:xfrm>
           <a:prstGeom xmlns:a="http://schemas.openxmlformats.org/drawingml/2006/main" prst="rect">
             <a:avLst/>
           </a:prstGeom>
           <a:solidFill xmlns:a="http://schemas.openxmlformats.org/drawingml/2006/main">
-            <a:srgbClr val="EDEDED"/>
+            <a:srgbClr val="101010"/>
           </a:solidFill>
           <a:ln xmlns:a="http://schemas.openxmlformats.org/drawingml/2006/main" w="0">
             <a:noFill/>
@@ -6787,178 +7139,88 @@
           <p:cNvPr id="4" name="">
             <a:extLst xmlns:a="http://schemas.openxmlformats.org/drawingml/2006/main">
               <a:ext uri="{FF2B5EF4-FFF2-40B4-BE49-F238E27FC236}">
-                <a16:creationId xmlns:a16="http://schemas.microsoft.com/office/drawing/2014/main" id="{AC519E76-565B-4544-8352-9F65DB86FB35}"/>
-              </a:ext>
-            </a:extLst>
-          </p:cNvPr>
-          <p:cNvSpPr>
-            <a:spLocks xmlns:a="http://schemas.openxmlformats.org/drawingml/2006/main" noGrp="1"/>
-          </p:cNvSpPr>
-          <p:nvPr/>
-        </p:nvSpPr>
-        <p:spPr>
-          <a:xfrm xmlns:a="http://schemas.openxmlformats.org/drawingml/2006/main">
-            <a:off x="647700" y="2143125"/>
-            <a:ext cx="3048000" cy="342900"/>
-          </a:xfrm>
-          <a:prstGeom xmlns:a="http://schemas.openxmlformats.org/drawingml/2006/main" prst="rect">
-            <a:avLst/>
-          </a:prstGeom>
-          <a:noFill xmlns:a="http://schemas.openxmlformats.org/drawingml/2006/main"/>
-          <a:ln xmlns:a="http://schemas.openxmlformats.org/drawingml/2006/main" w="0">
-            <a:noFill/>
-            <a:prstDash val="solid"/>
-          </a:ln>
-        </p:spPr>
-        <p:txBody>
-          <a:bodyPr xmlns:a="http://schemas.openxmlformats.org/drawingml/2006/main"/>
-          <a:lstStyle xmlns:a="http://schemas.openxmlformats.org/drawingml/2006/main"/>
-          <a:p xmlns:a="http://schemas.openxmlformats.org/drawingml/2006/main">
-            <a:pPr algn="l">
-              <a:defRPr sz="1650" b="1">
-                <a:solidFill>
-                  <a:srgbClr val="101010"/>
-                </a:solidFill>
-                <a:latin typeface="Malgun Gothic"/>
-                <a:ea typeface="Malgun Gothic"/>
-                <a:cs typeface="Malgun Gothic"/>
-              </a:defRPr>
-            </a:pPr>
-            <a:r>
-              <a:rPr sz="1650" b="1">
-                <a:solidFill>
-                  <a:srgbClr val="101010"/>
-                </a:solidFill>
-                <a:latin typeface="Malgun Gothic"/>
-                <a:ea typeface="Malgun Gothic"/>
-                <a:cs typeface="Malgun Gothic"/>
-              </a:rPr>
-              <a:t>FETCH</a:t>
-            </a:r>
-          </a:p>
-        </p:txBody>
+                <a16:creationId xmlns:a16="http://schemas.microsoft.com/office/drawing/2014/main" id="{6990F0BC-6795-4F0E-AA65-C7C805B78D94}"/>
+              </a:ext>
+            </a:extLst>
+          </p:cNvPr>
+          <p:cNvSpPr>
+            <a:spLocks xmlns:a="http://schemas.openxmlformats.org/drawingml/2006/main" noGrp="1"/>
+          </p:cNvSpPr>
+          <p:nvPr/>
+        </p:nvSpPr>
+        <p:spPr>
+          <a:xfrm xmlns:a="http://schemas.openxmlformats.org/drawingml/2006/main">
+            <a:off x="723900" y="3295650"/>
+            <a:ext cx="171450" cy="171450"/>
+          </a:xfrm>
+          <a:prstGeom xmlns:a="http://schemas.openxmlformats.org/drawingml/2006/main" prst="roundRect">
+            <a:avLst>
+              <a:gd name="adj" fmla="val 50000"/>
+            </a:avLst>
+          </a:prstGeom>
+          <a:solidFill xmlns:a="http://schemas.openxmlformats.org/drawingml/2006/main">
+            <a:srgbClr val="3D8DFF"/>
+          </a:solidFill>
+          <a:ln xmlns:a="http://schemas.openxmlformats.org/drawingml/2006/main" w="9525">
+            <a:solidFill>
+              <a:srgbClr val="101010"/>
+            </a:solidFill>
+            <a:prstDash val="solid"/>
+          </a:ln>
+        </p:spPr>
       </p:sp>
       <p:sp>
         <p:nvSpPr>
           <p:cNvPr id="5" name="">
             <a:extLst xmlns:a="http://schemas.openxmlformats.org/drawingml/2006/main">
               <a:ext uri="{FF2B5EF4-FFF2-40B4-BE49-F238E27FC236}">
-                <a16:creationId xmlns:a16="http://schemas.microsoft.com/office/drawing/2014/main" id="{29554226-9CEB-436E-A4B5-215782517A46}"/>
-              </a:ext>
-            </a:extLst>
-          </p:cNvPr>
-          <p:cNvSpPr>
-            <a:spLocks xmlns:a="http://schemas.openxmlformats.org/drawingml/2006/main" noGrp="1"/>
-          </p:cNvSpPr>
-          <p:nvPr/>
-        </p:nvSpPr>
-        <p:spPr>
-          <a:xfrm xmlns:a="http://schemas.openxmlformats.org/drawingml/2006/main">
-            <a:off x="647700" y="2876550"/>
-            <a:ext cx="3048000" cy="2000250"/>
-          </a:xfrm>
-          <a:prstGeom xmlns:a="http://schemas.openxmlformats.org/drawingml/2006/main" prst="rect">
-            <a:avLst/>
-          </a:prstGeom>
-          <a:noFill xmlns:a="http://schemas.openxmlformats.org/drawingml/2006/main"/>
-          <a:ln xmlns:a="http://schemas.openxmlformats.org/drawingml/2006/main" w="0">
-            <a:noFill/>
-            <a:prstDash val="solid"/>
-          </a:ln>
-        </p:spPr>
-        <p:txBody>
-          <a:bodyPr xmlns:a="http://schemas.openxmlformats.org/drawingml/2006/main"/>
-          <a:lstStyle xmlns:a="http://schemas.openxmlformats.org/drawingml/2006/main"/>
-          <a:p xmlns:a="http://schemas.openxmlformats.org/drawingml/2006/main">
-            <a:pPr algn="l">
-              <a:defRPr sz="1650" b="0">
-                <a:solidFill>
-                  <a:srgbClr val="101010"/>
-                </a:solidFill>
-                <a:latin typeface="Malgun Gothic"/>
-                <a:ea typeface="Malgun Gothic"/>
-                <a:cs typeface="Malgun Gothic"/>
-              </a:defRPr>
-            </a:pPr>
-            <a:r>
-              <a:rPr sz="1650" b="0">
-                <a:solidFill>
-                  <a:srgbClr val="101010"/>
-                </a:solidFill>
-                <a:latin typeface="Malgun Gothic"/>
-                <a:ea typeface="Malgun Gothic"/>
-                <a:cs typeface="Malgun Gothic"/>
-              </a:rPr>
-              <a:t>Bare Repository</a:t>
-            </a:r>
-          </a:p>
-          <a:p xmlns:a="http://schemas.openxmlformats.org/drawingml/2006/main">
-            <a:pPr algn="l">
-              <a:defRPr sz="1650" b="0">
-                <a:solidFill>
-                  <a:srgbClr val="101010"/>
-                </a:solidFill>
-                <a:latin typeface="Malgun Gothic"/>
-                <a:ea typeface="Malgun Gothic"/>
-                <a:cs typeface="Malgun Gothic"/>
-              </a:defRPr>
-            </a:pPr>
-            <a:r>
-              <a:rPr sz="1650" b="0">
-                <a:solidFill>
-                  <a:srgbClr val="101010"/>
-                </a:solidFill>
-                <a:latin typeface="Malgun Gothic"/>
-                <a:ea typeface="Malgun Gothic"/>
-                <a:cs typeface="Malgun Gothic"/>
-              </a:rPr>
-              <a:t>40자 Commit Pin</a:t>
-            </a:r>
-          </a:p>
-          <a:p xmlns:a="http://schemas.openxmlformats.org/drawingml/2006/main">
-            <a:pPr algn="l">
-              <a:defRPr sz="1650" b="0">
-                <a:solidFill>
-                  <a:srgbClr val="101010"/>
-                </a:solidFill>
-                <a:latin typeface="Malgun Gothic"/>
-                <a:ea typeface="Malgun Gothic"/>
-                <a:cs typeface="Malgun Gothic"/>
-              </a:defRPr>
-            </a:pPr>
-            <a:r>
-              <a:rPr sz="1650" b="0">
-                <a:solidFill>
-                  <a:srgbClr val="101010"/>
-                </a:solidFill>
-                <a:latin typeface="Malgun Gothic"/>
-                <a:ea typeface="Malgun Gothic"/>
-                <a:cs typeface="Malgun Gothic"/>
-              </a:rPr>
-              <a:t>ls-tree·cat-file만</a:t>
-            </a:r>
-          </a:p>
-          <a:p xmlns:a="http://schemas.openxmlformats.org/drawingml/2006/main">
-            <a:pPr algn="l">
-              <a:defRPr sz="1650" b="0">
-                <a:solidFill>
-                  <a:srgbClr val="101010"/>
-                </a:solidFill>
-                <a:latin typeface="Malgun Gothic"/>
-                <a:ea typeface="Malgun Gothic"/>
-                <a:cs typeface="Malgun Gothic"/>
-              </a:defRPr>
-            </a:pPr>
-            <a:r>
-              <a:rPr sz="1650" b="0">
-                <a:solidFill>
-                  <a:srgbClr val="101010"/>
-                </a:solidFill>
-                <a:latin typeface="Malgun Gothic"/>
-                <a:ea typeface="Malgun Gothic"/>
-                <a:cs typeface="Malgun Gothic"/>
-              </a:rPr>
-              <a:t>Hook·Checkout·LFS·Submodule 금지</a:t>
+                <a16:creationId xmlns:a16="http://schemas.microsoft.com/office/drawing/2014/main" id="{E56C084F-7DAF-49F3-8D5A-1ADF350A1B33}"/>
+              </a:ext>
+            </a:extLst>
+          </p:cNvPr>
+          <p:cNvSpPr>
+            <a:spLocks xmlns:a="http://schemas.openxmlformats.org/drawingml/2006/main" noGrp="1"/>
+          </p:cNvSpPr>
+          <p:nvPr/>
+        </p:nvSpPr>
+        <p:spPr>
+          <a:xfrm xmlns:a="http://schemas.openxmlformats.org/drawingml/2006/main">
+            <a:off x="723900" y="2571750"/>
+            <a:ext cx="1809750" cy="304800"/>
+          </a:xfrm>
+          <a:prstGeom xmlns:a="http://schemas.openxmlformats.org/drawingml/2006/main" prst="rect">
+            <a:avLst/>
+          </a:prstGeom>
+          <a:noFill xmlns:a="http://schemas.openxmlformats.org/drawingml/2006/main"/>
+          <a:ln xmlns:a="http://schemas.openxmlformats.org/drawingml/2006/main" w="0">
+            <a:noFill/>
+            <a:prstDash val="solid"/>
+          </a:ln>
+        </p:spPr>
+        <p:txBody>
+          <a:bodyPr xmlns:a="http://schemas.openxmlformats.org/drawingml/2006/main"/>
+          <a:lstStyle xmlns:a="http://schemas.openxmlformats.org/drawingml/2006/main"/>
+          <a:p xmlns:a="http://schemas.openxmlformats.org/drawingml/2006/main">
+            <a:pPr algn="l">
+              <a:defRPr sz="1350" b="1">
+                <a:solidFill>
+                  <a:srgbClr val="101010"/>
+                </a:solidFill>
+                <a:latin typeface="Malgun Gothic"/>
+                <a:ea typeface="Malgun Gothic"/>
+                <a:cs typeface="Malgun Gothic"/>
+              </a:defRPr>
+            </a:pPr>
+            <a:r>
+              <a:rPr sz="1350" b="1">
+                <a:solidFill>
+                  <a:srgbClr val="101010"/>
+                </a:solidFill>
+                <a:latin typeface="Malgun Gothic"/>
+                <a:ea typeface="Malgun Gothic"/>
+                <a:cs typeface="Malgun Gothic"/>
+              </a:rPr>
+              <a:t>REGISTERED</a:t>
             </a:r>
           </a:p>
         </p:txBody>
@@ -6968,209 +7230,167 @@
           <p:cNvPr id="6" name="">
             <a:extLst xmlns:a="http://schemas.openxmlformats.org/drawingml/2006/main">
               <a:ext uri="{FF2B5EF4-FFF2-40B4-BE49-F238E27FC236}">
-                <a16:creationId xmlns:a16="http://schemas.microsoft.com/office/drawing/2014/main" id="{5D3E7F05-9036-4300-ABF5-0EB8E7CD8BCB}"/>
-              </a:ext>
-            </a:extLst>
-          </p:cNvPr>
-          <p:cNvSpPr>
-            <a:spLocks xmlns:a="http://schemas.openxmlformats.org/drawingml/2006/main" noGrp="1"/>
-          </p:cNvSpPr>
-          <p:nvPr/>
-        </p:nvSpPr>
-        <p:spPr>
-          <a:xfrm xmlns:a="http://schemas.openxmlformats.org/drawingml/2006/main">
-            <a:off x="4314825" y="1809750"/>
-            <a:ext cx="3562350" cy="3714750"/>
-          </a:xfrm>
-          <a:prstGeom xmlns:a="http://schemas.openxmlformats.org/drawingml/2006/main" prst="rect">
-            <a:avLst/>
+                <a16:creationId xmlns:a16="http://schemas.microsoft.com/office/drawing/2014/main" id="{87D529D2-4A3D-4DFB-BD99-C29071504D9D}"/>
+              </a:ext>
+            </a:extLst>
+          </p:cNvPr>
+          <p:cNvSpPr>
+            <a:spLocks xmlns:a="http://schemas.openxmlformats.org/drawingml/2006/main" noGrp="1"/>
+          </p:cNvSpPr>
+          <p:nvPr/>
+        </p:nvSpPr>
+        <p:spPr>
+          <a:xfrm xmlns:a="http://schemas.openxmlformats.org/drawingml/2006/main">
+            <a:off x="723900" y="3829050"/>
+            <a:ext cx="1809750" cy="685800"/>
+          </a:xfrm>
+          <a:prstGeom xmlns:a="http://schemas.openxmlformats.org/drawingml/2006/main" prst="rect">
+            <a:avLst/>
+          </a:prstGeom>
+          <a:noFill xmlns:a="http://schemas.openxmlformats.org/drawingml/2006/main"/>
+          <a:ln xmlns:a="http://schemas.openxmlformats.org/drawingml/2006/main" w="0">
+            <a:noFill/>
+            <a:prstDash val="solid"/>
+          </a:ln>
+        </p:spPr>
+        <p:txBody>
+          <a:bodyPr xmlns:a="http://schemas.openxmlformats.org/drawingml/2006/main"/>
+          <a:lstStyle xmlns:a="http://schemas.openxmlformats.org/drawingml/2006/main"/>
+          <a:p xmlns:a="http://schemas.openxmlformats.org/drawingml/2006/main">
+            <a:pPr algn="l">
+              <a:defRPr sz="1350" b="0">
+                <a:solidFill>
+                  <a:srgbClr val="5B616B"/>
+                </a:solidFill>
+                <a:latin typeface="Malgun Gothic"/>
+                <a:ea typeface="Malgun Gothic"/>
+                <a:cs typeface="Malgun Gothic"/>
+              </a:defRPr>
+            </a:pPr>
+            <a:r>
+              <a:rPr sz="1350" b="0">
+                <a:solidFill>
+                  <a:srgbClr val="5B616B"/>
+                </a:solidFill>
+                <a:latin typeface="Malgun Gothic"/>
+                <a:ea typeface="Malgun Gothic"/>
+                <a:cs typeface="Malgun Gothic"/>
+              </a:rPr>
+              <a:t>Head 발견</a:t>
+            </a:r>
+          </a:p>
+          <a:p xmlns:a="http://schemas.openxmlformats.org/drawingml/2006/main">
+            <a:pPr algn="l">
+              <a:defRPr sz="1350" b="0">
+                <a:solidFill>
+                  <a:srgbClr val="5B616B"/>
+                </a:solidFill>
+                <a:latin typeface="Malgun Gothic"/>
+                <a:ea typeface="Malgun Gothic"/>
+                <a:cs typeface="Malgun Gothic"/>
+              </a:defRPr>
+            </a:pPr>
+            <a:r>
+              <a:rPr sz="1350" b="0">
+                <a:solidFill>
+                  <a:srgbClr val="5B616B"/>
+                </a:solidFill>
+                <a:latin typeface="Malgun Gothic"/>
+                <a:ea typeface="Malgun Gothic"/>
+                <a:cs typeface="Malgun Gothic"/>
+              </a:rPr>
+              <a:t>Commit 고정</a:t>
+            </a:r>
+          </a:p>
+        </p:txBody>
+      </p:sp>
+      <p:sp>
+        <p:nvSpPr>
+          <p:cNvPr id="7" name="">
+            <a:extLst xmlns:a="http://schemas.openxmlformats.org/drawingml/2006/main">
+              <a:ext uri="{FF2B5EF4-FFF2-40B4-BE49-F238E27FC236}">
+                <a16:creationId xmlns:a16="http://schemas.microsoft.com/office/drawing/2014/main" id="{258FF337-7B80-4BC1-B9E0-725FBE4B0C28}"/>
+              </a:ext>
+            </a:extLst>
+          </p:cNvPr>
+          <p:cNvSpPr>
+            <a:spLocks xmlns:a="http://schemas.openxmlformats.org/drawingml/2006/main" noGrp="1"/>
+          </p:cNvSpPr>
+          <p:nvPr/>
+        </p:nvSpPr>
+        <p:spPr>
+          <a:xfrm xmlns:a="http://schemas.openxmlformats.org/drawingml/2006/main">
+            <a:off x="3048000" y="3295650"/>
+            <a:ext cx="171450" cy="171450"/>
+          </a:xfrm>
+          <a:prstGeom xmlns:a="http://schemas.openxmlformats.org/drawingml/2006/main" prst="roundRect">
+            <a:avLst>
+              <a:gd name="adj" fmla="val 50000"/>
+            </a:avLst>
           </a:prstGeom>
           <a:solidFill xmlns:a="http://schemas.openxmlformats.org/drawingml/2006/main">
-            <a:srgbClr val="DDF3FF"/>
+            <a:srgbClr val="3D8DFF"/>
           </a:solidFill>
-          <a:ln xmlns:a="http://schemas.openxmlformats.org/drawingml/2006/main" w="0">
-            <a:noFill/>
-            <a:prstDash val="solid"/>
-          </a:ln>
-        </p:spPr>
-      </p:sp>
-      <p:sp>
-        <p:nvSpPr>
-          <p:cNvPr id="7" name="">
-            <a:extLst xmlns:a="http://schemas.openxmlformats.org/drawingml/2006/main">
-              <a:ext uri="{FF2B5EF4-FFF2-40B4-BE49-F238E27FC236}">
-                <a16:creationId xmlns:a16="http://schemas.microsoft.com/office/drawing/2014/main" id="{32DE1B70-9EA1-4BE6-A870-2FF1FD49A238}"/>
-              </a:ext>
-            </a:extLst>
-          </p:cNvPr>
-          <p:cNvSpPr>
-            <a:spLocks xmlns:a="http://schemas.openxmlformats.org/drawingml/2006/main" noGrp="1"/>
-          </p:cNvSpPr>
-          <p:nvPr/>
-        </p:nvSpPr>
-        <p:spPr>
-          <a:xfrm xmlns:a="http://schemas.openxmlformats.org/drawingml/2006/main">
-            <a:off x="4562475" y="2143125"/>
-            <a:ext cx="3048000" cy="342900"/>
-          </a:xfrm>
-          <a:prstGeom xmlns:a="http://schemas.openxmlformats.org/drawingml/2006/main" prst="rect">
-            <a:avLst/>
-          </a:prstGeom>
-          <a:noFill xmlns:a="http://schemas.openxmlformats.org/drawingml/2006/main"/>
-          <a:ln xmlns:a="http://schemas.openxmlformats.org/drawingml/2006/main" w="0">
-            <a:noFill/>
-            <a:prstDash val="solid"/>
-          </a:ln>
-        </p:spPr>
-        <p:txBody>
-          <a:bodyPr xmlns:a="http://schemas.openxmlformats.org/drawingml/2006/main"/>
-          <a:lstStyle xmlns:a="http://schemas.openxmlformats.org/drawingml/2006/main"/>
-          <a:p xmlns:a="http://schemas.openxmlformats.org/drawingml/2006/main">
-            <a:pPr algn="l">
-              <a:defRPr sz="1650" b="1">
-                <a:solidFill>
-                  <a:srgbClr val="3D8DFF"/>
-                </a:solidFill>
-                <a:latin typeface="Malgun Gothic"/>
-                <a:ea typeface="Malgun Gothic"/>
-                <a:cs typeface="Malgun Gothic"/>
-              </a:defRPr>
-            </a:pPr>
-            <a:r>
-              <a:rPr sz="1650" b="1">
-                <a:solidFill>
-                  <a:srgbClr val="3D8DFF"/>
-                </a:solidFill>
-                <a:latin typeface="Malgun Gothic"/>
-                <a:ea typeface="Malgun Gothic"/>
-                <a:cs typeface="Malgun Gothic"/>
-              </a:rPr>
-              <a:t>QUARANTINE</a:t>
-            </a:r>
-          </a:p>
-        </p:txBody>
+          <a:ln xmlns:a="http://schemas.openxmlformats.org/drawingml/2006/main" w="9525">
+            <a:solidFill>
+              <a:srgbClr val="101010"/>
+            </a:solidFill>
+            <a:prstDash val="solid"/>
+          </a:ln>
+        </p:spPr>
       </p:sp>
       <p:sp>
         <p:nvSpPr>
           <p:cNvPr id="8" name="">
             <a:extLst xmlns:a="http://schemas.openxmlformats.org/drawingml/2006/main">
               <a:ext uri="{FF2B5EF4-FFF2-40B4-BE49-F238E27FC236}">
-                <a16:creationId xmlns:a16="http://schemas.microsoft.com/office/drawing/2014/main" id="{A8C67FF9-D5CD-41B7-BBAF-7ED4E6409268}"/>
-              </a:ext>
-            </a:extLst>
-          </p:cNvPr>
-          <p:cNvSpPr>
-            <a:spLocks xmlns:a="http://schemas.openxmlformats.org/drawingml/2006/main" noGrp="1"/>
-          </p:cNvSpPr>
-          <p:nvPr/>
-        </p:nvSpPr>
-        <p:spPr>
-          <a:xfrm xmlns:a="http://schemas.openxmlformats.org/drawingml/2006/main">
-            <a:off x="4562475" y="2876550"/>
-            <a:ext cx="3048000" cy="2000250"/>
-          </a:xfrm>
-          <a:prstGeom xmlns:a="http://schemas.openxmlformats.org/drawingml/2006/main" prst="rect">
-            <a:avLst/>
-          </a:prstGeom>
-          <a:noFill xmlns:a="http://schemas.openxmlformats.org/drawingml/2006/main"/>
-          <a:ln xmlns:a="http://schemas.openxmlformats.org/drawingml/2006/main" w="0">
-            <a:noFill/>
-            <a:prstDash val="solid"/>
-          </a:ln>
-        </p:spPr>
-        <p:txBody>
-          <a:bodyPr xmlns:a="http://schemas.openxmlformats.org/drawingml/2006/main"/>
-          <a:lstStyle xmlns:a="http://schemas.openxmlformats.org/drawingml/2006/main"/>
-          <a:p xmlns:a="http://schemas.openxmlformats.org/drawingml/2006/main">
-            <a:pPr algn="l">
-              <a:defRPr sz="1650" b="0">
-                <a:solidFill>
-                  <a:srgbClr val="101010"/>
-                </a:solidFill>
-                <a:latin typeface="Malgun Gothic"/>
-                <a:ea typeface="Malgun Gothic"/>
-                <a:cs typeface="Malgun Gothic"/>
-              </a:defRPr>
-            </a:pPr>
-            <a:r>
-              <a:rPr sz="1650" b="0">
-                <a:solidFill>
-                  <a:srgbClr val="101010"/>
-                </a:solidFill>
-                <a:latin typeface="Malgun Gothic"/>
-                <a:ea typeface="Malgun Gothic"/>
-                <a:cs typeface="Malgun Gothic"/>
-              </a:rPr>
-              <a:t>D0 Allowlist</a:t>
-            </a:r>
-          </a:p>
-          <a:p xmlns:a="http://schemas.openxmlformats.org/drawingml/2006/main">
-            <a:pPr algn="l">
-              <a:defRPr sz="1650" b="0">
-                <a:solidFill>
-                  <a:srgbClr val="101010"/>
-                </a:solidFill>
-                <a:latin typeface="Malgun Gothic"/>
-                <a:ea typeface="Malgun Gothic"/>
-                <a:cs typeface="Malgun Gothic"/>
-              </a:defRPr>
-            </a:pPr>
-            <a:r>
-              <a:rPr sz="1650" b="0">
-                <a:solidFill>
-                  <a:srgbClr val="101010"/>
-                </a:solidFill>
-                <a:latin typeface="Malgun Gothic"/>
-                <a:ea typeface="Malgun Gothic"/>
-                <a:cs typeface="Malgun Gothic"/>
-              </a:rPr>
-              <a:t>Binary·Encoding·1 MiB</a:t>
-            </a:r>
-          </a:p>
-          <a:p xmlns:a="http://schemas.openxmlformats.org/drawingml/2006/main">
-            <a:pPr algn="l">
-              <a:defRPr sz="1650" b="0">
-                <a:solidFill>
-                  <a:srgbClr val="101010"/>
-                </a:solidFill>
-                <a:latin typeface="Malgun Gothic"/>
-                <a:ea typeface="Malgun Gothic"/>
-                <a:cs typeface="Malgun Gothic"/>
-              </a:defRPr>
-            </a:pPr>
-            <a:r>
-              <a:rPr sz="1650" b="0">
-                <a:solidFill>
-                  <a:srgbClr val="101010"/>
-                </a:solidFill>
-                <a:latin typeface="Malgun Gothic"/>
-                <a:ea typeface="Malgun Gothic"/>
-                <a:cs typeface="Malgun Gothic"/>
-              </a:rPr>
-              <a:t>Secret·PII·Injection</a:t>
-            </a:r>
-          </a:p>
-          <a:p xmlns:a="http://schemas.openxmlformats.org/drawingml/2006/main">
-            <a:pPr algn="l">
-              <a:defRPr sz="1650" b="0">
-                <a:solidFill>
-                  <a:srgbClr val="101010"/>
-                </a:solidFill>
-                <a:latin typeface="Malgun Gothic"/>
-                <a:ea typeface="Malgun Gothic"/>
-                <a:cs typeface="Malgun Gothic"/>
-              </a:defRPr>
-            </a:pPr>
-            <a:r>
-              <a:rPr sz="1650" b="0">
-                <a:solidFill>
-                  <a:srgbClr val="101010"/>
-                </a:solidFill>
-                <a:latin typeface="Malgun Gothic"/>
-                <a:ea typeface="Malgun Gothic"/>
-                <a:cs typeface="Malgun Gothic"/>
-              </a:rPr>
-              <a:t>제외 원문 미저장</a:t>
+                <a16:creationId xmlns:a16="http://schemas.microsoft.com/office/drawing/2014/main" id="{9B91DC1B-87A8-4161-A823-E7ECD7F2CB59}"/>
+              </a:ext>
+            </a:extLst>
+          </p:cNvPr>
+          <p:cNvSpPr>
+            <a:spLocks xmlns:a="http://schemas.openxmlformats.org/drawingml/2006/main" noGrp="1"/>
+          </p:cNvSpPr>
+          <p:nvPr/>
+        </p:nvSpPr>
+        <p:spPr>
+          <a:xfrm xmlns:a="http://schemas.openxmlformats.org/drawingml/2006/main">
+            <a:off x="3048000" y="2571750"/>
+            <a:ext cx="1809750" cy="304800"/>
+          </a:xfrm>
+          <a:prstGeom xmlns:a="http://schemas.openxmlformats.org/drawingml/2006/main" prst="rect">
+            <a:avLst/>
+          </a:prstGeom>
+          <a:noFill xmlns:a="http://schemas.openxmlformats.org/drawingml/2006/main"/>
+          <a:ln xmlns:a="http://schemas.openxmlformats.org/drawingml/2006/main" w="0">
+            <a:noFill/>
+            <a:prstDash val="solid"/>
+          </a:ln>
+        </p:spPr>
+        <p:txBody>
+          <a:bodyPr xmlns:a="http://schemas.openxmlformats.org/drawingml/2006/main"/>
+          <a:lstStyle xmlns:a="http://schemas.openxmlformats.org/drawingml/2006/main"/>
+          <a:p xmlns:a="http://schemas.openxmlformats.org/drawingml/2006/main">
+            <a:pPr algn="l">
+              <a:defRPr sz="1350" b="1">
+                <a:solidFill>
+                  <a:srgbClr val="101010"/>
+                </a:solidFill>
+                <a:latin typeface="Malgun Gothic"/>
+                <a:ea typeface="Malgun Gothic"/>
+                <a:cs typeface="Malgun Gothic"/>
+              </a:defRPr>
+            </a:pPr>
+            <a:r>
+              <a:rPr sz="1350" b="1">
+                <a:solidFill>
+                  <a:srgbClr val="101010"/>
+                </a:solidFill>
+                <a:latin typeface="Malgun Gothic"/>
+                <a:ea typeface="Malgun Gothic"/>
+                <a:cs typeface="Malgun Gothic"/>
+              </a:rPr>
+              <a:t>QUARANTINED</a:t>
             </a:r>
           </a:p>
         </p:txBody>
@@ -7180,209 +7400,167 @@
           <p:cNvPr id="9" name="">
             <a:extLst xmlns:a="http://schemas.openxmlformats.org/drawingml/2006/main">
               <a:ext uri="{FF2B5EF4-FFF2-40B4-BE49-F238E27FC236}">
-                <a16:creationId xmlns:a16="http://schemas.microsoft.com/office/drawing/2014/main" id="{A12087D0-F7DC-4A25-B436-B3521B6F5C3F}"/>
-              </a:ext>
-            </a:extLst>
-          </p:cNvPr>
-          <p:cNvSpPr>
-            <a:spLocks xmlns:a="http://schemas.openxmlformats.org/drawingml/2006/main" noGrp="1"/>
-          </p:cNvSpPr>
-          <p:nvPr/>
-        </p:nvSpPr>
-        <p:spPr>
-          <a:xfrm xmlns:a="http://schemas.openxmlformats.org/drawingml/2006/main">
-            <a:off x="8229600" y="1809750"/>
-            <a:ext cx="3562350" cy="3714750"/>
-          </a:xfrm>
-          <a:prstGeom xmlns:a="http://schemas.openxmlformats.org/drawingml/2006/main" prst="rect">
-            <a:avLst/>
+                <a16:creationId xmlns:a16="http://schemas.microsoft.com/office/drawing/2014/main" id="{251D79B3-6A3A-4C6D-8AB6-ACA363046401}"/>
+              </a:ext>
+            </a:extLst>
+          </p:cNvPr>
+          <p:cNvSpPr>
+            <a:spLocks xmlns:a="http://schemas.openxmlformats.org/drawingml/2006/main" noGrp="1"/>
+          </p:cNvSpPr>
+          <p:nvPr/>
+        </p:nvSpPr>
+        <p:spPr>
+          <a:xfrm xmlns:a="http://schemas.openxmlformats.org/drawingml/2006/main">
+            <a:off x="3048000" y="3829050"/>
+            <a:ext cx="1809750" cy="685800"/>
+          </a:xfrm>
+          <a:prstGeom xmlns:a="http://schemas.openxmlformats.org/drawingml/2006/main" prst="rect">
+            <a:avLst/>
+          </a:prstGeom>
+          <a:noFill xmlns:a="http://schemas.openxmlformats.org/drawingml/2006/main"/>
+          <a:ln xmlns:a="http://schemas.openxmlformats.org/drawingml/2006/main" w="0">
+            <a:noFill/>
+            <a:prstDash val="solid"/>
+          </a:ln>
+        </p:spPr>
+        <p:txBody>
+          <a:bodyPr xmlns:a="http://schemas.openxmlformats.org/drawingml/2006/main"/>
+          <a:lstStyle xmlns:a="http://schemas.openxmlformats.org/drawingml/2006/main"/>
+          <a:p xmlns:a="http://schemas.openxmlformats.org/drawingml/2006/main">
+            <a:pPr algn="l">
+              <a:defRPr sz="1350" b="0">
+                <a:solidFill>
+                  <a:srgbClr val="5B616B"/>
+                </a:solidFill>
+                <a:latin typeface="Malgun Gothic"/>
+                <a:ea typeface="Malgun Gothic"/>
+                <a:cs typeface="Malgun Gothic"/>
+              </a:defRPr>
+            </a:pPr>
+            <a:r>
+              <a:rPr sz="1350" b="0">
+                <a:solidFill>
+                  <a:srgbClr val="5B616B"/>
+                </a:solidFill>
+                <a:latin typeface="Malgun Gothic"/>
+                <a:ea typeface="Malgun Gothic"/>
+                <a:cs typeface="Malgun Gothic"/>
+              </a:rPr>
+              <a:t>로컬 검역</a:t>
+            </a:r>
+          </a:p>
+          <a:p xmlns:a="http://schemas.openxmlformats.org/drawingml/2006/main">
+            <a:pPr algn="l">
+              <a:defRPr sz="1350" b="0">
+                <a:solidFill>
+                  <a:srgbClr val="5B616B"/>
+                </a:solidFill>
+                <a:latin typeface="Malgun Gothic"/>
+                <a:ea typeface="Malgun Gothic"/>
+                <a:cs typeface="Malgun Gothic"/>
+              </a:defRPr>
+            </a:pPr>
+            <a:r>
+              <a:rPr sz="1350" b="0">
+                <a:solidFill>
+                  <a:srgbClr val="5B616B"/>
+                </a:solidFill>
+                <a:latin typeface="Malgun Gothic"/>
+                <a:ea typeface="Malgun Gothic"/>
+                <a:cs typeface="Malgun Gothic"/>
+              </a:rPr>
+              <a:t>원문 실행 금지</a:t>
+            </a:r>
+          </a:p>
+        </p:txBody>
+      </p:sp>
+      <p:sp>
+        <p:nvSpPr>
+          <p:cNvPr id="10" name="">
+            <a:extLst xmlns:a="http://schemas.openxmlformats.org/drawingml/2006/main">
+              <a:ext uri="{FF2B5EF4-FFF2-40B4-BE49-F238E27FC236}">
+                <a16:creationId xmlns:a16="http://schemas.microsoft.com/office/drawing/2014/main" id="{B2EA5DAD-947B-4032-90C3-8ADE286B7209}"/>
+              </a:ext>
+            </a:extLst>
+          </p:cNvPr>
+          <p:cNvSpPr>
+            <a:spLocks xmlns:a="http://schemas.openxmlformats.org/drawingml/2006/main" noGrp="1"/>
+          </p:cNvSpPr>
+          <p:nvPr/>
+        </p:nvSpPr>
+        <p:spPr>
+          <a:xfrm xmlns:a="http://schemas.openxmlformats.org/drawingml/2006/main">
+            <a:off x="5372100" y="3295650"/>
+            <a:ext cx="171450" cy="171450"/>
+          </a:xfrm>
+          <a:prstGeom xmlns:a="http://schemas.openxmlformats.org/drawingml/2006/main" prst="roundRect">
+            <a:avLst>
+              <a:gd name="adj" fmla="val 50000"/>
+            </a:avLst>
           </a:prstGeom>
           <a:solidFill xmlns:a="http://schemas.openxmlformats.org/drawingml/2006/main">
-            <a:srgbClr val="EDEDED"/>
+            <a:srgbClr val="3D8DFF"/>
           </a:solidFill>
-          <a:ln xmlns:a="http://schemas.openxmlformats.org/drawingml/2006/main" w="0">
-            <a:noFill/>
-            <a:prstDash val="solid"/>
-          </a:ln>
-        </p:spPr>
-      </p:sp>
-      <p:sp>
-        <p:nvSpPr>
-          <p:cNvPr id="10" name="">
-            <a:extLst xmlns:a="http://schemas.openxmlformats.org/drawingml/2006/main">
-              <a:ext uri="{FF2B5EF4-FFF2-40B4-BE49-F238E27FC236}">
-                <a16:creationId xmlns:a16="http://schemas.microsoft.com/office/drawing/2014/main" id="{0B2EE5F1-0036-4040-863F-4787260F1FF5}"/>
-              </a:ext>
-            </a:extLst>
-          </p:cNvPr>
-          <p:cNvSpPr>
-            <a:spLocks xmlns:a="http://schemas.openxmlformats.org/drawingml/2006/main" noGrp="1"/>
-          </p:cNvSpPr>
-          <p:nvPr/>
-        </p:nvSpPr>
-        <p:spPr>
-          <a:xfrm xmlns:a="http://schemas.openxmlformats.org/drawingml/2006/main">
-            <a:off x="8477250" y="2143125"/>
-            <a:ext cx="3048000" cy="342900"/>
-          </a:xfrm>
-          <a:prstGeom xmlns:a="http://schemas.openxmlformats.org/drawingml/2006/main" prst="rect">
-            <a:avLst/>
-          </a:prstGeom>
-          <a:noFill xmlns:a="http://schemas.openxmlformats.org/drawingml/2006/main"/>
-          <a:ln xmlns:a="http://schemas.openxmlformats.org/drawingml/2006/main" w="0">
-            <a:noFill/>
-            <a:prstDash val="solid"/>
-          </a:ln>
-        </p:spPr>
-        <p:txBody>
-          <a:bodyPr xmlns:a="http://schemas.openxmlformats.org/drawingml/2006/main"/>
-          <a:lstStyle xmlns:a="http://schemas.openxmlformats.org/drawingml/2006/main"/>
-          <a:p xmlns:a="http://schemas.openxmlformats.org/drawingml/2006/main">
-            <a:pPr algn="l">
-              <a:defRPr sz="1650" b="1">
-                <a:solidFill>
-                  <a:srgbClr val="101010"/>
-                </a:solidFill>
-                <a:latin typeface="Malgun Gothic"/>
-                <a:ea typeface="Malgun Gothic"/>
-                <a:cs typeface="Malgun Gothic"/>
-              </a:defRPr>
-            </a:pPr>
-            <a:r>
-              <a:rPr sz="1650" b="1">
-                <a:solidFill>
-                  <a:srgbClr val="101010"/>
-                </a:solidFill>
-                <a:latin typeface="Malgun Gothic"/>
-                <a:ea typeface="Malgun Gothic"/>
-                <a:cs typeface="Malgun Gothic"/>
-              </a:rPr>
-              <a:t>RUNTIME</a:t>
-            </a:r>
-          </a:p>
-        </p:txBody>
+          <a:ln xmlns:a="http://schemas.openxmlformats.org/drawingml/2006/main" w="9525">
+            <a:solidFill>
+              <a:srgbClr val="101010"/>
+            </a:solidFill>
+            <a:prstDash val="solid"/>
+          </a:ln>
+        </p:spPr>
       </p:sp>
       <p:sp>
         <p:nvSpPr>
           <p:cNvPr id="11" name="">
             <a:extLst xmlns:a="http://schemas.openxmlformats.org/drawingml/2006/main">
               <a:ext uri="{FF2B5EF4-FFF2-40B4-BE49-F238E27FC236}">
-                <a16:creationId xmlns:a16="http://schemas.microsoft.com/office/drawing/2014/main" id="{AAF2CA6F-A207-4D33-9608-2C75F8CD8CC0}"/>
-              </a:ext>
-            </a:extLst>
-          </p:cNvPr>
-          <p:cNvSpPr>
-            <a:spLocks xmlns:a="http://schemas.openxmlformats.org/drawingml/2006/main" noGrp="1"/>
-          </p:cNvSpPr>
-          <p:nvPr/>
-        </p:nvSpPr>
-        <p:spPr>
-          <a:xfrm xmlns:a="http://schemas.openxmlformats.org/drawingml/2006/main">
-            <a:off x="8477250" y="2876550"/>
-            <a:ext cx="3048000" cy="2000250"/>
-          </a:xfrm>
-          <a:prstGeom xmlns:a="http://schemas.openxmlformats.org/drawingml/2006/main" prst="rect">
-            <a:avLst/>
-          </a:prstGeom>
-          <a:noFill xmlns:a="http://schemas.openxmlformats.org/drawingml/2006/main"/>
-          <a:ln xmlns:a="http://schemas.openxmlformats.org/drawingml/2006/main" w="0">
-            <a:noFill/>
-            <a:prstDash val="solid"/>
-          </a:ln>
-        </p:spPr>
-        <p:txBody>
-          <a:bodyPr xmlns:a="http://schemas.openxmlformats.org/drawingml/2006/main"/>
-          <a:lstStyle xmlns:a="http://schemas.openxmlformats.org/drawingml/2006/main"/>
-          <a:p xmlns:a="http://schemas.openxmlformats.org/drawingml/2006/main">
-            <a:pPr algn="l">
-              <a:defRPr sz="1650" b="0">
-                <a:solidFill>
-                  <a:srgbClr val="101010"/>
-                </a:solidFill>
-                <a:latin typeface="Malgun Gothic"/>
-                <a:ea typeface="Malgun Gothic"/>
-                <a:cs typeface="Malgun Gothic"/>
-              </a:defRPr>
-            </a:pPr>
-            <a:r>
-              <a:rPr sz="1650" b="0">
-                <a:solidFill>
-                  <a:srgbClr val="101010"/>
-                </a:solidFill>
-                <a:latin typeface="Malgun Gothic"/>
-                <a:ea typeface="Malgun Gothic"/>
-                <a:cs typeface="Malgun Gothic"/>
-              </a:rPr>
-              <a:t>2 GiB tmpfs</a:t>
-            </a:r>
-          </a:p>
-          <a:p xmlns:a="http://schemas.openxmlformats.org/drawingml/2006/main">
-            <a:pPr algn="l">
-              <a:defRPr sz="1650" b="0">
-                <a:solidFill>
-                  <a:srgbClr val="101010"/>
-                </a:solidFill>
-                <a:latin typeface="Malgun Gothic"/>
-                <a:ea typeface="Malgun Gothic"/>
-                <a:cs typeface="Malgun Gothic"/>
-              </a:defRPr>
-            </a:pPr>
-            <a:r>
-              <a:rPr sz="1650" b="0">
-                <a:solidFill>
-                  <a:srgbClr val="101010"/>
-                </a:solidFill>
-                <a:latin typeface="Malgun Gothic"/>
-                <a:ea typeface="Malgun Gothic"/>
-                <a:cs typeface="Malgun Gothic"/>
-              </a:rPr>
-              <a:t>noexec · nosuid · nodev</a:t>
-            </a:r>
-          </a:p>
-          <a:p xmlns:a="http://schemas.openxmlformats.org/drawingml/2006/main">
-            <a:pPr algn="l">
-              <a:defRPr sz="1650" b="0">
-                <a:solidFill>
-                  <a:srgbClr val="101010"/>
-                </a:solidFill>
-                <a:latin typeface="Malgun Gothic"/>
-                <a:ea typeface="Malgun Gothic"/>
-                <a:cs typeface="Malgun Gothic"/>
-              </a:defRPr>
-            </a:pPr>
-            <a:r>
-              <a:rPr sz="1650" b="0">
-                <a:solidFill>
-                  <a:srgbClr val="101010"/>
-                </a:solidFill>
-                <a:latin typeface="Malgun Gothic"/>
-                <a:ea typeface="Malgun Gothic"/>
-                <a:cs typeface="Malgun Gothic"/>
-              </a:rPr>
-              <a:t>UID 10001 · Read-only</a:t>
-            </a:r>
-          </a:p>
-          <a:p xmlns:a="http://schemas.openxmlformats.org/drawingml/2006/main">
-            <a:pPr algn="l">
-              <a:defRPr sz="1650" b="0">
-                <a:solidFill>
-                  <a:srgbClr val="101010"/>
-                </a:solidFill>
-                <a:latin typeface="Malgun Gothic"/>
-                <a:ea typeface="Malgun Gothic"/>
-                <a:cs typeface="Malgun Gothic"/>
-              </a:defRPr>
-            </a:pPr>
-            <a:r>
-              <a:rPr sz="1650" b="0">
-                <a:solidFill>
-                  <a:srgbClr val="101010"/>
-                </a:solidFill>
-                <a:latin typeface="Malgun Gothic"/>
-                <a:ea typeface="Malgun Gothic"/>
-                <a:cs typeface="Malgun Gothic"/>
-              </a:rPr>
-              <a:t>Capability ALL Drop</a:t>
+                <a16:creationId xmlns:a16="http://schemas.microsoft.com/office/drawing/2014/main" id="{102273C9-3CB3-4A78-8069-81ED7A2F964D}"/>
+              </a:ext>
+            </a:extLst>
+          </p:cNvPr>
+          <p:cNvSpPr>
+            <a:spLocks xmlns:a="http://schemas.openxmlformats.org/drawingml/2006/main" noGrp="1"/>
+          </p:cNvSpPr>
+          <p:nvPr/>
+        </p:nvSpPr>
+        <p:spPr>
+          <a:xfrm xmlns:a="http://schemas.openxmlformats.org/drawingml/2006/main">
+            <a:off x="5372100" y="2571750"/>
+            <a:ext cx="1809750" cy="304800"/>
+          </a:xfrm>
+          <a:prstGeom xmlns:a="http://schemas.openxmlformats.org/drawingml/2006/main" prst="rect">
+            <a:avLst/>
+          </a:prstGeom>
+          <a:noFill xmlns:a="http://schemas.openxmlformats.org/drawingml/2006/main"/>
+          <a:ln xmlns:a="http://schemas.openxmlformats.org/drawingml/2006/main" w="0">
+            <a:noFill/>
+            <a:prstDash val="solid"/>
+          </a:ln>
+        </p:spPr>
+        <p:txBody>
+          <a:bodyPr xmlns:a="http://schemas.openxmlformats.org/drawingml/2006/main"/>
+          <a:lstStyle xmlns:a="http://schemas.openxmlformats.org/drawingml/2006/main"/>
+          <a:p xmlns:a="http://schemas.openxmlformats.org/drawingml/2006/main">
+            <a:pPr algn="l">
+              <a:defRPr sz="1350" b="1">
+                <a:solidFill>
+                  <a:srgbClr val="101010"/>
+                </a:solidFill>
+                <a:latin typeface="Malgun Gothic"/>
+                <a:ea typeface="Malgun Gothic"/>
+                <a:cs typeface="Malgun Gothic"/>
+              </a:defRPr>
+            </a:pPr>
+            <a:r>
+              <a:rPr sz="1350" b="1">
+                <a:solidFill>
+                  <a:srgbClr val="101010"/>
+                </a:solidFill>
+                <a:latin typeface="Malgun Gothic"/>
+                <a:ea typeface="Malgun Gothic"/>
+                <a:cs typeface="Malgun Gothic"/>
+              </a:rPr>
+              <a:t>APPROVED</a:t>
             </a:r>
           </a:p>
         </p:txBody>
@@ -7392,19 +7570,133 @@
           <p:cNvPr id="12" name="">
             <a:extLst xmlns:a="http://schemas.openxmlformats.org/drawingml/2006/main">
               <a:ext uri="{FF2B5EF4-FFF2-40B4-BE49-F238E27FC236}">
-                <a16:creationId xmlns:a16="http://schemas.microsoft.com/office/drawing/2014/main" id="{DC5C9763-E7A3-46FC-92DD-F9B4A1DE8A89}"/>
-              </a:ext>
-            </a:extLst>
-          </p:cNvPr>
-          <p:cNvSpPr>
-            <a:spLocks xmlns:a="http://schemas.openxmlformats.org/drawingml/2006/main" noGrp="1"/>
-          </p:cNvSpPr>
-          <p:nvPr/>
-        </p:nvSpPr>
-        <p:spPr>
-          <a:xfrm xmlns:a="http://schemas.openxmlformats.org/drawingml/2006/main">
-            <a:off x="400050" y="5867400"/>
-            <a:ext cx="10668000" cy="304800"/>
+                <a16:creationId xmlns:a16="http://schemas.microsoft.com/office/drawing/2014/main" id="{73BAC19E-6115-4252-8E17-849E0C10FBBB}"/>
+              </a:ext>
+            </a:extLst>
+          </p:cNvPr>
+          <p:cNvSpPr>
+            <a:spLocks xmlns:a="http://schemas.openxmlformats.org/drawingml/2006/main" noGrp="1"/>
+          </p:cNvSpPr>
+          <p:nvPr/>
+        </p:nvSpPr>
+        <p:spPr>
+          <a:xfrm xmlns:a="http://schemas.openxmlformats.org/drawingml/2006/main">
+            <a:off x="5372100" y="3829050"/>
+            <a:ext cx="1809750" cy="685800"/>
+          </a:xfrm>
+          <a:prstGeom xmlns:a="http://schemas.openxmlformats.org/drawingml/2006/main" prst="rect">
+            <a:avLst/>
+          </a:prstGeom>
+          <a:noFill xmlns:a="http://schemas.openxmlformats.org/drawingml/2006/main"/>
+          <a:ln xmlns:a="http://schemas.openxmlformats.org/drawingml/2006/main" w="0">
+            <a:noFill/>
+            <a:prstDash val="solid"/>
+          </a:ln>
+        </p:spPr>
+        <p:txBody>
+          <a:bodyPr xmlns:a="http://schemas.openxmlformats.org/drawingml/2006/main"/>
+          <a:lstStyle xmlns:a="http://schemas.openxmlformats.org/drawingml/2006/main"/>
+          <a:p xmlns:a="http://schemas.openxmlformats.org/drawingml/2006/main">
+            <a:pPr algn="l">
+              <a:defRPr sz="1350" b="0">
+                <a:solidFill>
+                  <a:srgbClr val="5B616B"/>
+                </a:solidFill>
+                <a:latin typeface="Malgun Gothic"/>
+                <a:ea typeface="Malgun Gothic"/>
+                <a:cs typeface="Malgun Gothic"/>
+              </a:defRPr>
+            </a:pPr>
+            <a:r>
+              <a:rPr sz="1350" b="0">
+                <a:solidFill>
+                  <a:srgbClr val="5B616B"/>
+                </a:solidFill>
+                <a:latin typeface="Malgun Gothic"/>
+                <a:ea typeface="Malgun Gothic"/>
+                <a:cs typeface="Malgun Gothic"/>
+              </a:rPr>
+              <a:t>dhslove</a:t>
+            </a:r>
+          </a:p>
+          <a:p xmlns:a="http://schemas.openxmlformats.org/drawingml/2006/main">
+            <a:pPr algn="l">
+              <a:defRPr sz="1350" b="0">
+                <a:solidFill>
+                  <a:srgbClr val="5B616B"/>
+                </a:solidFill>
+                <a:latin typeface="Malgun Gothic"/>
+                <a:ea typeface="Malgun Gothic"/>
+                <a:cs typeface="Malgun Gothic"/>
+              </a:defRPr>
+            </a:pPr>
+            <a:r>
+              <a:rPr sz="1350" b="0">
+                <a:solidFill>
+                  <a:srgbClr val="5B616B"/>
+                </a:solidFill>
+                <a:latin typeface="Malgun Gothic"/>
+                <a:ea typeface="Malgun Gothic"/>
+                <a:cs typeface="Malgun Gothic"/>
+              </a:rPr>
+              <a:t>Commit 확인</a:t>
+            </a:r>
+          </a:p>
+        </p:txBody>
+      </p:sp>
+      <p:sp>
+        <p:nvSpPr>
+          <p:cNvPr id="13" name="">
+            <a:extLst xmlns:a="http://schemas.openxmlformats.org/drawingml/2006/main">
+              <a:ext uri="{FF2B5EF4-FFF2-40B4-BE49-F238E27FC236}">
+                <a16:creationId xmlns:a16="http://schemas.microsoft.com/office/drawing/2014/main" id="{68488505-D738-4749-9AB6-5E3954529D6F}"/>
+              </a:ext>
+            </a:extLst>
+          </p:cNvPr>
+          <p:cNvSpPr>
+            <a:spLocks xmlns:a="http://schemas.openxmlformats.org/drawingml/2006/main" noGrp="1"/>
+          </p:cNvSpPr>
+          <p:nvPr/>
+        </p:nvSpPr>
+        <p:spPr>
+          <a:xfrm xmlns:a="http://schemas.openxmlformats.org/drawingml/2006/main">
+            <a:off x="7696200" y="3295650"/>
+            <a:ext cx="171450" cy="171450"/>
+          </a:xfrm>
+          <a:prstGeom xmlns:a="http://schemas.openxmlformats.org/drawingml/2006/main" prst="roundRect">
+            <a:avLst>
+              <a:gd name="adj" fmla="val 50000"/>
+            </a:avLst>
+          </a:prstGeom>
+          <a:solidFill xmlns:a="http://schemas.openxmlformats.org/drawingml/2006/main">
+            <a:srgbClr val="FFFFFF"/>
+          </a:solidFill>
+          <a:ln xmlns:a="http://schemas.openxmlformats.org/drawingml/2006/main" w="9525">
+            <a:solidFill>
+              <a:srgbClr val="101010"/>
+            </a:solidFill>
+            <a:prstDash val="solid"/>
+          </a:ln>
+        </p:spPr>
+      </p:sp>
+      <p:sp>
+        <p:nvSpPr>
+          <p:cNvPr id="14" name="">
+            <a:extLst xmlns:a="http://schemas.openxmlformats.org/drawingml/2006/main">
+              <a:ext uri="{FF2B5EF4-FFF2-40B4-BE49-F238E27FC236}">
+                <a16:creationId xmlns:a16="http://schemas.microsoft.com/office/drawing/2014/main" id="{2D945548-E16B-4F71-92A1-B265C17E0F7B}"/>
+              </a:ext>
+            </a:extLst>
+          </p:cNvPr>
+          <p:cNvSpPr>
+            <a:spLocks xmlns:a="http://schemas.openxmlformats.org/drawingml/2006/main" noGrp="1"/>
+          </p:cNvSpPr>
+          <p:nvPr/>
+        </p:nvSpPr>
+        <p:spPr>
+          <a:xfrm xmlns:a="http://schemas.openxmlformats.org/drawingml/2006/main">
+            <a:off x="7696200" y="2571750"/>
+            <a:ext cx="1809750" cy="304800"/>
           </a:xfrm>
           <a:prstGeom xmlns:a="http://schemas.openxmlformats.org/drawingml/2006/main" prst="rect">
             <a:avLst/>
@@ -7422,7 +7714,7 @@
             <a:pPr algn="l">
               <a:defRPr sz="1350" b="1">
                 <a:solidFill>
-                  <a:srgbClr val="117A4B"/>
+                  <a:srgbClr val="101010"/>
                 </a:solidFill>
                 <a:latin typeface="Malgun Gothic"/>
                 <a:ea typeface="Malgun Gothic"/>
@@ -7432,13 +7724,318 @@
             <a:r>
               <a:rPr sz="1350" b="1">
                 <a:solidFill>
-                  <a:srgbClr val="117A4B"/>
-                </a:solidFill>
-                <a:latin typeface="Malgun Gothic"/>
-                <a:ea typeface="Malgun Gothic"/>
-                <a:cs typeface="Malgun Gothic"/>
-              </a:rPr>
-              <a:t>파일 목록 API는 Content를 반환하지 않고 Path·Hash·Decision·Rule만 제공합니다.</a:t>
+                  <a:srgbClr val="101010"/>
+                </a:solidFill>
+                <a:latin typeface="Malgun Gothic"/>
+                <a:ea typeface="Malgun Gothic"/>
+                <a:cs typeface="Malgun Gothic"/>
+              </a:rPr>
+              <a:t>INDEXING</a:t>
+            </a:r>
+          </a:p>
+        </p:txBody>
+      </p:sp>
+      <p:sp>
+        <p:nvSpPr>
+          <p:cNvPr id="15" name="">
+            <a:extLst xmlns:a="http://schemas.openxmlformats.org/drawingml/2006/main">
+              <a:ext uri="{FF2B5EF4-FFF2-40B4-BE49-F238E27FC236}">
+                <a16:creationId xmlns:a16="http://schemas.microsoft.com/office/drawing/2014/main" id="{F87A5455-A643-41FF-AAAC-70BC9B0F2ED9}"/>
+              </a:ext>
+            </a:extLst>
+          </p:cNvPr>
+          <p:cNvSpPr>
+            <a:spLocks xmlns:a="http://schemas.openxmlformats.org/drawingml/2006/main" noGrp="1"/>
+          </p:cNvSpPr>
+          <p:nvPr/>
+        </p:nvSpPr>
+        <p:spPr>
+          <a:xfrm xmlns:a="http://schemas.openxmlformats.org/drawingml/2006/main">
+            <a:off x="7696200" y="3829050"/>
+            <a:ext cx="1809750" cy="685800"/>
+          </a:xfrm>
+          <a:prstGeom xmlns:a="http://schemas.openxmlformats.org/drawingml/2006/main" prst="rect">
+            <a:avLst/>
+          </a:prstGeom>
+          <a:noFill xmlns:a="http://schemas.openxmlformats.org/drawingml/2006/main"/>
+          <a:ln xmlns:a="http://schemas.openxmlformats.org/drawingml/2006/main" w="0">
+            <a:noFill/>
+            <a:prstDash val="solid"/>
+          </a:ln>
+        </p:spPr>
+        <p:txBody>
+          <a:bodyPr xmlns:a="http://schemas.openxmlformats.org/drawingml/2006/main"/>
+          <a:lstStyle xmlns:a="http://schemas.openxmlformats.org/drawingml/2006/main"/>
+          <a:p xmlns:a="http://schemas.openxmlformats.org/drawingml/2006/main">
+            <a:pPr algn="l">
+              <a:defRPr sz="1350" b="0">
+                <a:solidFill>
+                  <a:srgbClr val="5B616B"/>
+                </a:solidFill>
+                <a:latin typeface="Malgun Gothic"/>
+                <a:ea typeface="Malgun Gothic"/>
+                <a:cs typeface="Malgun Gothic"/>
+              </a:defRPr>
+            </a:pPr>
+            <a:r>
+              <a:rPr sz="1350" b="0">
+                <a:solidFill>
+                  <a:srgbClr val="5B616B"/>
+                </a:solidFill>
+                <a:latin typeface="Malgun Gothic"/>
+                <a:ea typeface="Malgun Gothic"/>
+                <a:cs typeface="Malgun Gothic"/>
+              </a:rPr>
+              <a:t>#43 Job</a:t>
+            </a:r>
+          </a:p>
+          <a:p xmlns:a="http://schemas.openxmlformats.org/drawingml/2006/main">
+            <a:pPr algn="l">
+              <a:defRPr sz="1350" b="0">
+                <a:solidFill>
+                  <a:srgbClr val="5B616B"/>
+                </a:solidFill>
+                <a:latin typeface="Malgun Gothic"/>
+                <a:ea typeface="Malgun Gothic"/>
+                <a:cs typeface="Malgun Gothic"/>
+              </a:defRPr>
+            </a:pPr>
+            <a:r>
+              <a:rPr sz="1350" b="0">
+                <a:solidFill>
+                  <a:srgbClr val="5B616B"/>
+                </a:solidFill>
+                <a:latin typeface="Malgun Gothic"/>
+                <a:ea typeface="Malgun Gothic"/>
+                <a:cs typeface="Malgun Gothic"/>
+              </a:rPr>
+              <a:t>부분 성공 금지</a:t>
+            </a:r>
+          </a:p>
+        </p:txBody>
+      </p:sp>
+      <p:sp>
+        <p:nvSpPr>
+          <p:cNvPr id="16" name="">
+            <a:extLst xmlns:a="http://schemas.openxmlformats.org/drawingml/2006/main">
+              <a:ext uri="{FF2B5EF4-FFF2-40B4-BE49-F238E27FC236}">
+                <a16:creationId xmlns:a16="http://schemas.microsoft.com/office/drawing/2014/main" id="{2921E765-073C-497F-8A0C-35466FE98BDE}"/>
+              </a:ext>
+            </a:extLst>
+          </p:cNvPr>
+          <p:cNvSpPr>
+            <a:spLocks xmlns:a="http://schemas.openxmlformats.org/drawingml/2006/main" noGrp="1"/>
+          </p:cNvSpPr>
+          <p:nvPr/>
+        </p:nvSpPr>
+        <p:spPr>
+          <a:xfrm xmlns:a="http://schemas.openxmlformats.org/drawingml/2006/main">
+            <a:off x="10020300" y="3295650"/>
+            <a:ext cx="171450" cy="171450"/>
+          </a:xfrm>
+          <a:prstGeom xmlns:a="http://schemas.openxmlformats.org/drawingml/2006/main" prst="roundRect">
+            <a:avLst>
+              <a:gd name="adj" fmla="val 50000"/>
+            </a:avLst>
+          </a:prstGeom>
+          <a:solidFill xmlns:a="http://schemas.openxmlformats.org/drawingml/2006/main">
+            <a:srgbClr val="FFFFFF"/>
+          </a:solidFill>
+          <a:ln xmlns:a="http://schemas.openxmlformats.org/drawingml/2006/main" w="9525">
+            <a:solidFill>
+              <a:srgbClr val="101010"/>
+            </a:solidFill>
+            <a:prstDash val="solid"/>
+          </a:ln>
+        </p:spPr>
+      </p:sp>
+      <p:sp>
+        <p:nvSpPr>
+          <p:cNvPr id="17" name="">
+            <a:extLst xmlns:a="http://schemas.openxmlformats.org/drawingml/2006/main">
+              <a:ext uri="{FF2B5EF4-FFF2-40B4-BE49-F238E27FC236}">
+                <a16:creationId xmlns:a16="http://schemas.microsoft.com/office/drawing/2014/main" id="{8D973EA2-09A2-4554-909C-50B2BC8CDA65}"/>
+              </a:ext>
+            </a:extLst>
+          </p:cNvPr>
+          <p:cNvSpPr>
+            <a:spLocks xmlns:a="http://schemas.openxmlformats.org/drawingml/2006/main" noGrp="1"/>
+          </p:cNvSpPr>
+          <p:nvPr/>
+        </p:nvSpPr>
+        <p:spPr>
+          <a:xfrm xmlns:a="http://schemas.openxmlformats.org/drawingml/2006/main">
+            <a:off x="10020300" y="2571750"/>
+            <a:ext cx="1809750" cy="304800"/>
+          </a:xfrm>
+          <a:prstGeom xmlns:a="http://schemas.openxmlformats.org/drawingml/2006/main" prst="rect">
+            <a:avLst/>
+          </a:prstGeom>
+          <a:noFill xmlns:a="http://schemas.openxmlformats.org/drawingml/2006/main"/>
+          <a:ln xmlns:a="http://schemas.openxmlformats.org/drawingml/2006/main" w="0">
+            <a:noFill/>
+            <a:prstDash val="solid"/>
+          </a:ln>
+        </p:spPr>
+        <p:txBody>
+          <a:bodyPr xmlns:a="http://schemas.openxmlformats.org/drawingml/2006/main"/>
+          <a:lstStyle xmlns:a="http://schemas.openxmlformats.org/drawingml/2006/main"/>
+          <a:p xmlns:a="http://schemas.openxmlformats.org/drawingml/2006/main">
+            <a:pPr algn="l">
+              <a:defRPr sz="1350" b="1">
+                <a:solidFill>
+                  <a:srgbClr val="101010"/>
+                </a:solidFill>
+                <a:latin typeface="Malgun Gothic"/>
+                <a:ea typeface="Malgun Gothic"/>
+                <a:cs typeface="Malgun Gothic"/>
+              </a:defRPr>
+            </a:pPr>
+            <a:r>
+              <a:rPr sz="1350" b="1">
+                <a:solidFill>
+                  <a:srgbClr val="101010"/>
+                </a:solidFill>
+                <a:latin typeface="Malgun Gothic"/>
+                <a:ea typeface="Malgun Gothic"/>
+                <a:cs typeface="Malgun Gothic"/>
+              </a:rPr>
+              <a:t>ACTIVE</a:t>
+            </a:r>
+          </a:p>
+        </p:txBody>
+      </p:sp>
+      <p:sp>
+        <p:nvSpPr>
+          <p:cNvPr id="18" name="">
+            <a:extLst xmlns:a="http://schemas.openxmlformats.org/drawingml/2006/main">
+              <a:ext uri="{FF2B5EF4-FFF2-40B4-BE49-F238E27FC236}">
+                <a16:creationId xmlns:a16="http://schemas.microsoft.com/office/drawing/2014/main" id="{6A74F5AF-F8EE-4519-99BB-D1E450C1E283}"/>
+              </a:ext>
+            </a:extLst>
+          </p:cNvPr>
+          <p:cNvSpPr>
+            <a:spLocks xmlns:a="http://schemas.openxmlformats.org/drawingml/2006/main" noGrp="1"/>
+          </p:cNvSpPr>
+          <p:nvPr/>
+        </p:nvSpPr>
+        <p:spPr>
+          <a:xfrm xmlns:a="http://schemas.openxmlformats.org/drawingml/2006/main">
+            <a:off x="10020300" y="3829050"/>
+            <a:ext cx="1809750" cy="685800"/>
+          </a:xfrm>
+          <a:prstGeom xmlns:a="http://schemas.openxmlformats.org/drawingml/2006/main" prst="rect">
+            <a:avLst/>
+          </a:prstGeom>
+          <a:noFill xmlns:a="http://schemas.openxmlformats.org/drawingml/2006/main"/>
+          <a:ln xmlns:a="http://schemas.openxmlformats.org/drawingml/2006/main" w="0">
+            <a:noFill/>
+            <a:prstDash val="solid"/>
+          </a:ln>
+        </p:spPr>
+        <p:txBody>
+          <a:bodyPr xmlns:a="http://schemas.openxmlformats.org/drawingml/2006/main"/>
+          <a:lstStyle xmlns:a="http://schemas.openxmlformats.org/drawingml/2006/main"/>
+          <a:p xmlns:a="http://schemas.openxmlformats.org/drawingml/2006/main">
+            <a:pPr algn="l">
+              <a:defRPr sz="1350" b="0">
+                <a:solidFill>
+                  <a:srgbClr val="5B616B"/>
+                </a:solidFill>
+                <a:latin typeface="Malgun Gothic"/>
+                <a:ea typeface="Malgun Gothic"/>
+                <a:cs typeface="Malgun Gothic"/>
+              </a:defRPr>
+            </a:pPr>
+            <a:r>
+              <a:rPr sz="1350" b="0">
+                <a:solidFill>
+                  <a:srgbClr val="5B616B"/>
+                </a:solidFill>
+                <a:latin typeface="Malgun Gothic"/>
+                <a:ea typeface="Malgun Gothic"/>
+                <a:cs typeface="Malgun Gothic"/>
+              </a:rPr>
+              <a:t>원자 전환</a:t>
+            </a:r>
+          </a:p>
+          <a:p xmlns:a="http://schemas.openxmlformats.org/drawingml/2006/main">
+            <a:pPr algn="l">
+              <a:defRPr sz="1350" b="0">
+                <a:solidFill>
+                  <a:srgbClr val="5B616B"/>
+                </a:solidFill>
+                <a:latin typeface="Malgun Gothic"/>
+                <a:ea typeface="Malgun Gothic"/>
+                <a:cs typeface="Malgun Gothic"/>
+              </a:defRPr>
+            </a:pPr>
+            <a:r>
+              <a:rPr sz="1350" b="0">
+                <a:solidFill>
+                  <a:srgbClr val="5B616B"/>
+                </a:solidFill>
+                <a:latin typeface="Malgun Gothic"/>
+                <a:ea typeface="Malgun Gothic"/>
+                <a:cs typeface="Malgun Gothic"/>
+              </a:rPr>
+              <a:t>이전 버전 철회</a:t>
+            </a:r>
+          </a:p>
+        </p:txBody>
+      </p:sp>
+      <p:sp>
+        <p:nvSpPr>
+          <p:cNvPr id="19" name="">
+            <a:extLst xmlns:a="http://schemas.openxmlformats.org/drawingml/2006/main">
+              <a:ext uri="{FF2B5EF4-FFF2-40B4-BE49-F238E27FC236}">
+                <a16:creationId xmlns:a16="http://schemas.microsoft.com/office/drawing/2014/main" id="{A4CB6B25-FDCB-42AB-9A2A-AA41245156A5}"/>
+              </a:ext>
+            </a:extLst>
+          </p:cNvPr>
+          <p:cNvSpPr>
+            <a:spLocks xmlns:a="http://schemas.openxmlformats.org/drawingml/2006/main" noGrp="1"/>
+          </p:cNvSpPr>
+          <p:nvPr/>
+        </p:nvSpPr>
+        <p:spPr>
+          <a:xfrm xmlns:a="http://schemas.openxmlformats.org/drawingml/2006/main">
+            <a:off x="723900" y="5410200"/>
+            <a:ext cx="10287000" cy="342900"/>
+          </a:xfrm>
+          <a:prstGeom xmlns:a="http://schemas.openxmlformats.org/drawingml/2006/main" prst="rect">
+            <a:avLst/>
+          </a:prstGeom>
+          <a:noFill xmlns:a="http://schemas.openxmlformats.org/drawingml/2006/main"/>
+          <a:ln xmlns:a="http://schemas.openxmlformats.org/drawingml/2006/main" w="0">
+            <a:noFill/>
+            <a:prstDash val="solid"/>
+          </a:ln>
+        </p:spPr>
+        <p:txBody>
+          <a:bodyPr xmlns:a="http://schemas.openxmlformats.org/drawingml/2006/main"/>
+          <a:lstStyle xmlns:a="http://schemas.openxmlformats.org/drawingml/2006/main"/>
+          <a:p xmlns:a="http://schemas.openxmlformats.org/drawingml/2006/main">
+            <a:pPr algn="l">
+              <a:defRPr sz="1425" b="1">
+                <a:solidFill>
+                  <a:srgbClr val="B42318"/>
+                </a:solidFill>
+                <a:latin typeface="Malgun Gothic"/>
+                <a:ea typeface="Malgun Gothic"/>
+                <a:cs typeface="Malgun Gothic"/>
+              </a:defRPr>
+            </a:pPr>
+            <a:r>
+              <a:rPr sz="1425" b="1">
+                <a:solidFill>
+                  <a:srgbClr val="B42318"/>
+                </a:solidFill>
+                <a:latin typeface="Malgun Gothic"/>
+                <a:ea typeface="Malgun Gothic"/>
+                <a:cs typeface="Malgun Gothic"/>
+              </a:rPr>
+              <a:t>실패 → APPROVED 복귀  |  File 수 불일치 → ACTIVE 거부  |  실제 승인·활성 0건</a:t>
             </a:r>
           </a:p>
         </p:txBody>
@@ -7446,7 +8043,7 @@
     </p:spTree>
     <p:extLst>
       <p:ext uri="{BB962C8B-B14F-4D97-AF65-F5344CB8AC3E}">
-        <p14:creationId xmlns:p14="http://schemas.microsoft.com/office/powerpoint/2010/main" val="804880881"/>
+        <p14:creationId xmlns:p14="http://schemas.microsoft.com/office/powerpoint/2010/main" val="1778842367"/>
       </p:ext>
     </p:extLst>
   </p:cSld>
@@ -7474,10 +8071,10 @@
       </p:grpSpPr>
       <p:sp>
         <p:nvSpPr>
-          <p:cNvPr id="22" name="">
-            <a:extLst xmlns:a="http://schemas.openxmlformats.org/drawingml/2006/main">
-              <a:ext uri="{FF2B5EF4-FFF2-40B4-BE49-F238E27FC236}">
-                <a16:creationId xmlns:a16="http://schemas.microsoft.com/office/drawing/2014/main" id="{2B3E6368-6CF0-4784-8DD4-745C385B717D}"/>
+          <p:cNvPr id="13" name="">
+            <a:extLst xmlns:a="http://schemas.openxmlformats.org/drawingml/2006/main">
+              <a:ext uri="{FF2B5EF4-FFF2-40B4-BE49-F238E27FC236}">
+                <a16:creationId xmlns:a16="http://schemas.microsoft.com/office/drawing/2014/main" id="{BB37B3F1-A99F-40B8-89BC-87F6966755E8}"/>
               </a:ext>
             </a:extLst>
           </p:cNvPr>
@@ -7523,7 +8120,7 @@
                 <a:ea typeface="Malgun Gothic"/>
                 <a:cs typeface="Malgun Gothic"/>
               </a:rPr>
-              <a:t>시험 서버에서 배포·권한·차단 동작을 함께 검증했습니다</a:t>
+              <a:t>Fetcher는 소스를 보존하지만 어떤 코드도 실행하지 않습니다</a:t>
             </a:r>
           </a:p>
         </p:txBody>
@@ -7533,7 +8130,7 @@
           <p:cNvPr id="2" name="">
             <a:extLst xmlns:a="http://schemas.openxmlformats.org/drawingml/2006/main">
               <a:ext uri="{FF2B5EF4-FFF2-40B4-BE49-F238E27FC236}">
-                <a16:creationId xmlns:a16="http://schemas.microsoft.com/office/drawing/2014/main" id="{57293ABF-7641-4FC7-9150-C57A989C8319}"/>
+                <a16:creationId xmlns:a16="http://schemas.microsoft.com/office/drawing/2014/main" id="{7C61846C-C006-4D28-BCEA-8AAE9D9EB640}"/>
               </a:ext>
             </a:extLst>
           </p:cNvPr>
@@ -7589,81 +8186,237 @@
           <p:cNvPr id="3" name="">
             <a:extLst xmlns:a="http://schemas.openxmlformats.org/drawingml/2006/main">
               <a:ext uri="{FF2B5EF4-FFF2-40B4-BE49-F238E27FC236}">
-                <a16:creationId xmlns:a16="http://schemas.microsoft.com/office/drawing/2014/main" id="{7928D9F9-F29F-4BF9-AEF5-7925ACC87503}"/>
-              </a:ext>
-            </a:extLst>
-          </p:cNvPr>
-          <p:cNvSpPr>
-            <a:spLocks xmlns:a="http://schemas.openxmlformats.org/drawingml/2006/main" noGrp="1"/>
-          </p:cNvSpPr>
-          <p:nvPr/>
-        </p:nvSpPr>
-        <p:spPr>
-          <a:xfrm xmlns:a="http://schemas.openxmlformats.org/drawingml/2006/main">
-            <a:off x="514350" y="1524000"/>
-            <a:ext cx="2095500" cy="342900"/>
-          </a:xfrm>
-          <a:prstGeom xmlns:a="http://schemas.openxmlformats.org/drawingml/2006/main" prst="rect">
-            <a:avLst/>
-          </a:prstGeom>
-          <a:noFill xmlns:a="http://schemas.openxmlformats.org/drawingml/2006/main"/>
-          <a:ln xmlns:a="http://schemas.openxmlformats.org/drawingml/2006/main" w="0">
-            <a:noFill/>
-            <a:prstDash val="solid"/>
-          </a:ln>
-        </p:spPr>
-        <p:txBody>
-          <a:bodyPr xmlns:a="http://schemas.openxmlformats.org/drawingml/2006/main"/>
-          <a:lstStyle xmlns:a="http://schemas.openxmlformats.org/drawingml/2006/main"/>
-          <a:p xmlns:a="http://schemas.openxmlformats.org/drawingml/2006/main">
-            <a:pPr algn="l">
-              <a:defRPr sz="1425" b="1">
-                <a:solidFill>
-                  <a:srgbClr val="101010"/>
-                </a:solidFill>
-                <a:latin typeface="Malgun Gothic"/>
-                <a:ea typeface="Malgun Gothic"/>
-                <a:cs typeface="Malgun Gothic"/>
-              </a:defRPr>
-            </a:pPr>
-            <a:r>
-              <a:rPr sz="1425" b="1">
-                <a:solidFill>
-                  <a:srgbClr val="101010"/>
-                </a:solidFill>
-                <a:latin typeface="Malgun Gothic"/>
-                <a:ea typeface="Malgun Gothic"/>
-                <a:cs typeface="Malgun Gothic"/>
-              </a:rPr>
-              <a:t>Gateway</a:t>
-            </a:r>
-          </a:p>
-        </p:txBody>
+                <a16:creationId xmlns:a16="http://schemas.microsoft.com/office/drawing/2014/main" id="{244A387D-4833-4457-9485-FE71829908DE}"/>
+              </a:ext>
+            </a:extLst>
+          </p:cNvPr>
+          <p:cNvSpPr>
+            <a:spLocks xmlns:a="http://schemas.openxmlformats.org/drawingml/2006/main" noGrp="1"/>
+          </p:cNvSpPr>
+          <p:nvPr/>
+        </p:nvSpPr>
+        <p:spPr>
+          <a:xfrm xmlns:a="http://schemas.openxmlformats.org/drawingml/2006/main">
+            <a:off x="400050" y="1809750"/>
+            <a:ext cx="3562350" cy="3714750"/>
+          </a:xfrm>
+          <a:prstGeom xmlns:a="http://schemas.openxmlformats.org/drawingml/2006/main" prst="rect">
+            <a:avLst/>
+          </a:prstGeom>
+          <a:solidFill xmlns:a="http://schemas.openxmlformats.org/drawingml/2006/main">
+            <a:srgbClr val="EDEDED"/>
+          </a:solidFill>
+          <a:ln xmlns:a="http://schemas.openxmlformats.org/drawingml/2006/main" w="0">
+            <a:noFill/>
+            <a:prstDash val="solid"/>
+          </a:ln>
+        </p:spPr>
       </p:sp>
       <p:sp>
         <p:nvSpPr>
           <p:cNvPr id="4" name="">
             <a:extLst xmlns:a="http://schemas.openxmlformats.org/drawingml/2006/main">
               <a:ext uri="{FF2B5EF4-FFF2-40B4-BE49-F238E27FC236}">
-                <a16:creationId xmlns:a16="http://schemas.microsoft.com/office/drawing/2014/main" id="{179CA543-1FAE-4436-AE2A-FE2D3CD37059}"/>
-              </a:ext>
-            </a:extLst>
-          </p:cNvPr>
-          <p:cNvSpPr>
-            <a:spLocks xmlns:a="http://schemas.openxmlformats.org/drawingml/2006/main" noGrp="1"/>
-          </p:cNvSpPr>
-          <p:nvPr/>
-        </p:nvSpPr>
-        <p:spPr>
-          <a:xfrm xmlns:a="http://schemas.openxmlformats.org/drawingml/2006/main">
-            <a:off x="2724150" y="1447800"/>
-            <a:ext cx="19050" cy="447675"/>
+                <a16:creationId xmlns:a16="http://schemas.microsoft.com/office/drawing/2014/main" id="{885AC724-7620-488B-B1E2-5AE703B69CAE}"/>
+              </a:ext>
+            </a:extLst>
+          </p:cNvPr>
+          <p:cNvSpPr>
+            <a:spLocks xmlns:a="http://schemas.openxmlformats.org/drawingml/2006/main" noGrp="1"/>
+          </p:cNvSpPr>
+          <p:nvPr/>
+        </p:nvSpPr>
+        <p:spPr>
+          <a:xfrm xmlns:a="http://schemas.openxmlformats.org/drawingml/2006/main">
+            <a:off x="647700" y="2143125"/>
+            <a:ext cx="3048000" cy="342900"/>
+          </a:xfrm>
+          <a:prstGeom xmlns:a="http://schemas.openxmlformats.org/drawingml/2006/main" prst="rect">
+            <a:avLst/>
+          </a:prstGeom>
+          <a:noFill xmlns:a="http://schemas.openxmlformats.org/drawingml/2006/main"/>
+          <a:ln xmlns:a="http://schemas.openxmlformats.org/drawingml/2006/main" w="0">
+            <a:noFill/>
+            <a:prstDash val="solid"/>
+          </a:ln>
+        </p:spPr>
+        <p:txBody>
+          <a:bodyPr xmlns:a="http://schemas.openxmlformats.org/drawingml/2006/main"/>
+          <a:lstStyle xmlns:a="http://schemas.openxmlformats.org/drawingml/2006/main"/>
+          <a:p xmlns:a="http://schemas.openxmlformats.org/drawingml/2006/main">
+            <a:pPr algn="l">
+              <a:defRPr sz="1650" b="1">
+                <a:solidFill>
+                  <a:srgbClr val="101010"/>
+                </a:solidFill>
+                <a:latin typeface="Malgun Gothic"/>
+                <a:ea typeface="Malgun Gothic"/>
+                <a:cs typeface="Malgun Gothic"/>
+              </a:defRPr>
+            </a:pPr>
+            <a:r>
+              <a:rPr sz="1650" b="1">
+                <a:solidFill>
+                  <a:srgbClr val="101010"/>
+                </a:solidFill>
+                <a:latin typeface="Malgun Gothic"/>
+                <a:ea typeface="Malgun Gothic"/>
+                <a:cs typeface="Malgun Gothic"/>
+              </a:rPr>
+              <a:t>MIRROR</a:t>
+            </a:r>
+          </a:p>
+        </p:txBody>
+      </p:sp>
+      <p:sp>
+        <p:nvSpPr>
+          <p:cNvPr id="5" name="">
+            <a:extLst xmlns:a="http://schemas.openxmlformats.org/drawingml/2006/main">
+              <a:ext uri="{FF2B5EF4-FFF2-40B4-BE49-F238E27FC236}">
+                <a16:creationId xmlns:a16="http://schemas.microsoft.com/office/drawing/2014/main" id="{C4C14D54-80FA-4481-8651-5D22CB233487}"/>
+              </a:ext>
+            </a:extLst>
+          </p:cNvPr>
+          <p:cNvSpPr>
+            <a:spLocks xmlns:a="http://schemas.openxmlformats.org/drawingml/2006/main" noGrp="1"/>
+          </p:cNvSpPr>
+          <p:nvPr/>
+        </p:nvSpPr>
+        <p:spPr>
+          <a:xfrm xmlns:a="http://schemas.openxmlformats.org/drawingml/2006/main">
+            <a:off x="647700" y="2876550"/>
+            <a:ext cx="3048000" cy="2095500"/>
+          </a:xfrm>
+          <a:prstGeom xmlns:a="http://schemas.openxmlformats.org/drawingml/2006/main" prst="rect">
+            <a:avLst/>
+          </a:prstGeom>
+          <a:noFill xmlns:a="http://schemas.openxmlformats.org/drawingml/2006/main"/>
+          <a:ln xmlns:a="http://schemas.openxmlformats.org/drawingml/2006/main" w="0">
+            <a:noFill/>
+            <a:prstDash val="solid"/>
+          </a:ln>
+        </p:spPr>
+        <p:txBody>
+          <a:bodyPr xmlns:a="http://schemas.openxmlformats.org/drawingml/2006/main"/>
+          <a:lstStyle xmlns:a="http://schemas.openxmlformats.org/drawingml/2006/main"/>
+          <a:p xmlns:a="http://schemas.openxmlformats.org/drawingml/2006/main">
+            <a:pPr algn="l">
+              <a:defRPr sz="1575" b="0">
+                <a:solidFill>
+                  <a:srgbClr val="101010"/>
+                </a:solidFill>
+                <a:latin typeface="Malgun Gothic"/>
+                <a:ea typeface="Malgun Gothic"/>
+                <a:cs typeface="Malgun Gothic"/>
+              </a:defRPr>
+            </a:pPr>
+            <a:r>
+              <a:rPr sz="1575" b="0">
+                <a:solidFill>
+                  <a:srgbClr val="101010"/>
+                </a:solidFill>
+                <a:latin typeface="Malgun Gothic"/>
+                <a:ea typeface="Malgun Gothic"/>
+                <a:cs typeface="Malgun Gothic"/>
+              </a:rPr>
+              <a:t>Bare Repository</a:t>
+            </a:r>
+          </a:p>
+          <a:p xmlns:a="http://schemas.openxmlformats.org/drawingml/2006/main">
+            <a:pPr algn="l">
+              <a:defRPr sz="1575" b="0">
+                <a:solidFill>
+                  <a:srgbClr val="101010"/>
+                </a:solidFill>
+                <a:latin typeface="Malgun Gothic"/>
+                <a:ea typeface="Malgun Gothic"/>
+                <a:cs typeface="Malgun Gothic"/>
+              </a:defRPr>
+            </a:pPr>
+            <a:r>
+              <a:rPr sz="1575" b="0">
+                <a:solidFill>
+                  <a:srgbClr val="101010"/>
+                </a:solidFill>
+                <a:latin typeface="Malgun Gothic"/>
+                <a:ea typeface="Malgun Gothic"/>
+                <a:cs typeface="Malgun Gothic"/>
+              </a:rPr>
+              <a:t>Candidate Ref 보호</a:t>
+            </a:r>
+          </a:p>
+          <a:p xmlns:a="http://schemas.openxmlformats.org/drawingml/2006/main">
+            <a:pPr algn="l">
+              <a:defRPr sz="1575" b="0">
+                <a:solidFill>
+                  <a:srgbClr val="101010"/>
+                </a:solidFill>
+                <a:latin typeface="Malgun Gothic"/>
+                <a:ea typeface="Malgun Gothic"/>
+                <a:cs typeface="Malgun Gothic"/>
+              </a:defRPr>
+            </a:pPr>
+            <a:r>
+              <a:rPr sz="1575" b="0">
+                <a:solidFill>
+                  <a:srgbClr val="101010"/>
+                </a:solidFill>
+                <a:latin typeface="Malgun Gothic"/>
+                <a:ea typeface="Malgun Gothic"/>
+                <a:cs typeface="Malgun Gothic"/>
+              </a:rPr>
+              <a:t>Remote·Commit 검증</a:t>
+            </a:r>
+          </a:p>
+          <a:p xmlns:a="http://schemas.openxmlformats.org/drawingml/2006/main">
+            <a:pPr algn="l">
+              <a:defRPr sz="1575" b="0">
+                <a:solidFill>
+                  <a:srgbClr val="101010"/>
+                </a:solidFill>
+                <a:latin typeface="Malgun Gothic"/>
+                <a:ea typeface="Malgun Gothic"/>
+                <a:cs typeface="Malgun Gothic"/>
+              </a:defRPr>
+            </a:pPr>
+            <a:r>
+              <a:rPr sz="1575" b="0">
+                <a:solidFill>
+                  <a:srgbClr val="101010"/>
+                </a:solidFill>
+                <a:latin typeface="Malgun Gothic"/>
+                <a:ea typeface="Malgun Gothic"/>
+                <a:cs typeface="Malgun Gothic"/>
+              </a:rPr>
+              <a:t>Repository File Lock</a:t>
+            </a:r>
+          </a:p>
+        </p:txBody>
+      </p:sp>
+      <p:sp>
+        <p:nvSpPr>
+          <p:cNvPr id="6" name="">
+            <a:extLst xmlns:a="http://schemas.openxmlformats.org/drawingml/2006/main">
+              <a:ext uri="{FF2B5EF4-FFF2-40B4-BE49-F238E27FC236}">
+                <a16:creationId xmlns:a16="http://schemas.microsoft.com/office/drawing/2014/main" id="{693AE5ED-C06C-4A26-8D1E-5AFE484D8B04}"/>
+              </a:ext>
+            </a:extLst>
+          </p:cNvPr>
+          <p:cNvSpPr>
+            <a:spLocks xmlns:a="http://schemas.openxmlformats.org/drawingml/2006/main" noGrp="1"/>
+          </p:cNvSpPr>
+          <p:nvPr/>
+        </p:nvSpPr>
+        <p:spPr>
+          <a:xfrm xmlns:a="http://schemas.openxmlformats.org/drawingml/2006/main">
+            <a:off x="4314825" y="1809750"/>
+            <a:ext cx="3562350" cy="3714750"/>
           </a:xfrm>
           <a:prstGeom xmlns:a="http://schemas.openxmlformats.org/drawingml/2006/main" prst="rect">
             <a:avLst/>
           </a:prstGeom>
           <a:solidFill xmlns:a="http://schemas.openxmlformats.org/drawingml/2006/main">
-            <a:srgbClr val="B8BCC4"/>
+            <a:srgbClr val="DDF3FF"/>
           </a:solidFill>
           <a:ln xmlns:a="http://schemas.openxmlformats.org/drawingml/2006/main" w="0">
             <a:noFill/>
@@ -7673,140 +8426,209 @@
       </p:sp>
       <p:sp>
         <p:nvSpPr>
-          <p:cNvPr id="5" name="">
-            <a:extLst xmlns:a="http://schemas.openxmlformats.org/drawingml/2006/main">
-              <a:ext uri="{FF2B5EF4-FFF2-40B4-BE49-F238E27FC236}">
-                <a16:creationId xmlns:a16="http://schemas.microsoft.com/office/drawing/2014/main" id="{AFB30FE0-B447-4404-82E5-13FE86871F03}"/>
-              </a:ext>
-            </a:extLst>
-          </p:cNvPr>
-          <p:cNvSpPr>
-            <a:spLocks xmlns:a="http://schemas.openxmlformats.org/drawingml/2006/main" noGrp="1"/>
-          </p:cNvSpPr>
-          <p:nvPr/>
-        </p:nvSpPr>
-        <p:spPr>
-          <a:xfrm xmlns:a="http://schemas.openxmlformats.org/drawingml/2006/main">
-            <a:off x="3009900" y="1524000"/>
-            <a:ext cx="8382000" cy="381000"/>
-          </a:xfrm>
-          <a:prstGeom xmlns:a="http://schemas.openxmlformats.org/drawingml/2006/main" prst="rect">
-            <a:avLst/>
-          </a:prstGeom>
-          <a:noFill xmlns:a="http://schemas.openxmlformats.org/drawingml/2006/main"/>
-          <a:ln xmlns:a="http://schemas.openxmlformats.org/drawingml/2006/main" w="0">
-            <a:noFill/>
-            <a:prstDash val="solid"/>
-          </a:ln>
-        </p:spPr>
-        <p:txBody>
-          <a:bodyPr xmlns:a="http://schemas.openxmlformats.org/drawingml/2006/main"/>
-          <a:lstStyle xmlns:a="http://schemas.openxmlformats.org/drawingml/2006/main"/>
-          <a:p xmlns:a="http://schemas.openxmlformats.org/drawingml/2006/main">
-            <a:pPr algn="l">
-              <a:defRPr sz="1350" b="0">
-                <a:solidFill>
-                  <a:srgbClr val="101010"/>
-                </a:solidFill>
-                <a:latin typeface="Malgun Gothic"/>
-                <a:ea typeface="Malgun Gothic"/>
-                <a:cs typeface="Malgun Gothic"/>
-              </a:defRPr>
-            </a:pPr>
-            <a:r>
-              <a:rPr sz="1350" b="0">
-                <a:solidFill>
-                  <a:srgbClr val="101010"/>
-                </a:solidFill>
-                <a:latin typeface="Malgun Gothic"/>
-                <a:ea typeface="Malgun Gothic"/>
-                <a:cs typeface="Malgun Gothic"/>
-              </a:rPr>
-              <a:t>0.2.0 · Healthy · Image b0c3fd…dd4b</a:t>
-            </a:r>
-          </a:p>
-        </p:txBody>
-      </p:sp>
-      <p:sp>
-        <p:nvSpPr>
-          <p:cNvPr id="6" name="">
-            <a:extLst xmlns:a="http://schemas.openxmlformats.org/drawingml/2006/main">
-              <a:ext uri="{FF2B5EF4-FFF2-40B4-BE49-F238E27FC236}">
-                <a16:creationId xmlns:a16="http://schemas.microsoft.com/office/drawing/2014/main" id="{AAA285AF-C5F2-4546-975A-C306CB255C17}"/>
-              </a:ext>
-            </a:extLst>
-          </p:cNvPr>
-          <p:cNvSpPr>
-            <a:spLocks xmlns:a="http://schemas.openxmlformats.org/drawingml/2006/main" noGrp="1"/>
-          </p:cNvSpPr>
-          <p:nvPr/>
-        </p:nvSpPr>
-        <p:spPr>
-          <a:xfrm xmlns:a="http://schemas.openxmlformats.org/drawingml/2006/main">
-            <a:off x="514350" y="2238375"/>
-            <a:ext cx="2095500" cy="342900"/>
-          </a:xfrm>
-          <a:prstGeom xmlns:a="http://schemas.openxmlformats.org/drawingml/2006/main" prst="rect">
-            <a:avLst/>
-          </a:prstGeom>
-          <a:noFill xmlns:a="http://schemas.openxmlformats.org/drawingml/2006/main"/>
-          <a:ln xmlns:a="http://schemas.openxmlformats.org/drawingml/2006/main" w="0">
-            <a:noFill/>
-            <a:prstDash val="solid"/>
-          </a:ln>
-        </p:spPr>
-        <p:txBody>
-          <a:bodyPr xmlns:a="http://schemas.openxmlformats.org/drawingml/2006/main"/>
-          <a:lstStyle xmlns:a="http://schemas.openxmlformats.org/drawingml/2006/main"/>
-          <a:p xmlns:a="http://schemas.openxmlformats.org/drawingml/2006/main">
-            <a:pPr algn="l">
-              <a:defRPr sz="1425" b="1">
-                <a:solidFill>
-                  <a:srgbClr val="101010"/>
-                </a:solidFill>
-                <a:latin typeface="Malgun Gothic"/>
-                <a:ea typeface="Malgun Gothic"/>
-                <a:cs typeface="Malgun Gothic"/>
-              </a:defRPr>
-            </a:pPr>
-            <a:r>
-              <a:rPr sz="1425" b="1">
-                <a:solidFill>
-                  <a:srgbClr val="101010"/>
-                </a:solidFill>
-                <a:latin typeface="Malgun Gothic"/>
-                <a:ea typeface="Malgun Gothic"/>
-                <a:cs typeface="Malgun Gothic"/>
-              </a:rPr>
-              <a:t>Database</a:t>
-            </a:r>
-          </a:p>
-        </p:txBody>
-      </p:sp>
-      <p:sp>
-        <p:nvSpPr>
           <p:cNvPr id="7" name="">
             <a:extLst xmlns:a="http://schemas.openxmlformats.org/drawingml/2006/main">
               <a:ext uri="{FF2B5EF4-FFF2-40B4-BE49-F238E27FC236}">
-                <a16:creationId xmlns:a16="http://schemas.microsoft.com/office/drawing/2014/main" id="{F62EA484-A0AE-41DE-BD1C-42F3F62EE0E2}"/>
-              </a:ext>
-            </a:extLst>
-          </p:cNvPr>
-          <p:cNvSpPr>
-            <a:spLocks xmlns:a="http://schemas.openxmlformats.org/drawingml/2006/main" noGrp="1"/>
-          </p:cNvSpPr>
-          <p:nvPr/>
-        </p:nvSpPr>
-        <p:spPr>
-          <a:xfrm xmlns:a="http://schemas.openxmlformats.org/drawingml/2006/main">
-            <a:off x="2724150" y="2162175"/>
-            <a:ext cx="19050" cy="447675"/>
+                <a16:creationId xmlns:a16="http://schemas.microsoft.com/office/drawing/2014/main" id="{C5DAE61E-0961-4EBE-86CA-7DDF200358A3}"/>
+              </a:ext>
+            </a:extLst>
+          </p:cNvPr>
+          <p:cNvSpPr>
+            <a:spLocks xmlns:a="http://schemas.openxmlformats.org/drawingml/2006/main" noGrp="1"/>
+          </p:cNvSpPr>
+          <p:nvPr/>
+        </p:nvSpPr>
+        <p:spPr>
+          <a:xfrm xmlns:a="http://schemas.openxmlformats.org/drawingml/2006/main">
+            <a:off x="4562475" y="2143125"/>
+            <a:ext cx="3048000" cy="342900"/>
+          </a:xfrm>
+          <a:prstGeom xmlns:a="http://schemas.openxmlformats.org/drawingml/2006/main" prst="rect">
+            <a:avLst/>
+          </a:prstGeom>
+          <a:noFill xmlns:a="http://schemas.openxmlformats.org/drawingml/2006/main"/>
+          <a:ln xmlns:a="http://schemas.openxmlformats.org/drawingml/2006/main" w="0">
+            <a:noFill/>
+            <a:prstDash val="solid"/>
+          </a:ln>
+        </p:spPr>
+        <p:txBody>
+          <a:bodyPr xmlns:a="http://schemas.openxmlformats.org/drawingml/2006/main"/>
+          <a:lstStyle xmlns:a="http://schemas.openxmlformats.org/drawingml/2006/main"/>
+          <a:p xmlns:a="http://schemas.openxmlformats.org/drawingml/2006/main">
+            <a:pPr algn="l">
+              <a:defRPr sz="1650" b="1">
+                <a:solidFill>
+                  <a:srgbClr val="3D8DFF"/>
+                </a:solidFill>
+                <a:latin typeface="Malgun Gothic"/>
+                <a:ea typeface="Malgun Gothic"/>
+                <a:cs typeface="Malgun Gothic"/>
+              </a:defRPr>
+            </a:pPr>
+            <a:r>
+              <a:rPr sz="1650" b="1">
+                <a:solidFill>
+                  <a:srgbClr val="3D8DFF"/>
+                </a:solidFill>
+                <a:latin typeface="Malgun Gothic"/>
+                <a:ea typeface="Malgun Gothic"/>
+                <a:cs typeface="Malgun Gothic"/>
+              </a:rPr>
+              <a:t>QUARANTINE</a:t>
+            </a:r>
+          </a:p>
+        </p:txBody>
+      </p:sp>
+      <p:sp>
+        <p:nvSpPr>
+          <p:cNvPr id="8" name="">
+            <a:extLst xmlns:a="http://schemas.openxmlformats.org/drawingml/2006/main">
+              <a:ext uri="{FF2B5EF4-FFF2-40B4-BE49-F238E27FC236}">
+                <a16:creationId xmlns:a16="http://schemas.microsoft.com/office/drawing/2014/main" id="{A423D974-CE4E-49CC-874B-C41566B4F13C}"/>
+              </a:ext>
+            </a:extLst>
+          </p:cNvPr>
+          <p:cNvSpPr>
+            <a:spLocks xmlns:a="http://schemas.openxmlformats.org/drawingml/2006/main" noGrp="1"/>
+          </p:cNvSpPr>
+          <p:nvPr/>
+        </p:nvSpPr>
+        <p:spPr>
+          <a:xfrm xmlns:a="http://schemas.openxmlformats.org/drawingml/2006/main">
+            <a:off x="4562475" y="2876550"/>
+            <a:ext cx="3048000" cy="2095500"/>
+          </a:xfrm>
+          <a:prstGeom xmlns:a="http://schemas.openxmlformats.org/drawingml/2006/main" prst="rect">
+            <a:avLst/>
+          </a:prstGeom>
+          <a:noFill xmlns:a="http://schemas.openxmlformats.org/drawingml/2006/main"/>
+          <a:ln xmlns:a="http://schemas.openxmlformats.org/drawingml/2006/main" w="0">
+            <a:noFill/>
+            <a:prstDash val="solid"/>
+          </a:ln>
+        </p:spPr>
+        <p:txBody>
+          <a:bodyPr xmlns:a="http://schemas.openxmlformats.org/drawingml/2006/main"/>
+          <a:lstStyle xmlns:a="http://schemas.openxmlformats.org/drawingml/2006/main"/>
+          <a:p xmlns:a="http://schemas.openxmlformats.org/drawingml/2006/main">
+            <a:pPr algn="l">
+              <a:defRPr sz="1575" b="0">
+                <a:solidFill>
+                  <a:srgbClr val="101010"/>
+                </a:solidFill>
+                <a:latin typeface="Malgun Gothic"/>
+                <a:ea typeface="Malgun Gothic"/>
+                <a:cs typeface="Malgun Gothic"/>
+              </a:defRPr>
+            </a:pPr>
+            <a:r>
+              <a:rPr sz="1575" b="0">
+                <a:solidFill>
+                  <a:srgbClr val="101010"/>
+                </a:solidFill>
+                <a:latin typeface="Malgun Gothic"/>
+                <a:ea typeface="Malgun Gothic"/>
+                <a:cs typeface="Malgun Gothic"/>
+              </a:rPr>
+              <a:t>D0 Allowlist</a:t>
+            </a:r>
+          </a:p>
+          <a:p xmlns:a="http://schemas.openxmlformats.org/drawingml/2006/main">
+            <a:pPr algn="l">
+              <a:defRPr sz="1575" b="0">
+                <a:solidFill>
+                  <a:srgbClr val="101010"/>
+                </a:solidFill>
+                <a:latin typeface="Malgun Gothic"/>
+                <a:ea typeface="Malgun Gothic"/>
+                <a:cs typeface="Malgun Gothic"/>
+              </a:defRPr>
+            </a:pPr>
+            <a:r>
+              <a:rPr sz="1575" b="0">
+                <a:solidFill>
+                  <a:srgbClr val="101010"/>
+                </a:solidFill>
+                <a:latin typeface="Malgun Gothic"/>
+                <a:ea typeface="Malgun Gothic"/>
+                <a:cs typeface="Malgun Gothic"/>
+              </a:rPr>
+              <a:t>Binary·Encoding·1 MiB</a:t>
+            </a:r>
+          </a:p>
+          <a:p xmlns:a="http://schemas.openxmlformats.org/drawingml/2006/main">
+            <a:pPr algn="l">
+              <a:defRPr sz="1575" b="0">
+                <a:solidFill>
+                  <a:srgbClr val="101010"/>
+                </a:solidFill>
+                <a:latin typeface="Malgun Gothic"/>
+                <a:ea typeface="Malgun Gothic"/>
+                <a:cs typeface="Malgun Gothic"/>
+              </a:defRPr>
+            </a:pPr>
+            <a:r>
+              <a:rPr sz="1575" b="0">
+                <a:solidFill>
+                  <a:srgbClr val="101010"/>
+                </a:solidFill>
+                <a:latin typeface="Malgun Gothic"/>
+                <a:ea typeface="Malgun Gothic"/>
+                <a:cs typeface="Malgun Gothic"/>
+              </a:rPr>
+              <a:t>Secret·PII·Injection</a:t>
+            </a:r>
+          </a:p>
+          <a:p xmlns:a="http://schemas.openxmlformats.org/drawingml/2006/main">
+            <a:pPr algn="l">
+              <a:defRPr sz="1575" b="0">
+                <a:solidFill>
+                  <a:srgbClr val="101010"/>
+                </a:solidFill>
+                <a:latin typeface="Malgun Gothic"/>
+                <a:ea typeface="Malgun Gothic"/>
+                <a:cs typeface="Malgun Gothic"/>
+              </a:defRPr>
+            </a:pPr>
+            <a:r>
+              <a:rPr sz="1575" b="0">
+                <a:solidFill>
+                  <a:srgbClr val="101010"/>
+                </a:solidFill>
+                <a:latin typeface="Malgun Gothic"/>
+                <a:ea typeface="Malgun Gothic"/>
+                <a:cs typeface="Malgun Gothic"/>
+              </a:rPr>
+              <a:t>제외 원문 미저장</a:t>
+            </a:r>
+          </a:p>
+        </p:txBody>
+      </p:sp>
+      <p:sp>
+        <p:nvSpPr>
+          <p:cNvPr id="9" name="">
+            <a:extLst xmlns:a="http://schemas.openxmlformats.org/drawingml/2006/main">
+              <a:ext uri="{FF2B5EF4-FFF2-40B4-BE49-F238E27FC236}">
+                <a16:creationId xmlns:a16="http://schemas.microsoft.com/office/drawing/2014/main" id="{D25B8A53-78B9-45BB-A72B-BDCD790D99C1}"/>
+              </a:ext>
+            </a:extLst>
+          </p:cNvPr>
+          <p:cNvSpPr>
+            <a:spLocks xmlns:a="http://schemas.openxmlformats.org/drawingml/2006/main" noGrp="1"/>
+          </p:cNvSpPr>
+          <p:nvPr/>
+        </p:nvSpPr>
+        <p:spPr>
+          <a:xfrm xmlns:a="http://schemas.openxmlformats.org/drawingml/2006/main">
+            <a:off x="8229600" y="1809750"/>
+            <a:ext cx="3562350" cy="3714750"/>
           </a:xfrm>
           <a:prstGeom xmlns:a="http://schemas.openxmlformats.org/drawingml/2006/main" prst="rect">
             <a:avLst/>
           </a:prstGeom>
           <a:solidFill xmlns:a="http://schemas.openxmlformats.org/drawingml/2006/main">
-            <a:srgbClr val="B8BCC4"/>
+            <a:srgbClr val="EDEDED"/>
           </a:solidFill>
           <a:ln xmlns:a="http://schemas.openxmlformats.org/drawingml/2006/main" w="0">
             <a:noFill/>
@@ -7816,199 +8638,181 @@
       </p:sp>
       <p:sp>
         <p:nvSpPr>
-          <p:cNvPr id="8" name="">
-            <a:extLst xmlns:a="http://schemas.openxmlformats.org/drawingml/2006/main">
-              <a:ext uri="{FF2B5EF4-FFF2-40B4-BE49-F238E27FC236}">
-                <a16:creationId xmlns:a16="http://schemas.microsoft.com/office/drawing/2014/main" id="{FB3D3D72-13CA-48CF-9B81-75BA8D765B78}"/>
-              </a:ext>
-            </a:extLst>
-          </p:cNvPr>
-          <p:cNvSpPr>
-            <a:spLocks xmlns:a="http://schemas.openxmlformats.org/drawingml/2006/main" noGrp="1"/>
-          </p:cNvSpPr>
-          <p:nvPr/>
-        </p:nvSpPr>
-        <p:spPr>
-          <a:xfrm xmlns:a="http://schemas.openxmlformats.org/drawingml/2006/main">
-            <a:off x="3009900" y="2238375"/>
-            <a:ext cx="8382000" cy="381000"/>
-          </a:xfrm>
-          <a:prstGeom xmlns:a="http://schemas.openxmlformats.org/drawingml/2006/main" prst="rect">
-            <a:avLst/>
-          </a:prstGeom>
-          <a:noFill xmlns:a="http://schemas.openxmlformats.org/drawingml/2006/main"/>
-          <a:ln xmlns:a="http://schemas.openxmlformats.org/drawingml/2006/main" w="0">
-            <a:noFill/>
-            <a:prstDash val="solid"/>
-          </a:ln>
-        </p:spPr>
-        <p:txBody>
-          <a:bodyPr xmlns:a="http://schemas.openxmlformats.org/drawingml/2006/main"/>
-          <a:lstStyle xmlns:a="http://schemas.openxmlformats.org/drawingml/2006/main"/>
-          <a:p xmlns:a="http://schemas.openxmlformats.org/drawingml/2006/main">
-            <a:pPr algn="l">
-              <a:defRPr sz="1350" b="0">
-                <a:solidFill>
-                  <a:srgbClr val="101010"/>
-                </a:solidFill>
-                <a:latin typeface="Malgun Gothic"/>
-                <a:ea typeface="Malgun Gothic"/>
-                <a:cs typeface="Malgun Gothic"/>
-              </a:defRPr>
-            </a:pPr>
-            <a:r>
-              <a:rPr sz="1350" b="0">
-                <a:solidFill>
-                  <a:srgbClr val="101010"/>
-                </a:solidFill>
-                <a:latin typeface="Malgun Gothic"/>
-                <a:ea typeface="Malgun Gothic"/>
-                <a:cs typeface="Malgun Gothic"/>
-              </a:rPr>
-              <a:t>18 Table · 9 Profile · vector + pg_trgm</a:t>
-            </a:r>
-          </a:p>
-        </p:txBody>
-      </p:sp>
-      <p:sp>
-        <p:nvSpPr>
-          <p:cNvPr id="9" name="">
-            <a:extLst xmlns:a="http://schemas.openxmlformats.org/drawingml/2006/main">
-              <a:ext uri="{FF2B5EF4-FFF2-40B4-BE49-F238E27FC236}">
-                <a16:creationId xmlns:a16="http://schemas.microsoft.com/office/drawing/2014/main" id="{ACF594B8-0966-4A42-AE18-70F07137A7DD}"/>
-              </a:ext>
-            </a:extLst>
-          </p:cNvPr>
-          <p:cNvSpPr>
-            <a:spLocks xmlns:a="http://schemas.openxmlformats.org/drawingml/2006/main" noGrp="1"/>
-          </p:cNvSpPr>
-          <p:nvPr/>
-        </p:nvSpPr>
-        <p:spPr>
-          <a:xfrm xmlns:a="http://schemas.openxmlformats.org/drawingml/2006/main">
-            <a:off x="514350" y="2952750"/>
-            <a:ext cx="2095500" cy="342900"/>
-          </a:xfrm>
-          <a:prstGeom xmlns:a="http://schemas.openxmlformats.org/drawingml/2006/main" prst="rect">
-            <a:avLst/>
-          </a:prstGeom>
-          <a:noFill xmlns:a="http://schemas.openxmlformats.org/drawingml/2006/main"/>
-          <a:ln xmlns:a="http://schemas.openxmlformats.org/drawingml/2006/main" w="0">
-            <a:noFill/>
-            <a:prstDash val="solid"/>
-          </a:ln>
-        </p:spPr>
-        <p:txBody>
-          <a:bodyPr xmlns:a="http://schemas.openxmlformats.org/drawingml/2006/main"/>
-          <a:lstStyle xmlns:a="http://schemas.openxmlformats.org/drawingml/2006/main"/>
-          <a:p xmlns:a="http://schemas.openxmlformats.org/drawingml/2006/main">
-            <a:pPr algn="l">
-              <a:defRPr sz="1425" b="1">
-                <a:solidFill>
-                  <a:srgbClr val="101010"/>
-                </a:solidFill>
-                <a:latin typeface="Malgun Gothic"/>
-                <a:ea typeface="Malgun Gothic"/>
-                <a:cs typeface="Malgun Gothic"/>
-              </a:defRPr>
-            </a:pPr>
-            <a:r>
-              <a:rPr sz="1425" b="1">
-                <a:solidFill>
-                  <a:srgbClr val="101010"/>
-                </a:solidFill>
-                <a:latin typeface="Malgun Gothic"/>
-                <a:ea typeface="Malgun Gothic"/>
-                <a:cs typeface="Malgun Gothic"/>
-              </a:rPr>
-              <a:t>Canary</a:t>
-            </a:r>
-          </a:p>
-        </p:txBody>
-      </p:sp>
-      <p:sp>
-        <p:nvSpPr>
           <p:cNvPr id="10" name="">
             <a:extLst xmlns:a="http://schemas.openxmlformats.org/drawingml/2006/main">
               <a:ext uri="{FF2B5EF4-FFF2-40B4-BE49-F238E27FC236}">
-                <a16:creationId xmlns:a16="http://schemas.microsoft.com/office/drawing/2014/main" id="{20AA482C-9FB1-45E7-815B-B27E98F29651}"/>
-              </a:ext>
-            </a:extLst>
-          </p:cNvPr>
-          <p:cNvSpPr>
-            <a:spLocks xmlns:a="http://schemas.openxmlformats.org/drawingml/2006/main" noGrp="1"/>
-          </p:cNvSpPr>
-          <p:nvPr/>
-        </p:nvSpPr>
-        <p:spPr>
-          <a:xfrm xmlns:a="http://schemas.openxmlformats.org/drawingml/2006/main">
-            <a:off x="2724150" y="2876550"/>
-            <a:ext cx="19050" cy="447675"/>
-          </a:xfrm>
-          <a:prstGeom xmlns:a="http://schemas.openxmlformats.org/drawingml/2006/main" prst="rect">
-            <a:avLst/>
-          </a:prstGeom>
-          <a:solidFill xmlns:a="http://schemas.openxmlformats.org/drawingml/2006/main">
-            <a:srgbClr val="B8BCC4"/>
-          </a:solidFill>
-          <a:ln xmlns:a="http://schemas.openxmlformats.org/drawingml/2006/main" w="0">
-            <a:noFill/>
-            <a:prstDash val="solid"/>
-          </a:ln>
-        </p:spPr>
+                <a16:creationId xmlns:a16="http://schemas.microsoft.com/office/drawing/2014/main" id="{457AC612-56A7-433C-BA0C-127494B95E8F}"/>
+              </a:ext>
+            </a:extLst>
+          </p:cNvPr>
+          <p:cNvSpPr>
+            <a:spLocks xmlns:a="http://schemas.openxmlformats.org/drawingml/2006/main" noGrp="1"/>
+          </p:cNvSpPr>
+          <p:nvPr/>
+        </p:nvSpPr>
+        <p:spPr>
+          <a:xfrm xmlns:a="http://schemas.openxmlformats.org/drawingml/2006/main">
+            <a:off x="8477250" y="2143125"/>
+            <a:ext cx="3048000" cy="342900"/>
+          </a:xfrm>
+          <a:prstGeom xmlns:a="http://schemas.openxmlformats.org/drawingml/2006/main" prst="rect">
+            <a:avLst/>
+          </a:prstGeom>
+          <a:noFill xmlns:a="http://schemas.openxmlformats.org/drawingml/2006/main"/>
+          <a:ln xmlns:a="http://schemas.openxmlformats.org/drawingml/2006/main" w="0">
+            <a:noFill/>
+            <a:prstDash val="solid"/>
+          </a:ln>
+        </p:spPr>
+        <p:txBody>
+          <a:bodyPr xmlns:a="http://schemas.openxmlformats.org/drawingml/2006/main"/>
+          <a:lstStyle xmlns:a="http://schemas.openxmlformats.org/drawingml/2006/main"/>
+          <a:p xmlns:a="http://schemas.openxmlformats.org/drawingml/2006/main">
+            <a:pPr algn="l">
+              <a:defRPr sz="1650" b="1">
+                <a:solidFill>
+                  <a:srgbClr val="101010"/>
+                </a:solidFill>
+                <a:latin typeface="Malgun Gothic"/>
+                <a:ea typeface="Malgun Gothic"/>
+                <a:cs typeface="Malgun Gothic"/>
+              </a:defRPr>
+            </a:pPr>
+            <a:r>
+              <a:rPr sz="1650" b="1">
+                <a:solidFill>
+                  <a:srgbClr val="101010"/>
+                </a:solidFill>
+                <a:latin typeface="Malgun Gothic"/>
+                <a:ea typeface="Malgun Gothic"/>
+                <a:cs typeface="Malgun Gothic"/>
+              </a:rPr>
+              <a:t>RUNTIME</a:t>
+            </a:r>
+          </a:p>
+        </p:txBody>
       </p:sp>
       <p:sp>
         <p:nvSpPr>
           <p:cNvPr id="11" name="">
             <a:extLst xmlns:a="http://schemas.openxmlformats.org/drawingml/2006/main">
               <a:ext uri="{FF2B5EF4-FFF2-40B4-BE49-F238E27FC236}">
-                <a16:creationId xmlns:a16="http://schemas.microsoft.com/office/drawing/2014/main" id="{F1F19A4F-FCBF-4138-931C-DACA123CF2E6}"/>
-              </a:ext>
-            </a:extLst>
-          </p:cNvPr>
-          <p:cNvSpPr>
-            <a:spLocks xmlns:a="http://schemas.openxmlformats.org/drawingml/2006/main" noGrp="1"/>
-          </p:cNvSpPr>
-          <p:nvPr/>
-        </p:nvSpPr>
-        <p:spPr>
-          <a:xfrm xmlns:a="http://schemas.openxmlformats.org/drawingml/2006/main">
-            <a:off x="3009900" y="2952750"/>
-            <a:ext cx="8382000" cy="381000"/>
-          </a:xfrm>
-          <a:prstGeom xmlns:a="http://schemas.openxmlformats.org/drawingml/2006/main" prst="rect">
-            <a:avLst/>
-          </a:prstGeom>
-          <a:noFill xmlns:a="http://schemas.openxmlformats.org/drawingml/2006/main"/>
-          <a:ln xmlns:a="http://schemas.openxmlformats.org/drawingml/2006/main" w="0">
-            <a:noFill/>
-            <a:prstDash val="solid"/>
-          </a:ln>
-        </p:spPr>
-        <p:txBody>
-          <a:bodyPr xmlns:a="http://schemas.openxmlformats.org/drawingml/2006/main"/>
-          <a:lstStyle xmlns:a="http://schemas.openxmlformats.org/drawingml/2006/main"/>
-          <a:p xmlns:a="http://schemas.openxmlformats.org/drawingml/2006/main">
-            <a:pPr algn="l">
-              <a:defRPr sz="1350" b="0">
-                <a:solidFill>
-                  <a:srgbClr val="101010"/>
-                </a:solidFill>
-                <a:latin typeface="Malgun Gothic"/>
-                <a:ea typeface="Malgun Gothic"/>
-                <a:cs typeface="Malgun Gothic"/>
-              </a:defRPr>
-            </a:pPr>
-            <a:r>
-              <a:rPr sz="1350" b="0">
-                <a:solidFill>
-                  <a:srgbClr val="101010"/>
-                </a:solidFill>
-                <a:latin typeface="Malgun Gothic"/>
-                <a:ea typeface="Malgun Gothic"/>
-                <a:cs typeface="Malgun Gothic"/>
-              </a:rPr>
-              <a:t>GENIE 34 / 34 Eligible · Excluded 0 · Blocking 0</a:t>
+                <a16:creationId xmlns:a16="http://schemas.microsoft.com/office/drawing/2014/main" id="{B6C1FC59-8070-43DF-8C68-FFD34838A78A}"/>
+              </a:ext>
+            </a:extLst>
+          </p:cNvPr>
+          <p:cNvSpPr>
+            <a:spLocks xmlns:a="http://schemas.openxmlformats.org/drawingml/2006/main" noGrp="1"/>
+          </p:cNvSpPr>
+          <p:nvPr/>
+        </p:nvSpPr>
+        <p:spPr>
+          <a:xfrm xmlns:a="http://schemas.openxmlformats.org/drawingml/2006/main">
+            <a:off x="8477250" y="2876550"/>
+            <a:ext cx="3048000" cy="2095500"/>
+          </a:xfrm>
+          <a:prstGeom xmlns:a="http://schemas.openxmlformats.org/drawingml/2006/main" prst="rect">
+            <a:avLst/>
+          </a:prstGeom>
+          <a:noFill xmlns:a="http://schemas.openxmlformats.org/drawingml/2006/main"/>
+          <a:ln xmlns:a="http://schemas.openxmlformats.org/drawingml/2006/main" w="0">
+            <a:noFill/>
+            <a:prstDash val="solid"/>
+          </a:ln>
+        </p:spPr>
+        <p:txBody>
+          <a:bodyPr xmlns:a="http://schemas.openxmlformats.org/drawingml/2006/main"/>
+          <a:lstStyle xmlns:a="http://schemas.openxmlformats.org/drawingml/2006/main"/>
+          <a:p xmlns:a="http://schemas.openxmlformats.org/drawingml/2006/main">
+            <a:pPr algn="l">
+              <a:defRPr sz="1575" b="0">
+                <a:solidFill>
+                  <a:srgbClr val="101010"/>
+                </a:solidFill>
+                <a:latin typeface="Malgun Gothic"/>
+                <a:ea typeface="Malgun Gothic"/>
+                <a:cs typeface="Malgun Gothic"/>
+              </a:defRPr>
+            </a:pPr>
+            <a:r>
+              <a:rPr sz="1575" b="0">
+                <a:solidFill>
+                  <a:srgbClr val="101010"/>
+                </a:solidFill>
+                <a:latin typeface="Malgun Gothic"/>
+                <a:ea typeface="Malgun Gothic"/>
+                <a:cs typeface="Malgun Gothic"/>
+              </a:rPr>
+              <a:t>Named Volume 영속</a:t>
+            </a:r>
+          </a:p>
+          <a:p xmlns:a="http://schemas.openxmlformats.org/drawingml/2006/main">
+            <a:pPr algn="l">
+              <a:defRPr sz="1575" b="0">
+                <a:solidFill>
+                  <a:srgbClr val="101010"/>
+                </a:solidFill>
+                <a:latin typeface="Malgun Gothic"/>
+                <a:ea typeface="Malgun Gothic"/>
+                <a:cs typeface="Malgun Gothic"/>
+              </a:defRPr>
+            </a:pPr>
+            <a:r>
+              <a:rPr sz="1575" b="0">
+                <a:solidFill>
+                  <a:srgbClr val="101010"/>
+                </a:solidFill>
+                <a:latin typeface="Malgun Gothic"/>
+                <a:ea typeface="Malgun Gothic"/>
+                <a:cs typeface="Malgun Gothic"/>
+              </a:rPr>
+              <a:t>UID 10001 · Read-only Root</a:t>
+            </a:r>
+          </a:p>
+          <a:p xmlns:a="http://schemas.openxmlformats.org/drawingml/2006/main">
+            <a:pPr algn="l">
+              <a:defRPr sz="1575" b="0">
+                <a:solidFill>
+                  <a:srgbClr val="101010"/>
+                </a:solidFill>
+                <a:latin typeface="Malgun Gothic"/>
+                <a:ea typeface="Malgun Gothic"/>
+                <a:cs typeface="Malgun Gothic"/>
+              </a:defRPr>
+            </a:pPr>
+            <a:r>
+              <a:rPr sz="1575" b="0">
+                <a:solidFill>
+                  <a:srgbClr val="101010"/>
+                </a:solidFill>
+                <a:latin typeface="Malgun Gothic"/>
+                <a:ea typeface="Malgun Gothic"/>
+                <a:cs typeface="Malgun Gothic"/>
+              </a:rPr>
+              <a:t>Capability ALL Drop</a:t>
+            </a:r>
+          </a:p>
+          <a:p xmlns:a="http://schemas.openxmlformats.org/drawingml/2006/main">
+            <a:pPr algn="l">
+              <a:defRPr sz="1575" b="0">
+                <a:solidFill>
+                  <a:srgbClr val="101010"/>
+                </a:solidFill>
+                <a:latin typeface="Malgun Gothic"/>
+                <a:ea typeface="Malgun Gothic"/>
+                <a:cs typeface="Malgun Gothic"/>
+              </a:defRPr>
+            </a:pPr>
+            <a:r>
+              <a:rPr sz="1575" b="0">
+                <a:solidFill>
+                  <a:srgbClr val="101010"/>
+                </a:solidFill>
+                <a:latin typeface="Malgun Gothic"/>
+                <a:ea typeface="Malgun Gothic"/>
+                <a:cs typeface="Malgun Gothic"/>
+              </a:rPr>
+              <a:t>Checkout·Hook·Build 금지</a:t>
             </a:r>
           </a:p>
         </p:txBody>
@@ -8018,482 +8822,53 @@
           <p:cNvPr id="12" name="">
             <a:extLst xmlns:a="http://schemas.openxmlformats.org/drawingml/2006/main">
               <a:ext uri="{FF2B5EF4-FFF2-40B4-BE49-F238E27FC236}">
-                <a16:creationId xmlns:a16="http://schemas.microsoft.com/office/drawing/2014/main" id="{12A214A8-9978-46E0-81C7-EBD65D0D6D9C}"/>
-              </a:ext>
-            </a:extLst>
-          </p:cNvPr>
-          <p:cNvSpPr>
-            <a:spLocks xmlns:a="http://schemas.openxmlformats.org/drawingml/2006/main" noGrp="1"/>
-          </p:cNvSpPr>
-          <p:nvPr/>
-        </p:nvSpPr>
-        <p:spPr>
-          <a:xfrm xmlns:a="http://schemas.openxmlformats.org/drawingml/2006/main">
-            <a:off x="514350" y="3667125"/>
-            <a:ext cx="2095500" cy="342900"/>
-          </a:xfrm>
-          <a:prstGeom xmlns:a="http://schemas.openxmlformats.org/drawingml/2006/main" prst="rect">
-            <a:avLst/>
-          </a:prstGeom>
-          <a:noFill xmlns:a="http://schemas.openxmlformats.org/drawingml/2006/main"/>
-          <a:ln xmlns:a="http://schemas.openxmlformats.org/drawingml/2006/main" w="0">
-            <a:noFill/>
-            <a:prstDash val="solid"/>
-          </a:ln>
-        </p:spPr>
-        <p:txBody>
-          <a:bodyPr xmlns:a="http://schemas.openxmlformats.org/drawingml/2006/main"/>
-          <a:lstStyle xmlns:a="http://schemas.openxmlformats.org/drawingml/2006/main"/>
-          <a:p xmlns:a="http://schemas.openxmlformats.org/drawingml/2006/main">
-            <a:pPr algn="l">
-              <a:defRPr sz="1425" b="1">
-                <a:solidFill>
-                  <a:srgbClr val="101010"/>
-                </a:solidFill>
-                <a:latin typeface="Malgun Gothic"/>
-                <a:ea typeface="Malgun Gothic"/>
-                <a:cs typeface="Malgun Gothic"/>
-              </a:defRPr>
-            </a:pPr>
-            <a:r>
-              <a:rPr sz="1425" b="1">
-                <a:solidFill>
-                  <a:srgbClr val="101010"/>
-                </a:solidFill>
-                <a:latin typeface="Malgun Gothic"/>
-                <a:ea typeface="Malgun Gothic"/>
-                <a:cs typeface="Malgun Gothic"/>
-              </a:rPr>
-              <a:t>Approval</a:t>
-            </a:r>
-          </a:p>
-        </p:txBody>
-      </p:sp>
-      <p:sp>
-        <p:nvSpPr>
-          <p:cNvPr id="13" name="">
-            <a:extLst xmlns:a="http://schemas.openxmlformats.org/drawingml/2006/main">
-              <a:ext uri="{FF2B5EF4-FFF2-40B4-BE49-F238E27FC236}">
-                <a16:creationId xmlns:a16="http://schemas.microsoft.com/office/drawing/2014/main" id="{92BD3F2F-F791-4A56-8804-8B3B68926570}"/>
-              </a:ext>
-            </a:extLst>
-          </p:cNvPr>
-          <p:cNvSpPr>
-            <a:spLocks xmlns:a="http://schemas.openxmlformats.org/drawingml/2006/main" noGrp="1"/>
-          </p:cNvSpPr>
-          <p:nvPr/>
-        </p:nvSpPr>
-        <p:spPr>
-          <a:xfrm xmlns:a="http://schemas.openxmlformats.org/drawingml/2006/main">
-            <a:off x="2724150" y="3590925"/>
-            <a:ext cx="19050" cy="447675"/>
-          </a:xfrm>
-          <a:prstGeom xmlns:a="http://schemas.openxmlformats.org/drawingml/2006/main" prst="rect">
-            <a:avLst/>
-          </a:prstGeom>
-          <a:solidFill xmlns:a="http://schemas.openxmlformats.org/drawingml/2006/main">
-            <a:srgbClr val="B8BCC4"/>
-          </a:solidFill>
-          <a:ln xmlns:a="http://schemas.openxmlformats.org/drawingml/2006/main" w="0">
-            <a:noFill/>
-            <a:prstDash val="solid"/>
-          </a:ln>
-        </p:spPr>
-      </p:sp>
-      <p:sp>
-        <p:nvSpPr>
-          <p:cNvPr id="14" name="">
-            <a:extLst xmlns:a="http://schemas.openxmlformats.org/drawingml/2006/main">
-              <a:ext uri="{FF2B5EF4-FFF2-40B4-BE49-F238E27FC236}">
-                <a16:creationId xmlns:a16="http://schemas.microsoft.com/office/drawing/2014/main" id="{BD8E8D2A-53E0-488C-B746-538212FE2308}"/>
-              </a:ext>
-            </a:extLst>
-          </p:cNvPr>
-          <p:cNvSpPr>
-            <a:spLocks xmlns:a="http://schemas.openxmlformats.org/drawingml/2006/main" noGrp="1"/>
-          </p:cNvSpPr>
-          <p:nvPr/>
-        </p:nvSpPr>
-        <p:spPr>
-          <a:xfrm xmlns:a="http://schemas.openxmlformats.org/drawingml/2006/main">
-            <a:off x="3009900" y="3667125"/>
-            <a:ext cx="8382000" cy="381000"/>
-          </a:xfrm>
-          <a:prstGeom xmlns:a="http://schemas.openxmlformats.org/drawingml/2006/main" prst="rect">
-            <a:avLst/>
-          </a:prstGeom>
-          <a:noFill xmlns:a="http://schemas.openxmlformats.org/drawingml/2006/main"/>
-          <a:ln xmlns:a="http://schemas.openxmlformats.org/drawingml/2006/main" w="0">
-            <a:noFill/>
-            <a:prstDash val="solid"/>
-          </a:ln>
-        </p:spPr>
-        <p:txBody>
-          <a:bodyPr xmlns:a="http://schemas.openxmlformats.org/drawingml/2006/main"/>
-          <a:lstStyle xmlns:a="http://schemas.openxmlformats.org/drawingml/2006/main"/>
-          <a:p xmlns:a="http://schemas.openxmlformats.org/drawingml/2006/main">
-            <a:pPr algn="l">
-              <a:defRPr sz="1350" b="0">
-                <a:solidFill>
-                  <a:srgbClr val="101010"/>
-                </a:solidFill>
-                <a:latin typeface="Malgun Gothic"/>
-                <a:ea typeface="Malgun Gothic"/>
-                <a:cs typeface="Malgun Gothic"/>
-              </a:defRPr>
-            </a:pPr>
-            <a:r>
-              <a:rPr sz="1350" b="0">
-                <a:solidFill>
-                  <a:srgbClr val="101010"/>
-                </a:solidFill>
-                <a:latin typeface="Malgun Gothic"/>
-                <a:ea typeface="Malgun Gothic"/>
-                <a:cs typeface="Malgun Gothic"/>
-              </a:rPr>
-              <a:t>REGISTERED 8 · QUARANTINED 1 · APPROVED 0</a:t>
-            </a:r>
-          </a:p>
-        </p:txBody>
-      </p:sp>
-      <p:sp>
-        <p:nvSpPr>
-          <p:cNvPr id="15" name="">
-            <a:extLst xmlns:a="http://schemas.openxmlformats.org/drawingml/2006/main">
-              <a:ext uri="{FF2B5EF4-FFF2-40B4-BE49-F238E27FC236}">
-                <a16:creationId xmlns:a16="http://schemas.microsoft.com/office/drawing/2014/main" id="{0C9067E2-006F-48A9-8EBD-5A117FA66078}"/>
-              </a:ext>
-            </a:extLst>
-          </p:cNvPr>
-          <p:cNvSpPr>
-            <a:spLocks xmlns:a="http://schemas.openxmlformats.org/drawingml/2006/main" noGrp="1"/>
-          </p:cNvSpPr>
-          <p:nvPr/>
-        </p:nvSpPr>
-        <p:spPr>
-          <a:xfrm xmlns:a="http://schemas.openxmlformats.org/drawingml/2006/main">
-            <a:off x="514350" y="4381500"/>
-            <a:ext cx="2095500" cy="342900"/>
-          </a:xfrm>
-          <a:prstGeom xmlns:a="http://schemas.openxmlformats.org/drawingml/2006/main" prst="rect">
-            <a:avLst/>
-          </a:prstGeom>
-          <a:noFill xmlns:a="http://schemas.openxmlformats.org/drawingml/2006/main"/>
-          <a:ln xmlns:a="http://schemas.openxmlformats.org/drawingml/2006/main" w="0">
-            <a:noFill/>
-            <a:prstDash val="solid"/>
-          </a:ln>
-        </p:spPr>
-        <p:txBody>
-          <a:bodyPr xmlns:a="http://schemas.openxmlformats.org/drawingml/2006/main"/>
-          <a:lstStyle xmlns:a="http://schemas.openxmlformats.org/drawingml/2006/main"/>
-          <a:p xmlns:a="http://schemas.openxmlformats.org/drawingml/2006/main">
-            <a:pPr algn="l">
-              <a:defRPr sz="1425" b="1">
-                <a:solidFill>
-                  <a:srgbClr val="B42318"/>
-                </a:solidFill>
-                <a:latin typeface="Malgun Gothic"/>
-                <a:ea typeface="Malgun Gothic"/>
-                <a:cs typeface="Malgun Gothic"/>
-              </a:defRPr>
-            </a:pPr>
-            <a:r>
-              <a:rPr sz="1425" b="1">
-                <a:solidFill>
-                  <a:srgbClr val="B42318"/>
-                </a:solidFill>
-                <a:latin typeface="Malgun Gothic"/>
-                <a:ea typeface="Malgun Gothic"/>
-                <a:cs typeface="Malgun Gothic"/>
-              </a:rPr>
-              <a:t>Fail closed</a:t>
-            </a:r>
-          </a:p>
-        </p:txBody>
-      </p:sp>
-      <p:sp>
-        <p:nvSpPr>
-          <p:cNvPr id="16" name="">
-            <a:extLst xmlns:a="http://schemas.openxmlformats.org/drawingml/2006/main">
-              <a:ext uri="{FF2B5EF4-FFF2-40B4-BE49-F238E27FC236}">
-                <a16:creationId xmlns:a16="http://schemas.microsoft.com/office/drawing/2014/main" id="{FE120DFE-1A03-48AE-BF5E-4F7690940416}"/>
-              </a:ext>
-            </a:extLst>
-          </p:cNvPr>
-          <p:cNvSpPr>
-            <a:spLocks xmlns:a="http://schemas.openxmlformats.org/drawingml/2006/main" noGrp="1"/>
-          </p:cNvSpPr>
-          <p:nvPr/>
-        </p:nvSpPr>
-        <p:spPr>
-          <a:xfrm xmlns:a="http://schemas.openxmlformats.org/drawingml/2006/main">
-            <a:off x="2724150" y="4305300"/>
-            <a:ext cx="19050" cy="447675"/>
-          </a:xfrm>
-          <a:prstGeom xmlns:a="http://schemas.openxmlformats.org/drawingml/2006/main" prst="rect">
-            <a:avLst/>
-          </a:prstGeom>
-          <a:solidFill xmlns:a="http://schemas.openxmlformats.org/drawingml/2006/main">
-            <a:srgbClr val="B42318"/>
-          </a:solidFill>
-          <a:ln xmlns:a="http://schemas.openxmlformats.org/drawingml/2006/main" w="0">
-            <a:noFill/>
-            <a:prstDash val="solid"/>
-          </a:ln>
-        </p:spPr>
-      </p:sp>
-      <p:sp>
-        <p:nvSpPr>
-          <p:cNvPr id="17" name="">
-            <a:extLst xmlns:a="http://schemas.openxmlformats.org/drawingml/2006/main">
-              <a:ext uri="{FF2B5EF4-FFF2-40B4-BE49-F238E27FC236}">
-                <a16:creationId xmlns:a16="http://schemas.microsoft.com/office/drawing/2014/main" id="{1A7784B9-91AD-46DC-BA2D-6B2E94E4E760}"/>
-              </a:ext>
-            </a:extLst>
-          </p:cNvPr>
-          <p:cNvSpPr>
-            <a:spLocks xmlns:a="http://schemas.openxmlformats.org/drawingml/2006/main" noGrp="1"/>
-          </p:cNvSpPr>
-          <p:nvPr/>
-        </p:nvSpPr>
-        <p:spPr>
-          <a:xfrm xmlns:a="http://schemas.openxmlformats.org/drawingml/2006/main">
-            <a:off x="3009900" y="4381500"/>
-            <a:ext cx="8382000" cy="381000"/>
-          </a:xfrm>
-          <a:prstGeom xmlns:a="http://schemas.openxmlformats.org/drawingml/2006/main" prst="rect">
-            <a:avLst/>
-          </a:prstGeom>
-          <a:noFill xmlns:a="http://schemas.openxmlformats.org/drawingml/2006/main"/>
-          <a:ln xmlns:a="http://schemas.openxmlformats.org/drawingml/2006/main" w="0">
-            <a:noFill/>
-            <a:prstDash val="solid"/>
-          </a:ln>
-        </p:spPr>
-        <p:txBody>
-          <a:bodyPr xmlns:a="http://schemas.openxmlformats.org/drawingml/2006/main"/>
-          <a:lstStyle xmlns:a="http://schemas.openxmlformats.org/drawingml/2006/main"/>
-          <a:p xmlns:a="http://schemas.openxmlformats.org/drawingml/2006/main">
-            <a:pPr algn="l">
-              <a:defRPr sz="1350" b="0">
-                <a:solidFill>
-                  <a:srgbClr val="101010"/>
-                </a:solidFill>
-                <a:latin typeface="Malgun Gothic"/>
-                <a:ea typeface="Malgun Gothic"/>
-                <a:cs typeface="Malgun Gothic"/>
-              </a:defRPr>
-            </a:pPr>
-            <a:r>
-              <a:rPr sz="1350" b="0">
-                <a:solidFill>
-                  <a:srgbClr val="101010"/>
-                </a:solidFill>
-                <a:latin typeface="Malgun Gothic"/>
-                <a:ea typeface="Malgun Gothic"/>
-                <a:cs typeface="Malgun Gothic"/>
-              </a:rPr>
-              <a:t>미승인 Ingestion HTTP 409 · Query ABSTAINED</a:t>
-            </a:r>
-          </a:p>
-        </p:txBody>
-      </p:sp>
-      <p:sp>
-        <p:nvSpPr>
-          <p:cNvPr id="18" name="">
-            <a:extLst xmlns:a="http://schemas.openxmlformats.org/drawingml/2006/main">
-              <a:ext uri="{FF2B5EF4-FFF2-40B4-BE49-F238E27FC236}">
-                <a16:creationId xmlns:a16="http://schemas.microsoft.com/office/drawing/2014/main" id="{437F43F6-B782-40C9-93C3-D2728158DDF3}"/>
-              </a:ext>
-            </a:extLst>
-          </p:cNvPr>
-          <p:cNvSpPr>
-            <a:spLocks xmlns:a="http://schemas.openxmlformats.org/drawingml/2006/main" noGrp="1"/>
-          </p:cNvSpPr>
-          <p:nvPr/>
-        </p:nvSpPr>
-        <p:spPr>
-          <a:xfrm xmlns:a="http://schemas.openxmlformats.org/drawingml/2006/main">
-            <a:off x="514350" y="5095875"/>
-            <a:ext cx="2095500" cy="342900"/>
-          </a:xfrm>
-          <a:prstGeom xmlns:a="http://schemas.openxmlformats.org/drawingml/2006/main" prst="rect">
-            <a:avLst/>
-          </a:prstGeom>
-          <a:noFill xmlns:a="http://schemas.openxmlformats.org/drawingml/2006/main"/>
-          <a:ln xmlns:a="http://schemas.openxmlformats.org/drawingml/2006/main" w="0">
-            <a:noFill/>
-            <a:prstDash val="solid"/>
-          </a:ln>
-        </p:spPr>
-        <p:txBody>
-          <a:bodyPr xmlns:a="http://schemas.openxmlformats.org/drawingml/2006/main"/>
-          <a:lstStyle xmlns:a="http://schemas.openxmlformats.org/drawingml/2006/main"/>
-          <a:p xmlns:a="http://schemas.openxmlformats.org/drawingml/2006/main">
-            <a:pPr algn="l">
-              <a:defRPr sz="1425" b="1">
-                <a:solidFill>
-                  <a:srgbClr val="101010"/>
-                </a:solidFill>
-                <a:latin typeface="Malgun Gothic"/>
-                <a:ea typeface="Malgun Gothic"/>
-                <a:cs typeface="Malgun Gothic"/>
-              </a:defRPr>
-            </a:pPr>
-            <a:r>
-              <a:rPr sz="1425" b="1">
-                <a:solidFill>
-                  <a:srgbClr val="101010"/>
-                </a:solidFill>
-                <a:latin typeface="Malgun Gothic"/>
-                <a:ea typeface="Malgun Gothic"/>
-                <a:cs typeface="Malgun Gothic"/>
-              </a:rPr>
-              <a:t>Isolation</a:t>
-            </a:r>
-          </a:p>
-        </p:txBody>
-      </p:sp>
-      <p:sp>
-        <p:nvSpPr>
-          <p:cNvPr id="19" name="">
-            <a:extLst xmlns:a="http://schemas.openxmlformats.org/drawingml/2006/main">
-              <a:ext uri="{FF2B5EF4-FFF2-40B4-BE49-F238E27FC236}">
-                <a16:creationId xmlns:a16="http://schemas.microsoft.com/office/drawing/2014/main" id="{83AE69C1-DB0C-4224-989D-0EDB512C0243}"/>
-              </a:ext>
-            </a:extLst>
-          </p:cNvPr>
-          <p:cNvSpPr>
-            <a:spLocks xmlns:a="http://schemas.openxmlformats.org/drawingml/2006/main" noGrp="1"/>
-          </p:cNvSpPr>
-          <p:nvPr/>
-        </p:nvSpPr>
-        <p:spPr>
-          <a:xfrm xmlns:a="http://schemas.openxmlformats.org/drawingml/2006/main">
-            <a:off x="2724150" y="5019675"/>
-            <a:ext cx="19050" cy="447675"/>
-          </a:xfrm>
-          <a:prstGeom xmlns:a="http://schemas.openxmlformats.org/drawingml/2006/main" prst="rect">
-            <a:avLst/>
-          </a:prstGeom>
-          <a:solidFill xmlns:a="http://schemas.openxmlformats.org/drawingml/2006/main">
-            <a:srgbClr val="B8BCC4"/>
-          </a:solidFill>
-          <a:ln xmlns:a="http://schemas.openxmlformats.org/drawingml/2006/main" w="0">
-            <a:noFill/>
-            <a:prstDash val="solid"/>
-          </a:ln>
-        </p:spPr>
-      </p:sp>
-      <p:sp>
-        <p:nvSpPr>
-          <p:cNvPr id="20" name="">
-            <a:extLst xmlns:a="http://schemas.openxmlformats.org/drawingml/2006/main">
-              <a:ext uri="{FF2B5EF4-FFF2-40B4-BE49-F238E27FC236}">
-                <a16:creationId xmlns:a16="http://schemas.microsoft.com/office/drawing/2014/main" id="{789EC7E1-2895-4DCF-A4B0-F403C7257543}"/>
-              </a:ext>
-            </a:extLst>
-          </p:cNvPr>
-          <p:cNvSpPr>
-            <a:spLocks xmlns:a="http://schemas.openxmlformats.org/drawingml/2006/main" noGrp="1"/>
-          </p:cNvSpPr>
-          <p:nvPr/>
-        </p:nvSpPr>
-        <p:spPr>
-          <a:xfrm xmlns:a="http://schemas.openxmlformats.org/drawingml/2006/main">
-            <a:off x="3009900" y="5095875"/>
-            <a:ext cx="8382000" cy="381000"/>
-          </a:xfrm>
-          <a:prstGeom xmlns:a="http://schemas.openxmlformats.org/drawingml/2006/main" prst="rect">
-            <a:avLst/>
-          </a:prstGeom>
-          <a:noFill xmlns:a="http://schemas.openxmlformats.org/drawingml/2006/main"/>
-          <a:ln xmlns:a="http://schemas.openxmlformats.org/drawingml/2006/main" w="0">
-            <a:noFill/>
-            <a:prstDash val="solid"/>
-          </a:ln>
-        </p:spPr>
-        <p:txBody>
-          <a:bodyPr xmlns:a="http://schemas.openxmlformats.org/drawingml/2006/main"/>
-          <a:lstStyle xmlns:a="http://schemas.openxmlformats.org/drawingml/2006/main"/>
-          <a:p xmlns:a="http://schemas.openxmlformats.org/drawingml/2006/main">
-            <a:pPr algn="l">
-              <a:defRPr sz="1350" b="0">
-                <a:solidFill>
-                  <a:srgbClr val="101010"/>
-                </a:solidFill>
-                <a:latin typeface="Malgun Gothic"/>
-                <a:ea typeface="Malgun Gothic"/>
-                <a:cs typeface="Malgun Gothic"/>
-              </a:defRPr>
-            </a:pPr>
-            <a:r>
-              <a:rPr sz="1350" b="0">
-                <a:solidFill>
-                  <a:srgbClr val="101010"/>
-                </a:solidFill>
-                <a:latin typeface="Malgun Gothic"/>
-                <a:ea typeface="Malgun Gothic"/>
-                <a:cs typeface="Malgun Gothic"/>
-              </a:rPr>
-              <a:t>기존 Activepieces 6 Container 모두 Healthy</a:t>
-            </a:r>
-          </a:p>
-        </p:txBody>
-      </p:sp>
-      <p:sp>
-        <p:nvSpPr>
-          <p:cNvPr id="21" name="">
-            <a:extLst xmlns:a="http://schemas.openxmlformats.org/drawingml/2006/main">
-              <a:ext uri="{FF2B5EF4-FFF2-40B4-BE49-F238E27FC236}">
-                <a16:creationId xmlns:a16="http://schemas.microsoft.com/office/drawing/2014/main" id="{36843AF1-922D-4949-ABD8-619109DA74C2}"/>
-              </a:ext>
-            </a:extLst>
-          </p:cNvPr>
-          <p:cNvSpPr>
-            <a:spLocks xmlns:a="http://schemas.openxmlformats.org/drawingml/2006/main" noGrp="1"/>
-          </p:cNvSpPr>
-          <p:nvPr/>
-        </p:nvSpPr>
-        <p:spPr>
-          <a:xfrm xmlns:a="http://schemas.openxmlformats.org/drawingml/2006/main">
-            <a:off x="514350" y="5981700"/>
-            <a:ext cx="10763250" cy="285750"/>
-          </a:xfrm>
-          <a:prstGeom xmlns:a="http://schemas.openxmlformats.org/drawingml/2006/main" prst="rect">
-            <a:avLst/>
-          </a:prstGeom>
-          <a:noFill xmlns:a="http://schemas.openxmlformats.org/drawingml/2006/main"/>
-          <a:ln xmlns:a="http://schemas.openxmlformats.org/drawingml/2006/main" w="0">
-            <a:noFill/>
-            <a:prstDash val="solid"/>
-          </a:ln>
-        </p:spPr>
-        <p:txBody>
-          <a:bodyPr xmlns:a="http://schemas.openxmlformats.org/drawingml/2006/main"/>
-          <a:lstStyle xmlns:a="http://schemas.openxmlformats.org/drawingml/2006/main"/>
-          <a:p xmlns:a="http://schemas.openxmlformats.org/drawingml/2006/main">
-            <a:pPr algn="l">
-              <a:defRPr sz="1275" b="1">
-                <a:solidFill>
-                  <a:srgbClr val="3D8DFF"/>
-                </a:solidFill>
-                <a:latin typeface="Malgun Gothic"/>
-                <a:ea typeface="Malgun Gothic"/>
-                <a:cs typeface="Malgun Gothic"/>
-              </a:defRPr>
-            </a:pPr>
-            <a:r>
-              <a:rPr sz="1275" b="1">
-                <a:solidFill>
-                  <a:srgbClr val="3D8DFF"/>
-                </a:solidFill>
-                <a:latin typeface="Malgun Gothic"/>
-                <a:ea typeface="Malgun Gothic"/>
-                <a:cs typeface="Malgun Gothic"/>
-              </a:rPr>
-              <a:t>백업 후 Migration·Canary를 수행했으며 Secret과 Source 원문은 산출물에 포함하지 않았습니다.</a:t>
+                <a16:creationId xmlns:a16="http://schemas.microsoft.com/office/drawing/2014/main" id="{757A6BE6-5D40-48DD-A0E1-3734C47BAD65}"/>
+              </a:ext>
+            </a:extLst>
+          </p:cNvPr>
+          <p:cNvSpPr>
+            <a:spLocks xmlns:a="http://schemas.openxmlformats.org/drawingml/2006/main" noGrp="1"/>
+          </p:cNvSpPr>
+          <p:nvPr/>
+        </p:nvSpPr>
+        <p:spPr>
+          <a:xfrm xmlns:a="http://schemas.openxmlformats.org/drawingml/2006/main">
+            <a:off x="400050" y="5867400"/>
+            <a:ext cx="10668000" cy="304800"/>
+          </a:xfrm>
+          <a:prstGeom xmlns:a="http://schemas.openxmlformats.org/drawingml/2006/main" prst="rect">
+            <a:avLst/>
+          </a:prstGeom>
+          <a:noFill xmlns:a="http://schemas.openxmlformats.org/drawingml/2006/main"/>
+          <a:ln xmlns:a="http://schemas.openxmlformats.org/drawingml/2006/main" w="0">
+            <a:noFill/>
+            <a:prstDash val="solid"/>
+          </a:ln>
+        </p:spPr>
+        <p:txBody>
+          <a:bodyPr xmlns:a="http://schemas.openxmlformats.org/drawingml/2006/main"/>
+          <a:lstStyle xmlns:a="http://schemas.openxmlformats.org/drawingml/2006/main"/>
+          <a:p xmlns:a="http://schemas.openxmlformats.org/drawingml/2006/main">
+            <a:pPr algn="l">
+              <a:defRPr sz="1350" b="1">
+                <a:solidFill>
+                  <a:srgbClr val="117A4B"/>
+                </a:solidFill>
+                <a:latin typeface="Malgun Gothic"/>
+                <a:ea typeface="Malgun Gothic"/>
+                <a:cs typeface="Malgun Gothic"/>
+              </a:defRPr>
+            </a:pPr>
+            <a:r>
+              <a:rPr sz="1350" b="1">
+                <a:solidFill>
+                  <a:srgbClr val="117A4B"/>
+                </a:solidFill>
+                <a:latin typeface="Malgun Gothic"/>
+                <a:ea typeface="Malgun Gothic"/>
+                <a:cs typeface="Malgun Gothic"/>
+              </a:rPr>
+              <a:t>File API는 Content를 반환하지 않고 Path·Hash·Decision·Rule만 제공합니다.</a:t>
             </a:r>
           </a:p>
         </p:txBody>
@@ -8501,7 +8876,7 @@
     </p:spTree>
     <p:extLst>
       <p:ext uri="{BB962C8B-B14F-4D97-AF65-F5344CB8AC3E}">
-        <p14:creationId xmlns:p14="http://schemas.microsoft.com/office/powerpoint/2010/main" val="1093546570"/>
+        <p14:creationId xmlns:p14="http://schemas.microsoft.com/office/powerpoint/2010/main" val="1567304158"/>
       </p:ext>
     </p:extLst>
   </p:cSld>
@@ -8529,173 +8904,1151 @@
       </p:grpSpPr>
       <p:sp>
         <p:nvSpPr>
+          <p:cNvPr id="25" name="">
+            <a:extLst xmlns:a="http://schemas.openxmlformats.org/drawingml/2006/main">
+              <a:ext uri="{FF2B5EF4-FFF2-40B4-BE49-F238E27FC236}">
+                <a16:creationId xmlns:a16="http://schemas.microsoft.com/office/drawing/2014/main" id="{384CBD22-42C8-40D3-8B1A-B23B36A156A4}"/>
+              </a:ext>
+            </a:extLst>
+          </p:cNvPr>
+          <p:cNvSpPr>
+            <a:spLocks xmlns:a="http://schemas.openxmlformats.org/drawingml/2006/main" noGrp="1"/>
+          </p:cNvSpPr>
+          <p:nvPr/>
+        </p:nvSpPr>
+        <p:spPr>
+          <a:xfrm xmlns:a="http://schemas.openxmlformats.org/drawingml/2006/main">
+            <a:off x="400050" y="323850"/>
+            <a:ext cx="10953750" cy="762000"/>
+          </a:xfrm>
+          <a:prstGeom xmlns:a="http://schemas.openxmlformats.org/drawingml/2006/main" prst="rect">
+            <a:avLst/>
+          </a:prstGeom>
+          <a:noFill xmlns:a="http://schemas.openxmlformats.org/drawingml/2006/main"/>
+          <a:ln xmlns:a="http://schemas.openxmlformats.org/drawingml/2006/main" w="0">
+            <a:noFill/>
+            <a:prstDash val="solid"/>
+          </a:ln>
+        </p:spPr>
+        <p:txBody>
+          <a:bodyPr xmlns:a="http://schemas.openxmlformats.org/drawingml/2006/main"/>
+          <a:lstStyle xmlns:a="http://schemas.openxmlformats.org/drawingml/2006/main"/>
+          <a:p xmlns:a="http://schemas.openxmlformats.org/drawingml/2006/main">
+            <a:pPr algn="l">
+              <a:defRPr sz="2850" b="1">
+                <a:solidFill>
+                  <a:srgbClr val="101010"/>
+                </a:solidFill>
+                <a:latin typeface="Malgun Gothic"/>
+                <a:ea typeface="Malgun Gothic"/>
+                <a:cs typeface="Malgun Gothic"/>
+              </a:defRPr>
+            </a:pPr>
+            <a:r>
+              <a:rPr sz="2850" b="1">
+                <a:solidFill>
+                  <a:srgbClr val="101010"/>
+                </a:solidFill>
+                <a:latin typeface="Malgun Gothic"/>
+                <a:ea typeface="Malgun Gothic"/>
+                <a:cs typeface="Malgun Gothic"/>
+              </a:rPr>
+              <a:t>영속성·오프라인·차단 동작을 시험 서버에서 함께 검증했습니다</a:t>
+            </a:r>
+          </a:p>
+        </p:txBody>
+      </p:sp>
+      <p:sp>
+        <p:nvSpPr>
+          <p:cNvPr id="2" name="">
+            <a:extLst xmlns:a="http://schemas.openxmlformats.org/drawingml/2006/main">
+              <a:ext uri="{FF2B5EF4-FFF2-40B4-BE49-F238E27FC236}">
+                <a16:creationId xmlns:a16="http://schemas.microsoft.com/office/drawing/2014/main" id="{1F542B7C-A297-4A81-B299-20DE1291E6EE}"/>
+              </a:ext>
+            </a:extLst>
+          </p:cNvPr>
+          <p:cNvSpPr>
+            <a:spLocks xmlns:a="http://schemas.openxmlformats.org/drawingml/2006/main" noGrp="1"/>
+          </p:cNvSpPr>
+          <p:nvPr/>
+        </p:nvSpPr>
+        <p:spPr>
+          <a:xfrm xmlns:a="http://schemas.openxmlformats.org/drawingml/2006/main">
+            <a:off x="11258550" y="6305550"/>
+            <a:ext cx="533400" cy="209550"/>
+          </a:xfrm>
+          <a:prstGeom xmlns:a="http://schemas.openxmlformats.org/drawingml/2006/main" prst="rect">
+            <a:avLst/>
+          </a:prstGeom>
+          <a:noFill xmlns:a="http://schemas.openxmlformats.org/drawingml/2006/main"/>
+          <a:ln xmlns:a="http://schemas.openxmlformats.org/drawingml/2006/main" w="0">
+            <a:noFill/>
+            <a:prstDash val="solid"/>
+          </a:ln>
+        </p:spPr>
+        <p:txBody>
+          <a:bodyPr xmlns:a="http://schemas.openxmlformats.org/drawingml/2006/main"/>
+          <a:lstStyle xmlns:a="http://schemas.openxmlformats.org/drawingml/2006/main"/>
+          <a:p xmlns:a="http://schemas.openxmlformats.org/drawingml/2006/main">
+            <a:pPr algn="r">
+              <a:defRPr sz="975" b="0">
+                <a:solidFill>
+                  <a:srgbClr val="5B616B"/>
+                </a:solidFill>
+                <a:latin typeface="Malgun Gothic"/>
+                <a:ea typeface="Malgun Gothic"/>
+                <a:cs typeface="Malgun Gothic"/>
+              </a:defRPr>
+            </a:pPr>
+            <a:r>
+              <a:rPr sz="975" b="0">
+                <a:solidFill>
+                  <a:srgbClr val="5B616B"/>
+                </a:solidFill>
+                <a:latin typeface="Malgun Gothic"/>
+                <a:ea typeface="Malgun Gothic"/>
+                <a:cs typeface="Malgun Gothic"/>
+              </a:rPr>
+              <a:t>08</a:t>
+            </a:r>
+          </a:p>
+        </p:txBody>
+      </p:sp>
+      <p:sp>
+        <p:nvSpPr>
+          <p:cNvPr id="3" name="">
+            <a:extLst xmlns:a="http://schemas.openxmlformats.org/drawingml/2006/main">
+              <a:ext uri="{FF2B5EF4-FFF2-40B4-BE49-F238E27FC236}">
+                <a16:creationId xmlns:a16="http://schemas.microsoft.com/office/drawing/2014/main" id="{21A5967F-D21D-4609-9657-72E8196DBB19}"/>
+              </a:ext>
+            </a:extLst>
+          </p:cNvPr>
+          <p:cNvSpPr>
+            <a:spLocks xmlns:a="http://schemas.openxmlformats.org/drawingml/2006/main" noGrp="1"/>
+          </p:cNvSpPr>
+          <p:nvPr/>
+        </p:nvSpPr>
+        <p:spPr>
+          <a:xfrm xmlns:a="http://schemas.openxmlformats.org/drawingml/2006/main">
+            <a:off x="514350" y="1333500"/>
+            <a:ext cx="2095500" cy="323850"/>
+          </a:xfrm>
+          <a:prstGeom xmlns:a="http://schemas.openxmlformats.org/drawingml/2006/main" prst="rect">
+            <a:avLst/>
+          </a:prstGeom>
+          <a:noFill xmlns:a="http://schemas.openxmlformats.org/drawingml/2006/main"/>
+          <a:ln xmlns:a="http://schemas.openxmlformats.org/drawingml/2006/main" w="0">
+            <a:noFill/>
+            <a:prstDash val="solid"/>
+          </a:ln>
+        </p:spPr>
+        <p:txBody>
+          <a:bodyPr xmlns:a="http://schemas.openxmlformats.org/drawingml/2006/main"/>
+          <a:lstStyle xmlns:a="http://schemas.openxmlformats.org/drawingml/2006/main"/>
+          <a:p xmlns:a="http://schemas.openxmlformats.org/drawingml/2006/main">
+            <a:pPr algn="l">
+              <a:defRPr sz="1350" b="1">
+                <a:solidFill>
+                  <a:srgbClr val="101010"/>
+                </a:solidFill>
+                <a:latin typeface="Malgun Gothic"/>
+                <a:ea typeface="Malgun Gothic"/>
+                <a:cs typeface="Malgun Gothic"/>
+              </a:defRPr>
+            </a:pPr>
+            <a:r>
+              <a:rPr sz="1350" b="1">
+                <a:solidFill>
+                  <a:srgbClr val="101010"/>
+                </a:solidFill>
+                <a:latin typeface="Malgun Gothic"/>
+                <a:ea typeface="Malgun Gothic"/>
+                <a:cs typeface="Malgun Gothic"/>
+              </a:rPr>
+              <a:t>Gateway</a:t>
+            </a:r>
+          </a:p>
+        </p:txBody>
+      </p:sp>
+      <p:sp>
+        <p:nvSpPr>
+          <p:cNvPr id="4" name="">
+            <a:extLst xmlns:a="http://schemas.openxmlformats.org/drawingml/2006/main">
+              <a:ext uri="{FF2B5EF4-FFF2-40B4-BE49-F238E27FC236}">
+                <a16:creationId xmlns:a16="http://schemas.microsoft.com/office/drawing/2014/main" id="{DE4C7DF1-6A41-4ABC-A07E-28F5C938D07D}"/>
+              </a:ext>
+            </a:extLst>
+          </p:cNvPr>
+          <p:cNvSpPr>
+            <a:spLocks xmlns:a="http://schemas.openxmlformats.org/drawingml/2006/main" noGrp="1"/>
+          </p:cNvSpPr>
+          <p:nvPr/>
+        </p:nvSpPr>
+        <p:spPr>
+          <a:xfrm xmlns:a="http://schemas.openxmlformats.org/drawingml/2006/main">
+            <a:off x="2724150" y="1266825"/>
+            <a:ext cx="19050" cy="419100"/>
+          </a:xfrm>
+          <a:prstGeom xmlns:a="http://schemas.openxmlformats.org/drawingml/2006/main" prst="rect">
+            <a:avLst/>
+          </a:prstGeom>
+          <a:solidFill xmlns:a="http://schemas.openxmlformats.org/drawingml/2006/main">
+            <a:srgbClr val="B8BCC4"/>
+          </a:solidFill>
+          <a:ln xmlns:a="http://schemas.openxmlformats.org/drawingml/2006/main" w="0">
+            <a:noFill/>
+            <a:prstDash val="solid"/>
+          </a:ln>
+        </p:spPr>
+      </p:sp>
+      <p:sp>
+        <p:nvSpPr>
+          <p:cNvPr id="5" name="">
+            <a:extLst xmlns:a="http://schemas.openxmlformats.org/drawingml/2006/main">
+              <a:ext uri="{FF2B5EF4-FFF2-40B4-BE49-F238E27FC236}">
+                <a16:creationId xmlns:a16="http://schemas.microsoft.com/office/drawing/2014/main" id="{4B254EB3-C433-400A-AA3C-A322E1E35423}"/>
+              </a:ext>
+            </a:extLst>
+          </p:cNvPr>
+          <p:cNvSpPr>
+            <a:spLocks xmlns:a="http://schemas.openxmlformats.org/drawingml/2006/main" noGrp="1"/>
+          </p:cNvSpPr>
+          <p:nvPr/>
+        </p:nvSpPr>
+        <p:spPr>
+          <a:xfrm xmlns:a="http://schemas.openxmlformats.org/drawingml/2006/main">
+            <a:off x="3009900" y="1333500"/>
+            <a:ext cx="8382000" cy="361950"/>
+          </a:xfrm>
+          <a:prstGeom xmlns:a="http://schemas.openxmlformats.org/drawingml/2006/main" prst="rect">
+            <a:avLst/>
+          </a:prstGeom>
+          <a:noFill xmlns:a="http://schemas.openxmlformats.org/drawingml/2006/main"/>
+          <a:ln xmlns:a="http://schemas.openxmlformats.org/drawingml/2006/main" w="0">
+            <a:noFill/>
+            <a:prstDash val="solid"/>
+          </a:ln>
+        </p:spPr>
+        <p:txBody>
+          <a:bodyPr xmlns:a="http://schemas.openxmlformats.org/drawingml/2006/main"/>
+          <a:lstStyle xmlns:a="http://schemas.openxmlformats.org/drawingml/2006/main"/>
+          <a:p xmlns:a="http://schemas.openxmlformats.org/drawingml/2006/main">
+            <a:pPr algn="l">
+              <a:defRPr sz="1350" b="0">
+                <a:solidFill>
+                  <a:srgbClr val="101010"/>
+                </a:solidFill>
+                <a:latin typeface="Malgun Gothic"/>
+                <a:ea typeface="Malgun Gothic"/>
+                <a:cs typeface="Malgun Gothic"/>
+              </a:defRPr>
+            </a:pPr>
+            <a:r>
+              <a:rPr sz="1350" b="0">
+                <a:solidFill>
+                  <a:srgbClr val="101010"/>
+                </a:solidFill>
+                <a:latin typeface="Malgun Gothic"/>
+                <a:ea typeface="Malgun Gothic"/>
+                <a:cs typeface="Malgun Gothic"/>
+              </a:rPr>
+              <a:t>0.2.1 · Healthy · Image 36ee3c…b1b1c</a:t>
+            </a:r>
+          </a:p>
+        </p:txBody>
+      </p:sp>
+      <p:sp>
+        <p:nvSpPr>
           <p:cNvPr id="6" name="">
             <a:extLst xmlns:a="http://schemas.openxmlformats.org/drawingml/2006/main">
               <a:ext uri="{FF2B5EF4-FFF2-40B4-BE49-F238E27FC236}">
-                <a16:creationId xmlns:a16="http://schemas.microsoft.com/office/drawing/2014/main" id="{AECE28B0-82FE-4DFB-A77A-D9D9CBD499DC}"/>
-              </a:ext>
-            </a:extLst>
-          </p:cNvPr>
-          <p:cNvSpPr>
-            <a:spLocks xmlns:a="http://schemas.openxmlformats.org/drawingml/2006/main" noGrp="1"/>
-          </p:cNvSpPr>
-          <p:nvPr/>
-        </p:nvSpPr>
-        <p:spPr>
-          <a:xfrm xmlns:a="http://schemas.openxmlformats.org/drawingml/2006/main">
-            <a:off x="400050" y="400050"/>
-            <a:ext cx="3429000" cy="400050"/>
-          </a:xfrm>
-          <a:prstGeom xmlns:a="http://schemas.openxmlformats.org/drawingml/2006/main" prst="rect">
-            <a:avLst/>
-          </a:prstGeom>
-          <a:noFill xmlns:a="http://schemas.openxmlformats.org/drawingml/2006/main"/>
-          <a:ln xmlns:a="http://schemas.openxmlformats.org/drawingml/2006/main" w="0">
-            <a:noFill/>
-            <a:prstDash val="solid"/>
-          </a:ln>
-        </p:spPr>
-        <p:txBody>
-          <a:bodyPr xmlns:a="http://schemas.openxmlformats.org/drawingml/2006/main"/>
-          <a:lstStyle xmlns:a="http://schemas.openxmlformats.org/drawingml/2006/main"/>
-          <a:p xmlns:a="http://schemas.openxmlformats.org/drawingml/2006/main">
-            <a:pPr algn="l">
-              <a:defRPr sz="1800" b="1">
-                <a:solidFill>
-                  <a:srgbClr val="101010"/>
-                </a:solidFill>
-                <a:latin typeface="Malgun Gothic"/>
-                <a:ea typeface="Malgun Gothic"/>
-                <a:cs typeface="Malgun Gothic"/>
-              </a:defRPr>
-            </a:pPr>
-            <a:r>
-              <a:rPr sz="1800" b="1">
-                <a:solidFill>
-                  <a:srgbClr val="101010"/>
-                </a:solidFill>
-                <a:latin typeface="Malgun Gothic"/>
-                <a:ea typeface="Malgun Gothic"/>
-                <a:cs typeface="Malgun Gothic"/>
-              </a:rPr>
-              <a:t>NEXT · ISSUE #43</a:t>
-            </a:r>
-          </a:p>
-        </p:txBody>
-      </p:sp>
-      <p:sp>
-        <p:nvSpPr>
-          <p:cNvPr id="2" name="">
-            <a:extLst xmlns:a="http://schemas.openxmlformats.org/drawingml/2006/main">
-              <a:ext uri="{FF2B5EF4-FFF2-40B4-BE49-F238E27FC236}">
-                <a16:creationId xmlns:a16="http://schemas.microsoft.com/office/drawing/2014/main" id="{334E9B76-1504-47FB-ADFD-5E9BCA7A02B2}"/>
-              </a:ext>
-            </a:extLst>
-          </p:cNvPr>
-          <p:cNvSpPr>
-            <a:spLocks xmlns:a="http://schemas.openxmlformats.org/drawingml/2006/main" noGrp="1"/>
-          </p:cNvSpPr>
-          <p:nvPr/>
-        </p:nvSpPr>
-        <p:spPr>
-          <a:xfrm xmlns:a="http://schemas.openxmlformats.org/drawingml/2006/main">
-            <a:off x="400050" y="1676400"/>
-            <a:ext cx="10382250" cy="1809750"/>
-          </a:xfrm>
-          <a:prstGeom xmlns:a="http://schemas.openxmlformats.org/drawingml/2006/main" prst="rect">
-            <a:avLst/>
-          </a:prstGeom>
-          <a:noFill xmlns:a="http://schemas.openxmlformats.org/drawingml/2006/main"/>
-          <a:ln xmlns:a="http://schemas.openxmlformats.org/drawingml/2006/main" w="0">
-            <a:noFill/>
-            <a:prstDash val="solid"/>
-          </a:ln>
-        </p:spPr>
-        <p:txBody>
-          <a:bodyPr xmlns:a="http://schemas.openxmlformats.org/drawingml/2006/main"/>
-          <a:lstStyle xmlns:a="http://schemas.openxmlformats.org/drawingml/2006/main"/>
-          <a:p xmlns:a="http://schemas.openxmlformats.org/drawingml/2006/main">
-            <a:pPr algn="l">
-              <a:defRPr sz="4500" b="1">
-                <a:solidFill>
-                  <a:srgbClr val="101010"/>
-                </a:solidFill>
-                <a:latin typeface="Malgun Gothic"/>
-                <a:ea typeface="Malgun Gothic"/>
-                <a:cs typeface="Malgun Gothic"/>
-              </a:defRPr>
-            </a:pPr>
-            <a:r>
-              <a:rPr sz="4500" b="1">
-                <a:solidFill>
-                  <a:srgbClr val="101010"/>
-                </a:solidFill>
-                <a:latin typeface="Malgun Gothic"/>
-                <a:ea typeface="Malgun Gothic"/>
-                <a:cs typeface="Malgun Gothic"/>
-              </a:rPr>
-              <a:t>PR은 구현을 승인합니다.</a:t>
-            </a:r>
-          </a:p>
-          <a:p xmlns:a="http://schemas.openxmlformats.org/drawingml/2006/main">
-            <a:pPr algn="l">
-              <a:defRPr sz="4500" b="1">
-                <a:solidFill>
-                  <a:srgbClr val="101010"/>
-                </a:solidFill>
-                <a:latin typeface="Malgun Gothic"/>
-                <a:ea typeface="Malgun Gothic"/>
-                <a:cs typeface="Malgun Gothic"/>
-              </a:defRPr>
-            </a:pPr>
-            <a:r>
-              <a:rPr sz="4500" b="1">
-                <a:solidFill>
-                  <a:srgbClr val="101010"/>
-                </a:solidFill>
-                <a:latin typeface="Malgun Gothic"/>
-                <a:ea typeface="Malgun Gothic"/>
-                <a:cs typeface="Malgun Gothic"/>
-              </a:rPr>
-              <a:t>Source 승인은 별도입니다.</a:t>
-            </a:r>
-          </a:p>
-        </p:txBody>
-      </p:sp>
-      <p:sp>
-        <p:nvSpPr>
-          <p:cNvPr id="3" name="">
-            <a:extLst xmlns:a="http://schemas.openxmlformats.org/drawingml/2006/main">
-              <a:ext uri="{FF2B5EF4-FFF2-40B4-BE49-F238E27FC236}">
-                <a16:creationId xmlns:a16="http://schemas.microsoft.com/office/drawing/2014/main" id="{0FFA40BC-3318-4E4E-B6BC-9333B904F7F6}"/>
-              </a:ext>
-            </a:extLst>
-          </p:cNvPr>
-          <p:cNvSpPr>
-            <a:spLocks xmlns:a="http://schemas.openxmlformats.org/drawingml/2006/main" noGrp="1"/>
-          </p:cNvSpPr>
-          <p:nvPr/>
-        </p:nvSpPr>
-        <p:spPr>
-          <a:xfrm xmlns:a="http://schemas.openxmlformats.org/drawingml/2006/main">
-            <a:off x="400050" y="4400550"/>
-            <a:ext cx="7239000" cy="323850"/>
-          </a:xfrm>
-          <a:prstGeom xmlns:a="http://schemas.openxmlformats.org/drawingml/2006/main" prst="rect">
-            <a:avLst/>
-          </a:prstGeom>
-          <a:noFill xmlns:a="http://schemas.openxmlformats.org/drawingml/2006/main"/>
-          <a:ln xmlns:a="http://schemas.openxmlformats.org/drawingml/2006/main" w="0">
-            <a:noFill/>
-            <a:prstDash val="solid"/>
-          </a:ln>
-        </p:spPr>
-        <p:txBody>
-          <a:bodyPr xmlns:a="http://schemas.openxmlformats.org/drawingml/2006/main"/>
-          <a:lstStyle xmlns:a="http://schemas.openxmlformats.org/drawingml/2006/main"/>
-          <a:p xmlns:a="http://schemas.openxmlformats.org/drawingml/2006/main">
-            <a:pPr algn="l">
-              <a:defRPr sz="1575" b="1">
+                <a16:creationId xmlns:a16="http://schemas.microsoft.com/office/drawing/2014/main" id="{28A15243-5151-4C5D-8A22-EC9CD6FAC4D6}"/>
+              </a:ext>
+            </a:extLst>
+          </p:cNvPr>
+          <p:cNvSpPr>
+            <a:spLocks xmlns:a="http://schemas.openxmlformats.org/drawingml/2006/main" noGrp="1"/>
+          </p:cNvSpPr>
+          <p:nvPr/>
+        </p:nvSpPr>
+        <p:spPr>
+          <a:xfrm xmlns:a="http://schemas.openxmlformats.org/drawingml/2006/main">
+            <a:off x="514350" y="1971675"/>
+            <a:ext cx="2095500" cy="323850"/>
+          </a:xfrm>
+          <a:prstGeom xmlns:a="http://schemas.openxmlformats.org/drawingml/2006/main" prst="rect">
+            <a:avLst/>
+          </a:prstGeom>
+          <a:noFill xmlns:a="http://schemas.openxmlformats.org/drawingml/2006/main"/>
+          <a:ln xmlns:a="http://schemas.openxmlformats.org/drawingml/2006/main" w="0">
+            <a:noFill/>
+            <a:prstDash val="solid"/>
+          </a:ln>
+        </p:spPr>
+        <p:txBody>
+          <a:bodyPr xmlns:a="http://schemas.openxmlformats.org/drawingml/2006/main"/>
+          <a:lstStyle xmlns:a="http://schemas.openxmlformats.org/drawingml/2006/main"/>
+          <a:p xmlns:a="http://schemas.openxmlformats.org/drawingml/2006/main">
+            <a:pPr algn="l">
+              <a:defRPr sz="1350" b="1">
+                <a:solidFill>
+                  <a:srgbClr val="101010"/>
+                </a:solidFill>
+                <a:latin typeface="Malgun Gothic"/>
+                <a:ea typeface="Malgun Gothic"/>
+                <a:cs typeface="Malgun Gothic"/>
+              </a:defRPr>
+            </a:pPr>
+            <a:r>
+              <a:rPr sz="1350" b="1">
+                <a:solidFill>
+                  <a:srgbClr val="101010"/>
+                </a:solidFill>
+                <a:latin typeface="Malgun Gothic"/>
+                <a:ea typeface="Malgun Gothic"/>
+                <a:cs typeface="Malgun Gothic"/>
+              </a:rPr>
+              <a:t>Database</a:t>
+            </a:r>
+          </a:p>
+        </p:txBody>
+      </p:sp>
+      <p:sp>
+        <p:nvSpPr>
+          <p:cNvPr id="7" name="">
+            <a:extLst xmlns:a="http://schemas.openxmlformats.org/drawingml/2006/main">
+              <a:ext uri="{FF2B5EF4-FFF2-40B4-BE49-F238E27FC236}">
+                <a16:creationId xmlns:a16="http://schemas.microsoft.com/office/drawing/2014/main" id="{3DF6FD02-821E-4DC2-B690-6358ADB7EAF6}"/>
+              </a:ext>
+            </a:extLst>
+          </p:cNvPr>
+          <p:cNvSpPr>
+            <a:spLocks xmlns:a="http://schemas.openxmlformats.org/drawingml/2006/main" noGrp="1"/>
+          </p:cNvSpPr>
+          <p:nvPr/>
+        </p:nvSpPr>
+        <p:spPr>
+          <a:xfrm xmlns:a="http://schemas.openxmlformats.org/drawingml/2006/main">
+            <a:off x="2724150" y="1905000"/>
+            <a:ext cx="19050" cy="419100"/>
+          </a:xfrm>
+          <a:prstGeom xmlns:a="http://schemas.openxmlformats.org/drawingml/2006/main" prst="rect">
+            <a:avLst/>
+          </a:prstGeom>
+          <a:solidFill xmlns:a="http://schemas.openxmlformats.org/drawingml/2006/main">
+            <a:srgbClr val="B8BCC4"/>
+          </a:solidFill>
+          <a:ln xmlns:a="http://schemas.openxmlformats.org/drawingml/2006/main" w="0">
+            <a:noFill/>
+            <a:prstDash val="solid"/>
+          </a:ln>
+        </p:spPr>
+      </p:sp>
+      <p:sp>
+        <p:nvSpPr>
+          <p:cNvPr id="8" name="">
+            <a:extLst xmlns:a="http://schemas.openxmlformats.org/drawingml/2006/main">
+              <a:ext uri="{FF2B5EF4-FFF2-40B4-BE49-F238E27FC236}">
+                <a16:creationId xmlns:a16="http://schemas.microsoft.com/office/drawing/2014/main" id="{8C858095-5930-4FFE-81F4-E125762DDB65}"/>
+              </a:ext>
+            </a:extLst>
+          </p:cNvPr>
+          <p:cNvSpPr>
+            <a:spLocks xmlns:a="http://schemas.openxmlformats.org/drawingml/2006/main" noGrp="1"/>
+          </p:cNvSpPr>
+          <p:nvPr/>
+        </p:nvSpPr>
+        <p:spPr>
+          <a:xfrm xmlns:a="http://schemas.openxmlformats.org/drawingml/2006/main">
+            <a:off x="3009900" y="1971675"/>
+            <a:ext cx="8382000" cy="361950"/>
+          </a:xfrm>
+          <a:prstGeom xmlns:a="http://schemas.openxmlformats.org/drawingml/2006/main" prst="rect">
+            <a:avLst/>
+          </a:prstGeom>
+          <a:noFill xmlns:a="http://schemas.openxmlformats.org/drawingml/2006/main"/>
+          <a:ln xmlns:a="http://schemas.openxmlformats.org/drawingml/2006/main" w="0">
+            <a:noFill/>
+            <a:prstDash val="solid"/>
+          </a:ln>
+        </p:spPr>
+        <p:txBody>
+          <a:bodyPr xmlns:a="http://schemas.openxmlformats.org/drawingml/2006/main"/>
+          <a:lstStyle xmlns:a="http://schemas.openxmlformats.org/drawingml/2006/main"/>
+          <a:p xmlns:a="http://schemas.openxmlformats.org/drawingml/2006/main">
+            <a:pPr algn="l">
+              <a:defRPr sz="1350" b="0">
+                <a:solidFill>
+                  <a:srgbClr val="101010"/>
+                </a:solidFill>
+                <a:latin typeface="Malgun Gothic"/>
+                <a:ea typeface="Malgun Gothic"/>
+                <a:cs typeface="Malgun Gothic"/>
+              </a:defRPr>
+            </a:pPr>
+            <a:r>
+              <a:rPr sz="1350" b="0">
+                <a:solidFill>
+                  <a:srgbClr val="101010"/>
+                </a:solidFill>
+                <a:latin typeface="Malgun Gothic"/>
+                <a:ea typeface="Malgun Gothic"/>
+                <a:cs typeface="Malgun Gothic"/>
+              </a:rPr>
+              <a:t>19 Table · 9 Profile · 7 Mirror State</a:t>
+            </a:r>
+          </a:p>
+        </p:txBody>
+      </p:sp>
+      <p:sp>
+        <p:nvSpPr>
+          <p:cNvPr id="9" name="">
+            <a:extLst xmlns:a="http://schemas.openxmlformats.org/drawingml/2006/main">
+              <a:ext uri="{FF2B5EF4-FFF2-40B4-BE49-F238E27FC236}">
+                <a16:creationId xmlns:a16="http://schemas.microsoft.com/office/drawing/2014/main" id="{5392D5DA-36EB-4208-A316-BB655CB329D9}"/>
+              </a:ext>
+            </a:extLst>
+          </p:cNvPr>
+          <p:cNvSpPr>
+            <a:spLocks xmlns:a="http://schemas.openxmlformats.org/drawingml/2006/main" noGrp="1"/>
+          </p:cNvSpPr>
+          <p:nvPr/>
+        </p:nvSpPr>
+        <p:spPr>
+          <a:xfrm xmlns:a="http://schemas.openxmlformats.org/drawingml/2006/main">
+            <a:off x="514350" y="2609850"/>
+            <a:ext cx="2095500" cy="323850"/>
+          </a:xfrm>
+          <a:prstGeom xmlns:a="http://schemas.openxmlformats.org/drawingml/2006/main" prst="rect">
+            <a:avLst/>
+          </a:prstGeom>
+          <a:noFill xmlns:a="http://schemas.openxmlformats.org/drawingml/2006/main"/>
+          <a:ln xmlns:a="http://schemas.openxmlformats.org/drawingml/2006/main" w="0">
+            <a:noFill/>
+            <a:prstDash val="solid"/>
+          </a:ln>
+        </p:spPr>
+        <p:txBody>
+          <a:bodyPr xmlns:a="http://schemas.openxmlformats.org/drawingml/2006/main"/>
+          <a:lstStyle xmlns:a="http://schemas.openxmlformats.org/drawingml/2006/main"/>
+          <a:p xmlns:a="http://schemas.openxmlformats.org/drawingml/2006/main">
+            <a:pPr algn="l">
+              <a:defRPr sz="1350" b="1">
+                <a:solidFill>
+                  <a:srgbClr val="101010"/>
+                </a:solidFill>
+                <a:latin typeface="Malgun Gothic"/>
+                <a:ea typeface="Malgun Gothic"/>
+                <a:cs typeface="Malgun Gothic"/>
+              </a:defRPr>
+            </a:pPr>
+            <a:r>
+              <a:rPr sz="1350" b="1">
+                <a:solidFill>
+                  <a:srgbClr val="101010"/>
+                </a:solidFill>
+                <a:latin typeface="Malgun Gothic"/>
+                <a:ea typeface="Malgun Gothic"/>
+                <a:cs typeface="Malgun Gothic"/>
+              </a:rPr>
+              <a:t>Reconciler</a:t>
+            </a:r>
+          </a:p>
+        </p:txBody>
+      </p:sp>
+      <p:sp>
+        <p:nvSpPr>
+          <p:cNvPr id="10" name="">
+            <a:extLst xmlns:a="http://schemas.openxmlformats.org/drawingml/2006/main">
+              <a:ext uri="{FF2B5EF4-FFF2-40B4-BE49-F238E27FC236}">
+                <a16:creationId xmlns:a16="http://schemas.microsoft.com/office/drawing/2014/main" id="{77359745-B05E-4E2D-BC0D-EC193FB1F9FC}"/>
+              </a:ext>
+            </a:extLst>
+          </p:cNvPr>
+          <p:cNvSpPr>
+            <a:spLocks xmlns:a="http://schemas.openxmlformats.org/drawingml/2006/main" noGrp="1"/>
+          </p:cNvSpPr>
+          <p:nvPr/>
+        </p:nvSpPr>
+        <p:spPr>
+          <a:xfrm xmlns:a="http://schemas.openxmlformats.org/drawingml/2006/main">
+            <a:off x="2724150" y="2543175"/>
+            <a:ext cx="19050" cy="419100"/>
+          </a:xfrm>
+          <a:prstGeom xmlns:a="http://schemas.openxmlformats.org/drawingml/2006/main" prst="rect">
+            <a:avLst/>
+          </a:prstGeom>
+          <a:solidFill xmlns:a="http://schemas.openxmlformats.org/drawingml/2006/main">
+            <a:srgbClr val="B8BCC4"/>
+          </a:solidFill>
+          <a:ln xmlns:a="http://schemas.openxmlformats.org/drawingml/2006/main" w="0">
+            <a:noFill/>
+            <a:prstDash val="solid"/>
+          </a:ln>
+        </p:spPr>
+      </p:sp>
+      <p:sp>
+        <p:nvSpPr>
+          <p:cNvPr id="11" name="">
+            <a:extLst xmlns:a="http://schemas.openxmlformats.org/drawingml/2006/main">
+              <a:ext uri="{FF2B5EF4-FFF2-40B4-BE49-F238E27FC236}">
+                <a16:creationId xmlns:a16="http://schemas.microsoft.com/office/drawing/2014/main" id="{2258E777-3A14-4B30-9A84-1D522F748F05}"/>
+              </a:ext>
+            </a:extLst>
+          </p:cNvPr>
+          <p:cNvSpPr>
+            <a:spLocks xmlns:a="http://schemas.openxmlformats.org/drawingml/2006/main" noGrp="1"/>
+          </p:cNvSpPr>
+          <p:nvPr/>
+        </p:nvSpPr>
+        <p:spPr>
+          <a:xfrm xmlns:a="http://schemas.openxmlformats.org/drawingml/2006/main">
+            <a:off x="3009900" y="2609850"/>
+            <a:ext cx="8382000" cy="361950"/>
+          </a:xfrm>
+          <a:prstGeom xmlns:a="http://schemas.openxmlformats.org/drawingml/2006/main" prst="rect">
+            <a:avLst/>
+          </a:prstGeom>
+          <a:noFill xmlns:a="http://schemas.openxmlformats.org/drawingml/2006/main"/>
+          <a:ln xmlns:a="http://schemas.openxmlformats.org/drawingml/2006/main" w="0">
+            <a:noFill/>
+            <a:prstDash val="solid"/>
+          </a:ln>
+        </p:spPr>
+        <p:txBody>
+          <a:bodyPr xmlns:a="http://schemas.openxmlformats.org/drawingml/2006/main"/>
+          <a:lstStyle xmlns:a="http://schemas.openxmlformats.org/drawingml/2006/main"/>
+          <a:p xmlns:a="http://schemas.openxmlformats.org/drawingml/2006/main">
+            <a:pPr algn="l">
+              <a:defRPr sz="1350" b="0">
+                <a:solidFill>
+                  <a:srgbClr val="101010"/>
+                </a:solidFill>
+                <a:latin typeface="Malgun Gothic"/>
+                <a:ea typeface="Malgun Gothic"/>
+                <a:cs typeface="Malgun Gothic"/>
+              </a:defRPr>
+            </a:pPr>
+            <a:r>
+              <a:rPr sz="1350" b="0">
+                <a:solidFill>
+                  <a:srgbClr val="101010"/>
+                </a:solidFill>
+                <a:latin typeface="Malgun Gothic"/>
+                <a:ea typeface="Malgun Gothic"/>
+                <a:cs typeface="Malgun Gothic"/>
+              </a:rPr>
+              <a:t>9 / 9 성공 · 21,600초 · 7 HEALTHY</a:t>
+            </a:r>
+          </a:p>
+        </p:txBody>
+      </p:sp>
+      <p:sp>
+        <p:nvSpPr>
+          <p:cNvPr id="12" name="">
+            <a:extLst xmlns:a="http://schemas.openxmlformats.org/drawingml/2006/main">
+              <a:ext uri="{FF2B5EF4-FFF2-40B4-BE49-F238E27FC236}">
+                <a16:creationId xmlns:a16="http://schemas.microsoft.com/office/drawing/2014/main" id="{A5888397-54EC-4143-8809-81BA7BFC5801}"/>
+              </a:ext>
+            </a:extLst>
+          </p:cNvPr>
+          <p:cNvSpPr>
+            <a:spLocks xmlns:a="http://schemas.openxmlformats.org/drawingml/2006/main" noGrp="1"/>
+          </p:cNvSpPr>
+          <p:nvPr/>
+        </p:nvSpPr>
+        <p:spPr>
+          <a:xfrm xmlns:a="http://schemas.openxmlformats.org/drawingml/2006/main">
+            <a:off x="514350" y="3248025"/>
+            <a:ext cx="2095500" cy="323850"/>
+          </a:xfrm>
+          <a:prstGeom xmlns:a="http://schemas.openxmlformats.org/drawingml/2006/main" prst="rect">
+            <a:avLst/>
+          </a:prstGeom>
+          <a:noFill xmlns:a="http://schemas.openxmlformats.org/drawingml/2006/main"/>
+          <a:ln xmlns:a="http://schemas.openxmlformats.org/drawingml/2006/main" w="0">
+            <a:noFill/>
+            <a:prstDash val="solid"/>
+          </a:ln>
+        </p:spPr>
+        <p:txBody>
+          <a:bodyPr xmlns:a="http://schemas.openxmlformats.org/drawingml/2006/main"/>
+          <a:lstStyle xmlns:a="http://schemas.openxmlformats.org/drawingml/2006/main"/>
+          <a:p xmlns:a="http://schemas.openxmlformats.org/drawingml/2006/main">
+            <a:pPr algn="l">
+              <a:defRPr sz="1350" b="1">
+                <a:solidFill>
+                  <a:srgbClr val="101010"/>
+                </a:solidFill>
+                <a:latin typeface="Malgun Gothic"/>
+                <a:ea typeface="Malgun Gothic"/>
+                <a:cs typeface="Malgun Gothic"/>
+              </a:defRPr>
+            </a:pPr>
+            <a:r>
+              <a:rPr sz="1350" b="1">
+                <a:solidFill>
+                  <a:srgbClr val="101010"/>
+                </a:solidFill>
+                <a:latin typeface="Malgun Gothic"/>
+                <a:ea typeface="Malgun Gothic"/>
+                <a:cs typeface="Malgun Gothic"/>
+              </a:rPr>
+              <a:t>Persistence</a:t>
+            </a:r>
+          </a:p>
+        </p:txBody>
+      </p:sp>
+      <p:sp>
+        <p:nvSpPr>
+          <p:cNvPr id="13" name="">
+            <a:extLst xmlns:a="http://schemas.openxmlformats.org/drawingml/2006/main">
+              <a:ext uri="{FF2B5EF4-FFF2-40B4-BE49-F238E27FC236}">
+                <a16:creationId xmlns:a16="http://schemas.microsoft.com/office/drawing/2014/main" id="{3783F649-438B-4FFC-BD0D-2E3101710174}"/>
+              </a:ext>
+            </a:extLst>
+          </p:cNvPr>
+          <p:cNvSpPr>
+            <a:spLocks xmlns:a="http://schemas.openxmlformats.org/drawingml/2006/main" noGrp="1"/>
+          </p:cNvSpPr>
+          <p:nvPr/>
+        </p:nvSpPr>
+        <p:spPr>
+          <a:xfrm xmlns:a="http://schemas.openxmlformats.org/drawingml/2006/main">
+            <a:off x="2724150" y="3181350"/>
+            <a:ext cx="19050" cy="419100"/>
+          </a:xfrm>
+          <a:prstGeom xmlns:a="http://schemas.openxmlformats.org/drawingml/2006/main" prst="rect">
+            <a:avLst/>
+          </a:prstGeom>
+          <a:solidFill xmlns:a="http://schemas.openxmlformats.org/drawingml/2006/main">
+            <a:srgbClr val="B8BCC4"/>
+          </a:solidFill>
+          <a:ln xmlns:a="http://schemas.openxmlformats.org/drawingml/2006/main" w="0">
+            <a:noFill/>
+            <a:prstDash val="solid"/>
+          </a:ln>
+        </p:spPr>
+      </p:sp>
+      <p:sp>
+        <p:nvSpPr>
+          <p:cNvPr id="14" name="">
+            <a:extLst xmlns:a="http://schemas.openxmlformats.org/drawingml/2006/main">
+              <a:ext uri="{FF2B5EF4-FFF2-40B4-BE49-F238E27FC236}">
+                <a16:creationId xmlns:a16="http://schemas.microsoft.com/office/drawing/2014/main" id="{55FD18C1-CBB9-45C0-AA2F-3AB133B34E59}"/>
+              </a:ext>
+            </a:extLst>
+          </p:cNvPr>
+          <p:cNvSpPr>
+            <a:spLocks xmlns:a="http://schemas.openxmlformats.org/drawingml/2006/main" noGrp="1"/>
+          </p:cNvSpPr>
+          <p:nvPr/>
+        </p:nvSpPr>
+        <p:spPr>
+          <a:xfrm xmlns:a="http://schemas.openxmlformats.org/drawingml/2006/main">
+            <a:off x="3009900" y="3248025"/>
+            <a:ext cx="8382000" cy="361950"/>
+          </a:xfrm>
+          <a:prstGeom xmlns:a="http://schemas.openxmlformats.org/drawingml/2006/main" prst="rect">
+            <a:avLst/>
+          </a:prstGeom>
+          <a:noFill xmlns:a="http://schemas.openxmlformats.org/drawingml/2006/main"/>
+          <a:ln xmlns:a="http://schemas.openxmlformats.org/drawingml/2006/main" w="0">
+            <a:noFill/>
+            <a:prstDash val="solid"/>
+          </a:ln>
+        </p:spPr>
+        <p:txBody>
+          <a:bodyPr xmlns:a="http://schemas.openxmlformats.org/drawingml/2006/main"/>
+          <a:lstStyle xmlns:a="http://schemas.openxmlformats.org/drawingml/2006/main"/>
+          <a:p xmlns:a="http://schemas.openxmlformats.org/drawingml/2006/main">
+            <a:pPr algn="l">
+              <a:defRPr sz="1350" b="0">
+                <a:solidFill>
+                  <a:srgbClr val="101010"/>
+                </a:solidFill>
+                <a:latin typeface="Malgun Gothic"/>
+                <a:ea typeface="Malgun Gothic"/>
+                <a:cs typeface="Malgun Gothic"/>
+              </a:defRPr>
+            </a:pPr>
+            <a:r>
+              <a:rPr sz="1350" b="0">
+                <a:solidFill>
+                  <a:srgbClr val="101010"/>
+                </a:solidFill>
+                <a:latin typeface="Malgun Gothic"/>
+                <a:ea typeface="Malgun Gothic"/>
+                <a:cs typeface="Malgun Gothic"/>
+              </a:rPr>
+              <a:t>7 Mirror · 906 MiB · Gateway 재시작 후 유지</a:t>
+            </a:r>
+          </a:p>
+        </p:txBody>
+      </p:sp>
+      <p:sp>
+        <p:nvSpPr>
+          <p:cNvPr id="15" name="">
+            <a:extLst xmlns:a="http://schemas.openxmlformats.org/drawingml/2006/main">
+              <a:ext uri="{FF2B5EF4-FFF2-40B4-BE49-F238E27FC236}">
+                <a16:creationId xmlns:a16="http://schemas.microsoft.com/office/drawing/2014/main" id="{6B17A3DA-611E-4923-84AB-3390C31A0CE9}"/>
+              </a:ext>
+            </a:extLst>
+          </p:cNvPr>
+          <p:cNvSpPr>
+            <a:spLocks xmlns:a="http://schemas.openxmlformats.org/drawingml/2006/main" noGrp="1"/>
+          </p:cNvSpPr>
+          <p:nvPr/>
+        </p:nvSpPr>
+        <p:spPr>
+          <a:xfrm xmlns:a="http://schemas.openxmlformats.org/drawingml/2006/main">
+            <a:off x="514350" y="3886200"/>
+            <a:ext cx="2095500" cy="323850"/>
+          </a:xfrm>
+          <a:prstGeom xmlns:a="http://schemas.openxmlformats.org/drawingml/2006/main" prst="rect">
+            <a:avLst/>
+          </a:prstGeom>
+          <a:noFill xmlns:a="http://schemas.openxmlformats.org/drawingml/2006/main"/>
+          <a:ln xmlns:a="http://schemas.openxmlformats.org/drawingml/2006/main" w="0">
+            <a:noFill/>
+            <a:prstDash val="solid"/>
+          </a:ln>
+        </p:spPr>
+        <p:txBody>
+          <a:bodyPr xmlns:a="http://schemas.openxmlformats.org/drawingml/2006/main"/>
+          <a:lstStyle xmlns:a="http://schemas.openxmlformats.org/drawingml/2006/main"/>
+          <a:p xmlns:a="http://schemas.openxmlformats.org/drawingml/2006/main">
+            <a:pPr algn="l">
+              <a:defRPr sz="1350" b="1">
+                <a:solidFill>
+                  <a:srgbClr val="101010"/>
+                </a:solidFill>
+                <a:latin typeface="Malgun Gothic"/>
+                <a:ea typeface="Malgun Gothic"/>
+                <a:cs typeface="Malgun Gothic"/>
+              </a:defRPr>
+            </a:pPr>
+            <a:r>
+              <a:rPr sz="1350" b="1">
+                <a:solidFill>
+                  <a:srgbClr val="101010"/>
+                </a:solidFill>
+                <a:latin typeface="Malgun Gothic"/>
+                <a:ea typeface="Malgun Gothic"/>
+                <a:cs typeface="Malgun Gothic"/>
+              </a:rPr>
+              <a:t>Offline</a:t>
+            </a:r>
+          </a:p>
+        </p:txBody>
+      </p:sp>
+      <p:sp>
+        <p:nvSpPr>
+          <p:cNvPr id="16" name="">
+            <a:extLst xmlns:a="http://schemas.openxmlformats.org/drawingml/2006/main">
+              <a:ext uri="{FF2B5EF4-FFF2-40B4-BE49-F238E27FC236}">
+                <a16:creationId xmlns:a16="http://schemas.microsoft.com/office/drawing/2014/main" id="{C6BAF02E-FA9C-40F4-9590-EF0634E22DDE}"/>
+              </a:ext>
+            </a:extLst>
+          </p:cNvPr>
+          <p:cNvSpPr>
+            <a:spLocks xmlns:a="http://schemas.openxmlformats.org/drawingml/2006/main" noGrp="1"/>
+          </p:cNvSpPr>
+          <p:nvPr/>
+        </p:nvSpPr>
+        <p:spPr>
+          <a:xfrm xmlns:a="http://schemas.openxmlformats.org/drawingml/2006/main">
+            <a:off x="2724150" y="3819525"/>
+            <a:ext cx="19050" cy="419100"/>
+          </a:xfrm>
+          <a:prstGeom xmlns:a="http://schemas.openxmlformats.org/drawingml/2006/main" prst="rect">
+            <a:avLst/>
+          </a:prstGeom>
+          <a:solidFill xmlns:a="http://schemas.openxmlformats.org/drawingml/2006/main">
+            <a:srgbClr val="B8BCC4"/>
+          </a:solidFill>
+          <a:ln xmlns:a="http://schemas.openxmlformats.org/drawingml/2006/main" w="0">
+            <a:noFill/>
+            <a:prstDash val="solid"/>
+          </a:ln>
+        </p:spPr>
+      </p:sp>
+      <p:sp>
+        <p:nvSpPr>
+          <p:cNvPr id="17" name="">
+            <a:extLst xmlns:a="http://schemas.openxmlformats.org/drawingml/2006/main">
+              <a:ext uri="{FF2B5EF4-FFF2-40B4-BE49-F238E27FC236}">
+                <a16:creationId xmlns:a16="http://schemas.microsoft.com/office/drawing/2014/main" id="{170F2264-D380-4CC3-A5C0-861C2FC41EB6}"/>
+              </a:ext>
+            </a:extLst>
+          </p:cNvPr>
+          <p:cNvSpPr>
+            <a:spLocks xmlns:a="http://schemas.openxmlformats.org/drawingml/2006/main" noGrp="1"/>
+          </p:cNvSpPr>
+          <p:nvPr/>
+        </p:nvSpPr>
+        <p:spPr>
+          <a:xfrm xmlns:a="http://schemas.openxmlformats.org/drawingml/2006/main">
+            <a:off x="3009900" y="3886200"/>
+            <a:ext cx="8382000" cy="361950"/>
+          </a:xfrm>
+          <a:prstGeom xmlns:a="http://schemas.openxmlformats.org/drawingml/2006/main" prst="rect">
+            <a:avLst/>
+          </a:prstGeom>
+          <a:noFill xmlns:a="http://schemas.openxmlformats.org/drawingml/2006/main"/>
+          <a:ln xmlns:a="http://schemas.openxmlformats.org/drawingml/2006/main" w="0">
+            <a:noFill/>
+            <a:prstDash val="solid"/>
+          </a:ln>
+        </p:spPr>
+        <p:txBody>
+          <a:bodyPr xmlns:a="http://schemas.openxmlformats.org/drawingml/2006/main"/>
+          <a:lstStyle xmlns:a="http://schemas.openxmlformats.org/drawingml/2006/main"/>
+          <a:p xmlns:a="http://schemas.openxmlformats.org/drawingml/2006/main">
+            <a:pPr algn="l">
+              <a:defRPr sz="1350" b="0">
+                <a:solidFill>
+                  <a:srgbClr val="101010"/>
+                </a:solidFill>
+                <a:latin typeface="Malgun Gothic"/>
+                <a:ea typeface="Malgun Gothic"/>
+                <a:cs typeface="Malgun Gothic"/>
+              </a:defRPr>
+            </a:pPr>
+            <a:r>
+              <a:rPr sz="1350" b="0">
+                <a:solidFill>
+                  <a:srgbClr val="101010"/>
+                </a:solidFill>
+                <a:latin typeface="Malgun Gothic"/>
+                <a:ea typeface="Malgun Gothic"/>
+                <a:cs typeface="Malgun Gothic"/>
+              </a:rPr>
+              <a:t>network none · GENIE 34 / 34 Eligible</a:t>
+            </a:r>
+          </a:p>
+        </p:txBody>
+      </p:sp>
+      <p:sp>
+        <p:nvSpPr>
+          <p:cNvPr id="18" name="">
+            <a:extLst xmlns:a="http://schemas.openxmlformats.org/drawingml/2006/main">
+              <a:ext uri="{FF2B5EF4-FFF2-40B4-BE49-F238E27FC236}">
+                <a16:creationId xmlns:a16="http://schemas.microsoft.com/office/drawing/2014/main" id="{BBA06691-442C-45CA-8E69-9FBC2516A2D0}"/>
+              </a:ext>
+            </a:extLst>
+          </p:cNvPr>
+          <p:cNvSpPr>
+            <a:spLocks xmlns:a="http://schemas.openxmlformats.org/drawingml/2006/main" noGrp="1"/>
+          </p:cNvSpPr>
+          <p:nvPr/>
+        </p:nvSpPr>
+        <p:spPr>
+          <a:xfrm xmlns:a="http://schemas.openxmlformats.org/drawingml/2006/main">
+            <a:off x="514350" y="4524375"/>
+            <a:ext cx="2095500" cy="323850"/>
+          </a:xfrm>
+          <a:prstGeom xmlns:a="http://schemas.openxmlformats.org/drawingml/2006/main" prst="rect">
+            <a:avLst/>
+          </a:prstGeom>
+          <a:noFill xmlns:a="http://schemas.openxmlformats.org/drawingml/2006/main"/>
+          <a:ln xmlns:a="http://schemas.openxmlformats.org/drawingml/2006/main" w="0">
+            <a:noFill/>
+            <a:prstDash val="solid"/>
+          </a:ln>
+        </p:spPr>
+        <p:txBody>
+          <a:bodyPr xmlns:a="http://schemas.openxmlformats.org/drawingml/2006/main"/>
+          <a:lstStyle xmlns:a="http://schemas.openxmlformats.org/drawingml/2006/main"/>
+          <a:p xmlns:a="http://schemas.openxmlformats.org/drawingml/2006/main">
+            <a:pPr algn="l">
+              <a:defRPr sz="1350" b="1">
+                <a:solidFill>
+                  <a:srgbClr val="B42318"/>
+                </a:solidFill>
+                <a:latin typeface="Malgun Gothic"/>
+                <a:ea typeface="Malgun Gothic"/>
+                <a:cs typeface="Malgun Gothic"/>
+              </a:defRPr>
+            </a:pPr>
+            <a:r>
+              <a:rPr sz="1350" b="1">
+                <a:solidFill>
+                  <a:srgbClr val="B42318"/>
+                </a:solidFill>
+                <a:latin typeface="Malgun Gothic"/>
+                <a:ea typeface="Malgun Gothic"/>
+                <a:cs typeface="Malgun Gothic"/>
+              </a:rPr>
+              <a:t>Fail closed</a:t>
+            </a:r>
+          </a:p>
+        </p:txBody>
+      </p:sp>
+      <p:sp>
+        <p:nvSpPr>
+          <p:cNvPr id="19" name="">
+            <a:extLst xmlns:a="http://schemas.openxmlformats.org/drawingml/2006/main">
+              <a:ext uri="{FF2B5EF4-FFF2-40B4-BE49-F238E27FC236}">
+                <a16:creationId xmlns:a16="http://schemas.microsoft.com/office/drawing/2014/main" id="{84CFB8BC-4540-42F4-B270-4EA8FC1F880C}"/>
+              </a:ext>
+            </a:extLst>
+          </p:cNvPr>
+          <p:cNvSpPr>
+            <a:spLocks xmlns:a="http://schemas.openxmlformats.org/drawingml/2006/main" noGrp="1"/>
+          </p:cNvSpPr>
+          <p:nvPr/>
+        </p:nvSpPr>
+        <p:spPr>
+          <a:xfrm xmlns:a="http://schemas.openxmlformats.org/drawingml/2006/main">
+            <a:off x="2724150" y="4457700"/>
+            <a:ext cx="19050" cy="419100"/>
+          </a:xfrm>
+          <a:prstGeom xmlns:a="http://schemas.openxmlformats.org/drawingml/2006/main" prst="rect">
+            <a:avLst/>
+          </a:prstGeom>
+          <a:solidFill xmlns:a="http://schemas.openxmlformats.org/drawingml/2006/main">
+            <a:srgbClr val="B42318"/>
+          </a:solidFill>
+          <a:ln xmlns:a="http://schemas.openxmlformats.org/drawingml/2006/main" w="0">
+            <a:noFill/>
+            <a:prstDash val="solid"/>
+          </a:ln>
+        </p:spPr>
+      </p:sp>
+      <p:sp>
+        <p:nvSpPr>
+          <p:cNvPr id="20" name="">
+            <a:extLst xmlns:a="http://schemas.openxmlformats.org/drawingml/2006/main">
+              <a:ext uri="{FF2B5EF4-FFF2-40B4-BE49-F238E27FC236}">
+                <a16:creationId xmlns:a16="http://schemas.microsoft.com/office/drawing/2014/main" id="{882E1309-F3BA-40C0-BDD1-333ACF375E07}"/>
+              </a:ext>
+            </a:extLst>
+          </p:cNvPr>
+          <p:cNvSpPr>
+            <a:spLocks xmlns:a="http://schemas.openxmlformats.org/drawingml/2006/main" noGrp="1"/>
+          </p:cNvSpPr>
+          <p:nvPr/>
+        </p:nvSpPr>
+        <p:spPr>
+          <a:xfrm xmlns:a="http://schemas.openxmlformats.org/drawingml/2006/main">
+            <a:off x="3009900" y="4524375"/>
+            <a:ext cx="8382000" cy="361950"/>
+          </a:xfrm>
+          <a:prstGeom xmlns:a="http://schemas.openxmlformats.org/drawingml/2006/main" prst="rect">
+            <a:avLst/>
+          </a:prstGeom>
+          <a:noFill xmlns:a="http://schemas.openxmlformats.org/drawingml/2006/main"/>
+          <a:ln xmlns:a="http://schemas.openxmlformats.org/drawingml/2006/main" w="0">
+            <a:noFill/>
+            <a:prstDash val="solid"/>
+          </a:ln>
+        </p:spPr>
+        <p:txBody>
+          <a:bodyPr xmlns:a="http://schemas.openxmlformats.org/drawingml/2006/main"/>
+          <a:lstStyle xmlns:a="http://schemas.openxmlformats.org/drawingml/2006/main"/>
+          <a:p xmlns:a="http://schemas.openxmlformats.org/drawingml/2006/main">
+            <a:pPr algn="l">
+              <a:defRPr sz="1350" b="0">
+                <a:solidFill>
+                  <a:srgbClr val="101010"/>
+                </a:solidFill>
+                <a:latin typeface="Malgun Gothic"/>
+                <a:ea typeface="Malgun Gothic"/>
+                <a:cs typeface="Malgun Gothic"/>
+              </a:defRPr>
+            </a:pPr>
+            <a:r>
+              <a:rPr sz="1350" b="0">
+                <a:solidFill>
+                  <a:srgbClr val="101010"/>
+                </a:solidFill>
+                <a:latin typeface="Malgun Gothic"/>
+                <a:ea typeface="Malgun Gothic"/>
+                <a:cs typeface="Malgun Gothic"/>
+              </a:rPr>
+              <a:t>미승인 Ingestion HTTP 409 · Query ABSTAINED</a:t>
+            </a:r>
+          </a:p>
+        </p:txBody>
+      </p:sp>
+      <p:sp>
+        <p:nvSpPr>
+          <p:cNvPr id="21" name="">
+            <a:extLst xmlns:a="http://schemas.openxmlformats.org/drawingml/2006/main">
+              <a:ext uri="{FF2B5EF4-FFF2-40B4-BE49-F238E27FC236}">
+                <a16:creationId xmlns:a16="http://schemas.microsoft.com/office/drawing/2014/main" id="{19963BFE-7D02-43F9-AC6F-A60D76B3CEBE}"/>
+              </a:ext>
+            </a:extLst>
+          </p:cNvPr>
+          <p:cNvSpPr>
+            <a:spLocks xmlns:a="http://schemas.openxmlformats.org/drawingml/2006/main" noGrp="1"/>
+          </p:cNvSpPr>
+          <p:nvPr/>
+        </p:nvSpPr>
+        <p:spPr>
+          <a:xfrm xmlns:a="http://schemas.openxmlformats.org/drawingml/2006/main">
+            <a:off x="514350" y="5162550"/>
+            <a:ext cx="2095500" cy="323850"/>
+          </a:xfrm>
+          <a:prstGeom xmlns:a="http://schemas.openxmlformats.org/drawingml/2006/main" prst="rect">
+            <a:avLst/>
+          </a:prstGeom>
+          <a:noFill xmlns:a="http://schemas.openxmlformats.org/drawingml/2006/main"/>
+          <a:ln xmlns:a="http://schemas.openxmlformats.org/drawingml/2006/main" w="0">
+            <a:noFill/>
+            <a:prstDash val="solid"/>
+          </a:ln>
+        </p:spPr>
+        <p:txBody>
+          <a:bodyPr xmlns:a="http://schemas.openxmlformats.org/drawingml/2006/main"/>
+          <a:lstStyle xmlns:a="http://schemas.openxmlformats.org/drawingml/2006/main"/>
+          <a:p xmlns:a="http://schemas.openxmlformats.org/drawingml/2006/main">
+            <a:pPr algn="l">
+              <a:defRPr sz="1350" b="1">
+                <a:solidFill>
+                  <a:srgbClr val="101010"/>
+                </a:solidFill>
+                <a:latin typeface="Malgun Gothic"/>
+                <a:ea typeface="Malgun Gothic"/>
+                <a:cs typeface="Malgun Gothic"/>
+              </a:defRPr>
+            </a:pPr>
+            <a:r>
+              <a:rPr sz="1350" b="1">
+                <a:solidFill>
+                  <a:srgbClr val="101010"/>
+                </a:solidFill>
+                <a:latin typeface="Malgun Gothic"/>
+                <a:ea typeface="Malgun Gothic"/>
+                <a:cs typeface="Malgun Gothic"/>
+              </a:rPr>
+              <a:t>Isolation</a:t>
+            </a:r>
+          </a:p>
+        </p:txBody>
+      </p:sp>
+      <p:sp>
+        <p:nvSpPr>
+          <p:cNvPr id="22" name="">
+            <a:extLst xmlns:a="http://schemas.openxmlformats.org/drawingml/2006/main">
+              <a:ext uri="{FF2B5EF4-FFF2-40B4-BE49-F238E27FC236}">
+                <a16:creationId xmlns:a16="http://schemas.microsoft.com/office/drawing/2014/main" id="{D025AC0C-0497-478C-9E2C-93ABE99E7036}"/>
+              </a:ext>
+            </a:extLst>
+          </p:cNvPr>
+          <p:cNvSpPr>
+            <a:spLocks xmlns:a="http://schemas.openxmlformats.org/drawingml/2006/main" noGrp="1"/>
+          </p:cNvSpPr>
+          <p:nvPr/>
+        </p:nvSpPr>
+        <p:spPr>
+          <a:xfrm xmlns:a="http://schemas.openxmlformats.org/drawingml/2006/main">
+            <a:off x="2724150" y="5095875"/>
+            <a:ext cx="19050" cy="419100"/>
+          </a:xfrm>
+          <a:prstGeom xmlns:a="http://schemas.openxmlformats.org/drawingml/2006/main" prst="rect">
+            <a:avLst/>
+          </a:prstGeom>
+          <a:solidFill xmlns:a="http://schemas.openxmlformats.org/drawingml/2006/main">
+            <a:srgbClr val="B8BCC4"/>
+          </a:solidFill>
+          <a:ln xmlns:a="http://schemas.openxmlformats.org/drawingml/2006/main" w="0">
+            <a:noFill/>
+            <a:prstDash val="solid"/>
+          </a:ln>
+        </p:spPr>
+      </p:sp>
+      <p:sp>
+        <p:nvSpPr>
+          <p:cNvPr id="23" name="">
+            <a:extLst xmlns:a="http://schemas.openxmlformats.org/drawingml/2006/main">
+              <a:ext uri="{FF2B5EF4-FFF2-40B4-BE49-F238E27FC236}">
+                <a16:creationId xmlns:a16="http://schemas.microsoft.com/office/drawing/2014/main" id="{A35465B4-AF2E-429A-9362-7DD95C29C9BD}"/>
+              </a:ext>
+            </a:extLst>
+          </p:cNvPr>
+          <p:cNvSpPr>
+            <a:spLocks xmlns:a="http://schemas.openxmlformats.org/drawingml/2006/main" noGrp="1"/>
+          </p:cNvSpPr>
+          <p:nvPr/>
+        </p:nvSpPr>
+        <p:spPr>
+          <a:xfrm xmlns:a="http://schemas.openxmlformats.org/drawingml/2006/main">
+            <a:off x="3009900" y="5162550"/>
+            <a:ext cx="8382000" cy="361950"/>
+          </a:xfrm>
+          <a:prstGeom xmlns:a="http://schemas.openxmlformats.org/drawingml/2006/main" prst="rect">
+            <a:avLst/>
+          </a:prstGeom>
+          <a:noFill xmlns:a="http://schemas.openxmlformats.org/drawingml/2006/main"/>
+          <a:ln xmlns:a="http://schemas.openxmlformats.org/drawingml/2006/main" w="0">
+            <a:noFill/>
+            <a:prstDash val="solid"/>
+          </a:ln>
+        </p:spPr>
+        <p:txBody>
+          <a:bodyPr xmlns:a="http://schemas.openxmlformats.org/drawingml/2006/main"/>
+          <a:lstStyle xmlns:a="http://schemas.openxmlformats.org/drawingml/2006/main"/>
+          <a:p xmlns:a="http://schemas.openxmlformats.org/drawingml/2006/main">
+            <a:pPr algn="l">
+              <a:defRPr sz="1350" b="0">
+                <a:solidFill>
+                  <a:srgbClr val="101010"/>
+                </a:solidFill>
+                <a:latin typeface="Malgun Gothic"/>
+                <a:ea typeface="Malgun Gothic"/>
+                <a:cs typeface="Malgun Gothic"/>
+              </a:defRPr>
+            </a:pPr>
+            <a:r>
+              <a:rPr sz="1350" b="0">
+                <a:solidFill>
+                  <a:srgbClr val="101010"/>
+                </a:solidFill>
+                <a:latin typeface="Malgun Gothic"/>
+                <a:ea typeface="Malgun Gothic"/>
+                <a:cs typeface="Malgun Gothic"/>
+              </a:rPr>
+              <a:t>기존 Activepieces 6 Container 모두 Healthy</a:t>
+            </a:r>
+          </a:p>
+        </p:txBody>
+      </p:sp>
+      <p:sp>
+        <p:nvSpPr>
+          <p:cNvPr id="24" name="">
+            <a:extLst xmlns:a="http://schemas.openxmlformats.org/drawingml/2006/main">
+              <a:ext uri="{FF2B5EF4-FFF2-40B4-BE49-F238E27FC236}">
+                <a16:creationId xmlns:a16="http://schemas.microsoft.com/office/drawing/2014/main" id="{CB667A9B-99CD-4997-843F-4310A26855A0}"/>
+              </a:ext>
+            </a:extLst>
+          </p:cNvPr>
+          <p:cNvSpPr>
+            <a:spLocks xmlns:a="http://schemas.openxmlformats.org/drawingml/2006/main" noGrp="1"/>
+          </p:cNvSpPr>
+          <p:nvPr/>
+        </p:nvSpPr>
+        <p:spPr>
+          <a:xfrm xmlns:a="http://schemas.openxmlformats.org/drawingml/2006/main">
+            <a:off x="514350" y="5962650"/>
+            <a:ext cx="10287000" cy="285750"/>
+          </a:xfrm>
+          <a:prstGeom xmlns:a="http://schemas.openxmlformats.org/drawingml/2006/main" prst="rect">
+            <a:avLst/>
+          </a:prstGeom>
+          <a:noFill xmlns:a="http://schemas.openxmlformats.org/drawingml/2006/main"/>
+          <a:ln xmlns:a="http://schemas.openxmlformats.org/drawingml/2006/main" w="0">
+            <a:noFill/>
+            <a:prstDash val="solid"/>
+          </a:ln>
+        </p:spPr>
+        <p:txBody>
+          <a:bodyPr xmlns:a="http://schemas.openxmlformats.org/drawingml/2006/main"/>
+          <a:lstStyle xmlns:a="http://schemas.openxmlformats.org/drawingml/2006/main"/>
+          <a:p xmlns:a="http://schemas.openxmlformats.org/drawingml/2006/main">
+            <a:pPr algn="l">
+              <a:defRPr sz="1350" b="1">
                 <a:solidFill>
                   <a:srgbClr val="3D8DFF"/>
                 </a:solidFill>
@@ -8705,7 +10058,7 @@
               </a:defRPr>
             </a:pPr>
             <a:r>
-              <a:rPr sz="1575" b="1">
+              <a:rPr sz="1350" b="1">
                 <a:solidFill>
                   <a:srgbClr val="3D8DFF"/>
                 </a:solidFill>
@@ -8713,119 +10066,7 @@
                 <a:ea typeface="Malgun Gothic"/>
                 <a:cs typeface="Malgun Gothic"/>
               </a:rPr>
-              <a:t>검토 1  ·  9개 Profile·Reviewer dhslove</a:t>
-            </a:r>
-          </a:p>
-        </p:txBody>
-      </p:sp>
-      <p:sp>
-        <p:nvSpPr>
-          <p:cNvPr id="4" name="">
-            <a:extLst xmlns:a="http://schemas.openxmlformats.org/drawingml/2006/main">
-              <a:ext uri="{FF2B5EF4-FFF2-40B4-BE49-F238E27FC236}">
-                <a16:creationId xmlns:a16="http://schemas.microsoft.com/office/drawing/2014/main" id="{9D9DDB9E-081B-482A-8F33-1EC7C9A30CA4}"/>
-              </a:ext>
-            </a:extLst>
-          </p:cNvPr>
-          <p:cNvSpPr>
-            <a:spLocks xmlns:a="http://schemas.openxmlformats.org/drawingml/2006/main" noGrp="1"/>
-          </p:cNvSpPr>
-          <p:nvPr/>
-        </p:nvSpPr>
-        <p:spPr>
-          <a:xfrm xmlns:a="http://schemas.openxmlformats.org/drawingml/2006/main">
-            <a:off x="400050" y="4857750"/>
-            <a:ext cx="7239000" cy="323850"/>
-          </a:xfrm>
-          <a:prstGeom xmlns:a="http://schemas.openxmlformats.org/drawingml/2006/main" prst="rect">
-            <a:avLst/>
-          </a:prstGeom>
-          <a:noFill xmlns:a="http://schemas.openxmlformats.org/drawingml/2006/main"/>
-          <a:ln xmlns:a="http://schemas.openxmlformats.org/drawingml/2006/main" w="0">
-            <a:noFill/>
-            <a:prstDash val="solid"/>
-          </a:ln>
-        </p:spPr>
-        <p:txBody>
-          <a:bodyPr xmlns:a="http://schemas.openxmlformats.org/drawingml/2006/main"/>
-          <a:lstStyle xmlns:a="http://schemas.openxmlformats.org/drawingml/2006/main"/>
-          <a:p xmlns:a="http://schemas.openxmlformats.org/drawingml/2006/main">
-            <a:pPr algn="l">
-              <a:defRPr sz="1575" b="1">
-                <a:solidFill>
-                  <a:srgbClr val="3D8DFF"/>
-                </a:solidFill>
-                <a:latin typeface="Malgun Gothic"/>
-                <a:ea typeface="Malgun Gothic"/>
-                <a:cs typeface="Malgun Gothic"/>
-              </a:defRPr>
-            </a:pPr>
-            <a:r>
-              <a:rPr sz="1575" b="1">
-                <a:solidFill>
-                  <a:srgbClr val="3D8DFF"/>
-                </a:solidFill>
-                <a:latin typeface="Malgun Gothic"/>
-                <a:ea typeface="Malgun Gothic"/>
-                <a:cs typeface="Malgun Gothic"/>
-              </a:rPr>
-              <a:t>검토 2  ·  GENIE 34개 검역 결과</a:t>
-            </a:r>
-          </a:p>
-        </p:txBody>
-      </p:sp>
-      <p:sp>
-        <p:nvSpPr>
-          <p:cNvPr id="5" name="">
-            <a:extLst xmlns:a="http://schemas.openxmlformats.org/drawingml/2006/main">
-              <a:ext uri="{FF2B5EF4-FFF2-40B4-BE49-F238E27FC236}">
-                <a16:creationId xmlns:a16="http://schemas.microsoft.com/office/drawing/2014/main" id="{90CF5975-E8D0-4F6C-852F-BE2B2C2C5A53}"/>
-              </a:ext>
-            </a:extLst>
-          </p:cNvPr>
-          <p:cNvSpPr>
-            <a:spLocks xmlns:a="http://schemas.openxmlformats.org/drawingml/2006/main" noGrp="1"/>
-          </p:cNvSpPr>
-          <p:nvPr/>
-        </p:nvSpPr>
-        <p:spPr>
-          <a:xfrm xmlns:a="http://schemas.openxmlformats.org/drawingml/2006/main">
-            <a:off x="400050" y="5314950"/>
-            <a:ext cx="8572500" cy="323850"/>
-          </a:xfrm>
-          <a:prstGeom xmlns:a="http://schemas.openxmlformats.org/drawingml/2006/main" prst="rect">
-            <a:avLst/>
-          </a:prstGeom>
-          <a:noFill xmlns:a="http://schemas.openxmlformats.org/drawingml/2006/main"/>
-          <a:ln xmlns:a="http://schemas.openxmlformats.org/drawingml/2006/main" w="0">
-            <a:noFill/>
-            <a:prstDash val="solid"/>
-          </a:ln>
-        </p:spPr>
-        <p:txBody>
-          <a:bodyPr xmlns:a="http://schemas.openxmlformats.org/drawingml/2006/main"/>
-          <a:lstStyle xmlns:a="http://schemas.openxmlformats.org/drawingml/2006/main"/>
-          <a:p xmlns:a="http://schemas.openxmlformats.org/drawingml/2006/main">
-            <a:pPr algn="l">
-              <a:defRPr sz="1575" b="1">
-                <a:solidFill>
-                  <a:srgbClr val="117A4B"/>
-                </a:solidFill>
-                <a:latin typeface="Malgun Gothic"/>
-                <a:ea typeface="Malgun Gothic"/>
-                <a:cs typeface="Malgun Gothic"/>
-              </a:defRPr>
-            </a:pPr>
-            <a:r>
-              <a:rPr sz="1575" b="1">
-                <a:solidFill>
-                  <a:srgbClr val="117A4B"/>
-                </a:solidFill>
-                <a:latin typeface="Malgun Gothic"/>
-                <a:ea typeface="Malgun Gothic"/>
-                <a:cs typeface="Malgun Gothic"/>
-              </a:rPr>
-              <a:t>다음  ·  Parser·Chunk·Embeddings·Hybrid Retrieval</a:t>
+              <a:t>실제 Source 승인·활성화·OpenAI Provider Call은 모두 0건입니다.</a:t>
             </a:r>
           </a:p>
         </p:txBody>
@@ -8833,7 +10074,985 @@
     </p:spTree>
     <p:extLst>
       <p:ext uri="{BB962C8B-B14F-4D97-AF65-F5344CB8AC3E}">
-        <p14:creationId xmlns:p14="http://schemas.microsoft.com/office/powerpoint/2010/main" val="666659986"/>
+        <p14:creationId xmlns:p14="http://schemas.microsoft.com/office/powerpoint/2010/main" val="1828209846"/>
+      </p:ext>
+    </p:extLst>
+  </p:cSld>
+</p:sld>
+</file>
+
+<file path=ppt/slides/slide9.xml><?xml version="1.0" encoding="utf-8"?>
+<p:sld xmlns:p="http://schemas.openxmlformats.org/presentationml/2006/main">
+  <p:cSld>
+    <p:bg>
+      <p:bgPr>
+        <a:solidFill xmlns:a="http://schemas.openxmlformats.org/drawingml/2006/main">
+          <a:srgbClr val="FFFFFF"/>
+        </a:solidFill>
+      </p:bgPr>
+    </p:bg>
+    <p:spTree>
+      <p:nvGrpSpPr>
+        <p:cNvPr id="1" name=""/>
+        <p:cNvGrpSpPr/>
+        <p:nvPr/>
+      </p:nvGrpSpPr>
+      <p:grpSpPr>
+        <a:xfrm xmlns:a="http://schemas.openxmlformats.org/drawingml/2006/main"/>
+      </p:grpSpPr>
+      <p:sp>
+        <p:nvSpPr>
+          <p:cNvPr id="20" name="">
+            <a:extLst xmlns:a="http://schemas.openxmlformats.org/drawingml/2006/main">
+              <a:ext uri="{FF2B5EF4-FFF2-40B4-BE49-F238E27FC236}">
+                <a16:creationId xmlns:a16="http://schemas.microsoft.com/office/drawing/2014/main" id="{DD1819CB-AD7B-498D-97AD-46D7ABA537AE}"/>
+              </a:ext>
+            </a:extLst>
+          </p:cNvPr>
+          <p:cNvSpPr>
+            <a:spLocks xmlns:a="http://schemas.openxmlformats.org/drawingml/2006/main" noGrp="1"/>
+          </p:cNvSpPr>
+          <p:nvPr/>
+        </p:nvSpPr>
+        <p:spPr>
+          <a:xfrm xmlns:a="http://schemas.openxmlformats.org/drawingml/2006/main">
+            <a:off x="400050" y="323850"/>
+            <a:ext cx="10953750" cy="762000"/>
+          </a:xfrm>
+          <a:prstGeom xmlns:a="http://schemas.openxmlformats.org/drawingml/2006/main" prst="rect">
+            <a:avLst/>
+          </a:prstGeom>
+          <a:noFill xmlns:a="http://schemas.openxmlformats.org/drawingml/2006/main"/>
+          <a:ln xmlns:a="http://schemas.openxmlformats.org/drawingml/2006/main" w="0">
+            <a:noFill/>
+            <a:prstDash val="solid"/>
+          </a:ln>
+        </p:spPr>
+        <p:txBody>
+          <a:bodyPr xmlns:a="http://schemas.openxmlformats.org/drawingml/2006/main"/>
+          <a:lstStyle xmlns:a="http://schemas.openxmlformats.org/drawingml/2006/main"/>
+          <a:p xmlns:a="http://schemas.openxmlformats.org/drawingml/2006/main">
+            <a:pPr algn="l">
+              <a:defRPr sz="2850" b="1">
+                <a:solidFill>
+                  <a:srgbClr val="101010"/>
+                </a:solidFill>
+                <a:latin typeface="Malgun Gothic"/>
+                <a:ea typeface="Malgun Gothic"/>
+                <a:cs typeface="Malgun Gothic"/>
+              </a:defRPr>
+            </a:pPr>
+            <a:r>
+              <a:rPr sz="2850" b="1">
+                <a:solidFill>
+                  <a:srgbClr val="101010"/>
+                </a:solidFill>
+                <a:latin typeface="Malgun Gothic"/>
+                <a:ea typeface="Malgun Gothic"/>
+                <a:cs typeface="Malgun Gothic"/>
+              </a:rPr>
+              <a:t>시험 서버 Root를 1TB까지 온라인 확장했습니다</a:t>
+            </a:r>
+          </a:p>
+        </p:txBody>
+      </p:sp>
+      <p:sp>
+        <p:nvSpPr>
+          <p:cNvPr id="2" name="">
+            <a:extLst xmlns:a="http://schemas.openxmlformats.org/drawingml/2006/main">
+              <a:ext uri="{FF2B5EF4-FFF2-40B4-BE49-F238E27FC236}">
+                <a16:creationId xmlns:a16="http://schemas.microsoft.com/office/drawing/2014/main" id="{D86008A9-0DBD-4CCF-A1C3-CD811244355B}"/>
+              </a:ext>
+            </a:extLst>
+          </p:cNvPr>
+          <p:cNvSpPr>
+            <a:spLocks xmlns:a="http://schemas.openxmlformats.org/drawingml/2006/main" noGrp="1"/>
+          </p:cNvSpPr>
+          <p:nvPr/>
+        </p:nvSpPr>
+        <p:spPr>
+          <a:xfrm xmlns:a="http://schemas.openxmlformats.org/drawingml/2006/main">
+            <a:off x="11258550" y="6305550"/>
+            <a:ext cx="533400" cy="209550"/>
+          </a:xfrm>
+          <a:prstGeom xmlns:a="http://schemas.openxmlformats.org/drawingml/2006/main" prst="rect">
+            <a:avLst/>
+          </a:prstGeom>
+          <a:noFill xmlns:a="http://schemas.openxmlformats.org/drawingml/2006/main"/>
+          <a:ln xmlns:a="http://schemas.openxmlformats.org/drawingml/2006/main" w="0">
+            <a:noFill/>
+            <a:prstDash val="solid"/>
+          </a:ln>
+        </p:spPr>
+        <p:txBody>
+          <a:bodyPr xmlns:a="http://schemas.openxmlformats.org/drawingml/2006/main"/>
+          <a:lstStyle xmlns:a="http://schemas.openxmlformats.org/drawingml/2006/main"/>
+          <a:p xmlns:a="http://schemas.openxmlformats.org/drawingml/2006/main">
+            <a:pPr algn="r">
+              <a:defRPr sz="975" b="0">
+                <a:solidFill>
+                  <a:srgbClr val="5B616B"/>
+                </a:solidFill>
+                <a:latin typeface="Malgun Gothic"/>
+                <a:ea typeface="Malgun Gothic"/>
+                <a:cs typeface="Malgun Gothic"/>
+              </a:defRPr>
+            </a:pPr>
+            <a:r>
+              <a:rPr sz="975" b="0">
+                <a:solidFill>
+                  <a:srgbClr val="5B616B"/>
+                </a:solidFill>
+                <a:latin typeface="Malgun Gothic"/>
+                <a:ea typeface="Malgun Gothic"/>
+                <a:cs typeface="Malgun Gothic"/>
+              </a:rPr>
+              <a:t>09</a:t>
+            </a:r>
+          </a:p>
+        </p:txBody>
+      </p:sp>
+      <p:sp>
+        <p:nvSpPr>
+          <p:cNvPr id="3" name="">
+            <a:extLst xmlns:a="http://schemas.openxmlformats.org/drawingml/2006/main">
+              <a:ext uri="{FF2B5EF4-FFF2-40B4-BE49-F238E27FC236}">
+                <a16:creationId xmlns:a16="http://schemas.microsoft.com/office/drawing/2014/main" id="{90D26365-9FE2-4E30-91BB-A3322851A623}"/>
+              </a:ext>
+            </a:extLst>
+          </p:cNvPr>
+          <p:cNvSpPr>
+            <a:spLocks xmlns:a="http://schemas.openxmlformats.org/drawingml/2006/main" noGrp="1"/>
+          </p:cNvSpPr>
+          <p:nvPr/>
+        </p:nvSpPr>
+        <p:spPr>
+          <a:xfrm xmlns:a="http://schemas.openxmlformats.org/drawingml/2006/main">
+            <a:off x="400050" y="1952625"/>
+            <a:ext cx="3562350" cy="2381250"/>
+          </a:xfrm>
+          <a:prstGeom xmlns:a="http://schemas.openxmlformats.org/drawingml/2006/main" prst="roundRect">
+            <a:avLst>
+              <a:gd name="adj" fmla="val 4800"/>
+            </a:avLst>
+          </a:prstGeom>
+          <a:solidFill xmlns:a="http://schemas.openxmlformats.org/drawingml/2006/main">
+            <a:srgbClr val="EDEDED"/>
+          </a:solidFill>
+          <a:ln xmlns:a="http://schemas.openxmlformats.org/drawingml/2006/main" w="0">
+            <a:noFill/>
+            <a:prstDash val="solid"/>
+          </a:ln>
+        </p:spPr>
+      </p:sp>
+      <p:sp>
+        <p:nvSpPr>
+          <p:cNvPr id="4" name="">
+            <a:extLst xmlns:a="http://schemas.openxmlformats.org/drawingml/2006/main">
+              <a:ext uri="{FF2B5EF4-FFF2-40B4-BE49-F238E27FC236}">
+                <a16:creationId xmlns:a16="http://schemas.microsoft.com/office/drawing/2014/main" id="{B5BD9187-39E6-481E-9FAE-CABBE2C52488}"/>
+              </a:ext>
+            </a:extLst>
+          </p:cNvPr>
+          <p:cNvSpPr>
+            <a:spLocks xmlns:a="http://schemas.openxmlformats.org/drawingml/2006/main" noGrp="1"/>
+          </p:cNvSpPr>
+          <p:nvPr/>
+        </p:nvSpPr>
+        <p:spPr>
+          <a:xfrm xmlns:a="http://schemas.openxmlformats.org/drawingml/2006/main">
+            <a:off x="647700" y="2333625"/>
+            <a:ext cx="3048000" cy="876300"/>
+          </a:xfrm>
+          <a:prstGeom xmlns:a="http://schemas.openxmlformats.org/drawingml/2006/main" prst="rect">
+            <a:avLst/>
+          </a:prstGeom>
+          <a:noFill xmlns:a="http://schemas.openxmlformats.org/drawingml/2006/main"/>
+          <a:ln xmlns:a="http://schemas.openxmlformats.org/drawingml/2006/main" w="0">
+            <a:noFill/>
+            <a:prstDash val="solid"/>
+          </a:ln>
+        </p:spPr>
+        <p:txBody>
+          <a:bodyPr xmlns:a="http://schemas.openxmlformats.org/drawingml/2006/main"/>
+          <a:lstStyle xmlns:a="http://schemas.openxmlformats.org/drawingml/2006/main"/>
+          <a:p xmlns:a="http://schemas.openxmlformats.org/drawingml/2006/main">
+            <a:pPr algn="l">
+              <a:defRPr sz="4200" b="1">
+                <a:solidFill>
+                  <a:srgbClr val="101010"/>
+                </a:solidFill>
+                <a:latin typeface="Malgun Gothic"/>
+                <a:ea typeface="Malgun Gothic"/>
+                <a:cs typeface="Malgun Gothic"/>
+              </a:defRPr>
+            </a:pPr>
+            <a:r>
+              <a:rPr sz="4200" b="1">
+                <a:solidFill>
+                  <a:srgbClr val="101010"/>
+                </a:solidFill>
+                <a:latin typeface="Malgun Gothic"/>
+                <a:ea typeface="Malgun Gothic"/>
+                <a:cs typeface="Malgun Gothic"/>
+              </a:rPr>
+              <a:t>46.9</a:t>
+            </a:r>
+          </a:p>
+        </p:txBody>
+      </p:sp>
+      <p:sp>
+        <p:nvSpPr>
+          <p:cNvPr id="5" name="">
+            <a:extLst xmlns:a="http://schemas.openxmlformats.org/drawingml/2006/main">
+              <a:ext uri="{FF2B5EF4-FFF2-40B4-BE49-F238E27FC236}">
+                <a16:creationId xmlns:a16="http://schemas.microsoft.com/office/drawing/2014/main" id="{A9500DF7-30D1-4A6D-94D3-6E9D6D198B45}"/>
+              </a:ext>
+            </a:extLst>
+          </p:cNvPr>
+          <p:cNvSpPr>
+            <a:spLocks xmlns:a="http://schemas.openxmlformats.org/drawingml/2006/main" noGrp="1"/>
+          </p:cNvSpPr>
+          <p:nvPr/>
+        </p:nvSpPr>
+        <p:spPr>
+          <a:xfrm xmlns:a="http://schemas.openxmlformats.org/drawingml/2006/main">
+            <a:off x="647700" y="3295650"/>
+            <a:ext cx="3048000" cy="285750"/>
+          </a:xfrm>
+          <a:prstGeom xmlns:a="http://schemas.openxmlformats.org/drawingml/2006/main" prst="rect">
+            <a:avLst/>
+          </a:prstGeom>
+          <a:noFill xmlns:a="http://schemas.openxmlformats.org/drawingml/2006/main"/>
+          <a:ln xmlns:a="http://schemas.openxmlformats.org/drawingml/2006/main" w="0">
+            <a:noFill/>
+            <a:prstDash val="solid"/>
+          </a:ln>
+        </p:spPr>
+        <p:txBody>
+          <a:bodyPr xmlns:a="http://schemas.openxmlformats.org/drawingml/2006/main"/>
+          <a:lstStyle xmlns:a="http://schemas.openxmlformats.org/drawingml/2006/main"/>
+          <a:p xmlns:a="http://schemas.openxmlformats.org/drawingml/2006/main">
+            <a:pPr algn="l">
+              <a:defRPr sz="1350" b="1">
+                <a:solidFill>
+                  <a:srgbClr val="101010"/>
+                </a:solidFill>
+                <a:latin typeface="Malgun Gothic"/>
+                <a:ea typeface="Malgun Gothic"/>
+                <a:cs typeface="Malgun Gothic"/>
+              </a:defRPr>
+            </a:pPr>
+            <a:r>
+              <a:rPr sz="1350" b="1">
+                <a:solidFill>
+                  <a:srgbClr val="101010"/>
+                </a:solidFill>
+                <a:latin typeface="Malgun Gothic"/>
+                <a:ea typeface="Malgun Gothic"/>
+                <a:cs typeface="Malgun Gothic"/>
+              </a:rPr>
+              <a:t>GiB BEFORE</a:t>
+            </a:r>
+          </a:p>
+        </p:txBody>
+      </p:sp>
+      <p:sp>
+        <p:nvSpPr>
+          <p:cNvPr id="6" name="">
+            <a:extLst xmlns:a="http://schemas.openxmlformats.org/drawingml/2006/main">
+              <a:ext uri="{FF2B5EF4-FFF2-40B4-BE49-F238E27FC236}">
+                <a16:creationId xmlns:a16="http://schemas.microsoft.com/office/drawing/2014/main" id="{158779D4-BB3F-43D3-A8DC-140661DC50FC}"/>
+              </a:ext>
+            </a:extLst>
+          </p:cNvPr>
+          <p:cNvSpPr>
+            <a:spLocks xmlns:a="http://schemas.openxmlformats.org/drawingml/2006/main" noGrp="1"/>
+          </p:cNvSpPr>
+          <p:nvPr/>
+        </p:nvSpPr>
+        <p:spPr>
+          <a:xfrm xmlns:a="http://schemas.openxmlformats.org/drawingml/2006/main">
+            <a:off x="647700" y="3733800"/>
+            <a:ext cx="3048000" cy="323850"/>
+          </a:xfrm>
+          <a:prstGeom xmlns:a="http://schemas.openxmlformats.org/drawingml/2006/main" prst="rect">
+            <a:avLst/>
+          </a:prstGeom>
+          <a:noFill xmlns:a="http://schemas.openxmlformats.org/drawingml/2006/main"/>
+          <a:ln xmlns:a="http://schemas.openxmlformats.org/drawingml/2006/main" w="0">
+            <a:noFill/>
+            <a:prstDash val="solid"/>
+          </a:ln>
+        </p:spPr>
+        <p:txBody>
+          <a:bodyPr xmlns:a="http://schemas.openxmlformats.org/drawingml/2006/main"/>
+          <a:lstStyle xmlns:a="http://schemas.openxmlformats.org/drawingml/2006/main"/>
+          <a:p xmlns:a="http://schemas.openxmlformats.org/drawingml/2006/main">
+            <a:pPr algn="l">
+              <a:defRPr sz="1200" b="0">
+                <a:solidFill>
+                  <a:srgbClr val="5B616B"/>
+                </a:solidFill>
+                <a:latin typeface="Malgun Gothic"/>
+                <a:ea typeface="Malgun Gothic"/>
+                <a:cs typeface="Malgun Gothic"/>
+              </a:defRPr>
+            </a:pPr>
+            <a:r>
+              <a:rPr sz="1200" b="0">
+                <a:solidFill>
+                  <a:srgbClr val="5B616B"/>
+                </a:solidFill>
+                <a:latin typeface="Malgun Gothic"/>
+                <a:ea typeface="Malgun Gothic"/>
+                <a:cs typeface="Malgun Gothic"/>
+              </a:rPr>
+              <a:t>sda3 · PV · Root LV</a:t>
+            </a:r>
+          </a:p>
+        </p:txBody>
+      </p:sp>
+      <p:sp>
+        <p:nvSpPr>
+          <p:cNvPr id="7" name="">
+            <a:extLst xmlns:a="http://schemas.openxmlformats.org/drawingml/2006/main">
+              <a:ext uri="{FF2B5EF4-FFF2-40B4-BE49-F238E27FC236}">
+                <a16:creationId xmlns:a16="http://schemas.microsoft.com/office/drawing/2014/main" id="{C0EA4CD5-FFAB-4BD8-A5BE-BE7B8869BE38}"/>
+              </a:ext>
+            </a:extLst>
+          </p:cNvPr>
+          <p:cNvSpPr>
+            <a:spLocks xmlns:a="http://schemas.openxmlformats.org/drawingml/2006/main" noGrp="1"/>
+          </p:cNvSpPr>
+          <p:nvPr/>
+        </p:nvSpPr>
+        <p:spPr>
+          <a:xfrm xmlns:a="http://schemas.openxmlformats.org/drawingml/2006/main">
+            <a:off x="4314825" y="1952625"/>
+            <a:ext cx="3562350" cy="2381250"/>
+          </a:xfrm>
+          <a:prstGeom xmlns:a="http://schemas.openxmlformats.org/drawingml/2006/main" prst="roundRect">
+            <a:avLst>
+              <a:gd name="adj" fmla="val 4800"/>
+            </a:avLst>
+          </a:prstGeom>
+          <a:solidFill xmlns:a="http://schemas.openxmlformats.org/drawingml/2006/main">
+            <a:srgbClr val="EDEDED"/>
+          </a:solidFill>
+          <a:ln xmlns:a="http://schemas.openxmlformats.org/drawingml/2006/main" w="0">
+            <a:noFill/>
+            <a:prstDash val="solid"/>
+          </a:ln>
+        </p:spPr>
+      </p:sp>
+      <p:sp>
+        <p:nvSpPr>
+          <p:cNvPr id="8" name="">
+            <a:extLst xmlns:a="http://schemas.openxmlformats.org/drawingml/2006/main">
+              <a:ext uri="{FF2B5EF4-FFF2-40B4-BE49-F238E27FC236}">
+                <a16:creationId xmlns:a16="http://schemas.microsoft.com/office/drawing/2014/main" id="{B472BBB2-4594-43E8-A3B7-8AD782D60692}"/>
+              </a:ext>
+            </a:extLst>
+          </p:cNvPr>
+          <p:cNvSpPr>
+            <a:spLocks xmlns:a="http://schemas.openxmlformats.org/drawingml/2006/main" noGrp="1"/>
+          </p:cNvSpPr>
+          <p:nvPr/>
+        </p:nvSpPr>
+        <p:spPr>
+          <a:xfrm xmlns:a="http://schemas.openxmlformats.org/drawingml/2006/main">
+            <a:off x="4562475" y="2333625"/>
+            <a:ext cx="3048000" cy="876300"/>
+          </a:xfrm>
+          <a:prstGeom xmlns:a="http://schemas.openxmlformats.org/drawingml/2006/main" prst="rect">
+            <a:avLst/>
+          </a:prstGeom>
+          <a:noFill xmlns:a="http://schemas.openxmlformats.org/drawingml/2006/main"/>
+          <a:ln xmlns:a="http://schemas.openxmlformats.org/drawingml/2006/main" w="0">
+            <a:noFill/>
+            <a:prstDash val="solid"/>
+          </a:ln>
+        </p:spPr>
+        <p:txBody>
+          <a:bodyPr xmlns:a="http://schemas.openxmlformats.org/drawingml/2006/main"/>
+          <a:lstStyle xmlns:a="http://schemas.openxmlformats.org/drawingml/2006/main"/>
+          <a:p xmlns:a="http://schemas.openxmlformats.org/drawingml/2006/main">
+            <a:pPr algn="l">
+              <a:defRPr sz="4200" b="1">
+                <a:solidFill>
+                  <a:srgbClr val="101010"/>
+                </a:solidFill>
+                <a:latin typeface="Malgun Gothic"/>
+                <a:ea typeface="Malgun Gothic"/>
+                <a:cs typeface="Malgun Gothic"/>
+              </a:defRPr>
+            </a:pPr>
+            <a:r>
+              <a:rPr sz="4200" b="1">
+                <a:solidFill>
+                  <a:srgbClr val="101010"/>
+                </a:solidFill>
+                <a:latin typeface="Malgun Gothic"/>
+                <a:ea typeface="Malgun Gothic"/>
+                <a:cs typeface="Malgun Gothic"/>
+              </a:rPr>
+              <a:t>1,020.9</a:t>
+            </a:r>
+          </a:p>
+        </p:txBody>
+      </p:sp>
+      <p:sp>
+        <p:nvSpPr>
+          <p:cNvPr id="9" name="">
+            <a:extLst xmlns:a="http://schemas.openxmlformats.org/drawingml/2006/main">
+              <a:ext uri="{FF2B5EF4-FFF2-40B4-BE49-F238E27FC236}">
+                <a16:creationId xmlns:a16="http://schemas.microsoft.com/office/drawing/2014/main" id="{6E09A77A-F812-42AA-8232-0CC050B26911}"/>
+              </a:ext>
+            </a:extLst>
+          </p:cNvPr>
+          <p:cNvSpPr>
+            <a:spLocks xmlns:a="http://schemas.openxmlformats.org/drawingml/2006/main" noGrp="1"/>
+          </p:cNvSpPr>
+          <p:nvPr/>
+        </p:nvSpPr>
+        <p:spPr>
+          <a:xfrm xmlns:a="http://schemas.openxmlformats.org/drawingml/2006/main">
+            <a:off x="4562475" y="3295650"/>
+            <a:ext cx="3048000" cy="285750"/>
+          </a:xfrm>
+          <a:prstGeom xmlns:a="http://schemas.openxmlformats.org/drawingml/2006/main" prst="rect">
+            <a:avLst/>
+          </a:prstGeom>
+          <a:noFill xmlns:a="http://schemas.openxmlformats.org/drawingml/2006/main"/>
+          <a:ln xmlns:a="http://schemas.openxmlformats.org/drawingml/2006/main" w="0">
+            <a:noFill/>
+            <a:prstDash val="solid"/>
+          </a:ln>
+        </p:spPr>
+        <p:txBody>
+          <a:bodyPr xmlns:a="http://schemas.openxmlformats.org/drawingml/2006/main"/>
+          <a:lstStyle xmlns:a="http://schemas.openxmlformats.org/drawingml/2006/main"/>
+          <a:p xmlns:a="http://schemas.openxmlformats.org/drawingml/2006/main">
+            <a:pPr algn="l">
+              <a:defRPr sz="1350" b="1">
+                <a:solidFill>
+                  <a:srgbClr val="101010"/>
+                </a:solidFill>
+                <a:latin typeface="Malgun Gothic"/>
+                <a:ea typeface="Malgun Gothic"/>
+                <a:cs typeface="Malgun Gothic"/>
+              </a:defRPr>
+            </a:pPr>
+            <a:r>
+              <a:rPr sz="1350" b="1">
+                <a:solidFill>
+                  <a:srgbClr val="101010"/>
+                </a:solidFill>
+                <a:latin typeface="Malgun Gothic"/>
+                <a:ea typeface="Malgun Gothic"/>
+                <a:cs typeface="Malgun Gothic"/>
+              </a:rPr>
+              <a:t>GiB AFTER</a:t>
+            </a:r>
+          </a:p>
+        </p:txBody>
+      </p:sp>
+      <p:sp>
+        <p:nvSpPr>
+          <p:cNvPr id="10" name="">
+            <a:extLst xmlns:a="http://schemas.openxmlformats.org/drawingml/2006/main">
+              <a:ext uri="{FF2B5EF4-FFF2-40B4-BE49-F238E27FC236}">
+                <a16:creationId xmlns:a16="http://schemas.microsoft.com/office/drawing/2014/main" id="{A69C2622-177A-48A6-B9F4-BB9C98ED7A11}"/>
+              </a:ext>
+            </a:extLst>
+          </p:cNvPr>
+          <p:cNvSpPr>
+            <a:spLocks xmlns:a="http://schemas.openxmlformats.org/drawingml/2006/main" noGrp="1"/>
+          </p:cNvSpPr>
+          <p:nvPr/>
+        </p:nvSpPr>
+        <p:spPr>
+          <a:xfrm xmlns:a="http://schemas.openxmlformats.org/drawingml/2006/main">
+            <a:off x="4562475" y="3733800"/>
+            <a:ext cx="3048000" cy="323850"/>
+          </a:xfrm>
+          <a:prstGeom xmlns:a="http://schemas.openxmlformats.org/drawingml/2006/main" prst="rect">
+            <a:avLst/>
+          </a:prstGeom>
+          <a:noFill xmlns:a="http://schemas.openxmlformats.org/drawingml/2006/main"/>
+          <a:ln xmlns:a="http://schemas.openxmlformats.org/drawingml/2006/main" w="0">
+            <a:noFill/>
+            <a:prstDash val="solid"/>
+          </a:ln>
+        </p:spPr>
+        <p:txBody>
+          <a:bodyPr xmlns:a="http://schemas.openxmlformats.org/drawingml/2006/main"/>
+          <a:lstStyle xmlns:a="http://schemas.openxmlformats.org/drawingml/2006/main"/>
+          <a:p xmlns:a="http://schemas.openxmlformats.org/drawingml/2006/main">
+            <a:pPr algn="l">
+              <a:defRPr sz="1200" b="0">
+                <a:solidFill>
+                  <a:srgbClr val="5B616B"/>
+                </a:solidFill>
+                <a:latin typeface="Malgun Gothic"/>
+                <a:ea typeface="Malgun Gothic"/>
+                <a:cs typeface="Malgun Gothic"/>
+              </a:defRPr>
+            </a:pPr>
+            <a:r>
+              <a:rPr sz="1200" b="0">
+                <a:solidFill>
+                  <a:srgbClr val="5B616B"/>
+                </a:solidFill>
+                <a:latin typeface="Malgun Gothic"/>
+                <a:ea typeface="Malgun Gothic"/>
+                <a:cs typeface="Malgun Gothic"/>
+              </a:rPr>
+              <a:t>sda3 · ubuntu-lv</a:t>
+            </a:r>
+          </a:p>
+        </p:txBody>
+      </p:sp>
+      <p:sp>
+        <p:nvSpPr>
+          <p:cNvPr id="11" name="">
+            <a:extLst xmlns:a="http://schemas.openxmlformats.org/drawingml/2006/main">
+              <a:ext uri="{FF2B5EF4-FFF2-40B4-BE49-F238E27FC236}">
+                <a16:creationId xmlns:a16="http://schemas.microsoft.com/office/drawing/2014/main" id="{601E557D-8874-4AF2-80AF-234D01FCA835}"/>
+              </a:ext>
+            </a:extLst>
+          </p:cNvPr>
+          <p:cNvSpPr>
+            <a:spLocks xmlns:a="http://schemas.openxmlformats.org/drawingml/2006/main" noGrp="1"/>
+          </p:cNvSpPr>
+          <p:nvPr/>
+        </p:nvSpPr>
+        <p:spPr>
+          <a:xfrm xmlns:a="http://schemas.openxmlformats.org/drawingml/2006/main">
+            <a:off x="8229600" y="1952625"/>
+            <a:ext cx="3562350" cy="2381250"/>
+          </a:xfrm>
+          <a:prstGeom xmlns:a="http://schemas.openxmlformats.org/drawingml/2006/main" prst="roundRect">
+            <a:avLst>
+              <a:gd name="adj" fmla="val 4800"/>
+            </a:avLst>
+          </a:prstGeom>
+          <a:solidFill xmlns:a="http://schemas.openxmlformats.org/drawingml/2006/main">
+            <a:srgbClr val="DDF3FF"/>
+          </a:solidFill>
+          <a:ln xmlns:a="http://schemas.openxmlformats.org/drawingml/2006/main" w="0">
+            <a:noFill/>
+            <a:prstDash val="solid"/>
+          </a:ln>
+        </p:spPr>
+      </p:sp>
+      <p:sp>
+        <p:nvSpPr>
+          <p:cNvPr id="12" name="">
+            <a:extLst xmlns:a="http://schemas.openxmlformats.org/drawingml/2006/main">
+              <a:ext uri="{FF2B5EF4-FFF2-40B4-BE49-F238E27FC236}">
+                <a16:creationId xmlns:a16="http://schemas.microsoft.com/office/drawing/2014/main" id="{3CA96C6C-8727-4D08-B9EC-0F212B9E85BB}"/>
+              </a:ext>
+            </a:extLst>
+          </p:cNvPr>
+          <p:cNvSpPr>
+            <a:spLocks xmlns:a="http://schemas.openxmlformats.org/drawingml/2006/main" noGrp="1"/>
+          </p:cNvSpPr>
+          <p:nvPr/>
+        </p:nvSpPr>
+        <p:spPr>
+          <a:xfrm xmlns:a="http://schemas.openxmlformats.org/drawingml/2006/main">
+            <a:off x="8477250" y="2333625"/>
+            <a:ext cx="3048000" cy="876300"/>
+          </a:xfrm>
+          <a:prstGeom xmlns:a="http://schemas.openxmlformats.org/drawingml/2006/main" prst="rect">
+            <a:avLst/>
+          </a:prstGeom>
+          <a:noFill xmlns:a="http://schemas.openxmlformats.org/drawingml/2006/main"/>
+          <a:ln xmlns:a="http://schemas.openxmlformats.org/drawingml/2006/main" w="0">
+            <a:noFill/>
+            <a:prstDash val="solid"/>
+          </a:ln>
+        </p:spPr>
+        <p:txBody>
+          <a:bodyPr xmlns:a="http://schemas.openxmlformats.org/drawingml/2006/main"/>
+          <a:lstStyle xmlns:a="http://schemas.openxmlformats.org/drawingml/2006/main"/>
+          <a:p xmlns:a="http://schemas.openxmlformats.org/drawingml/2006/main">
+            <a:pPr algn="l">
+              <a:defRPr sz="4200" b="1">
+                <a:solidFill>
+                  <a:srgbClr val="3D8DFF"/>
+                </a:solidFill>
+                <a:latin typeface="Malgun Gothic"/>
+                <a:ea typeface="Malgun Gothic"/>
+                <a:cs typeface="Malgun Gothic"/>
+              </a:defRPr>
+            </a:pPr>
+            <a:r>
+              <a:rPr sz="4200" b="1">
+                <a:solidFill>
+                  <a:srgbClr val="3D8DFF"/>
+                </a:solidFill>
+                <a:latin typeface="Malgun Gothic"/>
+                <a:ea typeface="Malgun Gothic"/>
+                <a:cs typeface="Malgun Gothic"/>
+              </a:rPr>
+              <a:t>950</a:t>
+            </a:r>
+          </a:p>
+        </p:txBody>
+      </p:sp>
+      <p:sp>
+        <p:nvSpPr>
+          <p:cNvPr id="13" name="">
+            <a:extLst xmlns:a="http://schemas.openxmlformats.org/drawingml/2006/main">
+              <a:ext uri="{FF2B5EF4-FFF2-40B4-BE49-F238E27FC236}">
+                <a16:creationId xmlns:a16="http://schemas.microsoft.com/office/drawing/2014/main" id="{4BE2FE46-5313-493F-9381-9EF70A6B6B4C}"/>
+              </a:ext>
+            </a:extLst>
+          </p:cNvPr>
+          <p:cNvSpPr>
+            <a:spLocks xmlns:a="http://schemas.openxmlformats.org/drawingml/2006/main" noGrp="1"/>
+          </p:cNvSpPr>
+          <p:nvPr/>
+        </p:nvSpPr>
+        <p:spPr>
+          <a:xfrm xmlns:a="http://schemas.openxmlformats.org/drawingml/2006/main">
+            <a:off x="8477250" y="3295650"/>
+            <a:ext cx="3048000" cy="285750"/>
+          </a:xfrm>
+          <a:prstGeom xmlns:a="http://schemas.openxmlformats.org/drawingml/2006/main" prst="rect">
+            <a:avLst/>
+          </a:prstGeom>
+          <a:noFill xmlns:a="http://schemas.openxmlformats.org/drawingml/2006/main"/>
+          <a:ln xmlns:a="http://schemas.openxmlformats.org/drawingml/2006/main" w="0">
+            <a:noFill/>
+            <a:prstDash val="solid"/>
+          </a:ln>
+        </p:spPr>
+        <p:txBody>
+          <a:bodyPr xmlns:a="http://schemas.openxmlformats.org/drawingml/2006/main"/>
+          <a:lstStyle xmlns:a="http://schemas.openxmlformats.org/drawingml/2006/main"/>
+          <a:p xmlns:a="http://schemas.openxmlformats.org/drawingml/2006/main">
+            <a:pPr algn="l">
+              <a:defRPr sz="1350" b="1">
+                <a:solidFill>
+                  <a:srgbClr val="101010"/>
+                </a:solidFill>
+                <a:latin typeface="Malgun Gothic"/>
+                <a:ea typeface="Malgun Gothic"/>
+                <a:cs typeface="Malgun Gothic"/>
+              </a:defRPr>
+            </a:pPr>
+            <a:r>
+              <a:rPr sz="1350" b="1">
+                <a:solidFill>
+                  <a:srgbClr val="101010"/>
+                </a:solidFill>
+                <a:latin typeface="Malgun Gothic"/>
+                <a:ea typeface="Malgun Gothic"/>
+                <a:cs typeface="Malgun Gothic"/>
+              </a:rPr>
+              <a:t>GiB AVAILABLE</a:t>
+            </a:r>
+          </a:p>
+        </p:txBody>
+      </p:sp>
+      <p:sp>
+        <p:nvSpPr>
+          <p:cNvPr id="14" name="">
+            <a:extLst xmlns:a="http://schemas.openxmlformats.org/drawingml/2006/main">
+              <a:ext uri="{FF2B5EF4-FFF2-40B4-BE49-F238E27FC236}">
+                <a16:creationId xmlns:a16="http://schemas.microsoft.com/office/drawing/2014/main" id="{70162C9E-3C4E-4722-9E92-D545EE470395}"/>
+              </a:ext>
+            </a:extLst>
+          </p:cNvPr>
+          <p:cNvSpPr>
+            <a:spLocks xmlns:a="http://schemas.openxmlformats.org/drawingml/2006/main" noGrp="1"/>
+          </p:cNvSpPr>
+          <p:nvPr/>
+        </p:nvSpPr>
+        <p:spPr>
+          <a:xfrm xmlns:a="http://schemas.openxmlformats.org/drawingml/2006/main">
+            <a:off x="8477250" y="3733800"/>
+            <a:ext cx="3048000" cy="323850"/>
+          </a:xfrm>
+          <a:prstGeom xmlns:a="http://schemas.openxmlformats.org/drawingml/2006/main" prst="rect">
+            <a:avLst/>
+          </a:prstGeom>
+          <a:noFill xmlns:a="http://schemas.openxmlformats.org/drawingml/2006/main"/>
+          <a:ln xmlns:a="http://schemas.openxmlformats.org/drawingml/2006/main" w="0">
+            <a:noFill/>
+            <a:prstDash val="solid"/>
+          </a:ln>
+        </p:spPr>
+        <p:txBody>
+          <a:bodyPr xmlns:a="http://schemas.openxmlformats.org/drawingml/2006/main"/>
+          <a:lstStyle xmlns:a="http://schemas.openxmlformats.org/drawingml/2006/main"/>
+          <a:p xmlns:a="http://schemas.openxmlformats.org/drawingml/2006/main">
+            <a:pPr algn="l">
+              <a:defRPr sz="1200" b="0">
+                <a:solidFill>
+                  <a:srgbClr val="5B616B"/>
+                </a:solidFill>
+                <a:latin typeface="Malgun Gothic"/>
+                <a:ea typeface="Malgun Gothic"/>
+                <a:cs typeface="Malgun Gothic"/>
+              </a:defRPr>
+            </a:pPr>
+            <a:r>
+              <a:rPr sz="1200" b="0">
+                <a:solidFill>
+                  <a:srgbClr val="5B616B"/>
+                </a:solidFill>
+                <a:latin typeface="Malgun Gothic"/>
+                <a:ea typeface="Malgun Gothic"/>
+                <a:cs typeface="Malgun Gothic"/>
+              </a:rPr>
+              <a:t>Root ext4 사용률 2%</a:t>
+            </a:r>
+          </a:p>
+        </p:txBody>
+      </p:sp>
+      <p:sp>
+        <p:nvSpPr>
+          <p:cNvPr id="15" name="">
+            <a:extLst xmlns:a="http://schemas.openxmlformats.org/drawingml/2006/main">
+              <a:ext uri="{FF2B5EF4-FFF2-40B4-BE49-F238E27FC236}">
+                <a16:creationId xmlns:a16="http://schemas.microsoft.com/office/drawing/2014/main" id="{B8D0E951-F2CC-44F9-8D73-1552B7F10EB9}"/>
+              </a:ext>
+            </a:extLst>
+          </p:cNvPr>
+          <p:cNvSpPr>
+            <a:spLocks xmlns:a="http://schemas.openxmlformats.org/drawingml/2006/main" noGrp="1"/>
+          </p:cNvSpPr>
+          <p:nvPr/>
+        </p:nvSpPr>
+        <p:spPr>
+          <a:xfrm xmlns:a="http://schemas.openxmlformats.org/drawingml/2006/main">
+            <a:off x="400050" y="4914900"/>
+            <a:ext cx="11391900" cy="171450"/>
+          </a:xfrm>
+          <a:prstGeom xmlns:a="http://schemas.openxmlformats.org/drawingml/2006/main" prst="roundRect">
+            <a:avLst>
+              <a:gd name="adj" fmla="val 50000"/>
+            </a:avLst>
+          </a:prstGeom>
+          <a:solidFill xmlns:a="http://schemas.openxmlformats.org/drawingml/2006/main">
+            <a:srgbClr val="E8EDF4"/>
+          </a:solidFill>
+          <a:ln xmlns:a="http://schemas.openxmlformats.org/drawingml/2006/main" w="0">
+            <a:noFill/>
+            <a:prstDash val="solid"/>
+          </a:ln>
+        </p:spPr>
+      </p:sp>
+      <p:sp>
+        <p:nvSpPr>
+          <p:cNvPr id="16" name="">
+            <a:extLst xmlns:a="http://schemas.openxmlformats.org/drawingml/2006/main">
+              <a:ext uri="{FF2B5EF4-FFF2-40B4-BE49-F238E27FC236}">
+                <a16:creationId xmlns:a16="http://schemas.microsoft.com/office/drawing/2014/main" id="{4CDC5CE5-A852-4957-9FCF-B0738DE2A00D}"/>
+              </a:ext>
+            </a:extLst>
+          </p:cNvPr>
+          <p:cNvSpPr>
+            <a:spLocks xmlns:a="http://schemas.openxmlformats.org/drawingml/2006/main" noGrp="1"/>
+          </p:cNvSpPr>
+          <p:nvPr/>
+        </p:nvSpPr>
+        <p:spPr>
+          <a:xfrm xmlns:a="http://schemas.openxmlformats.org/drawingml/2006/main">
+            <a:off x="400050" y="4914900"/>
+            <a:ext cx="228600" cy="171450"/>
+          </a:xfrm>
+          <a:prstGeom xmlns:a="http://schemas.openxmlformats.org/drawingml/2006/main" prst="roundRect">
+            <a:avLst>
+              <a:gd name="adj" fmla="val 50000"/>
+            </a:avLst>
+          </a:prstGeom>
+          <a:solidFill xmlns:a="http://schemas.openxmlformats.org/drawingml/2006/main">
+            <a:srgbClr val="3D8DFF"/>
+          </a:solidFill>
+          <a:ln xmlns:a="http://schemas.openxmlformats.org/drawingml/2006/main" w="0">
+            <a:noFill/>
+            <a:prstDash val="solid"/>
+          </a:ln>
+        </p:spPr>
+      </p:sp>
+      <p:sp>
+        <p:nvSpPr>
+          <p:cNvPr id="17" name="">
+            <a:extLst xmlns:a="http://schemas.openxmlformats.org/drawingml/2006/main">
+              <a:ext uri="{FF2B5EF4-FFF2-40B4-BE49-F238E27FC236}">
+                <a16:creationId xmlns:a16="http://schemas.microsoft.com/office/drawing/2014/main" id="{1B605ADD-4986-4871-821D-A4886B3B11A6}"/>
+              </a:ext>
+            </a:extLst>
+          </p:cNvPr>
+          <p:cNvSpPr>
+            <a:spLocks xmlns:a="http://schemas.openxmlformats.org/drawingml/2006/main" noGrp="1"/>
+          </p:cNvSpPr>
+          <p:nvPr/>
+        </p:nvSpPr>
+        <p:spPr>
+          <a:xfrm xmlns:a="http://schemas.openxmlformats.org/drawingml/2006/main">
+            <a:off x="400050" y="5238750"/>
+            <a:ext cx="2095500" cy="266700"/>
+          </a:xfrm>
+          <a:prstGeom xmlns:a="http://schemas.openxmlformats.org/drawingml/2006/main" prst="rect">
+            <a:avLst/>
+          </a:prstGeom>
+          <a:noFill xmlns:a="http://schemas.openxmlformats.org/drawingml/2006/main"/>
+          <a:ln xmlns:a="http://schemas.openxmlformats.org/drawingml/2006/main" w="0">
+            <a:noFill/>
+            <a:prstDash val="solid"/>
+          </a:ln>
+        </p:spPr>
+        <p:txBody>
+          <a:bodyPr xmlns:a="http://schemas.openxmlformats.org/drawingml/2006/main"/>
+          <a:lstStyle xmlns:a="http://schemas.openxmlformats.org/drawingml/2006/main"/>
+          <a:p xmlns:a="http://schemas.openxmlformats.org/drawingml/2006/main">
+            <a:pPr algn="l">
+              <a:defRPr sz="1200" b="1">
+                <a:solidFill>
+                  <a:srgbClr val="101010"/>
+                </a:solidFill>
+                <a:latin typeface="Malgun Gothic"/>
+                <a:ea typeface="Malgun Gothic"/>
+                <a:cs typeface="Malgun Gothic"/>
+              </a:defRPr>
+            </a:pPr>
+            <a:r>
+              <a:rPr sz="1200" b="1">
+                <a:solidFill>
+                  <a:srgbClr val="101010"/>
+                </a:solidFill>
+                <a:latin typeface="Malgun Gothic"/>
+                <a:ea typeface="Malgun Gothic"/>
+                <a:cs typeface="Malgun Gothic"/>
+              </a:rPr>
+              <a:t>14 GiB used</a:t>
+            </a:r>
+          </a:p>
+        </p:txBody>
+      </p:sp>
+      <p:sp>
+        <p:nvSpPr>
+          <p:cNvPr id="18" name="">
+            <a:extLst xmlns:a="http://schemas.openxmlformats.org/drawingml/2006/main">
+              <a:ext uri="{FF2B5EF4-FFF2-40B4-BE49-F238E27FC236}">
+                <a16:creationId xmlns:a16="http://schemas.microsoft.com/office/drawing/2014/main" id="{5DCA1631-D71E-4E1C-B95A-2ED5A1734A1C}"/>
+              </a:ext>
+            </a:extLst>
+          </p:cNvPr>
+          <p:cNvSpPr>
+            <a:spLocks xmlns:a="http://schemas.openxmlformats.org/drawingml/2006/main" noGrp="1"/>
+          </p:cNvSpPr>
+          <p:nvPr/>
+        </p:nvSpPr>
+        <p:spPr>
+          <a:xfrm xmlns:a="http://schemas.openxmlformats.org/drawingml/2006/main">
+            <a:off x="9620250" y="5238750"/>
+            <a:ext cx="2171700" cy="266700"/>
+          </a:xfrm>
+          <a:prstGeom xmlns:a="http://schemas.openxmlformats.org/drawingml/2006/main" prst="rect">
+            <a:avLst/>
+          </a:prstGeom>
+          <a:noFill xmlns:a="http://schemas.openxmlformats.org/drawingml/2006/main"/>
+          <a:ln xmlns:a="http://schemas.openxmlformats.org/drawingml/2006/main" w="0">
+            <a:noFill/>
+            <a:prstDash val="solid"/>
+          </a:ln>
+        </p:spPr>
+        <p:txBody>
+          <a:bodyPr xmlns:a="http://schemas.openxmlformats.org/drawingml/2006/main"/>
+          <a:lstStyle xmlns:a="http://schemas.openxmlformats.org/drawingml/2006/main"/>
+          <a:p xmlns:a="http://schemas.openxmlformats.org/drawingml/2006/main">
+            <a:pPr algn="r">
+              <a:defRPr sz="1200" b="1">
+                <a:solidFill>
+                  <a:srgbClr val="5B616B"/>
+                </a:solidFill>
+                <a:latin typeface="Malgun Gothic"/>
+                <a:ea typeface="Malgun Gothic"/>
+                <a:cs typeface="Malgun Gothic"/>
+              </a:defRPr>
+            </a:pPr>
+            <a:r>
+              <a:rPr sz="1200" b="1">
+                <a:solidFill>
+                  <a:srgbClr val="5B616B"/>
+                </a:solidFill>
+                <a:latin typeface="Malgun Gothic"/>
+                <a:ea typeface="Malgun Gothic"/>
+                <a:cs typeface="Malgun Gothic"/>
+              </a:rPr>
+              <a:t>1,005 GiB ext4</a:t>
+            </a:r>
+          </a:p>
+        </p:txBody>
+      </p:sp>
+      <p:sp>
+        <p:nvSpPr>
+          <p:cNvPr id="19" name="">
+            <a:extLst xmlns:a="http://schemas.openxmlformats.org/drawingml/2006/main">
+              <a:ext uri="{FF2B5EF4-FFF2-40B4-BE49-F238E27FC236}">
+                <a16:creationId xmlns:a16="http://schemas.microsoft.com/office/drawing/2014/main" id="{559C8D94-ED95-44C0-B2F2-5EFAE76ED33D}"/>
+              </a:ext>
+            </a:extLst>
+          </p:cNvPr>
+          <p:cNvSpPr>
+            <a:spLocks xmlns:a="http://schemas.openxmlformats.org/drawingml/2006/main" noGrp="1"/>
+          </p:cNvSpPr>
+          <p:nvPr/>
+        </p:nvSpPr>
+        <p:spPr>
+          <a:xfrm xmlns:a="http://schemas.openxmlformats.org/drawingml/2006/main">
+            <a:off x="400050" y="5829300"/>
+            <a:ext cx="10668000" cy="285750"/>
+          </a:xfrm>
+          <a:prstGeom xmlns:a="http://schemas.openxmlformats.org/drawingml/2006/main" prst="rect">
+            <a:avLst/>
+          </a:prstGeom>
+          <a:noFill xmlns:a="http://schemas.openxmlformats.org/drawingml/2006/main"/>
+          <a:ln xmlns:a="http://schemas.openxmlformats.org/drawingml/2006/main" w="0">
+            <a:noFill/>
+            <a:prstDash val="solid"/>
+          </a:ln>
+        </p:spPr>
+        <p:txBody>
+          <a:bodyPr xmlns:a="http://schemas.openxmlformats.org/drawingml/2006/main"/>
+          <a:lstStyle xmlns:a="http://schemas.openxmlformats.org/drawingml/2006/main"/>
+          <a:p xmlns:a="http://schemas.openxmlformats.org/drawingml/2006/main">
+            <a:pPr algn="l">
+              <a:defRPr sz="1350" b="1">
+                <a:solidFill>
+                  <a:srgbClr val="117A4B"/>
+                </a:solidFill>
+                <a:latin typeface="Malgun Gothic"/>
+                <a:ea typeface="Malgun Gothic"/>
+                <a:cs typeface="Malgun Gothic"/>
+              </a:defRPr>
+            </a:pPr>
+            <a:r>
+              <a:rPr sz="1350" b="1">
+                <a:solidFill>
+                  <a:srgbClr val="117A4B"/>
+                </a:solidFill>
+                <a:latin typeface="Malgun Gothic"/>
+                <a:ea typeface="Malgun Gothic"/>
+                <a:cs typeface="Malgun Gothic"/>
+              </a:rPr>
+              <a:t>Partition Table·VG Metadata 백업 후 growpart → pvresize → lvextend -r</a:t>
+            </a:r>
+          </a:p>
+        </p:txBody>
+      </p:sp>
+    </p:spTree>
+    <p:extLst>
+      <p:ext uri="{BB962C8B-B14F-4D97-AF65-F5344CB8AC3E}">
+        <p14:creationId xmlns:p14="http://schemas.microsoft.com/office/powerpoint/2010/main" val="558326817"/>
       </p:ext>
     </p:extLst>
   </p:cSld>
